--- a/web-presentation/pdf-exports/Week1-Session1-Foundations.pptx
+++ b/web-presentation/pdf-exports/Week1-Session1-Foundations.pptx
@@ -3226,6 +3226,7 @@
           <a:ln>
             <a:noFill/>
           </a:ln>
+          <a:effectLst/>
         </p:spPr>
         <p:style>
           <a:lnRef idx="1">
@@ -3443,6 +3444,7 @@
           <a:ln>
             <a:noFill/>
           </a:ln>
+          <a:effectLst/>
         </p:spPr>
         <p:style>
           <a:lnRef idx="1">
@@ -3586,6 +3588,7 @@
           <a:ln>
             <a:noFill/>
           </a:ln>
+          <a:effectLst/>
         </p:spPr>
         <p:style>
           <a:lnRef idx="1">
@@ -3803,6 +3806,7 @@
           <a:ln>
             <a:noFill/>
           </a:ln>
+          <a:effectLst/>
         </p:spPr>
         <p:style>
           <a:lnRef idx="1">
@@ -3946,6 +3950,7 @@
           <a:ln>
             <a:noFill/>
           </a:ln>
+          <a:effectLst/>
         </p:spPr>
         <p:style>
           <a:lnRef idx="1">
@@ -4163,6 +4168,7 @@
           <a:ln>
             <a:noFill/>
           </a:ln>
+          <a:effectLst/>
         </p:spPr>
         <p:style>
           <a:lnRef idx="1">
@@ -4306,6 +4312,7 @@
           <a:ln>
             <a:noFill/>
           </a:ln>
+          <a:effectLst/>
         </p:spPr>
         <p:style>
           <a:lnRef idx="1">
@@ -4523,6 +4530,7 @@
           <a:ln>
             <a:noFill/>
           </a:ln>
+          <a:effectLst/>
         </p:spPr>
         <p:style>
           <a:lnRef idx="1">
@@ -4666,6 +4674,7 @@
           <a:ln>
             <a:noFill/>
           </a:ln>
+          <a:effectLst/>
         </p:spPr>
         <p:style>
           <a:lnRef idx="1">
@@ -4883,6 +4892,7 @@
           <a:ln>
             <a:noFill/>
           </a:ln>
+          <a:effectLst/>
         </p:spPr>
         <p:style>
           <a:lnRef idx="1">
@@ -5061,6 +5071,7 @@
           <a:ln>
             <a:noFill/>
           </a:ln>
+          <a:effectLst/>
         </p:spPr>
         <p:style>
           <a:lnRef idx="1">
@@ -5086,26 +5097,25 @@
       </p:sp>
       <p:sp>
         <p:nvSpPr>
-          <p:cNvPr id="10" name="Rounded Rectangle 9"/>
+          <p:cNvPr id="10" name="Rectangle 9"/>
           <p:cNvSpPr/>
           <p:nvPr/>
         </p:nvSpPr>
         <p:spPr>
           <a:xfrm>
-            <a:off x="822960" y="2560320"/>
-            <a:ext cx="2514600" cy="457200"/>
-          </a:xfrm>
-          <a:prstGeom prst="roundRect">
-            <a:avLst>
-              <a:gd name="adj" fmla="val 12000"/>
-            </a:avLst>
+            <a:off x="822960" y="2679192"/>
+            <a:ext cx="54864" cy="256032"/>
+          </a:xfrm>
+          <a:prstGeom prst="rect">
+            <a:avLst/>
           </a:prstGeom>
           <a:solidFill>
-            <a:srgbClr val="F4F2F9"/>
+            <a:srgbClr val="5C45B0"/>
           </a:solidFill>
           <a:ln>
             <a:noFill/>
           </a:ln>
+          <a:effectLst/>
         </p:spPr>
         <p:style>
           <a:lnRef idx="1">
@@ -5137,7 +5147,7 @@
         </p:nvSpPr>
         <p:spPr>
           <a:xfrm>
-            <a:off x="932688" y="2606040"/>
+            <a:off x="987552" y="2606040"/>
             <a:ext cx="365760" cy="365760"/>
           </a:xfrm>
           <a:prstGeom prst="rect">
@@ -5174,7 +5184,7 @@
         </p:nvSpPr>
         <p:spPr>
           <a:xfrm>
-            <a:off x="1325880" y="2606040"/>
+            <a:off x="1371600" y="2606040"/>
             <a:ext cx="1920240" cy="365760"/>
           </a:xfrm>
           <a:prstGeom prst="rect">
@@ -5211,7 +5221,7 @@
         </p:nvSpPr>
         <p:spPr>
           <a:xfrm>
-            <a:off x="932688" y="3136392"/>
+            <a:off x="987552" y="3136392"/>
             <a:ext cx="365760" cy="365760"/>
           </a:xfrm>
           <a:prstGeom prst="rect">
@@ -5248,7 +5258,7 @@
         </p:nvSpPr>
         <p:spPr>
           <a:xfrm>
-            <a:off x="1325880" y="3136392"/>
+            <a:off x="1371600" y="3136392"/>
             <a:ext cx="1920240" cy="365760"/>
           </a:xfrm>
           <a:prstGeom prst="rect">
@@ -5285,7 +5295,7 @@
         </p:nvSpPr>
         <p:spPr>
           <a:xfrm>
-            <a:off x="932688" y="3666744"/>
+            <a:off x="987552" y="3666744"/>
             <a:ext cx="365760" cy="365760"/>
           </a:xfrm>
           <a:prstGeom prst="rect">
@@ -5322,7 +5332,7 @@
         </p:nvSpPr>
         <p:spPr>
           <a:xfrm>
-            <a:off x="1325880" y="3666744"/>
+            <a:off x="1371600" y="3666744"/>
             <a:ext cx="1920240" cy="365760"/>
           </a:xfrm>
           <a:prstGeom prst="rect">
@@ -5359,7 +5369,7 @@
         </p:nvSpPr>
         <p:spPr>
           <a:xfrm>
-            <a:off x="932688" y="4197095"/>
+            <a:off x="987552" y="4197095"/>
             <a:ext cx="365760" cy="365760"/>
           </a:xfrm>
           <a:prstGeom prst="rect">
@@ -5396,7 +5406,7 @@
         </p:nvSpPr>
         <p:spPr>
           <a:xfrm>
-            <a:off x="1325880" y="4197095"/>
+            <a:off x="1371600" y="4197095"/>
             <a:ext cx="1920240" cy="365760"/>
           </a:xfrm>
           <a:prstGeom prst="rect">
@@ -5433,7 +5443,7 @@
         </p:nvSpPr>
         <p:spPr>
           <a:xfrm>
-            <a:off x="932688" y="4727448"/>
+            <a:off x="987552" y="4727448"/>
             <a:ext cx="365760" cy="365760"/>
           </a:xfrm>
           <a:prstGeom prst="rect">
@@ -5470,7 +5480,7 @@
         </p:nvSpPr>
         <p:spPr>
           <a:xfrm>
-            <a:off x="1325880" y="4727448"/>
+            <a:off x="1371600" y="4727448"/>
             <a:ext cx="1920240" cy="365760"/>
           </a:xfrm>
           <a:prstGeom prst="rect">
@@ -5507,7 +5517,7 @@
         </p:nvSpPr>
         <p:spPr>
           <a:xfrm>
-            <a:off x="932688" y="5257800"/>
+            <a:off x="987552" y="5257800"/>
             <a:ext cx="365760" cy="365760"/>
           </a:xfrm>
           <a:prstGeom prst="rect">
@@ -5544,7 +5554,7 @@
         </p:nvSpPr>
         <p:spPr>
           <a:xfrm>
-            <a:off x="1325880" y="5257800"/>
+            <a:off x="1371600" y="5257800"/>
             <a:ext cx="1920240" cy="365760"/>
           </a:xfrm>
           <a:prstGeom prst="rect">
@@ -5630,6 +5640,7 @@
           <a:ln>
             <a:noFill/>
           </a:ln>
+          <a:effectLst/>
         </p:spPr>
         <p:style>
           <a:lnRef idx="1">
@@ -5661,7 +5672,7 @@
         </p:nvSpPr>
         <p:spPr>
           <a:xfrm>
-            <a:off x="3721608" y="2606040"/>
+            <a:off x="3776472" y="2606040"/>
             <a:ext cx="365760" cy="365760"/>
           </a:xfrm>
           <a:prstGeom prst="rect">
@@ -5698,7 +5709,7 @@
         </p:nvSpPr>
         <p:spPr>
           <a:xfrm>
-            <a:off x="4114800" y="2606040"/>
+            <a:off x="4160520" y="2606040"/>
             <a:ext cx="1920240" cy="365760"/>
           </a:xfrm>
           <a:prstGeom prst="rect">
@@ -5784,6 +5795,7 @@
           <a:ln>
             <a:noFill/>
           </a:ln>
+          <a:effectLst/>
         </p:spPr>
         <p:style>
           <a:lnRef idx="1">
@@ -5815,7 +5827,7 @@
         </p:nvSpPr>
         <p:spPr>
           <a:xfrm>
-            <a:off x="6510528" y="2606040"/>
+            <a:off x="6565392" y="2606040"/>
             <a:ext cx="365760" cy="365760"/>
           </a:xfrm>
           <a:prstGeom prst="rect">
@@ -5852,7 +5864,7 @@
         </p:nvSpPr>
         <p:spPr>
           <a:xfrm>
-            <a:off x="6903720" y="2606040"/>
+            <a:off x="6949440" y="2606040"/>
             <a:ext cx="1920240" cy="365760"/>
           </a:xfrm>
           <a:prstGeom prst="rect">
@@ -5889,7 +5901,7 @@
         </p:nvSpPr>
         <p:spPr>
           <a:xfrm>
-            <a:off x="6510528" y="3136392"/>
+            <a:off x="6565392" y="3136392"/>
             <a:ext cx="365760" cy="365760"/>
           </a:xfrm>
           <a:prstGeom prst="rect">
@@ -5926,7 +5938,7 @@
         </p:nvSpPr>
         <p:spPr>
           <a:xfrm>
-            <a:off x="6903720" y="3136392"/>
+            <a:off x="6949440" y="3136392"/>
             <a:ext cx="1920240" cy="365760"/>
           </a:xfrm>
           <a:prstGeom prst="rect">
@@ -5963,7 +5975,7 @@
         </p:nvSpPr>
         <p:spPr>
           <a:xfrm>
-            <a:off x="6510528" y="3666744"/>
+            <a:off x="6565392" y="3666744"/>
             <a:ext cx="365760" cy="365760"/>
           </a:xfrm>
           <a:prstGeom prst="rect">
@@ -6000,7 +6012,7 @@
         </p:nvSpPr>
         <p:spPr>
           <a:xfrm>
-            <a:off x="6903720" y="3666744"/>
+            <a:off x="6949440" y="3666744"/>
             <a:ext cx="1920240" cy="365760"/>
           </a:xfrm>
           <a:prstGeom prst="rect">
@@ -6037,7 +6049,7 @@
         </p:nvSpPr>
         <p:spPr>
           <a:xfrm>
-            <a:off x="6510528" y="4197095"/>
+            <a:off x="6565392" y="4197095"/>
             <a:ext cx="365760" cy="365760"/>
           </a:xfrm>
           <a:prstGeom prst="rect">
@@ -6074,7 +6086,7 @@
         </p:nvSpPr>
         <p:spPr>
           <a:xfrm>
-            <a:off x="6903720" y="4197095"/>
+            <a:off x="6949440" y="4197095"/>
             <a:ext cx="1920240" cy="365760"/>
           </a:xfrm>
           <a:prstGeom prst="rect">
@@ -6111,7 +6123,7 @@
         </p:nvSpPr>
         <p:spPr>
           <a:xfrm>
-            <a:off x="6510528" y="4727448"/>
+            <a:off x="6565392" y="4727448"/>
             <a:ext cx="365760" cy="365760"/>
           </a:xfrm>
           <a:prstGeom prst="rect">
@@ -6148,7 +6160,7 @@
         </p:nvSpPr>
         <p:spPr>
           <a:xfrm>
-            <a:off x="6903720" y="4727448"/>
+            <a:off x="6949440" y="4727448"/>
             <a:ext cx="1920240" cy="365760"/>
           </a:xfrm>
           <a:prstGeom prst="rect">
@@ -6185,7 +6197,7 @@
         </p:nvSpPr>
         <p:spPr>
           <a:xfrm>
-            <a:off x="6510528" y="5257800"/>
+            <a:off x="6565392" y="5257800"/>
             <a:ext cx="365760" cy="365760"/>
           </a:xfrm>
           <a:prstGeom prst="rect">
@@ -6222,7 +6234,7 @@
         </p:nvSpPr>
         <p:spPr>
           <a:xfrm>
-            <a:off x="6903720" y="5257800"/>
+            <a:off x="6949440" y="5257800"/>
             <a:ext cx="1920240" cy="365760"/>
           </a:xfrm>
           <a:prstGeom prst="rect">
@@ -6308,6 +6320,7 @@
           <a:ln>
             <a:noFill/>
           </a:ln>
+          <a:effectLst/>
         </p:spPr>
         <p:style>
           <a:lnRef idx="1">
@@ -6339,7 +6352,7 @@
         </p:nvSpPr>
         <p:spPr>
           <a:xfrm>
-            <a:off x="9299448" y="2606040"/>
+            <a:off x="9354312" y="2606040"/>
             <a:ext cx="365760" cy="365760"/>
           </a:xfrm>
           <a:prstGeom prst="rect">
@@ -6376,7 +6389,7 @@
         </p:nvSpPr>
         <p:spPr>
           <a:xfrm>
-            <a:off x="9692640" y="2606040"/>
+            <a:off x="9738360" y="2606040"/>
             <a:ext cx="1920240" cy="365760"/>
           </a:xfrm>
           <a:prstGeom prst="rect">
@@ -6413,7 +6426,7 @@
         </p:nvSpPr>
         <p:spPr>
           <a:xfrm>
-            <a:off x="9299448" y="3136392"/>
+            <a:off x="9354312" y="3136392"/>
             <a:ext cx="365760" cy="365760"/>
           </a:xfrm>
           <a:prstGeom prst="rect">
@@ -6450,7 +6463,7 @@
         </p:nvSpPr>
         <p:spPr>
           <a:xfrm>
-            <a:off x="9692640" y="3136392"/>
+            <a:off x="9738360" y="3136392"/>
             <a:ext cx="1920240" cy="365760"/>
           </a:xfrm>
           <a:prstGeom prst="rect">
@@ -6487,7 +6500,7 @@
         </p:nvSpPr>
         <p:spPr>
           <a:xfrm>
-            <a:off x="9299448" y="3666744"/>
+            <a:off x="9354312" y="3666744"/>
             <a:ext cx="365760" cy="365760"/>
           </a:xfrm>
           <a:prstGeom prst="rect">
@@ -6524,7 +6537,7 @@
         </p:nvSpPr>
         <p:spPr>
           <a:xfrm>
-            <a:off x="9692640" y="3666744"/>
+            <a:off x="9738360" y="3666744"/>
             <a:ext cx="1920240" cy="365760"/>
           </a:xfrm>
           <a:prstGeom prst="rect">
@@ -6697,6 +6710,7 @@
           <a:ln>
             <a:noFill/>
           </a:ln>
+          <a:effectLst/>
         </p:spPr>
         <p:style>
           <a:lnRef idx="1">
@@ -6779,6 +6793,7 @@
           <a:ln>
             <a:noFill/>
           </a:ln>
+          <a:effectLst/>
         </p:spPr>
         <p:style>
           <a:lnRef idx="1">
@@ -6861,6 +6876,7 @@
           <a:ln>
             <a:noFill/>
           </a:ln>
+          <a:effectLst/>
         </p:spPr>
         <p:style>
           <a:lnRef idx="1">
@@ -6943,6 +6959,7 @@
           <a:ln>
             <a:noFill/>
           </a:ln>
+          <a:effectLst/>
         </p:spPr>
         <p:style>
           <a:lnRef idx="1">
@@ -7025,6 +7042,7 @@
           <a:ln>
             <a:noFill/>
           </a:ln>
+          <a:effectLst/>
         </p:spPr>
         <p:style>
           <a:lnRef idx="1">
@@ -7205,6 +7223,7 @@
           <a:ln>
             <a:noFill/>
           </a:ln>
+          <a:effectLst/>
         </p:spPr>
         <p:style>
           <a:lnRef idx="1">
@@ -7816,6 +7835,7 @@
           <a:ln>
             <a:noFill/>
           </a:ln>
+          <a:effectLst/>
         </p:spPr>
         <p:style>
           <a:lnRef idx="1">
@@ -7959,6 +7979,7 @@
           <a:ln>
             <a:noFill/>
           </a:ln>
+          <a:effectLst/>
         </p:spPr>
         <p:style>
           <a:lnRef idx="1">
@@ -8374,6 +8395,7 @@
           <a:ln>
             <a:noFill/>
           </a:ln>
+          <a:effectLst/>
         </p:spPr>
         <p:style>
           <a:lnRef idx="1">
@@ -8715,6 +8737,7 @@
           <a:ln>
             <a:noFill/>
           </a:ln>
+          <a:effectLst/>
         </p:spPr>
         <p:style>
           <a:lnRef idx="1">
@@ -9080,6 +9103,7 @@
           <a:ln>
             <a:noFill/>
           </a:ln>
+          <a:effectLst/>
         </p:spPr>
         <p:style>
           <a:lnRef idx="1">
@@ -9617,6 +9641,7 @@
           <a:ln>
             <a:noFill/>
           </a:ln>
+          <a:effectLst/>
         </p:spPr>
         <p:style>
           <a:lnRef idx="1">
@@ -10080,6 +10105,7 @@
           <a:ln>
             <a:noFill/>
           </a:ln>
+          <a:effectLst/>
         </p:spPr>
         <p:style>
           <a:lnRef idx="1">
@@ -10469,6 +10495,7 @@
           <a:ln>
             <a:noFill/>
           </a:ln>
+          <a:effectLst/>
         </p:spPr>
         <p:style>
           <a:lnRef idx="1">
@@ -10612,6 +10639,7 @@
           <a:ln>
             <a:noFill/>
           </a:ln>
+          <a:effectLst/>
         </p:spPr>
         <p:style>
           <a:lnRef idx="1">

--- a/web-presentation/pdf-exports/Week1-Session1-Foundations.pptx
+++ b/web-presentation/pdf-exports/Week1-Session1-Foundations.pptx
@@ -3096,7 +3096,7 @@
     <p:bg>
       <p:bgPr>
         <a:solidFill>
-          <a:srgbClr val="0A0614"/>
+          <a:srgbClr val="FAF8FF"/>
         </a:solidFill>
         <a:effectLst/>
       </p:bgPr>
@@ -3110,20 +3110,20 @@
       <p:grpSpPr/>
       <p:sp>
         <p:nvSpPr>
-          <p:cNvPr id="2" name="Oval 1"/>
+          <p:cNvPr id="2" name="Rectangle 1"/>
           <p:cNvSpPr/>
           <p:nvPr/>
         </p:nvSpPr>
         <p:spPr>
           <a:xfrm>
-            <a:off x="3200400" y="731520"/>
-            <a:ext cx="5943600" cy="5029200"/>
-          </a:xfrm>
-          <a:prstGeom prst="ellipse">
+            <a:off x="12136831" y="0"/>
+            <a:ext cx="54864" cy="6858000"/>
+          </a:xfrm>
+          <a:prstGeom prst="rect">
             <a:avLst/>
           </a:prstGeom>
           <a:solidFill>
-            <a:srgbClr val="2A1860"/>
+            <a:srgbClr val="5234B7"/>
           </a:solidFill>
           <a:ln>
             <a:noFill/>
@@ -3239,7 +3239,7 @@
             <a:r>
               <a:rPr sz="4400" b="1">
                 <a:solidFill>
-                  <a:srgbClr val="FFFFFF"/>
+                  <a:srgbClr val="5234B7"/>
                 </a:solidFill>
                 <a:latin typeface="DIN Next LT W23"/>
                 <a:ea typeface="DIN Next LT W23"/>
@@ -3328,7 +3328,7 @@
             <a:r>
               <a:rPr sz="1700" b="0">
                 <a:solidFill>
-                  <a:srgbClr val="EEE8FA"/>
+                  <a:srgbClr val="5A5470"/>
                 </a:solidFill>
                 <a:latin typeface="DIN Next LT W23"/>
                 <a:ea typeface="DIN Next LT W23"/>
@@ -3365,7 +3365,7 @@
             <a:r>
               <a:rPr sz="1200" b="1">
                 <a:solidFill>
-                  <a:srgbClr val="9E59CD"/>
+                  <a:srgbClr val="5234B7"/>
                 </a:solidFill>
                 <a:latin typeface="DIN Next LT W23"/>
                 <a:ea typeface="DIN Next LT W23"/>
@@ -7294,7 +7294,7 @@
     <p:bg>
       <p:bgPr>
         <a:solidFill>
-          <a:srgbClr val="0A0614"/>
+          <a:srgbClr val="FAF8FF"/>
         </a:solidFill>
         <a:effectLst/>
       </p:bgPr>
@@ -7308,20 +7308,20 @@
       <p:grpSpPr/>
       <p:sp>
         <p:nvSpPr>
-          <p:cNvPr id="2" name="Oval 1"/>
+          <p:cNvPr id="2" name="Rectangle 1"/>
           <p:cNvSpPr/>
           <p:nvPr/>
         </p:nvSpPr>
         <p:spPr>
           <a:xfrm>
-            <a:off x="3200400" y="731520"/>
-            <a:ext cx="5943600" cy="5029200"/>
-          </a:xfrm>
-          <a:prstGeom prst="ellipse">
+            <a:off x="12136831" y="0"/>
+            <a:ext cx="54864" cy="6858000"/>
+          </a:xfrm>
+          <a:prstGeom prst="rect">
             <a:avLst/>
           </a:prstGeom>
           <a:solidFill>
-            <a:srgbClr val="2A1860"/>
+            <a:srgbClr val="5234B7"/>
           </a:solidFill>
           <a:ln>
             <a:noFill/>
@@ -7437,7 +7437,7 @@
             <a:r>
               <a:rPr sz="4200" b="1">
                 <a:solidFill>
-                  <a:srgbClr val="FFFFFF"/>
+                  <a:srgbClr val="5234B7"/>
                 </a:solidFill>
                 <a:latin typeface="DIN Next LT W23"/>
                 <a:ea typeface="DIN Next LT W23"/>
@@ -7526,7 +7526,7 @@
             <a:r>
               <a:rPr sz="1600" b="0">
                 <a:solidFill>
-                  <a:srgbClr val="EEE8FA"/>
+                  <a:srgbClr val="5A5470"/>
                 </a:solidFill>
                 <a:latin typeface="DIN Next LT W23"/>
                 <a:ea typeface="DIN Next LT W23"/>
@@ -7871,37 +7871,118 @@
       </p:sp>
       <p:sp>
         <p:nvSpPr>
-          <p:cNvPr id="16" name="TextBox 15"/>
-          <p:cNvSpPr txBox="1"/>
-          <p:nvPr/>
-        </p:nvSpPr>
-        <p:spPr>
-          <a:xfrm>
-            <a:off x="548640" y="6126480"/>
-            <a:ext cx="2743200" cy="274320"/>
-          </a:xfrm>
-          <a:prstGeom prst="rect">
-            <a:avLst/>
-          </a:prstGeom>
-          <a:noFill/>
-        </p:spPr>
-        <p:txBody>
-          <a:bodyPr wrap="square" anchor="t">
-            <a:spAutoFit/>
-          </a:bodyPr>
-          <a:lstStyle/>
-          <a:p>
-            <a:pPr algn="l"/>
-            <a:r>
-              <a:rPr sz="1200" b="1">
-                <a:solidFill>
-                  <a:srgbClr val="9E59CD"/>
+          <p:cNvPr id="16" name="Rectangle 15"/>
+          <p:cNvSpPr/>
+          <p:nvPr/>
+        </p:nvSpPr>
+        <p:spPr>
+          <a:xfrm>
+            <a:off x="548640" y="6446520"/>
+            <a:ext cx="11064240" cy="10972"/>
+          </a:xfrm>
+          <a:prstGeom prst="rect">
+            <a:avLst/>
+          </a:prstGeom>
+          <a:solidFill>
+            <a:srgbClr val="5234B7"/>
+          </a:solidFill>
+          <a:ln>
+            <a:noFill/>
+          </a:ln>
+          <a:effectLst/>
+        </p:spPr>
+        <p:style>
+          <a:lnRef idx="1">
+            <a:schemeClr val="accent1"/>
+          </a:lnRef>
+          <a:fillRef idx="3">
+            <a:schemeClr val="accent1"/>
+          </a:fillRef>
+          <a:effectRef idx="2">
+            <a:schemeClr val="accent1"/>
+          </a:effectRef>
+          <a:fontRef idx="minor">
+            <a:schemeClr val="lt1"/>
+          </a:fontRef>
+        </p:style>
+        <p:txBody>
+          <a:bodyPr rtlCol="0" anchor="ctr"/>
+          <a:lstStyle/>
+          <a:p>
+            <a:pPr algn="ctr"/>
+          </a:p>
+        </p:txBody>
+      </p:sp>
+      <p:sp>
+        <p:nvSpPr>
+          <p:cNvPr id="17" name="TextBox 16"/>
+          <p:cNvSpPr txBox="1"/>
+          <p:nvPr/>
+        </p:nvSpPr>
+        <p:spPr>
+          <a:xfrm>
+            <a:off x="548640" y="6510528"/>
+            <a:ext cx="2743200" cy="256032"/>
+          </a:xfrm>
+          <a:prstGeom prst="rect">
+            <a:avLst/>
+          </a:prstGeom>
+          <a:noFill/>
+        </p:spPr>
+        <p:txBody>
+          <a:bodyPr wrap="square" anchor="t">
+            <a:spAutoFit/>
+          </a:bodyPr>
+          <a:lstStyle/>
+          <a:p>
+            <a:pPr algn="l"/>
+            <a:r>
+              <a:rPr sz="1100" b="1">
+                <a:solidFill>
+                  <a:srgbClr val="5234B7"/>
                 </a:solidFill>
                 <a:latin typeface="DIN Next LT W23"/>
                 <a:ea typeface="DIN Next LT W23"/>
                 <a:cs typeface="DIN Next LT W23"/>
               </a:rPr>
               <a:t>ETRA</a:t>
+            </a:r>
+          </a:p>
+        </p:txBody>
+      </p:sp>
+      <p:sp>
+        <p:nvSpPr>
+          <p:cNvPr id="18" name="TextBox 17"/>
+          <p:cNvSpPr txBox="1"/>
+          <p:nvPr/>
+        </p:nvSpPr>
+        <p:spPr>
+          <a:xfrm>
+            <a:off x="9601200" y="6510528"/>
+            <a:ext cx="2011680" cy="256032"/>
+          </a:xfrm>
+          <a:prstGeom prst="rect">
+            <a:avLst/>
+          </a:prstGeom>
+          <a:noFill/>
+        </p:spPr>
+        <p:txBody>
+          <a:bodyPr wrap="square" anchor="t">
+            <a:spAutoFit/>
+          </a:bodyPr>
+          <a:lstStyle/>
+          <a:p>
+            <a:pPr algn="r"/>
+            <a:r>
+              <a:rPr sz="1100" b="0">
+                <a:solidFill>
+                  <a:srgbClr val="5A5470"/>
+                </a:solidFill>
+                <a:latin typeface="DIN Next LT W23"/>
+                <a:ea typeface="DIN Next LT W23"/>
+                <a:cs typeface="DIN Next LT W23"/>
+              </a:rPr>
+              <a:t>03  /  13</a:t>
             </a:r>
           </a:p>
         </p:txBody>

--- a/web-presentation/pdf-exports/Week1-Session1-Foundations.pptx
+++ b/web-presentation/pdf-exports/Week1-Session1-Foundations.pptx
@@ -10419,7 +10419,99 @@
                 <a:ea typeface="DIN Next LT W23"/>
                 <a:cs typeface="DIN Next LT W23"/>
               </a:rPr>
-              <a:t>x_norm = (x − x_min) / (x_max − x_min)</a:t>
+              <a:t>x</a:t>
+            </a:r>
+            <a:r>
+              <a:rPr sz="1600" b="1">
+                <a:solidFill>
+                  <a:srgbClr val="5234B7"/>
+                </a:solidFill>
+                <a:latin typeface="DIN Next LT W23"/>
+                <a:ea typeface="DIN Next LT W23"/>
+                <a:cs typeface="DIN Next LT W23"/>
+                <a:baseline val="-25000"/>
+              </a:rPr>
+              <a:t>norm</a:t>
+            </a:r>
+            <a:r>
+              <a:rPr sz="2200" b="1">
+                <a:solidFill>
+                  <a:srgbClr val="5234B7"/>
+                </a:solidFill>
+                <a:latin typeface="DIN Next LT W23"/>
+                <a:ea typeface="DIN Next LT W23"/>
+                <a:cs typeface="DIN Next LT W23"/>
+              </a:rPr>
+              <a:t> = (x − x</a:t>
+            </a:r>
+            <a:r>
+              <a:rPr sz="1600" b="1">
+                <a:solidFill>
+                  <a:srgbClr val="5234B7"/>
+                </a:solidFill>
+                <a:latin typeface="DIN Next LT W23"/>
+                <a:ea typeface="DIN Next LT W23"/>
+                <a:cs typeface="DIN Next LT W23"/>
+                <a:baseline val="-25000"/>
+              </a:rPr>
+              <a:t>min</a:t>
+            </a:r>
+            <a:r>
+              <a:rPr sz="2200" b="1">
+                <a:solidFill>
+                  <a:srgbClr val="5234B7"/>
+                </a:solidFill>
+                <a:latin typeface="DIN Next LT W23"/>
+                <a:ea typeface="DIN Next LT W23"/>
+                <a:cs typeface="DIN Next LT W23"/>
+              </a:rPr>
+              <a:t>) / (x</a:t>
+            </a:r>
+            <a:r>
+              <a:rPr sz="1600" b="1">
+                <a:solidFill>
+                  <a:srgbClr val="5234B7"/>
+                </a:solidFill>
+                <a:latin typeface="DIN Next LT W23"/>
+                <a:ea typeface="DIN Next LT W23"/>
+                <a:cs typeface="DIN Next LT W23"/>
+                <a:baseline val="-25000"/>
+              </a:rPr>
+              <a:t>max</a:t>
+            </a:r>
+            <a:r>
+              <a:rPr sz="2200" b="1">
+                <a:solidFill>
+                  <a:srgbClr val="5234B7"/>
+                </a:solidFill>
+                <a:latin typeface="DIN Next LT W23"/>
+                <a:ea typeface="DIN Next LT W23"/>
+                <a:cs typeface="DIN Next LT W23"/>
+              </a:rPr>
+              <a:t> − x</a:t>
+            </a:r>
+            <a:r>
+              <a:rPr sz="1600" b="1">
+                <a:solidFill>
+                  <a:srgbClr val="5234B7"/>
+                </a:solidFill>
+                <a:latin typeface="DIN Next LT W23"/>
+                <a:ea typeface="DIN Next LT W23"/>
+                <a:cs typeface="DIN Next LT W23"/>
+                <a:baseline val="-25000"/>
+              </a:rPr>
+              <a:t>min</a:t>
+            </a:r>
+            <a:r>
+              <a:rPr sz="2200" b="1">
+                <a:solidFill>
+                  <a:srgbClr val="5234B7"/>
+                </a:solidFill>
+                <a:latin typeface="DIN Next LT W23"/>
+                <a:ea typeface="DIN Next LT W23"/>
+                <a:cs typeface="DIN Next LT W23"/>
+              </a:rPr>
+              <a:t>)</a:t>
             </a:r>
           </a:p>
         </p:txBody>
@@ -15423,7 +15515,99 @@
                 <a:ea typeface="DIN Next LT W23"/>
                 <a:cs typeface="DIN Next LT W23"/>
               </a:rPr>
-              <a:t>x_norm = (x − x_min) / (x_max − x_min)</a:t>
+              <a:t>x</a:t>
+            </a:r>
+            <a:r>
+              <a:rPr sz="1200" b="1">
+                <a:solidFill>
+                  <a:srgbClr val="5234B7"/>
+                </a:solidFill>
+                <a:latin typeface="DIN Next LT W23"/>
+                <a:ea typeface="DIN Next LT W23"/>
+                <a:cs typeface="DIN Next LT W23"/>
+                <a:baseline val="-25000"/>
+              </a:rPr>
+              <a:t>norm</a:t>
+            </a:r>
+            <a:r>
+              <a:rPr sz="1800" b="1">
+                <a:solidFill>
+                  <a:srgbClr val="5234B7"/>
+                </a:solidFill>
+                <a:latin typeface="DIN Next LT W23"/>
+                <a:ea typeface="DIN Next LT W23"/>
+                <a:cs typeface="DIN Next LT W23"/>
+              </a:rPr>
+              <a:t> = (x − x</a:t>
+            </a:r>
+            <a:r>
+              <a:rPr sz="1200" b="1">
+                <a:solidFill>
+                  <a:srgbClr val="5234B7"/>
+                </a:solidFill>
+                <a:latin typeface="DIN Next LT W23"/>
+                <a:ea typeface="DIN Next LT W23"/>
+                <a:cs typeface="DIN Next LT W23"/>
+                <a:baseline val="-25000"/>
+              </a:rPr>
+              <a:t>min</a:t>
+            </a:r>
+            <a:r>
+              <a:rPr sz="1800" b="1">
+                <a:solidFill>
+                  <a:srgbClr val="5234B7"/>
+                </a:solidFill>
+                <a:latin typeface="DIN Next LT W23"/>
+                <a:ea typeface="DIN Next LT W23"/>
+                <a:cs typeface="DIN Next LT W23"/>
+              </a:rPr>
+              <a:t>) / (x</a:t>
+            </a:r>
+            <a:r>
+              <a:rPr sz="1200" b="1">
+                <a:solidFill>
+                  <a:srgbClr val="5234B7"/>
+                </a:solidFill>
+                <a:latin typeface="DIN Next LT W23"/>
+                <a:ea typeface="DIN Next LT W23"/>
+                <a:cs typeface="DIN Next LT W23"/>
+                <a:baseline val="-25000"/>
+              </a:rPr>
+              <a:t>max</a:t>
+            </a:r>
+            <a:r>
+              <a:rPr sz="1800" b="1">
+                <a:solidFill>
+                  <a:srgbClr val="5234B7"/>
+                </a:solidFill>
+                <a:latin typeface="DIN Next LT W23"/>
+                <a:ea typeface="DIN Next LT W23"/>
+                <a:cs typeface="DIN Next LT W23"/>
+              </a:rPr>
+              <a:t> − x</a:t>
+            </a:r>
+            <a:r>
+              <a:rPr sz="1200" b="1">
+                <a:solidFill>
+                  <a:srgbClr val="5234B7"/>
+                </a:solidFill>
+                <a:latin typeface="DIN Next LT W23"/>
+                <a:ea typeface="DIN Next LT W23"/>
+                <a:cs typeface="DIN Next LT W23"/>
+                <a:baseline val="-25000"/>
+              </a:rPr>
+              <a:t>min</a:t>
+            </a:r>
+            <a:r>
+              <a:rPr sz="1800" b="1">
+                <a:solidFill>
+                  <a:srgbClr val="5234B7"/>
+                </a:solidFill>
+                <a:latin typeface="DIN Next LT W23"/>
+                <a:ea typeface="DIN Next LT W23"/>
+                <a:cs typeface="DIN Next LT W23"/>
+              </a:rPr>
+              <a:t>)</a:t>
             </a:r>
           </a:p>
         </p:txBody>
@@ -15460,7 +15644,53 @@
                 <a:ea typeface="DIN Next LT W23"/>
                 <a:cs typeface="DIN Next LT W23"/>
               </a:rPr>
-              <a:t>x_min = 20 · x_max = 100</a:t>
+              <a:t>x</a:t>
+            </a:r>
+            <a:r>
+              <a:rPr sz="1100" b="0">
+                <a:solidFill>
+                  <a:srgbClr val="5A5470"/>
+                </a:solidFill>
+                <a:latin typeface="DIN Next LT W23"/>
+                <a:ea typeface="DIN Next LT W23"/>
+                <a:cs typeface="DIN Next LT W23"/>
+                <a:baseline val="-25000"/>
+              </a:rPr>
+              <a:t>min</a:t>
+            </a:r>
+            <a:r>
+              <a:rPr sz="1300" b="0">
+                <a:solidFill>
+                  <a:srgbClr val="5A5470"/>
+                </a:solidFill>
+                <a:latin typeface="DIN Next LT W23"/>
+                <a:ea typeface="DIN Next LT W23"/>
+                <a:cs typeface="DIN Next LT W23"/>
+              </a:rPr>
+              <a:t> = 20 · x</a:t>
+            </a:r>
+            <a:r>
+              <a:rPr sz="1100" b="0">
+                <a:solidFill>
+                  <a:srgbClr val="5A5470"/>
+                </a:solidFill>
+                <a:latin typeface="DIN Next LT W23"/>
+                <a:ea typeface="DIN Next LT W23"/>
+                <a:cs typeface="DIN Next LT W23"/>
+                <a:baseline val="-25000"/>
+              </a:rPr>
+              <a:t>max</a:t>
+            </a:r>
+            <a:r>
+              <a:rPr sz="1300" b="0">
+                <a:solidFill>
+                  <a:srgbClr val="5A5470"/>
+                </a:solidFill>
+                <a:latin typeface="DIN Next LT W23"/>
+                <a:ea typeface="DIN Next LT W23"/>
+                <a:cs typeface="DIN Next LT W23"/>
+              </a:rPr>
+              <a:t> = 100</a:t>
             </a:r>
           </a:p>
         </p:txBody>
@@ -16510,7 +16740,99 @@
                 <a:ea typeface="DIN Next LT W23"/>
                 <a:cs typeface="DIN Next LT W23"/>
               </a:rPr>
-              <a:t>x_norm = (x − x_min) / (x_max − x_min)</a:t>
+              <a:t>x</a:t>
+            </a:r>
+            <a:r>
+              <a:rPr sz="1200" b="1">
+                <a:solidFill>
+                  <a:srgbClr val="5234B7"/>
+                </a:solidFill>
+                <a:latin typeface="DIN Next LT W23"/>
+                <a:ea typeface="DIN Next LT W23"/>
+                <a:cs typeface="DIN Next LT W23"/>
+                <a:baseline val="-25000"/>
+              </a:rPr>
+              <a:t>norm</a:t>
+            </a:r>
+            <a:r>
+              <a:rPr sz="1800" b="1">
+                <a:solidFill>
+                  <a:srgbClr val="5234B7"/>
+                </a:solidFill>
+                <a:latin typeface="DIN Next LT W23"/>
+                <a:ea typeface="DIN Next LT W23"/>
+                <a:cs typeface="DIN Next LT W23"/>
+              </a:rPr>
+              <a:t> = (x − x</a:t>
+            </a:r>
+            <a:r>
+              <a:rPr sz="1200" b="1">
+                <a:solidFill>
+                  <a:srgbClr val="5234B7"/>
+                </a:solidFill>
+                <a:latin typeface="DIN Next LT W23"/>
+                <a:ea typeface="DIN Next LT W23"/>
+                <a:cs typeface="DIN Next LT W23"/>
+                <a:baseline val="-25000"/>
+              </a:rPr>
+              <a:t>min</a:t>
+            </a:r>
+            <a:r>
+              <a:rPr sz="1800" b="1">
+                <a:solidFill>
+                  <a:srgbClr val="5234B7"/>
+                </a:solidFill>
+                <a:latin typeface="DIN Next LT W23"/>
+                <a:ea typeface="DIN Next LT W23"/>
+                <a:cs typeface="DIN Next LT W23"/>
+              </a:rPr>
+              <a:t>) / (x</a:t>
+            </a:r>
+            <a:r>
+              <a:rPr sz="1200" b="1">
+                <a:solidFill>
+                  <a:srgbClr val="5234B7"/>
+                </a:solidFill>
+                <a:latin typeface="DIN Next LT W23"/>
+                <a:ea typeface="DIN Next LT W23"/>
+                <a:cs typeface="DIN Next LT W23"/>
+                <a:baseline val="-25000"/>
+              </a:rPr>
+              <a:t>max</a:t>
+            </a:r>
+            <a:r>
+              <a:rPr sz="1800" b="1">
+                <a:solidFill>
+                  <a:srgbClr val="5234B7"/>
+                </a:solidFill>
+                <a:latin typeface="DIN Next LT W23"/>
+                <a:ea typeface="DIN Next LT W23"/>
+                <a:cs typeface="DIN Next LT W23"/>
+              </a:rPr>
+              <a:t> − x</a:t>
+            </a:r>
+            <a:r>
+              <a:rPr sz="1200" b="1">
+                <a:solidFill>
+                  <a:srgbClr val="5234B7"/>
+                </a:solidFill>
+                <a:latin typeface="DIN Next LT W23"/>
+                <a:ea typeface="DIN Next LT W23"/>
+                <a:cs typeface="DIN Next LT W23"/>
+                <a:baseline val="-25000"/>
+              </a:rPr>
+              <a:t>min</a:t>
+            </a:r>
+            <a:r>
+              <a:rPr sz="1800" b="1">
+                <a:solidFill>
+                  <a:srgbClr val="5234B7"/>
+                </a:solidFill>
+                <a:latin typeface="DIN Next LT W23"/>
+                <a:ea typeface="DIN Next LT W23"/>
+                <a:cs typeface="DIN Next LT W23"/>
+              </a:rPr>
+              <a:t>)</a:t>
             </a:r>
           </a:p>
         </p:txBody>
@@ -16547,7 +16869,53 @@
                 <a:ea typeface="DIN Next LT W23"/>
                 <a:cs typeface="DIN Next LT W23"/>
               </a:rPr>
-              <a:t>x_min = 20 · x_max = 100</a:t>
+              <a:t>x</a:t>
+            </a:r>
+            <a:r>
+              <a:rPr sz="1100" b="0">
+                <a:solidFill>
+                  <a:srgbClr val="5A5470"/>
+                </a:solidFill>
+                <a:latin typeface="DIN Next LT W23"/>
+                <a:ea typeface="DIN Next LT W23"/>
+                <a:cs typeface="DIN Next LT W23"/>
+                <a:baseline val="-25000"/>
+              </a:rPr>
+              <a:t>min</a:t>
+            </a:r>
+            <a:r>
+              <a:rPr sz="1300" b="0">
+                <a:solidFill>
+                  <a:srgbClr val="5A5470"/>
+                </a:solidFill>
+                <a:latin typeface="DIN Next LT W23"/>
+                <a:ea typeface="DIN Next LT W23"/>
+                <a:cs typeface="DIN Next LT W23"/>
+              </a:rPr>
+              <a:t> = 20 · x</a:t>
+            </a:r>
+            <a:r>
+              <a:rPr sz="1100" b="0">
+                <a:solidFill>
+                  <a:srgbClr val="5A5470"/>
+                </a:solidFill>
+                <a:latin typeface="DIN Next LT W23"/>
+                <a:ea typeface="DIN Next LT W23"/>
+                <a:cs typeface="DIN Next LT W23"/>
+                <a:baseline val="-25000"/>
+              </a:rPr>
+              <a:t>max</a:t>
+            </a:r>
+            <a:r>
+              <a:rPr sz="1300" b="0">
+                <a:solidFill>
+                  <a:srgbClr val="5A5470"/>
+                </a:solidFill>
+                <a:latin typeface="DIN Next LT W23"/>
+                <a:ea typeface="DIN Next LT W23"/>
+                <a:cs typeface="DIN Next LT W23"/>
+              </a:rPr>
+              <a:t> = 100</a:t>
             </a:r>
           </a:p>
         </p:txBody>
@@ -16611,7 +16979,7 @@
                           </a:solidFill>
                           <a:latin typeface="Helvetica"/>
                         </a:rPr>
-                        <a:t>Normalized value (x_norm)</a:t>
+                        <a:t>Normalized value (xₙₒᵣₘ)</a:t>
                       </a:r>
                     </a:p>
                   </a:txBody>
@@ -43330,7 +43698,30 @@
                 <a:ea typeface="DIN Next LT W23"/>
                 <a:cs typeface="DIN Next LT W23"/>
               </a:rPr>
-              <a:t>Study Hours_C = (8 + 7) / 2 = 7.5</a:t>
+              <a:t>Study Hours</a:t>
+            </a:r>
+            <a:r>
+              <a:rPr sz="1600" b="1">
+                <a:solidFill>
+                  <a:srgbClr val="5234B7"/>
+                </a:solidFill>
+                <a:latin typeface="DIN Next LT W23"/>
+                <a:ea typeface="DIN Next LT W23"/>
+                <a:cs typeface="DIN Next LT W23"/>
+                <a:baseline val="-25000"/>
+              </a:rPr>
+              <a:t>C</a:t>
+            </a:r>
+            <a:r>
+              <a:rPr sz="2200" b="1">
+                <a:solidFill>
+                  <a:srgbClr val="5234B7"/>
+                </a:solidFill>
+                <a:latin typeface="DIN Next LT W23"/>
+                <a:ea typeface="DIN Next LT W23"/>
+                <a:cs typeface="DIN Next LT W23"/>
+              </a:rPr>
+              <a:t> = (8 + 7) / 2 = 7.5</a:t>
             </a:r>
           </a:p>
         </p:txBody>
@@ -44785,7 +45176,30 @@
                 <a:ea typeface="DIN Next LT W23"/>
                 <a:cs typeface="DIN Next LT W23"/>
               </a:rPr>
-              <a:t>Study Hours_C ≈ 7.6</a:t>
+              <a:t>Study Hours</a:t>
+            </a:r>
+            <a:r>
+              <a:rPr sz="1600" b="1">
+                <a:solidFill>
+                  <a:srgbClr val="5234B7"/>
+                </a:solidFill>
+                <a:latin typeface="DIN Next LT W23"/>
+                <a:ea typeface="DIN Next LT W23"/>
+                <a:cs typeface="DIN Next LT W23"/>
+                <a:baseline val="-25000"/>
+              </a:rPr>
+              <a:t>C</a:t>
+            </a:r>
+            <a:r>
+              <a:rPr sz="2200" b="1">
+                <a:solidFill>
+                  <a:srgbClr val="5234B7"/>
+                </a:solidFill>
+                <a:latin typeface="DIN Next LT W23"/>
+                <a:ea typeface="DIN Next LT W23"/>
+                <a:cs typeface="DIN Next LT W23"/>
+              </a:rPr>
+              <a:t> ≈ 7.6</a:t>
             </a:r>
           </a:p>
         </p:txBody>

--- a/web-presentation/pdf-exports/Week1-Session1-Foundations.pptx
+++ b/web-presentation/pdf-exports/Week1-Session1-Foundations.pptx
@@ -10312,8 +10312,8 @@
         </p:nvSpPr>
         <p:spPr>
           <a:xfrm>
-            <a:off x="548640" y="2651760"/>
-            <a:ext cx="10972800" cy="1417320"/>
+            <a:off x="548640" y="2606040"/>
+            <a:ext cx="10972800" cy="1874519"/>
           </a:xfrm>
           <a:prstGeom prst="roundRect">
             <a:avLst>
@@ -10358,8 +10358,8 @@
         </p:nvSpPr>
         <p:spPr>
           <a:xfrm>
-            <a:off x="914400" y="2834640"/>
-            <a:ext cx="10241280" cy="274320"/>
+            <a:off x="914400" y="2697480"/>
+            <a:ext cx="10241280" cy="256032"/>
           </a:xfrm>
           <a:prstGeom prst="rect">
             <a:avLst/>
@@ -10395,285 +10395,115 @@
         </p:nvSpPr>
         <p:spPr>
           <a:xfrm>
-            <a:off x="914400" y="3154680"/>
-            <a:ext cx="10241280" cy="411480"/>
-          </a:xfrm>
-          <a:prstGeom prst="rect">
-            <a:avLst/>
-          </a:prstGeom>
-          <a:noFill/>
-        </p:spPr>
-        <p:txBody>
-          <a:bodyPr wrap="square" anchor="t">
-            <a:spAutoFit/>
-          </a:bodyPr>
-          <a:lstStyle/>
-          <a:p>
-            <a:pPr algn="l"/>
-            <a:r>
-              <a:rPr sz="2200" b="1">
+            <a:off x="914400" y="2971800"/>
+            <a:ext cx="2867558" cy="1097280"/>
+          </a:xfrm>
+          <a:prstGeom prst="rect">
+            <a:avLst/>
+          </a:prstGeom>
+          <a:noFill/>
+        </p:spPr>
+        <p:txBody>
+          <a:bodyPr wrap="none" anchor="ctr">
+            <a:spAutoFit/>
+          </a:bodyPr>
+          <a:lstStyle/>
+          <a:p>
+            <a:pPr algn="r"/>
+            <a:r>
+              <a:rPr sz="2400" b="1">
                 <a:solidFill>
                   <a:srgbClr val="5234B7"/>
                 </a:solidFill>
-                <a:latin typeface="DIN Next LT W23"/>
-                <a:ea typeface="DIN Next LT W23"/>
-                <a:cs typeface="DIN Next LT W23"/>
+                <a:latin typeface="Helvetica Neue"/>
+                <a:ea typeface="Helvetica Neue"/>
+                <a:cs typeface="Helvetica Neue"/>
               </a:rPr>
               <a:t>x</a:t>
             </a:r>
             <a:r>
-              <a:rPr sz="1600" b="1">
+              <a:rPr sz="2000" b="1" baseline="-25000">
                 <a:solidFill>
                   <a:srgbClr val="5234B7"/>
                 </a:solidFill>
-                <a:latin typeface="DIN Next LT W23"/>
-                <a:ea typeface="DIN Next LT W23"/>
-                <a:cs typeface="DIN Next LT W23"/>
-                <a:baseline val="-25000"/>
+                <a:latin typeface="Helvetica Neue"/>
+                <a:ea typeface="Helvetica Neue"/>
+                <a:cs typeface="Helvetica Neue"/>
               </a:rPr>
               <a:t>norm</a:t>
             </a:r>
             <a:r>
-              <a:rPr sz="2200" b="1">
+              <a:rPr sz="2400" b="1">
                 <a:solidFill>
                   <a:srgbClr val="5234B7"/>
                 </a:solidFill>
-                <a:latin typeface="DIN Next LT W23"/>
-                <a:ea typeface="DIN Next LT W23"/>
-                <a:cs typeface="DIN Next LT W23"/>
-              </a:rPr>
-              <a:t> = (x − x</a:t>
-            </a:r>
-            <a:r>
-              <a:rPr sz="1600" b="1">
+                <a:latin typeface="Helvetica Neue"/>
+                <a:ea typeface="Helvetica Neue"/>
+                <a:cs typeface="Helvetica Neue"/>
+              </a:rPr>
+              <a:t> =</a:t>
+            </a:r>
+          </a:p>
+        </p:txBody>
+      </p:sp>
+      <p:sp>
+        <p:nvSpPr>
+          <p:cNvPr id="12" name="TextBox 11"/>
+          <p:cNvSpPr txBox="1"/>
+          <p:nvPr/>
+        </p:nvSpPr>
+        <p:spPr>
+          <a:xfrm>
+            <a:off x="3986784" y="2971800"/>
+            <a:ext cx="6964070" cy="416966"/>
+          </a:xfrm>
+          <a:prstGeom prst="rect">
+            <a:avLst/>
+          </a:prstGeom>
+          <a:noFill/>
+        </p:spPr>
+        <p:txBody>
+          <a:bodyPr wrap="none" anchor="b">
+            <a:spAutoFit/>
+          </a:bodyPr>
+          <a:lstStyle/>
+          <a:p>
+            <a:pPr algn="ctr"/>
+            <a:r>
+              <a:rPr sz="2400" b="1">
                 <a:solidFill>
                   <a:srgbClr val="5234B7"/>
                 </a:solidFill>
-                <a:latin typeface="DIN Next LT W23"/>
-                <a:ea typeface="DIN Next LT W23"/>
-                <a:cs typeface="DIN Next LT W23"/>
-                <a:baseline val="-25000"/>
+                <a:latin typeface="Helvetica Neue"/>
+                <a:ea typeface="Helvetica Neue"/>
+                <a:cs typeface="Helvetica Neue"/>
+              </a:rPr>
+              <a:t>x − x</a:t>
+            </a:r>
+            <a:r>
+              <a:rPr sz="2000" b="1" baseline="-25000">
+                <a:solidFill>
+                  <a:srgbClr val="5234B7"/>
+                </a:solidFill>
+                <a:latin typeface="Helvetica Neue"/>
+                <a:ea typeface="Helvetica Neue"/>
+                <a:cs typeface="Helvetica Neue"/>
               </a:rPr>
               <a:t>min</a:t>
             </a:r>
-            <a:r>
-              <a:rPr sz="2200" b="1">
-                <a:solidFill>
-                  <a:srgbClr val="5234B7"/>
-                </a:solidFill>
-                <a:latin typeface="DIN Next LT W23"/>
-                <a:ea typeface="DIN Next LT W23"/>
-                <a:cs typeface="DIN Next LT W23"/>
-              </a:rPr>
-              <a:t>) / (x</a:t>
-            </a:r>
-            <a:r>
-              <a:rPr sz="1600" b="1">
-                <a:solidFill>
-                  <a:srgbClr val="5234B7"/>
-                </a:solidFill>
-                <a:latin typeface="DIN Next LT W23"/>
-                <a:ea typeface="DIN Next LT W23"/>
-                <a:cs typeface="DIN Next LT W23"/>
-                <a:baseline val="-25000"/>
-              </a:rPr>
-              <a:t>max</a:t>
-            </a:r>
-            <a:r>
-              <a:rPr sz="2200" b="1">
-                <a:solidFill>
-                  <a:srgbClr val="5234B7"/>
-                </a:solidFill>
-                <a:latin typeface="DIN Next LT W23"/>
-                <a:ea typeface="DIN Next LT W23"/>
-                <a:cs typeface="DIN Next LT W23"/>
-              </a:rPr>
-              <a:t> − x</a:t>
-            </a:r>
-            <a:r>
-              <a:rPr sz="1600" b="1">
-                <a:solidFill>
-                  <a:srgbClr val="5234B7"/>
-                </a:solidFill>
-                <a:latin typeface="DIN Next LT W23"/>
-                <a:ea typeface="DIN Next LT W23"/>
-                <a:cs typeface="DIN Next LT W23"/>
-                <a:baseline val="-25000"/>
-              </a:rPr>
-              <a:t>min</a:t>
-            </a:r>
-            <a:r>
-              <a:rPr sz="2200" b="1">
-                <a:solidFill>
-                  <a:srgbClr val="5234B7"/>
-                </a:solidFill>
-                <a:latin typeface="DIN Next LT W23"/>
-                <a:ea typeface="DIN Next LT W23"/>
-                <a:cs typeface="DIN Next LT W23"/>
-              </a:rPr>
-              <a:t>)</a:t>
-            </a:r>
-          </a:p>
-        </p:txBody>
-      </p:sp>
-      <p:sp>
-        <p:nvSpPr>
-          <p:cNvPr id="12" name="TextBox 11"/>
-          <p:cNvSpPr txBox="1"/>
-          <p:nvPr/>
-        </p:nvSpPr>
-        <p:spPr>
-          <a:xfrm>
-            <a:off x="548640" y="4343400"/>
-            <a:ext cx="320040" cy="365760"/>
-          </a:xfrm>
-          <a:prstGeom prst="rect">
-            <a:avLst/>
-          </a:prstGeom>
-          <a:noFill/>
-        </p:spPr>
-        <p:txBody>
-          <a:bodyPr wrap="square" anchor="t">
-            <a:spAutoFit/>
-          </a:bodyPr>
-          <a:lstStyle/>
-          <a:p>
-            <a:pPr algn="l"/>
-            <a:r>
-              <a:rPr sz="1600" b="0">
-                <a:solidFill>
-                  <a:srgbClr val="9E59CD"/>
-                </a:solidFill>
-                <a:latin typeface="DIN Next LT W23"/>
-                <a:ea typeface="DIN Next LT W23"/>
-                <a:cs typeface="DIN Next LT W23"/>
-              </a:rPr>
-              <a:t>–</a:t>
-            </a:r>
-          </a:p>
-        </p:txBody>
-      </p:sp>
-      <p:sp>
-        <p:nvSpPr>
-          <p:cNvPr id="13" name="TextBox 12"/>
-          <p:cNvSpPr txBox="1"/>
-          <p:nvPr/>
-        </p:nvSpPr>
-        <p:spPr>
-          <a:xfrm>
-            <a:off x="914400" y="4343400"/>
-            <a:ext cx="10241280" cy="411480"/>
-          </a:xfrm>
-          <a:prstGeom prst="rect">
-            <a:avLst/>
-          </a:prstGeom>
-          <a:noFill/>
-        </p:spPr>
-        <p:txBody>
-          <a:bodyPr wrap="square" anchor="t">
-            <a:spAutoFit/>
-          </a:bodyPr>
-          <a:lstStyle/>
-          <a:p>
-            <a:pPr algn="l"/>
-            <a:r>
-              <a:rPr sz="1600" b="0">
-                <a:solidFill>
-                  <a:srgbClr val="121018"/>
-                </a:solidFill>
-                <a:latin typeface="DIN Next LT W23"/>
-                <a:ea typeface="DIN Next LT W23"/>
-                <a:cs typeface="DIN Next LT W23"/>
-              </a:rPr>
-              <a:t>Useful for models that depend on distances or absolute magnitudes.</a:t>
-            </a:r>
-          </a:p>
-        </p:txBody>
-      </p:sp>
-      <p:sp>
-        <p:nvSpPr>
-          <p:cNvPr id="14" name="TextBox 13"/>
-          <p:cNvSpPr txBox="1"/>
-          <p:nvPr/>
-        </p:nvSpPr>
-        <p:spPr>
-          <a:xfrm>
-            <a:off x="548640" y="4965192"/>
-            <a:ext cx="320040" cy="365760"/>
-          </a:xfrm>
-          <a:prstGeom prst="rect">
-            <a:avLst/>
-          </a:prstGeom>
-          <a:noFill/>
-        </p:spPr>
-        <p:txBody>
-          <a:bodyPr wrap="square" anchor="t">
-            <a:spAutoFit/>
-          </a:bodyPr>
-          <a:lstStyle/>
-          <a:p>
-            <a:pPr algn="l"/>
-            <a:r>
-              <a:rPr sz="1600" b="0">
-                <a:solidFill>
-                  <a:srgbClr val="9E59CD"/>
-                </a:solidFill>
-                <a:latin typeface="DIN Next LT W23"/>
-                <a:ea typeface="DIN Next LT W23"/>
-                <a:cs typeface="DIN Next LT W23"/>
-              </a:rPr>
-              <a:t>–</a:t>
-            </a:r>
-          </a:p>
-        </p:txBody>
-      </p:sp>
-      <p:sp>
-        <p:nvSpPr>
-          <p:cNvPr id="15" name="TextBox 14"/>
-          <p:cNvSpPr txBox="1"/>
-          <p:nvPr/>
-        </p:nvSpPr>
-        <p:spPr>
-          <a:xfrm>
-            <a:off x="914400" y="4965192"/>
-            <a:ext cx="10241280" cy="411480"/>
-          </a:xfrm>
-          <a:prstGeom prst="rect">
-            <a:avLst/>
-          </a:prstGeom>
-          <a:noFill/>
-        </p:spPr>
-        <p:txBody>
-          <a:bodyPr wrap="square" anchor="t">
-            <a:spAutoFit/>
-          </a:bodyPr>
-          <a:lstStyle/>
-          <a:p>
-            <a:pPr algn="l"/>
-            <a:r>
-              <a:rPr sz="1600" b="0">
-                <a:solidFill>
-                  <a:srgbClr val="121018"/>
-                </a:solidFill>
-                <a:latin typeface="DIN Next LT W23"/>
-                <a:ea typeface="DIN Next LT W23"/>
-                <a:cs typeface="DIN Next LT W23"/>
-              </a:rPr>
-              <a:t>Common choice for algorithms such as KNN and K-Means.</a:t>
-            </a:r>
-          </a:p>
-        </p:txBody>
-      </p:sp>
-      <p:sp>
-        <p:nvSpPr>
-          <p:cNvPr id="16" name="Rectangle 15"/>
+          </a:p>
+        </p:txBody>
+      </p:sp>
+      <p:sp>
+        <p:nvSpPr>
+          <p:cNvPr id="13" name="Rectangle 12"/>
           <p:cNvSpPr/>
           <p:nvPr/>
         </p:nvSpPr>
         <p:spPr>
           <a:xfrm>
-            <a:off x="548640" y="6446520"/>
-            <a:ext cx="11064240" cy="10972"/>
+            <a:off x="4334987" y="3434852"/>
+            <a:ext cx="6267663" cy="18288"/>
           </a:xfrm>
           <a:prstGeom prst="rect">
             <a:avLst/>
@@ -10710,7 +10540,269 @@
       </p:sp>
       <p:sp>
         <p:nvSpPr>
+          <p:cNvPr id="14" name="TextBox 13"/>
+          <p:cNvSpPr txBox="1"/>
+          <p:nvPr/>
+        </p:nvSpPr>
+        <p:spPr>
+          <a:xfrm>
+            <a:off x="3986784" y="3520440"/>
+            <a:ext cx="6964070" cy="416966"/>
+          </a:xfrm>
+          <a:prstGeom prst="rect">
+            <a:avLst/>
+          </a:prstGeom>
+          <a:noFill/>
+        </p:spPr>
+        <p:txBody>
+          <a:bodyPr wrap="none" anchor="t">
+            <a:spAutoFit/>
+          </a:bodyPr>
+          <a:lstStyle/>
+          <a:p>
+            <a:pPr algn="ctr"/>
+            <a:r>
+              <a:rPr sz="2400" b="1">
+                <a:solidFill>
+                  <a:srgbClr val="5234B7"/>
+                </a:solidFill>
+                <a:latin typeface="Helvetica Neue"/>
+                <a:ea typeface="Helvetica Neue"/>
+                <a:cs typeface="Helvetica Neue"/>
+              </a:rPr>
+              <a:t>x</a:t>
+            </a:r>
+            <a:r>
+              <a:rPr sz="2000" b="1" baseline="-25000">
+                <a:solidFill>
+                  <a:srgbClr val="5234B7"/>
+                </a:solidFill>
+                <a:latin typeface="Helvetica Neue"/>
+                <a:ea typeface="Helvetica Neue"/>
+                <a:cs typeface="Helvetica Neue"/>
+              </a:rPr>
+              <a:t>max</a:t>
+            </a:r>
+            <a:r>
+              <a:rPr sz="2400" b="1">
+                <a:solidFill>
+                  <a:srgbClr val="5234B7"/>
+                </a:solidFill>
+                <a:latin typeface="Helvetica Neue"/>
+                <a:ea typeface="Helvetica Neue"/>
+                <a:cs typeface="Helvetica Neue"/>
+              </a:rPr>
+              <a:t> − x</a:t>
+            </a:r>
+            <a:r>
+              <a:rPr sz="2000" b="1" baseline="-25000">
+                <a:solidFill>
+                  <a:srgbClr val="5234B7"/>
+                </a:solidFill>
+                <a:latin typeface="Helvetica Neue"/>
+                <a:ea typeface="Helvetica Neue"/>
+                <a:cs typeface="Helvetica Neue"/>
+              </a:rPr>
+              <a:t>min</a:t>
+            </a:r>
+          </a:p>
+        </p:txBody>
+      </p:sp>
+      <p:sp>
+        <p:nvSpPr>
+          <p:cNvPr id="15" name="TextBox 14"/>
+          <p:cNvSpPr txBox="1"/>
+          <p:nvPr/>
+        </p:nvSpPr>
+        <p:spPr>
+          <a:xfrm>
+            <a:off x="548640" y="4709160"/>
+            <a:ext cx="320040" cy="365760"/>
+          </a:xfrm>
+          <a:prstGeom prst="rect">
+            <a:avLst/>
+          </a:prstGeom>
+          <a:noFill/>
+        </p:spPr>
+        <p:txBody>
+          <a:bodyPr wrap="square" anchor="t">
+            <a:spAutoFit/>
+          </a:bodyPr>
+          <a:lstStyle/>
+          <a:p>
+            <a:pPr algn="l"/>
+            <a:r>
+              <a:rPr sz="1600" b="0">
+                <a:solidFill>
+                  <a:srgbClr val="9E59CD"/>
+                </a:solidFill>
+                <a:latin typeface="DIN Next LT W23"/>
+                <a:ea typeface="DIN Next LT W23"/>
+                <a:cs typeface="DIN Next LT W23"/>
+              </a:rPr>
+              <a:t>–</a:t>
+            </a:r>
+          </a:p>
+        </p:txBody>
+      </p:sp>
+      <p:sp>
+        <p:nvSpPr>
+          <p:cNvPr id="16" name="TextBox 15"/>
+          <p:cNvSpPr txBox="1"/>
+          <p:nvPr/>
+        </p:nvSpPr>
+        <p:spPr>
+          <a:xfrm>
+            <a:off x="914400" y="4709160"/>
+            <a:ext cx="10241280" cy="411480"/>
+          </a:xfrm>
+          <a:prstGeom prst="rect">
+            <a:avLst/>
+          </a:prstGeom>
+          <a:noFill/>
+        </p:spPr>
+        <p:txBody>
+          <a:bodyPr wrap="square" anchor="t">
+            <a:spAutoFit/>
+          </a:bodyPr>
+          <a:lstStyle/>
+          <a:p>
+            <a:pPr algn="l"/>
+            <a:r>
+              <a:rPr sz="1600" b="0">
+                <a:solidFill>
+                  <a:srgbClr val="121018"/>
+                </a:solidFill>
+                <a:latin typeface="DIN Next LT W23"/>
+                <a:ea typeface="DIN Next LT W23"/>
+                <a:cs typeface="DIN Next LT W23"/>
+              </a:rPr>
+              <a:t>Useful for models that depend on distances or absolute magnitudes.</a:t>
+            </a:r>
+          </a:p>
+        </p:txBody>
+      </p:sp>
+      <p:sp>
+        <p:nvSpPr>
           <p:cNvPr id="17" name="TextBox 16"/>
+          <p:cNvSpPr txBox="1"/>
+          <p:nvPr/>
+        </p:nvSpPr>
+        <p:spPr>
+          <a:xfrm>
+            <a:off x="548640" y="5330952"/>
+            <a:ext cx="320040" cy="365760"/>
+          </a:xfrm>
+          <a:prstGeom prst="rect">
+            <a:avLst/>
+          </a:prstGeom>
+          <a:noFill/>
+        </p:spPr>
+        <p:txBody>
+          <a:bodyPr wrap="square" anchor="t">
+            <a:spAutoFit/>
+          </a:bodyPr>
+          <a:lstStyle/>
+          <a:p>
+            <a:pPr algn="l"/>
+            <a:r>
+              <a:rPr sz="1600" b="0">
+                <a:solidFill>
+                  <a:srgbClr val="9E59CD"/>
+                </a:solidFill>
+                <a:latin typeface="DIN Next LT W23"/>
+                <a:ea typeface="DIN Next LT W23"/>
+                <a:cs typeface="DIN Next LT W23"/>
+              </a:rPr>
+              <a:t>–</a:t>
+            </a:r>
+          </a:p>
+        </p:txBody>
+      </p:sp>
+      <p:sp>
+        <p:nvSpPr>
+          <p:cNvPr id="18" name="TextBox 17"/>
+          <p:cNvSpPr txBox="1"/>
+          <p:nvPr/>
+        </p:nvSpPr>
+        <p:spPr>
+          <a:xfrm>
+            <a:off x="914400" y="5330952"/>
+            <a:ext cx="10241280" cy="411480"/>
+          </a:xfrm>
+          <a:prstGeom prst="rect">
+            <a:avLst/>
+          </a:prstGeom>
+          <a:noFill/>
+        </p:spPr>
+        <p:txBody>
+          <a:bodyPr wrap="square" anchor="t">
+            <a:spAutoFit/>
+          </a:bodyPr>
+          <a:lstStyle/>
+          <a:p>
+            <a:pPr algn="l"/>
+            <a:r>
+              <a:rPr sz="1600" b="0">
+                <a:solidFill>
+                  <a:srgbClr val="121018"/>
+                </a:solidFill>
+                <a:latin typeface="DIN Next LT W23"/>
+                <a:ea typeface="DIN Next LT W23"/>
+                <a:cs typeface="DIN Next LT W23"/>
+              </a:rPr>
+              <a:t>Common choice for algorithms such as KNN and K-Means.</a:t>
+            </a:r>
+          </a:p>
+        </p:txBody>
+      </p:sp>
+      <p:sp>
+        <p:nvSpPr>
+          <p:cNvPr id="19" name="Rectangle 18"/>
+          <p:cNvSpPr/>
+          <p:nvPr/>
+        </p:nvSpPr>
+        <p:spPr>
+          <a:xfrm>
+            <a:off x="548640" y="6446520"/>
+            <a:ext cx="11064240" cy="10972"/>
+          </a:xfrm>
+          <a:prstGeom prst="rect">
+            <a:avLst/>
+          </a:prstGeom>
+          <a:solidFill>
+            <a:srgbClr val="5234B7"/>
+          </a:solidFill>
+          <a:ln>
+            <a:noFill/>
+          </a:ln>
+          <a:effectLst/>
+        </p:spPr>
+        <p:style>
+          <a:lnRef idx="1">
+            <a:schemeClr val="accent1"/>
+          </a:lnRef>
+          <a:fillRef idx="3">
+            <a:schemeClr val="accent1"/>
+          </a:fillRef>
+          <a:effectRef idx="2">
+            <a:schemeClr val="accent1"/>
+          </a:effectRef>
+          <a:fontRef idx="minor">
+            <a:schemeClr val="lt1"/>
+          </a:fontRef>
+        </p:style>
+        <p:txBody>
+          <a:bodyPr rtlCol="0" anchor="ctr"/>
+          <a:lstStyle/>
+          <a:p>
+            <a:pPr algn="ctr"/>
+          </a:p>
+        </p:txBody>
+      </p:sp>
+      <p:sp>
+        <p:nvSpPr>
+          <p:cNvPr id="20" name="TextBox 19"/>
           <p:cNvSpPr txBox="1"/>
           <p:nvPr/>
         </p:nvSpPr>
@@ -10747,7 +10839,7 @@
       </p:sp>
       <p:sp>
         <p:nvSpPr>
-          <p:cNvPr id="18" name="TextBox 17"/>
+          <p:cNvPr id="21" name="TextBox 20"/>
           <p:cNvSpPr txBox="1"/>
           <p:nvPr/>
         </p:nvSpPr>
@@ -11076,8 +11168,8 @@
         </p:nvSpPr>
         <p:spPr>
           <a:xfrm>
-            <a:off x="548640" y="2651760"/>
-            <a:ext cx="10972800" cy="1417320"/>
+            <a:off x="548640" y="2606040"/>
+            <a:ext cx="10972800" cy="1874519"/>
           </a:xfrm>
           <a:prstGeom prst="roundRect">
             <a:avLst>
@@ -11122,8 +11214,8 @@
         </p:nvSpPr>
         <p:spPr>
           <a:xfrm>
-            <a:off x="914400" y="2834640"/>
-            <a:ext cx="10241280" cy="274320"/>
+            <a:off x="914400" y="2697480"/>
+            <a:ext cx="10241280" cy="256032"/>
           </a:xfrm>
           <a:prstGeom prst="rect">
             <a:avLst/>
@@ -11159,31 +11251,31 @@
         </p:nvSpPr>
         <p:spPr>
           <a:xfrm>
-            <a:off x="914400" y="3154680"/>
-            <a:ext cx="10241280" cy="411480"/>
-          </a:xfrm>
-          <a:prstGeom prst="rect">
-            <a:avLst/>
-          </a:prstGeom>
-          <a:noFill/>
-        </p:spPr>
-        <p:txBody>
-          <a:bodyPr wrap="square" anchor="t">
-            <a:spAutoFit/>
-          </a:bodyPr>
-          <a:lstStyle/>
-          <a:p>
-            <a:pPr algn="l"/>
-            <a:r>
-              <a:rPr sz="2200" b="1">
+            <a:off x="914400" y="2971800"/>
+            <a:ext cx="2867558" cy="1097280"/>
+          </a:xfrm>
+          <a:prstGeom prst="rect">
+            <a:avLst/>
+          </a:prstGeom>
+          <a:noFill/>
+        </p:spPr>
+        <p:txBody>
+          <a:bodyPr wrap="none" anchor="ctr">
+            <a:spAutoFit/>
+          </a:bodyPr>
+          <a:lstStyle/>
+          <a:p>
+            <a:pPr algn="r"/>
+            <a:r>
+              <a:rPr sz="2400" b="1">
                 <a:solidFill>
                   <a:srgbClr val="5234B7"/>
                 </a:solidFill>
-                <a:latin typeface="DIN Next LT W23"/>
-                <a:ea typeface="DIN Next LT W23"/>
-                <a:cs typeface="DIN Next LT W23"/>
-              </a:rPr>
-              <a:t>z = (x − μ) / σ</a:t>
+                <a:latin typeface="Helvetica Neue"/>
+                <a:ea typeface="Helvetica Neue"/>
+                <a:cs typeface="Helvetica Neue"/>
+              </a:rPr>
+              <a:t>z =</a:t>
             </a:r>
           </a:p>
         </p:txBody>
@@ -11196,193 +11288,45 @@
         </p:nvSpPr>
         <p:spPr>
           <a:xfrm>
-            <a:off x="914400" y="3611880"/>
-            <a:ext cx="10241280" cy="274320"/>
-          </a:xfrm>
-          <a:prstGeom prst="rect">
-            <a:avLst/>
-          </a:prstGeom>
-          <a:noFill/>
-        </p:spPr>
-        <p:txBody>
-          <a:bodyPr wrap="square" anchor="t">
-            <a:spAutoFit/>
-          </a:bodyPr>
-          <a:lstStyle/>
-          <a:p>
-            <a:pPr algn="l"/>
-            <a:r>
-              <a:rPr sz="1300" b="0">
-                <a:solidFill>
-                  <a:srgbClr val="5A5470"/>
-                </a:solidFill>
-                <a:latin typeface="DIN Next LT W23"/>
-                <a:ea typeface="DIN Next LT W23"/>
-                <a:cs typeface="DIN Next LT W23"/>
-              </a:rPr>
-              <a:t>μ = mean of the feature · σ = standard deviation of the feature</a:t>
-            </a:r>
-          </a:p>
-        </p:txBody>
-      </p:sp>
-      <p:sp>
-        <p:nvSpPr>
-          <p:cNvPr id="13" name="TextBox 12"/>
-          <p:cNvSpPr txBox="1"/>
-          <p:nvPr/>
-        </p:nvSpPr>
-        <p:spPr>
-          <a:xfrm>
-            <a:off x="548640" y="4343400"/>
-            <a:ext cx="320040" cy="365760"/>
-          </a:xfrm>
-          <a:prstGeom prst="rect">
-            <a:avLst/>
-          </a:prstGeom>
-          <a:noFill/>
-        </p:spPr>
-        <p:txBody>
-          <a:bodyPr wrap="square" anchor="t">
-            <a:spAutoFit/>
-          </a:bodyPr>
-          <a:lstStyle/>
-          <a:p>
-            <a:pPr algn="l"/>
-            <a:r>
-              <a:rPr sz="1600" b="0">
-                <a:solidFill>
-                  <a:srgbClr val="9E59CD"/>
-                </a:solidFill>
-                <a:latin typeface="DIN Next LT W23"/>
-                <a:ea typeface="DIN Next LT W23"/>
-                <a:cs typeface="DIN Next LT W23"/>
-              </a:rPr>
-              <a:t>–</a:t>
-            </a:r>
-          </a:p>
-        </p:txBody>
-      </p:sp>
-      <p:sp>
-        <p:nvSpPr>
-          <p:cNvPr id="14" name="TextBox 13"/>
-          <p:cNvSpPr txBox="1"/>
-          <p:nvPr/>
-        </p:nvSpPr>
-        <p:spPr>
-          <a:xfrm>
-            <a:off x="914400" y="4343400"/>
-            <a:ext cx="10241280" cy="411480"/>
-          </a:xfrm>
-          <a:prstGeom prst="rect">
-            <a:avLst/>
-          </a:prstGeom>
-          <a:noFill/>
-        </p:spPr>
-        <p:txBody>
-          <a:bodyPr wrap="square" anchor="t">
-            <a:spAutoFit/>
-          </a:bodyPr>
-          <a:lstStyle/>
-          <a:p>
-            <a:pPr algn="l"/>
-            <a:r>
-              <a:rPr sz="1600" b="0">
-                <a:solidFill>
-                  <a:srgbClr val="121018"/>
-                </a:solidFill>
-                <a:latin typeface="DIN Next LT W23"/>
-                <a:ea typeface="DIN Next LT W23"/>
-                <a:cs typeface="DIN Next LT W23"/>
-              </a:rPr>
-              <a:t>Preferred when features are close to a Gaussian distribution.</a:t>
-            </a:r>
-          </a:p>
-        </p:txBody>
-      </p:sp>
-      <p:sp>
-        <p:nvSpPr>
-          <p:cNvPr id="15" name="TextBox 14"/>
-          <p:cNvSpPr txBox="1"/>
-          <p:nvPr/>
-        </p:nvSpPr>
-        <p:spPr>
-          <a:xfrm>
-            <a:off x="548640" y="4965192"/>
-            <a:ext cx="320040" cy="365760"/>
-          </a:xfrm>
-          <a:prstGeom prst="rect">
-            <a:avLst/>
-          </a:prstGeom>
-          <a:noFill/>
-        </p:spPr>
-        <p:txBody>
-          <a:bodyPr wrap="square" anchor="t">
-            <a:spAutoFit/>
-          </a:bodyPr>
-          <a:lstStyle/>
-          <a:p>
-            <a:pPr algn="l"/>
-            <a:r>
-              <a:rPr sz="1600" b="0">
-                <a:solidFill>
-                  <a:srgbClr val="9E59CD"/>
-                </a:solidFill>
-                <a:latin typeface="DIN Next LT W23"/>
-                <a:ea typeface="DIN Next LT W23"/>
-                <a:cs typeface="DIN Next LT W23"/>
-              </a:rPr>
-              <a:t>–</a:t>
-            </a:r>
-          </a:p>
-        </p:txBody>
-      </p:sp>
-      <p:sp>
-        <p:nvSpPr>
-          <p:cNvPr id="16" name="TextBox 15"/>
-          <p:cNvSpPr txBox="1"/>
-          <p:nvPr/>
-        </p:nvSpPr>
-        <p:spPr>
-          <a:xfrm>
-            <a:off x="914400" y="4965192"/>
-            <a:ext cx="10241280" cy="411480"/>
-          </a:xfrm>
-          <a:prstGeom prst="rect">
-            <a:avLst/>
-          </a:prstGeom>
-          <a:noFill/>
-        </p:spPr>
-        <p:txBody>
-          <a:bodyPr wrap="square" anchor="t">
-            <a:spAutoFit/>
-          </a:bodyPr>
-          <a:lstStyle/>
-          <a:p>
-            <a:pPr algn="l"/>
-            <a:r>
-              <a:rPr sz="1600" b="0">
-                <a:solidFill>
-                  <a:srgbClr val="121018"/>
-                </a:solidFill>
-                <a:latin typeface="DIN Next LT W23"/>
-                <a:ea typeface="DIN Next LT W23"/>
-                <a:cs typeface="DIN Next LT W23"/>
-              </a:rPr>
-              <a:t>Works well with Logistic Regression, SVM, and Linear Regression.</a:t>
-            </a:r>
-          </a:p>
-        </p:txBody>
-      </p:sp>
-      <p:sp>
-        <p:nvSpPr>
-          <p:cNvPr id="17" name="Rectangle 16"/>
+            <a:off x="3986784" y="2971800"/>
+            <a:ext cx="6964070" cy="416966"/>
+          </a:xfrm>
+          <a:prstGeom prst="rect">
+            <a:avLst/>
+          </a:prstGeom>
+          <a:noFill/>
+        </p:spPr>
+        <p:txBody>
+          <a:bodyPr wrap="none" anchor="b">
+            <a:spAutoFit/>
+          </a:bodyPr>
+          <a:lstStyle/>
+          <a:p>
+            <a:pPr algn="ctr"/>
+            <a:r>
+              <a:rPr sz="2400" b="1">
+                <a:solidFill>
+                  <a:srgbClr val="5234B7"/>
+                </a:solidFill>
+                <a:latin typeface="Helvetica Neue"/>
+                <a:ea typeface="Helvetica Neue"/>
+                <a:cs typeface="Helvetica Neue"/>
+              </a:rPr>
+              <a:t>x − μ</a:t>
+            </a:r>
+          </a:p>
+        </p:txBody>
+      </p:sp>
+      <p:sp>
+        <p:nvSpPr>
+          <p:cNvPr id="13" name="Rectangle 12"/>
           <p:cNvSpPr/>
           <p:nvPr/>
         </p:nvSpPr>
         <p:spPr>
           <a:xfrm>
-            <a:off x="548640" y="6446520"/>
-            <a:ext cx="11064240" cy="10972"/>
+            <a:off x="4334987" y="3434852"/>
+            <a:ext cx="6267663" cy="18288"/>
           </a:xfrm>
           <a:prstGeom prst="rect">
             <a:avLst/>
@@ -11419,7 +11363,273 @@
       </p:sp>
       <p:sp>
         <p:nvSpPr>
+          <p:cNvPr id="14" name="TextBox 13"/>
+          <p:cNvSpPr txBox="1"/>
+          <p:nvPr/>
+        </p:nvSpPr>
+        <p:spPr>
+          <a:xfrm>
+            <a:off x="3986784" y="3520440"/>
+            <a:ext cx="6964070" cy="416966"/>
+          </a:xfrm>
+          <a:prstGeom prst="rect">
+            <a:avLst/>
+          </a:prstGeom>
+          <a:noFill/>
+        </p:spPr>
+        <p:txBody>
+          <a:bodyPr wrap="none" anchor="t">
+            <a:spAutoFit/>
+          </a:bodyPr>
+          <a:lstStyle/>
+          <a:p>
+            <a:pPr algn="ctr"/>
+            <a:r>
+              <a:rPr sz="2400" b="1">
+                <a:solidFill>
+                  <a:srgbClr val="5234B7"/>
+                </a:solidFill>
+                <a:latin typeface="Helvetica Neue"/>
+                <a:ea typeface="Helvetica Neue"/>
+                <a:cs typeface="Helvetica Neue"/>
+              </a:rPr>
+              <a:t>σ</a:t>
+            </a:r>
+          </a:p>
+        </p:txBody>
+      </p:sp>
+      <p:sp>
+        <p:nvSpPr>
+          <p:cNvPr id="15" name="TextBox 14"/>
+          <p:cNvSpPr txBox="1"/>
+          <p:nvPr/>
+        </p:nvSpPr>
+        <p:spPr>
+          <a:xfrm>
+            <a:off x="914400" y="4114800"/>
+            <a:ext cx="10241280" cy="256032"/>
+          </a:xfrm>
+          <a:prstGeom prst="rect">
+            <a:avLst/>
+          </a:prstGeom>
+          <a:noFill/>
+        </p:spPr>
+        <p:txBody>
+          <a:bodyPr wrap="square" anchor="t">
+            <a:spAutoFit/>
+          </a:bodyPr>
+          <a:lstStyle/>
+          <a:p>
+            <a:pPr algn="l"/>
+            <a:r>
+              <a:rPr sz="1300" b="0">
+                <a:solidFill>
+                  <a:srgbClr val="5A5470"/>
+                </a:solidFill>
+                <a:latin typeface="Helvetica Neue"/>
+                <a:ea typeface="Helvetica Neue"/>
+                <a:cs typeface="Helvetica Neue"/>
+              </a:rPr>
+              <a:t>μ = mean of the feature · σ = standard deviation of the feature</a:t>
+            </a:r>
+          </a:p>
+        </p:txBody>
+      </p:sp>
+      <p:sp>
+        <p:nvSpPr>
+          <p:cNvPr id="16" name="TextBox 15"/>
+          <p:cNvSpPr txBox="1"/>
+          <p:nvPr/>
+        </p:nvSpPr>
+        <p:spPr>
+          <a:xfrm>
+            <a:off x="548640" y="4709160"/>
+            <a:ext cx="320040" cy="365760"/>
+          </a:xfrm>
+          <a:prstGeom prst="rect">
+            <a:avLst/>
+          </a:prstGeom>
+          <a:noFill/>
+        </p:spPr>
+        <p:txBody>
+          <a:bodyPr wrap="square" anchor="t">
+            <a:spAutoFit/>
+          </a:bodyPr>
+          <a:lstStyle/>
+          <a:p>
+            <a:pPr algn="l"/>
+            <a:r>
+              <a:rPr sz="1600" b="0">
+                <a:solidFill>
+                  <a:srgbClr val="9E59CD"/>
+                </a:solidFill>
+                <a:latin typeface="DIN Next LT W23"/>
+                <a:ea typeface="DIN Next LT W23"/>
+                <a:cs typeface="DIN Next LT W23"/>
+              </a:rPr>
+              <a:t>–</a:t>
+            </a:r>
+          </a:p>
+        </p:txBody>
+      </p:sp>
+      <p:sp>
+        <p:nvSpPr>
+          <p:cNvPr id="17" name="TextBox 16"/>
+          <p:cNvSpPr txBox="1"/>
+          <p:nvPr/>
+        </p:nvSpPr>
+        <p:spPr>
+          <a:xfrm>
+            <a:off x="914400" y="4709160"/>
+            <a:ext cx="10241280" cy="411480"/>
+          </a:xfrm>
+          <a:prstGeom prst="rect">
+            <a:avLst/>
+          </a:prstGeom>
+          <a:noFill/>
+        </p:spPr>
+        <p:txBody>
+          <a:bodyPr wrap="square" anchor="t">
+            <a:spAutoFit/>
+          </a:bodyPr>
+          <a:lstStyle/>
+          <a:p>
+            <a:pPr algn="l"/>
+            <a:r>
+              <a:rPr sz="1600" b="0">
+                <a:solidFill>
+                  <a:srgbClr val="121018"/>
+                </a:solidFill>
+                <a:latin typeface="DIN Next LT W23"/>
+                <a:ea typeface="DIN Next LT W23"/>
+                <a:cs typeface="DIN Next LT W23"/>
+              </a:rPr>
+              <a:t>Preferred when features are close to a Gaussian distribution.</a:t>
+            </a:r>
+          </a:p>
+        </p:txBody>
+      </p:sp>
+      <p:sp>
+        <p:nvSpPr>
           <p:cNvPr id="18" name="TextBox 17"/>
+          <p:cNvSpPr txBox="1"/>
+          <p:nvPr/>
+        </p:nvSpPr>
+        <p:spPr>
+          <a:xfrm>
+            <a:off x="548640" y="5330952"/>
+            <a:ext cx="320040" cy="365760"/>
+          </a:xfrm>
+          <a:prstGeom prst="rect">
+            <a:avLst/>
+          </a:prstGeom>
+          <a:noFill/>
+        </p:spPr>
+        <p:txBody>
+          <a:bodyPr wrap="square" anchor="t">
+            <a:spAutoFit/>
+          </a:bodyPr>
+          <a:lstStyle/>
+          <a:p>
+            <a:pPr algn="l"/>
+            <a:r>
+              <a:rPr sz="1600" b="0">
+                <a:solidFill>
+                  <a:srgbClr val="9E59CD"/>
+                </a:solidFill>
+                <a:latin typeface="DIN Next LT W23"/>
+                <a:ea typeface="DIN Next LT W23"/>
+                <a:cs typeface="DIN Next LT W23"/>
+              </a:rPr>
+              <a:t>–</a:t>
+            </a:r>
+          </a:p>
+        </p:txBody>
+      </p:sp>
+      <p:sp>
+        <p:nvSpPr>
+          <p:cNvPr id="19" name="TextBox 18"/>
+          <p:cNvSpPr txBox="1"/>
+          <p:nvPr/>
+        </p:nvSpPr>
+        <p:spPr>
+          <a:xfrm>
+            <a:off x="914400" y="5330952"/>
+            <a:ext cx="10241280" cy="411480"/>
+          </a:xfrm>
+          <a:prstGeom prst="rect">
+            <a:avLst/>
+          </a:prstGeom>
+          <a:noFill/>
+        </p:spPr>
+        <p:txBody>
+          <a:bodyPr wrap="square" anchor="t">
+            <a:spAutoFit/>
+          </a:bodyPr>
+          <a:lstStyle/>
+          <a:p>
+            <a:pPr algn="l"/>
+            <a:r>
+              <a:rPr sz="1600" b="0">
+                <a:solidFill>
+                  <a:srgbClr val="121018"/>
+                </a:solidFill>
+                <a:latin typeface="DIN Next LT W23"/>
+                <a:ea typeface="DIN Next LT W23"/>
+                <a:cs typeface="DIN Next LT W23"/>
+              </a:rPr>
+              <a:t>Works well with Logistic Regression, SVM, and Linear Regression.</a:t>
+            </a:r>
+          </a:p>
+        </p:txBody>
+      </p:sp>
+      <p:sp>
+        <p:nvSpPr>
+          <p:cNvPr id="20" name="Rectangle 19"/>
+          <p:cNvSpPr/>
+          <p:nvPr/>
+        </p:nvSpPr>
+        <p:spPr>
+          <a:xfrm>
+            <a:off x="548640" y="6446520"/>
+            <a:ext cx="11064240" cy="10972"/>
+          </a:xfrm>
+          <a:prstGeom prst="rect">
+            <a:avLst/>
+          </a:prstGeom>
+          <a:solidFill>
+            <a:srgbClr val="5234B7"/>
+          </a:solidFill>
+          <a:ln>
+            <a:noFill/>
+          </a:ln>
+          <a:effectLst/>
+        </p:spPr>
+        <p:style>
+          <a:lnRef idx="1">
+            <a:schemeClr val="accent1"/>
+          </a:lnRef>
+          <a:fillRef idx="3">
+            <a:schemeClr val="accent1"/>
+          </a:fillRef>
+          <a:effectRef idx="2">
+            <a:schemeClr val="accent1"/>
+          </a:effectRef>
+          <a:fontRef idx="minor">
+            <a:schemeClr val="lt1"/>
+          </a:fontRef>
+        </p:style>
+        <p:txBody>
+          <a:bodyPr rtlCol="0" anchor="ctr"/>
+          <a:lstStyle/>
+          <a:p>
+            <a:pPr algn="ctr"/>
+          </a:p>
+        </p:txBody>
+      </p:sp>
+      <p:sp>
+        <p:nvSpPr>
+          <p:cNvPr id="21" name="TextBox 20"/>
           <p:cNvSpPr txBox="1"/>
           <p:nvPr/>
         </p:nvSpPr>
@@ -11456,7 +11666,7 @@
       </p:sp>
       <p:sp>
         <p:nvSpPr>
-          <p:cNvPr id="19" name="TextBox 18"/>
+          <p:cNvPr id="22" name="TextBox 21"/>
           <p:cNvSpPr txBox="1"/>
           <p:nvPr/>
         </p:nvSpPr>
@@ -15445,8 +15655,8 @@
         </p:nvSpPr>
         <p:spPr>
           <a:xfrm>
-            <a:off x="548640" y="3611880"/>
-            <a:ext cx="10972800" cy="1051560"/>
+            <a:off x="548640" y="3246120"/>
+            <a:ext cx="10972800" cy="1417320"/>
           </a:xfrm>
           <a:prstGeom prst="roundRect">
             <a:avLst>
@@ -15491,204 +15701,294 @@
         </p:nvSpPr>
         <p:spPr>
           <a:xfrm>
-            <a:off x="868680" y="3749039"/>
-            <a:ext cx="10332720" cy="320040"/>
-          </a:xfrm>
-          <a:prstGeom prst="rect">
-            <a:avLst/>
-          </a:prstGeom>
-          <a:noFill/>
-        </p:spPr>
-        <p:txBody>
-          <a:bodyPr wrap="square" anchor="t">
-            <a:spAutoFit/>
-          </a:bodyPr>
-          <a:lstStyle/>
-          <a:p>
-            <a:pPr algn="l"/>
-            <a:r>
-              <a:rPr sz="1800" b="1">
+            <a:off x="868680" y="3337560"/>
+            <a:ext cx="2893161" cy="960120"/>
+          </a:xfrm>
+          <a:prstGeom prst="rect">
+            <a:avLst/>
+          </a:prstGeom>
+          <a:noFill/>
+        </p:spPr>
+        <p:txBody>
+          <a:bodyPr wrap="none" anchor="ctr">
+            <a:spAutoFit/>
+          </a:bodyPr>
+          <a:lstStyle/>
+          <a:p>
+            <a:pPr algn="r"/>
+            <a:r>
+              <a:rPr sz="2000" b="1">
                 <a:solidFill>
                   <a:srgbClr val="5234B7"/>
                 </a:solidFill>
-                <a:latin typeface="DIN Next LT W23"/>
-                <a:ea typeface="DIN Next LT W23"/>
-                <a:cs typeface="DIN Next LT W23"/>
+                <a:latin typeface="Helvetica Neue"/>
+                <a:ea typeface="Helvetica Neue"/>
+                <a:cs typeface="Helvetica Neue"/>
               </a:rPr>
               <a:t>x</a:t>
             </a:r>
             <a:r>
-              <a:rPr sz="1200" b="1">
+              <a:rPr sz="1600" b="1" baseline="-25000">
                 <a:solidFill>
                   <a:srgbClr val="5234B7"/>
                 </a:solidFill>
-                <a:latin typeface="DIN Next LT W23"/>
-                <a:ea typeface="DIN Next LT W23"/>
-                <a:cs typeface="DIN Next LT W23"/>
-                <a:baseline val="-25000"/>
+                <a:latin typeface="Helvetica Neue"/>
+                <a:ea typeface="Helvetica Neue"/>
+                <a:cs typeface="Helvetica Neue"/>
               </a:rPr>
               <a:t>norm</a:t>
             </a:r>
             <a:r>
-              <a:rPr sz="1800" b="1">
+              <a:rPr sz="2000" b="1">
                 <a:solidFill>
                   <a:srgbClr val="5234B7"/>
                 </a:solidFill>
-                <a:latin typeface="DIN Next LT W23"/>
-                <a:ea typeface="DIN Next LT W23"/>
-                <a:cs typeface="DIN Next LT W23"/>
-              </a:rPr>
-              <a:t> = (x − x</a:t>
-            </a:r>
-            <a:r>
-              <a:rPr sz="1200" b="1">
+                <a:latin typeface="Helvetica Neue"/>
+                <a:ea typeface="Helvetica Neue"/>
+                <a:cs typeface="Helvetica Neue"/>
+              </a:rPr>
+              <a:t> =</a:t>
+            </a:r>
+          </a:p>
+        </p:txBody>
+      </p:sp>
+      <p:sp>
+        <p:nvSpPr>
+          <p:cNvPr id="17" name="TextBox 16"/>
+          <p:cNvSpPr txBox="1"/>
+          <p:nvPr/>
+        </p:nvSpPr>
+        <p:spPr>
+          <a:xfrm>
+            <a:off x="3968496" y="3337560"/>
+            <a:ext cx="7026249" cy="364845"/>
+          </a:xfrm>
+          <a:prstGeom prst="rect">
+            <a:avLst/>
+          </a:prstGeom>
+          <a:noFill/>
+        </p:spPr>
+        <p:txBody>
+          <a:bodyPr wrap="none" anchor="b">
+            <a:spAutoFit/>
+          </a:bodyPr>
+          <a:lstStyle/>
+          <a:p>
+            <a:pPr algn="ctr"/>
+            <a:r>
+              <a:rPr sz="2000" b="1">
                 <a:solidFill>
                   <a:srgbClr val="5234B7"/>
                 </a:solidFill>
-                <a:latin typeface="DIN Next LT W23"/>
-                <a:ea typeface="DIN Next LT W23"/>
-                <a:cs typeface="DIN Next LT W23"/>
-                <a:baseline val="-25000"/>
+                <a:latin typeface="Helvetica Neue"/>
+                <a:ea typeface="Helvetica Neue"/>
+                <a:cs typeface="Helvetica Neue"/>
+              </a:rPr>
+              <a:t>x − x</a:t>
+            </a:r>
+            <a:r>
+              <a:rPr sz="1600" b="1" baseline="-25000">
+                <a:solidFill>
+                  <a:srgbClr val="5234B7"/>
+                </a:solidFill>
+                <a:latin typeface="Helvetica Neue"/>
+                <a:ea typeface="Helvetica Neue"/>
+                <a:cs typeface="Helvetica Neue"/>
               </a:rPr>
               <a:t>min</a:t>
             </a:r>
-            <a:r>
-              <a:rPr sz="1800" b="1">
+          </a:p>
+        </p:txBody>
+      </p:sp>
+      <p:sp>
+        <p:nvSpPr>
+          <p:cNvPr id="18" name="Rectangle 17"/>
+          <p:cNvSpPr/>
+          <p:nvPr/>
+        </p:nvSpPr>
+        <p:spPr>
+          <a:xfrm>
+            <a:off x="4319808" y="3742730"/>
+            <a:ext cx="6323624" cy="18288"/>
+          </a:xfrm>
+          <a:prstGeom prst="rect">
+            <a:avLst/>
+          </a:prstGeom>
+          <a:solidFill>
+            <a:srgbClr val="5234B7"/>
+          </a:solidFill>
+          <a:ln>
+            <a:noFill/>
+          </a:ln>
+          <a:effectLst/>
+        </p:spPr>
+        <p:style>
+          <a:lnRef idx="1">
+            <a:schemeClr val="accent1"/>
+          </a:lnRef>
+          <a:fillRef idx="3">
+            <a:schemeClr val="accent1"/>
+          </a:fillRef>
+          <a:effectRef idx="2">
+            <a:schemeClr val="accent1"/>
+          </a:effectRef>
+          <a:fontRef idx="minor">
+            <a:schemeClr val="lt1"/>
+          </a:fontRef>
+        </p:style>
+        <p:txBody>
+          <a:bodyPr rtlCol="0" anchor="ctr"/>
+          <a:lstStyle/>
+          <a:p>
+            <a:pPr algn="ctr"/>
+          </a:p>
+        </p:txBody>
+      </p:sp>
+      <p:sp>
+        <p:nvSpPr>
+          <p:cNvPr id="19" name="TextBox 18"/>
+          <p:cNvSpPr txBox="1"/>
+          <p:nvPr/>
+        </p:nvSpPr>
+        <p:spPr>
+          <a:xfrm>
+            <a:off x="3968496" y="3817620"/>
+            <a:ext cx="7026249" cy="364845"/>
+          </a:xfrm>
+          <a:prstGeom prst="rect">
+            <a:avLst/>
+          </a:prstGeom>
+          <a:noFill/>
+        </p:spPr>
+        <p:txBody>
+          <a:bodyPr wrap="none" anchor="t">
+            <a:spAutoFit/>
+          </a:bodyPr>
+          <a:lstStyle/>
+          <a:p>
+            <a:pPr algn="ctr"/>
+            <a:r>
+              <a:rPr sz="2000" b="1">
                 <a:solidFill>
                   <a:srgbClr val="5234B7"/>
                 </a:solidFill>
-                <a:latin typeface="DIN Next LT W23"/>
-                <a:ea typeface="DIN Next LT W23"/>
-                <a:cs typeface="DIN Next LT W23"/>
-              </a:rPr>
-              <a:t>) / (x</a:t>
-            </a:r>
-            <a:r>
-              <a:rPr sz="1200" b="1">
+                <a:latin typeface="Helvetica Neue"/>
+                <a:ea typeface="Helvetica Neue"/>
+                <a:cs typeface="Helvetica Neue"/>
+              </a:rPr>
+              <a:t>x</a:t>
+            </a:r>
+            <a:r>
+              <a:rPr sz="1600" b="1" baseline="-25000">
                 <a:solidFill>
                   <a:srgbClr val="5234B7"/>
                 </a:solidFill>
-                <a:latin typeface="DIN Next LT W23"/>
-                <a:ea typeface="DIN Next LT W23"/>
-                <a:cs typeface="DIN Next LT W23"/>
-                <a:baseline val="-25000"/>
+                <a:latin typeface="Helvetica Neue"/>
+                <a:ea typeface="Helvetica Neue"/>
+                <a:cs typeface="Helvetica Neue"/>
               </a:rPr>
               <a:t>max</a:t>
             </a:r>
             <a:r>
-              <a:rPr sz="1800" b="1">
+              <a:rPr sz="2000" b="1">
                 <a:solidFill>
                   <a:srgbClr val="5234B7"/>
                 </a:solidFill>
-                <a:latin typeface="DIN Next LT W23"/>
-                <a:ea typeface="DIN Next LT W23"/>
-                <a:cs typeface="DIN Next LT W23"/>
+                <a:latin typeface="Helvetica Neue"/>
+                <a:ea typeface="Helvetica Neue"/>
+                <a:cs typeface="Helvetica Neue"/>
               </a:rPr>
               <a:t> − x</a:t>
             </a:r>
             <a:r>
-              <a:rPr sz="1200" b="1">
+              <a:rPr sz="1600" b="1" baseline="-25000">
                 <a:solidFill>
                   <a:srgbClr val="5234B7"/>
                 </a:solidFill>
-                <a:latin typeface="DIN Next LT W23"/>
-                <a:ea typeface="DIN Next LT W23"/>
-                <a:cs typeface="DIN Next LT W23"/>
-                <a:baseline val="-25000"/>
+                <a:latin typeface="Helvetica Neue"/>
+                <a:ea typeface="Helvetica Neue"/>
+                <a:cs typeface="Helvetica Neue"/>
               </a:rPr>
               <a:t>min</a:t>
             </a:r>
-            <a:r>
-              <a:rPr sz="1800" b="1">
-                <a:solidFill>
-                  <a:srgbClr val="5234B7"/>
-                </a:solidFill>
-                <a:latin typeface="DIN Next LT W23"/>
-                <a:ea typeface="DIN Next LT W23"/>
-                <a:cs typeface="DIN Next LT W23"/>
-              </a:rPr>
-              <a:t>)</a:t>
-            </a:r>
-          </a:p>
-        </p:txBody>
-      </p:sp>
-      <p:sp>
-        <p:nvSpPr>
-          <p:cNvPr id="17" name="TextBox 16"/>
-          <p:cNvSpPr txBox="1"/>
-          <p:nvPr/>
-        </p:nvSpPr>
-        <p:spPr>
-          <a:xfrm>
-            <a:off x="868680" y="4160520"/>
-            <a:ext cx="10332720" cy="274320"/>
-          </a:xfrm>
-          <a:prstGeom prst="rect">
-            <a:avLst/>
-          </a:prstGeom>
-          <a:noFill/>
-        </p:spPr>
-        <p:txBody>
-          <a:bodyPr wrap="square" anchor="t">
-            <a:spAutoFit/>
-          </a:bodyPr>
-          <a:lstStyle/>
-          <a:p>
-            <a:pPr algn="l"/>
-            <a:r>
-              <a:rPr sz="1300" b="0">
+          </a:p>
+        </p:txBody>
+      </p:sp>
+      <p:sp>
+        <p:nvSpPr>
+          <p:cNvPr id="20" name="TextBox 19"/>
+          <p:cNvSpPr txBox="1"/>
+          <p:nvPr/>
+        </p:nvSpPr>
+        <p:spPr>
+          <a:xfrm>
+            <a:off x="868680" y="4297680"/>
+            <a:ext cx="10332720" cy="256032"/>
+          </a:xfrm>
+          <a:prstGeom prst="rect">
+            <a:avLst/>
+          </a:prstGeom>
+          <a:noFill/>
+        </p:spPr>
+        <p:txBody>
+          <a:bodyPr wrap="square" anchor="t">
+            <a:spAutoFit/>
+          </a:bodyPr>
+          <a:lstStyle/>
+          <a:p>
+            <a:pPr algn="l"/>
+            <a:r>
+              <a:rPr sz="1200" b="0">
                 <a:solidFill>
                   <a:srgbClr val="5A5470"/>
                 </a:solidFill>
-                <a:latin typeface="DIN Next LT W23"/>
-                <a:ea typeface="DIN Next LT W23"/>
-                <a:cs typeface="DIN Next LT W23"/>
+                <a:latin typeface="Helvetica Neue"/>
+                <a:ea typeface="Helvetica Neue"/>
+                <a:cs typeface="Helvetica Neue"/>
               </a:rPr>
               <a:t>x</a:t>
             </a:r>
             <a:r>
-              <a:rPr sz="1100" b="0">
+              <a:rPr sz="1200" b="0" baseline="-25000">
                 <a:solidFill>
                   <a:srgbClr val="5A5470"/>
                 </a:solidFill>
-                <a:latin typeface="DIN Next LT W23"/>
-                <a:ea typeface="DIN Next LT W23"/>
-                <a:cs typeface="DIN Next LT W23"/>
-                <a:baseline val="-25000"/>
+                <a:latin typeface="Helvetica Neue"/>
+                <a:ea typeface="Helvetica Neue"/>
+                <a:cs typeface="Helvetica Neue"/>
               </a:rPr>
               <a:t>min</a:t>
             </a:r>
             <a:r>
-              <a:rPr sz="1300" b="0">
+              <a:rPr sz="1200" b="0">
                 <a:solidFill>
                   <a:srgbClr val="5A5470"/>
                 </a:solidFill>
-                <a:latin typeface="DIN Next LT W23"/>
-                <a:ea typeface="DIN Next LT W23"/>
-                <a:cs typeface="DIN Next LT W23"/>
+                <a:latin typeface="Helvetica Neue"/>
+                <a:ea typeface="Helvetica Neue"/>
+                <a:cs typeface="Helvetica Neue"/>
               </a:rPr>
               <a:t> = 20 · x</a:t>
             </a:r>
             <a:r>
-              <a:rPr sz="1100" b="0">
+              <a:rPr sz="1200" b="0" baseline="-25000">
                 <a:solidFill>
                   <a:srgbClr val="5A5470"/>
                 </a:solidFill>
-                <a:latin typeface="DIN Next LT W23"/>
-                <a:ea typeface="DIN Next LT W23"/>
-                <a:cs typeface="DIN Next LT W23"/>
-                <a:baseline val="-25000"/>
+                <a:latin typeface="Helvetica Neue"/>
+                <a:ea typeface="Helvetica Neue"/>
+                <a:cs typeface="Helvetica Neue"/>
               </a:rPr>
               <a:t>max</a:t>
             </a:r>
             <a:r>
-              <a:rPr sz="1300" b="0">
+              <a:rPr sz="1200" b="0">
                 <a:solidFill>
                   <a:srgbClr val="5A5470"/>
                 </a:solidFill>
-                <a:latin typeface="DIN Next LT W23"/>
-                <a:ea typeface="DIN Next LT W23"/>
-                <a:cs typeface="DIN Next LT W23"/>
+                <a:latin typeface="Helvetica Neue"/>
+                <a:ea typeface="Helvetica Neue"/>
+                <a:cs typeface="Helvetica Neue"/>
               </a:rPr>
               <a:t> = 100</a:t>
             </a:r>
@@ -15697,13 +15997,13 @@
       </p:sp>
       <p:sp>
         <p:nvSpPr>
-          <p:cNvPr id="18" name="Rounded Rectangle 17"/>
+          <p:cNvPr id="21" name="Rounded Rectangle 20"/>
           <p:cNvSpPr/>
           <p:nvPr/>
         </p:nvSpPr>
         <p:spPr>
           <a:xfrm>
-            <a:off x="594360" y="4846320"/>
+            <a:off x="594360" y="4754880"/>
             <a:ext cx="2103120" cy="1051560"/>
           </a:xfrm>
           <a:prstGeom prst="roundRect">
@@ -15743,7 +16043,7 @@
       </p:sp>
       <p:sp>
         <p:nvSpPr>
-          <p:cNvPr id="19" name="TextBox 18"/>
+          <p:cNvPr id="22" name="TextBox 21"/>
           <p:cNvSpPr txBox="1"/>
           <p:nvPr/>
         </p:nvSpPr>
@@ -15780,7 +16080,7 @@
       </p:sp>
       <p:sp>
         <p:nvSpPr>
-          <p:cNvPr id="20" name="TextBox 19"/>
+          <p:cNvPr id="23" name="TextBox 22"/>
           <p:cNvSpPr txBox="1"/>
           <p:nvPr/>
         </p:nvSpPr>
@@ -15817,13 +16117,13 @@
       </p:sp>
       <p:sp>
         <p:nvSpPr>
-          <p:cNvPr id="21" name="Rounded Rectangle 20"/>
+          <p:cNvPr id="24" name="Rounded Rectangle 23"/>
           <p:cNvSpPr/>
           <p:nvPr/>
         </p:nvSpPr>
         <p:spPr>
           <a:xfrm>
-            <a:off x="2788920" y="4846320"/>
+            <a:off x="2788920" y="4754880"/>
             <a:ext cx="2103120" cy="1051560"/>
           </a:xfrm>
           <a:prstGeom prst="roundRect">
@@ -15863,7 +16163,7 @@
       </p:sp>
       <p:sp>
         <p:nvSpPr>
-          <p:cNvPr id="22" name="TextBox 21"/>
+          <p:cNvPr id="25" name="TextBox 24"/>
           <p:cNvSpPr txBox="1"/>
           <p:nvPr/>
         </p:nvSpPr>
@@ -15900,7 +16200,7 @@
       </p:sp>
       <p:sp>
         <p:nvSpPr>
-          <p:cNvPr id="23" name="TextBox 22"/>
+          <p:cNvPr id="26" name="TextBox 25"/>
           <p:cNvSpPr txBox="1"/>
           <p:nvPr/>
         </p:nvSpPr>
@@ -15937,13 +16237,13 @@
       </p:sp>
       <p:sp>
         <p:nvSpPr>
-          <p:cNvPr id="24" name="Rounded Rectangle 23"/>
+          <p:cNvPr id="27" name="Rounded Rectangle 26"/>
           <p:cNvSpPr/>
           <p:nvPr/>
         </p:nvSpPr>
         <p:spPr>
           <a:xfrm>
-            <a:off x="4983480" y="4846320"/>
+            <a:off x="4983480" y="4754880"/>
             <a:ext cx="2103120" cy="1051560"/>
           </a:xfrm>
           <a:prstGeom prst="roundRect">
@@ -15983,7 +16283,7 @@
       </p:sp>
       <p:sp>
         <p:nvSpPr>
-          <p:cNvPr id="25" name="TextBox 24"/>
+          <p:cNvPr id="28" name="TextBox 27"/>
           <p:cNvSpPr txBox="1"/>
           <p:nvPr/>
         </p:nvSpPr>
@@ -16020,7 +16320,7 @@
       </p:sp>
       <p:sp>
         <p:nvSpPr>
-          <p:cNvPr id="26" name="TextBox 25"/>
+          <p:cNvPr id="29" name="TextBox 28"/>
           <p:cNvSpPr txBox="1"/>
           <p:nvPr/>
         </p:nvSpPr>
@@ -16057,13 +16357,13 @@
       </p:sp>
       <p:sp>
         <p:nvSpPr>
-          <p:cNvPr id="27" name="Rounded Rectangle 26"/>
+          <p:cNvPr id="30" name="Rounded Rectangle 29"/>
           <p:cNvSpPr/>
           <p:nvPr/>
         </p:nvSpPr>
         <p:spPr>
           <a:xfrm>
-            <a:off x="7178040" y="4846320"/>
+            <a:off x="7178040" y="4754880"/>
             <a:ext cx="2103120" cy="1051560"/>
           </a:xfrm>
           <a:prstGeom prst="roundRect">
@@ -16103,7 +16403,7 @@
       </p:sp>
       <p:sp>
         <p:nvSpPr>
-          <p:cNvPr id="28" name="TextBox 27"/>
+          <p:cNvPr id="31" name="TextBox 30"/>
           <p:cNvSpPr txBox="1"/>
           <p:nvPr/>
         </p:nvSpPr>
@@ -16140,7 +16440,7 @@
       </p:sp>
       <p:sp>
         <p:nvSpPr>
-          <p:cNvPr id="29" name="TextBox 28"/>
+          <p:cNvPr id="32" name="TextBox 31"/>
           <p:cNvSpPr txBox="1"/>
           <p:nvPr/>
         </p:nvSpPr>
@@ -16177,13 +16477,13 @@
       </p:sp>
       <p:sp>
         <p:nvSpPr>
-          <p:cNvPr id="30" name="Rounded Rectangle 29"/>
+          <p:cNvPr id="33" name="Rounded Rectangle 32"/>
           <p:cNvSpPr/>
           <p:nvPr/>
         </p:nvSpPr>
         <p:spPr>
           <a:xfrm>
-            <a:off x="9372600" y="4846320"/>
+            <a:off x="9372600" y="4754880"/>
             <a:ext cx="2103120" cy="1051560"/>
           </a:xfrm>
           <a:prstGeom prst="roundRect">
@@ -16223,7 +16523,7 @@
       </p:sp>
       <p:sp>
         <p:nvSpPr>
-          <p:cNvPr id="31" name="TextBox 30"/>
+          <p:cNvPr id="34" name="TextBox 33"/>
           <p:cNvSpPr txBox="1"/>
           <p:nvPr/>
         </p:nvSpPr>
@@ -16260,7 +16560,7 @@
       </p:sp>
       <p:sp>
         <p:nvSpPr>
-          <p:cNvPr id="32" name="TextBox 31"/>
+          <p:cNvPr id="35" name="TextBox 34"/>
           <p:cNvSpPr txBox="1"/>
           <p:nvPr/>
         </p:nvSpPr>
@@ -16297,7 +16597,7 @@
       </p:sp>
       <p:sp>
         <p:nvSpPr>
-          <p:cNvPr id="33" name="Rectangle 32"/>
+          <p:cNvPr id="36" name="Rectangle 35"/>
           <p:cNvSpPr/>
           <p:nvPr/>
         </p:nvSpPr>
@@ -16341,7 +16641,7 @@
       </p:sp>
       <p:sp>
         <p:nvSpPr>
-          <p:cNvPr id="34" name="TextBox 33"/>
+          <p:cNvPr id="37" name="TextBox 36"/>
           <p:cNvSpPr txBox="1"/>
           <p:nvPr/>
         </p:nvSpPr>
@@ -16378,7 +16678,7 @@
       </p:sp>
       <p:sp>
         <p:nvSpPr>
-          <p:cNvPr id="35" name="TextBox 34"/>
+          <p:cNvPr id="38" name="TextBox 37"/>
           <p:cNvSpPr txBox="1"/>
           <p:nvPr/>
         </p:nvSpPr>
@@ -16670,8 +16970,8 @@
         </p:nvSpPr>
         <p:spPr>
           <a:xfrm>
-            <a:off x="548640" y="2011680"/>
-            <a:ext cx="10972800" cy="1051560"/>
+            <a:off x="548640" y="1965960"/>
+            <a:ext cx="10972800" cy="1417320"/>
           </a:xfrm>
           <a:prstGeom prst="roundRect">
             <a:avLst>
@@ -16716,204 +17016,294 @@
         </p:nvSpPr>
         <p:spPr>
           <a:xfrm>
-            <a:off x="868680" y="2148840"/>
-            <a:ext cx="10332720" cy="320040"/>
-          </a:xfrm>
-          <a:prstGeom prst="rect">
-            <a:avLst/>
-          </a:prstGeom>
-          <a:noFill/>
-        </p:spPr>
-        <p:txBody>
-          <a:bodyPr wrap="square" anchor="t">
-            <a:spAutoFit/>
-          </a:bodyPr>
-          <a:lstStyle/>
-          <a:p>
-            <a:pPr algn="l"/>
-            <a:r>
-              <a:rPr sz="1800" b="1">
+            <a:off x="868680" y="2057400"/>
+            <a:ext cx="2893161" cy="960120"/>
+          </a:xfrm>
+          <a:prstGeom prst="rect">
+            <a:avLst/>
+          </a:prstGeom>
+          <a:noFill/>
+        </p:spPr>
+        <p:txBody>
+          <a:bodyPr wrap="none" anchor="ctr">
+            <a:spAutoFit/>
+          </a:bodyPr>
+          <a:lstStyle/>
+          <a:p>
+            <a:pPr algn="r"/>
+            <a:r>
+              <a:rPr sz="2000" b="1">
                 <a:solidFill>
                   <a:srgbClr val="5234B7"/>
                 </a:solidFill>
-                <a:latin typeface="DIN Next LT W23"/>
-                <a:ea typeface="DIN Next LT W23"/>
-                <a:cs typeface="DIN Next LT W23"/>
+                <a:latin typeface="Helvetica Neue"/>
+                <a:ea typeface="Helvetica Neue"/>
+                <a:cs typeface="Helvetica Neue"/>
               </a:rPr>
               <a:t>x</a:t>
             </a:r>
             <a:r>
-              <a:rPr sz="1200" b="1">
+              <a:rPr sz="1600" b="1" baseline="-25000">
                 <a:solidFill>
                   <a:srgbClr val="5234B7"/>
                 </a:solidFill>
-                <a:latin typeface="DIN Next LT W23"/>
-                <a:ea typeface="DIN Next LT W23"/>
-                <a:cs typeface="DIN Next LT W23"/>
-                <a:baseline val="-25000"/>
+                <a:latin typeface="Helvetica Neue"/>
+                <a:ea typeface="Helvetica Neue"/>
+                <a:cs typeface="Helvetica Neue"/>
               </a:rPr>
               <a:t>norm</a:t>
             </a:r>
             <a:r>
-              <a:rPr sz="1800" b="1">
+              <a:rPr sz="2000" b="1">
                 <a:solidFill>
                   <a:srgbClr val="5234B7"/>
                 </a:solidFill>
-                <a:latin typeface="DIN Next LT W23"/>
-                <a:ea typeface="DIN Next LT W23"/>
-                <a:cs typeface="DIN Next LT W23"/>
-              </a:rPr>
-              <a:t> = (x − x</a:t>
-            </a:r>
-            <a:r>
-              <a:rPr sz="1200" b="1">
+                <a:latin typeface="Helvetica Neue"/>
+                <a:ea typeface="Helvetica Neue"/>
+                <a:cs typeface="Helvetica Neue"/>
+              </a:rPr>
+              <a:t> =</a:t>
+            </a:r>
+          </a:p>
+        </p:txBody>
+      </p:sp>
+      <p:sp>
+        <p:nvSpPr>
+          <p:cNvPr id="10" name="TextBox 9"/>
+          <p:cNvSpPr txBox="1"/>
+          <p:nvPr/>
+        </p:nvSpPr>
+        <p:spPr>
+          <a:xfrm>
+            <a:off x="3968496" y="2057400"/>
+            <a:ext cx="7026249" cy="364845"/>
+          </a:xfrm>
+          <a:prstGeom prst="rect">
+            <a:avLst/>
+          </a:prstGeom>
+          <a:noFill/>
+        </p:spPr>
+        <p:txBody>
+          <a:bodyPr wrap="none" anchor="b">
+            <a:spAutoFit/>
+          </a:bodyPr>
+          <a:lstStyle/>
+          <a:p>
+            <a:pPr algn="ctr"/>
+            <a:r>
+              <a:rPr sz="2000" b="1">
                 <a:solidFill>
                   <a:srgbClr val="5234B7"/>
                 </a:solidFill>
-                <a:latin typeface="DIN Next LT W23"/>
-                <a:ea typeface="DIN Next LT W23"/>
-                <a:cs typeface="DIN Next LT W23"/>
-                <a:baseline val="-25000"/>
+                <a:latin typeface="Helvetica Neue"/>
+                <a:ea typeface="Helvetica Neue"/>
+                <a:cs typeface="Helvetica Neue"/>
+              </a:rPr>
+              <a:t>x − x</a:t>
+            </a:r>
+            <a:r>
+              <a:rPr sz="1600" b="1" baseline="-25000">
+                <a:solidFill>
+                  <a:srgbClr val="5234B7"/>
+                </a:solidFill>
+                <a:latin typeface="Helvetica Neue"/>
+                <a:ea typeface="Helvetica Neue"/>
+                <a:cs typeface="Helvetica Neue"/>
               </a:rPr>
               <a:t>min</a:t>
             </a:r>
-            <a:r>
-              <a:rPr sz="1800" b="1">
+          </a:p>
+        </p:txBody>
+      </p:sp>
+      <p:sp>
+        <p:nvSpPr>
+          <p:cNvPr id="11" name="Rectangle 10"/>
+          <p:cNvSpPr/>
+          <p:nvPr/>
+        </p:nvSpPr>
+        <p:spPr>
+          <a:xfrm>
+            <a:off x="4319808" y="2462570"/>
+            <a:ext cx="6323624" cy="18288"/>
+          </a:xfrm>
+          <a:prstGeom prst="rect">
+            <a:avLst/>
+          </a:prstGeom>
+          <a:solidFill>
+            <a:srgbClr val="5234B7"/>
+          </a:solidFill>
+          <a:ln>
+            <a:noFill/>
+          </a:ln>
+          <a:effectLst/>
+        </p:spPr>
+        <p:style>
+          <a:lnRef idx="1">
+            <a:schemeClr val="accent1"/>
+          </a:lnRef>
+          <a:fillRef idx="3">
+            <a:schemeClr val="accent1"/>
+          </a:fillRef>
+          <a:effectRef idx="2">
+            <a:schemeClr val="accent1"/>
+          </a:effectRef>
+          <a:fontRef idx="minor">
+            <a:schemeClr val="lt1"/>
+          </a:fontRef>
+        </p:style>
+        <p:txBody>
+          <a:bodyPr rtlCol="0" anchor="ctr"/>
+          <a:lstStyle/>
+          <a:p>
+            <a:pPr algn="ctr"/>
+          </a:p>
+        </p:txBody>
+      </p:sp>
+      <p:sp>
+        <p:nvSpPr>
+          <p:cNvPr id="12" name="TextBox 11"/>
+          <p:cNvSpPr txBox="1"/>
+          <p:nvPr/>
+        </p:nvSpPr>
+        <p:spPr>
+          <a:xfrm>
+            <a:off x="3968496" y="2537460"/>
+            <a:ext cx="7026249" cy="364845"/>
+          </a:xfrm>
+          <a:prstGeom prst="rect">
+            <a:avLst/>
+          </a:prstGeom>
+          <a:noFill/>
+        </p:spPr>
+        <p:txBody>
+          <a:bodyPr wrap="none" anchor="t">
+            <a:spAutoFit/>
+          </a:bodyPr>
+          <a:lstStyle/>
+          <a:p>
+            <a:pPr algn="ctr"/>
+            <a:r>
+              <a:rPr sz="2000" b="1">
                 <a:solidFill>
                   <a:srgbClr val="5234B7"/>
                 </a:solidFill>
-                <a:latin typeface="DIN Next LT W23"/>
-                <a:ea typeface="DIN Next LT W23"/>
-                <a:cs typeface="DIN Next LT W23"/>
-              </a:rPr>
-              <a:t>) / (x</a:t>
-            </a:r>
-            <a:r>
-              <a:rPr sz="1200" b="1">
+                <a:latin typeface="Helvetica Neue"/>
+                <a:ea typeface="Helvetica Neue"/>
+                <a:cs typeface="Helvetica Neue"/>
+              </a:rPr>
+              <a:t>x</a:t>
+            </a:r>
+            <a:r>
+              <a:rPr sz="1600" b="1" baseline="-25000">
                 <a:solidFill>
                   <a:srgbClr val="5234B7"/>
                 </a:solidFill>
-                <a:latin typeface="DIN Next LT W23"/>
-                <a:ea typeface="DIN Next LT W23"/>
-                <a:cs typeface="DIN Next LT W23"/>
-                <a:baseline val="-25000"/>
+                <a:latin typeface="Helvetica Neue"/>
+                <a:ea typeface="Helvetica Neue"/>
+                <a:cs typeface="Helvetica Neue"/>
               </a:rPr>
               <a:t>max</a:t>
             </a:r>
             <a:r>
-              <a:rPr sz="1800" b="1">
+              <a:rPr sz="2000" b="1">
                 <a:solidFill>
                   <a:srgbClr val="5234B7"/>
                 </a:solidFill>
-                <a:latin typeface="DIN Next LT W23"/>
-                <a:ea typeface="DIN Next LT W23"/>
-                <a:cs typeface="DIN Next LT W23"/>
+                <a:latin typeface="Helvetica Neue"/>
+                <a:ea typeface="Helvetica Neue"/>
+                <a:cs typeface="Helvetica Neue"/>
               </a:rPr>
               <a:t> − x</a:t>
             </a:r>
             <a:r>
-              <a:rPr sz="1200" b="1">
+              <a:rPr sz="1600" b="1" baseline="-25000">
                 <a:solidFill>
                   <a:srgbClr val="5234B7"/>
                 </a:solidFill>
-                <a:latin typeface="DIN Next LT W23"/>
-                <a:ea typeface="DIN Next LT W23"/>
-                <a:cs typeface="DIN Next LT W23"/>
-                <a:baseline val="-25000"/>
+                <a:latin typeface="Helvetica Neue"/>
+                <a:ea typeface="Helvetica Neue"/>
+                <a:cs typeface="Helvetica Neue"/>
               </a:rPr>
               <a:t>min</a:t>
             </a:r>
-            <a:r>
-              <a:rPr sz="1800" b="1">
-                <a:solidFill>
-                  <a:srgbClr val="5234B7"/>
-                </a:solidFill>
-                <a:latin typeface="DIN Next LT W23"/>
-                <a:ea typeface="DIN Next LT W23"/>
-                <a:cs typeface="DIN Next LT W23"/>
-              </a:rPr>
-              <a:t>)</a:t>
-            </a:r>
-          </a:p>
-        </p:txBody>
-      </p:sp>
-      <p:sp>
-        <p:nvSpPr>
-          <p:cNvPr id="10" name="TextBox 9"/>
-          <p:cNvSpPr txBox="1"/>
-          <p:nvPr/>
-        </p:nvSpPr>
-        <p:spPr>
-          <a:xfrm>
-            <a:off x="868680" y="2560320"/>
-            <a:ext cx="10332720" cy="274320"/>
-          </a:xfrm>
-          <a:prstGeom prst="rect">
-            <a:avLst/>
-          </a:prstGeom>
-          <a:noFill/>
-        </p:spPr>
-        <p:txBody>
-          <a:bodyPr wrap="square" anchor="t">
-            <a:spAutoFit/>
-          </a:bodyPr>
-          <a:lstStyle/>
-          <a:p>
-            <a:pPr algn="l"/>
-            <a:r>
-              <a:rPr sz="1300" b="0">
+          </a:p>
+        </p:txBody>
+      </p:sp>
+      <p:sp>
+        <p:nvSpPr>
+          <p:cNvPr id="13" name="TextBox 12"/>
+          <p:cNvSpPr txBox="1"/>
+          <p:nvPr/>
+        </p:nvSpPr>
+        <p:spPr>
+          <a:xfrm>
+            <a:off x="868680" y="3017520"/>
+            <a:ext cx="10332720" cy="256032"/>
+          </a:xfrm>
+          <a:prstGeom prst="rect">
+            <a:avLst/>
+          </a:prstGeom>
+          <a:noFill/>
+        </p:spPr>
+        <p:txBody>
+          <a:bodyPr wrap="square" anchor="t">
+            <a:spAutoFit/>
+          </a:bodyPr>
+          <a:lstStyle/>
+          <a:p>
+            <a:pPr algn="l"/>
+            <a:r>
+              <a:rPr sz="1200" b="0">
                 <a:solidFill>
                   <a:srgbClr val="5A5470"/>
                 </a:solidFill>
-                <a:latin typeface="DIN Next LT W23"/>
-                <a:ea typeface="DIN Next LT W23"/>
-                <a:cs typeface="DIN Next LT W23"/>
+                <a:latin typeface="Helvetica Neue"/>
+                <a:ea typeface="Helvetica Neue"/>
+                <a:cs typeface="Helvetica Neue"/>
               </a:rPr>
               <a:t>x</a:t>
             </a:r>
             <a:r>
-              <a:rPr sz="1100" b="0">
+              <a:rPr sz="1200" b="0" baseline="-25000">
                 <a:solidFill>
                   <a:srgbClr val="5A5470"/>
                 </a:solidFill>
-                <a:latin typeface="DIN Next LT W23"/>
-                <a:ea typeface="DIN Next LT W23"/>
-                <a:cs typeface="DIN Next LT W23"/>
-                <a:baseline val="-25000"/>
+                <a:latin typeface="Helvetica Neue"/>
+                <a:ea typeface="Helvetica Neue"/>
+                <a:cs typeface="Helvetica Neue"/>
               </a:rPr>
               <a:t>min</a:t>
             </a:r>
             <a:r>
-              <a:rPr sz="1300" b="0">
+              <a:rPr sz="1200" b="0">
                 <a:solidFill>
                   <a:srgbClr val="5A5470"/>
                 </a:solidFill>
-                <a:latin typeface="DIN Next LT W23"/>
-                <a:ea typeface="DIN Next LT W23"/>
-                <a:cs typeface="DIN Next LT W23"/>
+                <a:latin typeface="Helvetica Neue"/>
+                <a:ea typeface="Helvetica Neue"/>
+                <a:cs typeface="Helvetica Neue"/>
               </a:rPr>
               <a:t> = 20 · x</a:t>
             </a:r>
             <a:r>
-              <a:rPr sz="1100" b="0">
+              <a:rPr sz="1200" b="0" baseline="-25000">
                 <a:solidFill>
                   <a:srgbClr val="5A5470"/>
                 </a:solidFill>
-                <a:latin typeface="DIN Next LT W23"/>
-                <a:ea typeface="DIN Next LT W23"/>
-                <a:cs typeface="DIN Next LT W23"/>
-                <a:baseline val="-25000"/>
+                <a:latin typeface="Helvetica Neue"/>
+                <a:ea typeface="Helvetica Neue"/>
+                <a:cs typeface="Helvetica Neue"/>
               </a:rPr>
               <a:t>max</a:t>
             </a:r>
             <a:r>
-              <a:rPr sz="1300" b="0">
+              <a:rPr sz="1200" b="0">
                 <a:solidFill>
                   <a:srgbClr val="5A5470"/>
                 </a:solidFill>
-                <a:latin typeface="DIN Next LT W23"/>
-                <a:ea typeface="DIN Next LT W23"/>
-                <a:cs typeface="DIN Next LT W23"/>
+                <a:latin typeface="Helvetica Neue"/>
+                <a:ea typeface="Helvetica Neue"/>
+                <a:cs typeface="Helvetica Neue"/>
               </a:rPr>
               <a:t> = 100</a:t>
             </a:r>
@@ -16922,15 +17312,15 @@
       </p:sp>
       <p:graphicFrame>
         <p:nvGraphicFramePr>
-          <p:cNvPr id="11" name="Table 10"/>
+          <p:cNvPr id="14" name="Table 13"/>
           <p:cNvGraphicFramePr>
             <a:graphicFrameLocks noGrp="1"/>
           </p:cNvGraphicFramePr>
           <p:nvPr/>
         </p:nvGraphicFramePr>
         <p:xfrm>
-          <a:off x="548640" y="3246120"/>
-          <a:ext cx="10972800" cy="2240280"/>
+          <a:off x="548640" y="3566160"/>
+          <a:ext cx="10972800" cy="2011680"/>
         </p:xfrm>
         <a:graphic>
           <a:graphicData uri="http://schemas.openxmlformats.org/drawingml/2006/table">
@@ -16942,7 +17332,7 @@
                 <a:gridCol w="5486400"/>
                 <a:gridCol w="5486400"/>
               </a:tblGrid>
-              <a:tr h="373380">
+              <a:tr h="335280">
                 <a:tc>
                   <a:txBody>
                     <a:bodyPr/>
@@ -16990,7 +17380,7 @@
                   </a:tcPr>
                 </a:tc>
               </a:tr>
-              <a:tr h="373380">
+              <a:tr h="335280">
                 <a:tc>
                   <a:txBody>
                     <a:bodyPr/>
@@ -17038,7 +17428,7 @@
                   </a:tcPr>
                 </a:tc>
               </a:tr>
-              <a:tr h="373380">
+              <a:tr h="335280">
                 <a:tc>
                   <a:txBody>
                     <a:bodyPr/>
@@ -17086,7 +17476,7 @@
                   </a:tcPr>
                 </a:tc>
               </a:tr>
-              <a:tr h="373380">
+              <a:tr h="335280">
                 <a:tc>
                   <a:txBody>
                     <a:bodyPr/>
@@ -17134,7 +17524,7 @@
                   </a:tcPr>
                 </a:tc>
               </a:tr>
-              <a:tr h="373380">
+              <a:tr h="335280">
                 <a:tc>
                   <a:txBody>
                     <a:bodyPr/>
@@ -17182,7 +17572,7 @@
                   </a:tcPr>
                 </a:tc>
               </a:tr>
-              <a:tr h="373380">
+              <a:tr h="335280">
                 <a:tc>
                   <a:txBody>
                     <a:bodyPr/>
@@ -17236,7 +17626,7 @@
       </p:graphicFrame>
       <p:sp>
         <p:nvSpPr>
-          <p:cNvPr id="12" name="TextBox 11"/>
+          <p:cNvPr id="15" name="TextBox 14"/>
           <p:cNvSpPr txBox="1"/>
           <p:nvPr/>
         </p:nvSpPr>
@@ -17273,7 +17663,7 @@
       </p:sp>
       <p:sp>
         <p:nvSpPr>
-          <p:cNvPr id="13" name="Rectangle 12"/>
+          <p:cNvPr id="16" name="Rectangle 15"/>
           <p:cNvSpPr/>
           <p:nvPr/>
         </p:nvSpPr>
@@ -17317,7 +17707,7 @@
       </p:sp>
       <p:sp>
         <p:nvSpPr>
-          <p:cNvPr id="14" name="TextBox 13"/>
+          <p:cNvPr id="17" name="TextBox 16"/>
           <p:cNvSpPr txBox="1"/>
           <p:nvPr/>
         </p:nvSpPr>
@@ -17354,7 +17744,7 @@
       </p:sp>
       <p:sp>
         <p:nvSpPr>
-          <p:cNvPr id="15" name="TextBox 14"/>
+          <p:cNvPr id="18" name="TextBox 17"/>
           <p:cNvSpPr txBox="1"/>
           <p:nvPr/>
         </p:nvSpPr>
@@ -17923,8 +18313,8 @@
         </p:nvSpPr>
         <p:spPr>
           <a:xfrm>
-            <a:off x="548640" y="3611880"/>
-            <a:ext cx="10972800" cy="1051560"/>
+            <a:off x="548640" y="3246120"/>
+            <a:ext cx="10972800" cy="1417320"/>
           </a:xfrm>
           <a:prstGeom prst="roundRect">
             <a:avLst>
@@ -17969,31 +18359,31 @@
         </p:nvSpPr>
         <p:spPr>
           <a:xfrm>
-            <a:off x="868680" y="3749039"/>
-            <a:ext cx="10332720" cy="320040"/>
-          </a:xfrm>
-          <a:prstGeom prst="rect">
-            <a:avLst/>
-          </a:prstGeom>
-          <a:noFill/>
-        </p:spPr>
-        <p:txBody>
-          <a:bodyPr wrap="square" anchor="t">
-            <a:spAutoFit/>
-          </a:bodyPr>
-          <a:lstStyle/>
-          <a:p>
-            <a:pPr algn="l"/>
-            <a:r>
-              <a:rPr sz="1800" b="1">
+            <a:off x="868680" y="3337560"/>
+            <a:ext cx="2893161" cy="960120"/>
+          </a:xfrm>
+          <a:prstGeom prst="rect">
+            <a:avLst/>
+          </a:prstGeom>
+          <a:noFill/>
+        </p:spPr>
+        <p:txBody>
+          <a:bodyPr wrap="none" anchor="ctr">
+            <a:spAutoFit/>
+          </a:bodyPr>
+          <a:lstStyle/>
+          <a:p>
+            <a:pPr algn="r"/>
+            <a:r>
+              <a:rPr sz="2000" b="1">
                 <a:solidFill>
                   <a:srgbClr val="5234B7"/>
                 </a:solidFill>
-                <a:latin typeface="DIN Next LT W23"/>
-                <a:ea typeface="DIN Next LT W23"/>
-                <a:cs typeface="DIN Next LT W23"/>
-              </a:rPr>
-              <a:t>z = (x − μ) / σ</a:t>
+                <a:latin typeface="Helvetica Neue"/>
+                <a:ea typeface="Helvetica Neue"/>
+                <a:cs typeface="Helvetica Neue"/>
+              </a:rPr>
+              <a:t>z =</a:t>
             </a:r>
           </a:p>
         </p:txBody>
@@ -18006,29 +18396,147 @@
         </p:nvSpPr>
         <p:spPr>
           <a:xfrm>
-            <a:off x="868680" y="4160520"/>
-            <a:ext cx="10332720" cy="274320"/>
-          </a:xfrm>
-          <a:prstGeom prst="rect">
-            <a:avLst/>
-          </a:prstGeom>
-          <a:noFill/>
-        </p:spPr>
-        <p:txBody>
-          <a:bodyPr wrap="square" anchor="t">
-            <a:spAutoFit/>
-          </a:bodyPr>
-          <a:lstStyle/>
-          <a:p>
-            <a:pPr algn="l"/>
-            <a:r>
-              <a:rPr sz="1300" b="0">
+            <a:off x="3968496" y="3337560"/>
+            <a:ext cx="7026249" cy="364845"/>
+          </a:xfrm>
+          <a:prstGeom prst="rect">
+            <a:avLst/>
+          </a:prstGeom>
+          <a:noFill/>
+        </p:spPr>
+        <p:txBody>
+          <a:bodyPr wrap="none" anchor="b">
+            <a:spAutoFit/>
+          </a:bodyPr>
+          <a:lstStyle/>
+          <a:p>
+            <a:pPr algn="ctr"/>
+            <a:r>
+              <a:rPr sz="2000" b="1">
+                <a:solidFill>
+                  <a:srgbClr val="5234B7"/>
+                </a:solidFill>
+                <a:latin typeface="Helvetica Neue"/>
+                <a:ea typeface="Helvetica Neue"/>
+                <a:cs typeface="Helvetica Neue"/>
+              </a:rPr>
+              <a:t>x − μ</a:t>
+            </a:r>
+          </a:p>
+        </p:txBody>
+      </p:sp>
+      <p:sp>
+        <p:nvSpPr>
+          <p:cNvPr id="18" name="Rectangle 17"/>
+          <p:cNvSpPr/>
+          <p:nvPr/>
+        </p:nvSpPr>
+        <p:spPr>
+          <a:xfrm>
+            <a:off x="4319808" y="3742730"/>
+            <a:ext cx="6323624" cy="18288"/>
+          </a:xfrm>
+          <a:prstGeom prst="rect">
+            <a:avLst/>
+          </a:prstGeom>
+          <a:solidFill>
+            <a:srgbClr val="5234B7"/>
+          </a:solidFill>
+          <a:ln>
+            <a:noFill/>
+          </a:ln>
+          <a:effectLst/>
+        </p:spPr>
+        <p:style>
+          <a:lnRef idx="1">
+            <a:schemeClr val="accent1"/>
+          </a:lnRef>
+          <a:fillRef idx="3">
+            <a:schemeClr val="accent1"/>
+          </a:fillRef>
+          <a:effectRef idx="2">
+            <a:schemeClr val="accent1"/>
+          </a:effectRef>
+          <a:fontRef idx="minor">
+            <a:schemeClr val="lt1"/>
+          </a:fontRef>
+        </p:style>
+        <p:txBody>
+          <a:bodyPr rtlCol="0" anchor="ctr"/>
+          <a:lstStyle/>
+          <a:p>
+            <a:pPr algn="ctr"/>
+          </a:p>
+        </p:txBody>
+      </p:sp>
+      <p:sp>
+        <p:nvSpPr>
+          <p:cNvPr id="19" name="TextBox 18"/>
+          <p:cNvSpPr txBox="1"/>
+          <p:nvPr/>
+        </p:nvSpPr>
+        <p:spPr>
+          <a:xfrm>
+            <a:off x="3968496" y="3817620"/>
+            <a:ext cx="7026249" cy="364845"/>
+          </a:xfrm>
+          <a:prstGeom prst="rect">
+            <a:avLst/>
+          </a:prstGeom>
+          <a:noFill/>
+        </p:spPr>
+        <p:txBody>
+          <a:bodyPr wrap="none" anchor="t">
+            <a:spAutoFit/>
+          </a:bodyPr>
+          <a:lstStyle/>
+          <a:p>
+            <a:pPr algn="ctr"/>
+            <a:r>
+              <a:rPr sz="2000" b="1">
+                <a:solidFill>
+                  <a:srgbClr val="5234B7"/>
+                </a:solidFill>
+                <a:latin typeface="Helvetica Neue"/>
+                <a:ea typeface="Helvetica Neue"/>
+                <a:cs typeface="Helvetica Neue"/>
+              </a:rPr>
+              <a:t>σ</a:t>
+            </a:r>
+          </a:p>
+        </p:txBody>
+      </p:sp>
+      <p:sp>
+        <p:nvSpPr>
+          <p:cNvPr id="20" name="TextBox 19"/>
+          <p:cNvSpPr txBox="1"/>
+          <p:nvPr/>
+        </p:nvSpPr>
+        <p:spPr>
+          <a:xfrm>
+            <a:off x="868680" y="4297680"/>
+            <a:ext cx="10332720" cy="256032"/>
+          </a:xfrm>
+          <a:prstGeom prst="rect">
+            <a:avLst/>
+          </a:prstGeom>
+          <a:noFill/>
+        </p:spPr>
+        <p:txBody>
+          <a:bodyPr wrap="square" anchor="t">
+            <a:spAutoFit/>
+          </a:bodyPr>
+          <a:lstStyle/>
+          <a:p>
+            <a:pPr algn="l"/>
+            <a:r>
+              <a:rPr sz="1200" b="0">
                 <a:solidFill>
                   <a:srgbClr val="5A5470"/>
                 </a:solidFill>
-                <a:latin typeface="DIN Next LT W23"/>
-                <a:ea typeface="DIN Next LT W23"/>
-                <a:cs typeface="DIN Next LT W23"/>
+                <a:latin typeface="Helvetica Neue"/>
+                <a:ea typeface="Helvetica Neue"/>
+                <a:cs typeface="Helvetica Neue"/>
               </a:rPr>
               <a:t>Mean: μ = 60 · Standard deviation: σ = 28.28</a:t>
             </a:r>
@@ -18037,13 +18545,13 @@
       </p:sp>
       <p:sp>
         <p:nvSpPr>
-          <p:cNvPr id="18" name="Rounded Rectangle 17"/>
+          <p:cNvPr id="21" name="Rounded Rectangle 20"/>
           <p:cNvSpPr/>
           <p:nvPr/>
         </p:nvSpPr>
         <p:spPr>
           <a:xfrm>
-            <a:off x="594360" y="4846320"/>
+            <a:off x="594360" y="4754880"/>
             <a:ext cx="2103120" cy="1051560"/>
           </a:xfrm>
           <a:prstGeom prst="roundRect">
@@ -18083,7 +18591,7 @@
       </p:sp>
       <p:sp>
         <p:nvSpPr>
-          <p:cNvPr id="19" name="TextBox 18"/>
+          <p:cNvPr id="22" name="TextBox 21"/>
           <p:cNvSpPr txBox="1"/>
           <p:nvPr/>
         </p:nvSpPr>
@@ -18120,7 +18628,7 @@
       </p:sp>
       <p:sp>
         <p:nvSpPr>
-          <p:cNvPr id="20" name="TextBox 19"/>
+          <p:cNvPr id="23" name="TextBox 22"/>
           <p:cNvSpPr txBox="1"/>
           <p:nvPr/>
         </p:nvSpPr>
@@ -18157,13 +18665,13 @@
       </p:sp>
       <p:sp>
         <p:nvSpPr>
-          <p:cNvPr id="21" name="Rounded Rectangle 20"/>
+          <p:cNvPr id="24" name="Rounded Rectangle 23"/>
           <p:cNvSpPr/>
           <p:nvPr/>
         </p:nvSpPr>
         <p:spPr>
           <a:xfrm>
-            <a:off x="2788920" y="4846320"/>
+            <a:off x="2788920" y="4754880"/>
             <a:ext cx="2103120" cy="1051560"/>
           </a:xfrm>
           <a:prstGeom prst="roundRect">
@@ -18203,7 +18711,7 @@
       </p:sp>
       <p:sp>
         <p:nvSpPr>
-          <p:cNvPr id="22" name="TextBox 21"/>
+          <p:cNvPr id="25" name="TextBox 24"/>
           <p:cNvSpPr txBox="1"/>
           <p:nvPr/>
         </p:nvSpPr>
@@ -18240,7 +18748,7 @@
       </p:sp>
       <p:sp>
         <p:nvSpPr>
-          <p:cNvPr id="23" name="TextBox 22"/>
+          <p:cNvPr id="26" name="TextBox 25"/>
           <p:cNvSpPr txBox="1"/>
           <p:nvPr/>
         </p:nvSpPr>
@@ -18277,13 +18785,13 @@
       </p:sp>
       <p:sp>
         <p:nvSpPr>
-          <p:cNvPr id="24" name="Rounded Rectangle 23"/>
+          <p:cNvPr id="27" name="Rounded Rectangle 26"/>
           <p:cNvSpPr/>
           <p:nvPr/>
         </p:nvSpPr>
         <p:spPr>
           <a:xfrm>
-            <a:off x="4983480" y="4846320"/>
+            <a:off x="4983480" y="4754880"/>
             <a:ext cx="2103120" cy="1051560"/>
           </a:xfrm>
           <a:prstGeom prst="roundRect">
@@ -18323,7 +18831,7 @@
       </p:sp>
       <p:sp>
         <p:nvSpPr>
-          <p:cNvPr id="25" name="TextBox 24"/>
+          <p:cNvPr id="28" name="TextBox 27"/>
           <p:cNvSpPr txBox="1"/>
           <p:nvPr/>
         </p:nvSpPr>
@@ -18360,7 +18868,7 @@
       </p:sp>
       <p:sp>
         <p:nvSpPr>
-          <p:cNvPr id="26" name="TextBox 25"/>
+          <p:cNvPr id="29" name="TextBox 28"/>
           <p:cNvSpPr txBox="1"/>
           <p:nvPr/>
         </p:nvSpPr>
@@ -18397,13 +18905,13 @@
       </p:sp>
       <p:sp>
         <p:nvSpPr>
-          <p:cNvPr id="27" name="Rounded Rectangle 26"/>
+          <p:cNvPr id="30" name="Rounded Rectangle 29"/>
           <p:cNvSpPr/>
           <p:nvPr/>
         </p:nvSpPr>
         <p:spPr>
           <a:xfrm>
-            <a:off x="7178040" y="4846320"/>
+            <a:off x="7178040" y="4754880"/>
             <a:ext cx="2103120" cy="1051560"/>
           </a:xfrm>
           <a:prstGeom prst="roundRect">
@@ -18443,7 +18951,7 @@
       </p:sp>
       <p:sp>
         <p:nvSpPr>
-          <p:cNvPr id="28" name="TextBox 27"/>
+          <p:cNvPr id="31" name="TextBox 30"/>
           <p:cNvSpPr txBox="1"/>
           <p:nvPr/>
         </p:nvSpPr>
@@ -18480,7 +18988,7 @@
       </p:sp>
       <p:sp>
         <p:nvSpPr>
-          <p:cNvPr id="29" name="TextBox 28"/>
+          <p:cNvPr id="32" name="TextBox 31"/>
           <p:cNvSpPr txBox="1"/>
           <p:nvPr/>
         </p:nvSpPr>
@@ -18517,13 +19025,13 @@
       </p:sp>
       <p:sp>
         <p:nvSpPr>
-          <p:cNvPr id="30" name="Rounded Rectangle 29"/>
+          <p:cNvPr id="33" name="Rounded Rectangle 32"/>
           <p:cNvSpPr/>
           <p:nvPr/>
         </p:nvSpPr>
         <p:spPr>
           <a:xfrm>
-            <a:off x="9372600" y="4846320"/>
+            <a:off x="9372600" y="4754880"/>
             <a:ext cx="2103120" cy="1051560"/>
           </a:xfrm>
           <a:prstGeom prst="roundRect">
@@ -18563,7 +19071,7 @@
       </p:sp>
       <p:sp>
         <p:nvSpPr>
-          <p:cNvPr id="31" name="TextBox 30"/>
+          <p:cNvPr id="34" name="TextBox 33"/>
           <p:cNvSpPr txBox="1"/>
           <p:nvPr/>
         </p:nvSpPr>
@@ -18600,7 +19108,7 @@
       </p:sp>
       <p:sp>
         <p:nvSpPr>
-          <p:cNvPr id="32" name="TextBox 31"/>
+          <p:cNvPr id="35" name="TextBox 34"/>
           <p:cNvSpPr txBox="1"/>
           <p:nvPr/>
         </p:nvSpPr>
@@ -18637,7 +19145,7 @@
       </p:sp>
       <p:sp>
         <p:nvSpPr>
-          <p:cNvPr id="33" name="Rectangle 32"/>
+          <p:cNvPr id="36" name="Rectangle 35"/>
           <p:cNvSpPr/>
           <p:nvPr/>
         </p:nvSpPr>
@@ -18681,7 +19189,7 @@
       </p:sp>
       <p:sp>
         <p:nvSpPr>
-          <p:cNvPr id="34" name="TextBox 33"/>
+          <p:cNvPr id="37" name="TextBox 36"/>
           <p:cNvSpPr txBox="1"/>
           <p:nvPr/>
         </p:nvSpPr>
@@ -18718,7 +19226,7 @@
       </p:sp>
       <p:sp>
         <p:nvSpPr>
-          <p:cNvPr id="35" name="TextBox 34"/>
+          <p:cNvPr id="38" name="TextBox 37"/>
           <p:cNvSpPr txBox="1"/>
           <p:nvPr/>
         </p:nvSpPr>
@@ -19010,8 +19518,8 @@
         </p:nvSpPr>
         <p:spPr>
           <a:xfrm>
-            <a:off x="548640" y="2011680"/>
-            <a:ext cx="10972800" cy="1051560"/>
+            <a:off x="548640" y="1965960"/>
+            <a:ext cx="10972800" cy="1417320"/>
           </a:xfrm>
           <a:prstGeom prst="roundRect">
             <a:avLst>
@@ -19056,31 +19564,31 @@
         </p:nvSpPr>
         <p:spPr>
           <a:xfrm>
-            <a:off x="868680" y="2148840"/>
-            <a:ext cx="10332720" cy="320040"/>
-          </a:xfrm>
-          <a:prstGeom prst="rect">
-            <a:avLst/>
-          </a:prstGeom>
-          <a:noFill/>
-        </p:spPr>
-        <p:txBody>
-          <a:bodyPr wrap="square" anchor="t">
-            <a:spAutoFit/>
-          </a:bodyPr>
-          <a:lstStyle/>
-          <a:p>
-            <a:pPr algn="l"/>
-            <a:r>
-              <a:rPr sz="1800" b="1">
+            <a:off x="868680" y="2057400"/>
+            <a:ext cx="2893161" cy="960120"/>
+          </a:xfrm>
+          <a:prstGeom prst="rect">
+            <a:avLst/>
+          </a:prstGeom>
+          <a:noFill/>
+        </p:spPr>
+        <p:txBody>
+          <a:bodyPr wrap="none" anchor="ctr">
+            <a:spAutoFit/>
+          </a:bodyPr>
+          <a:lstStyle/>
+          <a:p>
+            <a:pPr algn="r"/>
+            <a:r>
+              <a:rPr sz="2000" b="1">
                 <a:solidFill>
                   <a:srgbClr val="5234B7"/>
                 </a:solidFill>
-                <a:latin typeface="DIN Next LT W23"/>
-                <a:ea typeface="DIN Next LT W23"/>
-                <a:cs typeface="DIN Next LT W23"/>
-              </a:rPr>
-              <a:t>z = (x − μ) / σ</a:t>
+                <a:latin typeface="Helvetica Neue"/>
+                <a:ea typeface="Helvetica Neue"/>
+                <a:cs typeface="Helvetica Neue"/>
+              </a:rPr>
+              <a:t>z =</a:t>
             </a:r>
           </a:p>
         </p:txBody>
@@ -19093,29 +19601,147 @@
         </p:nvSpPr>
         <p:spPr>
           <a:xfrm>
-            <a:off x="868680" y="2560320"/>
-            <a:ext cx="10332720" cy="274320"/>
-          </a:xfrm>
-          <a:prstGeom prst="rect">
-            <a:avLst/>
-          </a:prstGeom>
-          <a:noFill/>
-        </p:spPr>
-        <p:txBody>
-          <a:bodyPr wrap="square" anchor="t">
-            <a:spAutoFit/>
-          </a:bodyPr>
-          <a:lstStyle/>
-          <a:p>
-            <a:pPr algn="l"/>
-            <a:r>
-              <a:rPr sz="1300" b="0">
+            <a:off x="3968496" y="2057400"/>
+            <a:ext cx="7026249" cy="364845"/>
+          </a:xfrm>
+          <a:prstGeom prst="rect">
+            <a:avLst/>
+          </a:prstGeom>
+          <a:noFill/>
+        </p:spPr>
+        <p:txBody>
+          <a:bodyPr wrap="none" anchor="b">
+            <a:spAutoFit/>
+          </a:bodyPr>
+          <a:lstStyle/>
+          <a:p>
+            <a:pPr algn="ctr"/>
+            <a:r>
+              <a:rPr sz="2000" b="1">
+                <a:solidFill>
+                  <a:srgbClr val="5234B7"/>
+                </a:solidFill>
+                <a:latin typeface="Helvetica Neue"/>
+                <a:ea typeface="Helvetica Neue"/>
+                <a:cs typeface="Helvetica Neue"/>
+              </a:rPr>
+              <a:t>x − μ</a:t>
+            </a:r>
+          </a:p>
+        </p:txBody>
+      </p:sp>
+      <p:sp>
+        <p:nvSpPr>
+          <p:cNvPr id="11" name="Rectangle 10"/>
+          <p:cNvSpPr/>
+          <p:nvPr/>
+        </p:nvSpPr>
+        <p:spPr>
+          <a:xfrm>
+            <a:off x="4319808" y="2462570"/>
+            <a:ext cx="6323624" cy="18288"/>
+          </a:xfrm>
+          <a:prstGeom prst="rect">
+            <a:avLst/>
+          </a:prstGeom>
+          <a:solidFill>
+            <a:srgbClr val="5234B7"/>
+          </a:solidFill>
+          <a:ln>
+            <a:noFill/>
+          </a:ln>
+          <a:effectLst/>
+        </p:spPr>
+        <p:style>
+          <a:lnRef idx="1">
+            <a:schemeClr val="accent1"/>
+          </a:lnRef>
+          <a:fillRef idx="3">
+            <a:schemeClr val="accent1"/>
+          </a:fillRef>
+          <a:effectRef idx="2">
+            <a:schemeClr val="accent1"/>
+          </a:effectRef>
+          <a:fontRef idx="minor">
+            <a:schemeClr val="lt1"/>
+          </a:fontRef>
+        </p:style>
+        <p:txBody>
+          <a:bodyPr rtlCol="0" anchor="ctr"/>
+          <a:lstStyle/>
+          <a:p>
+            <a:pPr algn="ctr"/>
+          </a:p>
+        </p:txBody>
+      </p:sp>
+      <p:sp>
+        <p:nvSpPr>
+          <p:cNvPr id="12" name="TextBox 11"/>
+          <p:cNvSpPr txBox="1"/>
+          <p:nvPr/>
+        </p:nvSpPr>
+        <p:spPr>
+          <a:xfrm>
+            <a:off x="3968496" y="2537460"/>
+            <a:ext cx="7026249" cy="364845"/>
+          </a:xfrm>
+          <a:prstGeom prst="rect">
+            <a:avLst/>
+          </a:prstGeom>
+          <a:noFill/>
+        </p:spPr>
+        <p:txBody>
+          <a:bodyPr wrap="none" anchor="t">
+            <a:spAutoFit/>
+          </a:bodyPr>
+          <a:lstStyle/>
+          <a:p>
+            <a:pPr algn="ctr"/>
+            <a:r>
+              <a:rPr sz="2000" b="1">
+                <a:solidFill>
+                  <a:srgbClr val="5234B7"/>
+                </a:solidFill>
+                <a:latin typeface="Helvetica Neue"/>
+                <a:ea typeface="Helvetica Neue"/>
+                <a:cs typeface="Helvetica Neue"/>
+              </a:rPr>
+              <a:t>σ</a:t>
+            </a:r>
+          </a:p>
+        </p:txBody>
+      </p:sp>
+      <p:sp>
+        <p:nvSpPr>
+          <p:cNvPr id="13" name="TextBox 12"/>
+          <p:cNvSpPr txBox="1"/>
+          <p:nvPr/>
+        </p:nvSpPr>
+        <p:spPr>
+          <a:xfrm>
+            <a:off x="868680" y="3017520"/>
+            <a:ext cx="10332720" cy="256032"/>
+          </a:xfrm>
+          <a:prstGeom prst="rect">
+            <a:avLst/>
+          </a:prstGeom>
+          <a:noFill/>
+        </p:spPr>
+        <p:txBody>
+          <a:bodyPr wrap="square" anchor="t">
+            <a:spAutoFit/>
+          </a:bodyPr>
+          <a:lstStyle/>
+          <a:p>
+            <a:pPr algn="l"/>
+            <a:r>
+              <a:rPr sz="1200" b="0">
                 <a:solidFill>
                   <a:srgbClr val="5A5470"/>
                 </a:solidFill>
-                <a:latin typeface="DIN Next LT W23"/>
-                <a:ea typeface="DIN Next LT W23"/>
-                <a:cs typeface="DIN Next LT W23"/>
+                <a:latin typeface="Helvetica Neue"/>
+                <a:ea typeface="Helvetica Neue"/>
+                <a:cs typeface="Helvetica Neue"/>
               </a:rPr>
               <a:t>Mean: μ = 60 · Standard deviation: σ = 28.28</a:t>
             </a:r>
@@ -19124,15 +19750,15 @@
       </p:sp>
       <p:graphicFrame>
         <p:nvGraphicFramePr>
-          <p:cNvPr id="11" name="Table 10"/>
+          <p:cNvPr id="14" name="Table 13"/>
           <p:cNvGraphicFramePr>
             <a:graphicFrameLocks noGrp="1"/>
           </p:cNvGraphicFramePr>
           <p:nvPr/>
         </p:nvGraphicFramePr>
         <p:xfrm>
-          <a:off x="548640" y="3246120"/>
-          <a:ext cx="10972800" cy="2240280"/>
+          <a:off x="548640" y="3566160"/>
+          <a:ext cx="10972800" cy="2011680"/>
         </p:xfrm>
         <a:graphic>
           <a:graphicData uri="http://schemas.openxmlformats.org/drawingml/2006/table">
@@ -19144,7 +19770,7 @@
                 <a:gridCol w="5486400"/>
                 <a:gridCol w="5486400"/>
               </a:tblGrid>
-              <a:tr h="373380">
+              <a:tr h="335280">
                 <a:tc>
                   <a:txBody>
                     <a:bodyPr/>
@@ -19192,7 +19818,7 @@
                   </a:tcPr>
                 </a:tc>
               </a:tr>
-              <a:tr h="373380">
+              <a:tr h="335280">
                 <a:tc>
                   <a:txBody>
                     <a:bodyPr/>
@@ -19240,7 +19866,7 @@
                   </a:tcPr>
                 </a:tc>
               </a:tr>
-              <a:tr h="373380">
+              <a:tr h="335280">
                 <a:tc>
                   <a:txBody>
                     <a:bodyPr/>
@@ -19288,7 +19914,7 @@
                   </a:tcPr>
                 </a:tc>
               </a:tr>
-              <a:tr h="373380">
+              <a:tr h="335280">
                 <a:tc>
                   <a:txBody>
                     <a:bodyPr/>
@@ -19336,7 +19962,7 @@
                   </a:tcPr>
                 </a:tc>
               </a:tr>
-              <a:tr h="373380">
+              <a:tr h="335280">
                 <a:tc>
                   <a:txBody>
                     <a:bodyPr/>
@@ -19384,7 +20010,7 @@
                   </a:tcPr>
                 </a:tc>
               </a:tr>
-              <a:tr h="373380">
+              <a:tr h="335280">
                 <a:tc>
                   <a:txBody>
                     <a:bodyPr/>
@@ -19438,7 +20064,7 @@
       </p:graphicFrame>
       <p:sp>
         <p:nvSpPr>
-          <p:cNvPr id="12" name="TextBox 11"/>
+          <p:cNvPr id="15" name="TextBox 14"/>
           <p:cNvSpPr txBox="1"/>
           <p:nvPr/>
         </p:nvSpPr>
@@ -19475,7 +20101,7 @@
       </p:sp>
       <p:sp>
         <p:nvSpPr>
-          <p:cNvPr id="13" name="Rectangle 12"/>
+          <p:cNvPr id="16" name="Rectangle 15"/>
           <p:cNvSpPr/>
           <p:nvPr/>
         </p:nvSpPr>
@@ -19519,7 +20145,7 @@
       </p:sp>
       <p:sp>
         <p:nvSpPr>
-          <p:cNvPr id="14" name="TextBox 13"/>
+          <p:cNvPr id="17" name="TextBox 16"/>
           <p:cNvSpPr txBox="1"/>
           <p:nvPr/>
         </p:nvSpPr>
@@ -19556,7 +20182,7 @@
       </p:sp>
       <p:sp>
         <p:nvSpPr>
-          <p:cNvPr id="15" name="TextBox 14"/>
+          <p:cNvPr id="18" name="TextBox 17"/>
           <p:cNvSpPr txBox="1"/>
           <p:nvPr/>
         </p:nvSpPr>
@@ -43674,52 +44300,51 @@
         </p:nvSpPr>
         <p:spPr>
           <a:xfrm>
-            <a:off x="868680" y="2377440"/>
-            <a:ext cx="10332720" cy="457200"/>
-          </a:xfrm>
-          <a:prstGeom prst="rect">
-            <a:avLst/>
-          </a:prstGeom>
-          <a:noFill/>
-        </p:spPr>
-        <p:txBody>
-          <a:bodyPr wrap="square" anchor="t">
-            <a:spAutoFit/>
-          </a:bodyPr>
-          <a:lstStyle/>
-          <a:p>
-            <a:pPr algn="l"/>
-            <a:r>
-              <a:rPr sz="2200" b="1">
+            <a:off x="868680" y="2331720"/>
+            <a:ext cx="10332720" cy="640080"/>
+          </a:xfrm>
+          <a:prstGeom prst="rect">
+            <a:avLst/>
+          </a:prstGeom>
+          <a:noFill/>
+        </p:spPr>
+        <p:txBody>
+          <a:bodyPr wrap="square" anchor="t">
+            <a:spAutoFit/>
+          </a:bodyPr>
+          <a:lstStyle/>
+          <a:p>
+            <a:pPr algn="ctr"/>
+            <a:r>
+              <a:rPr sz="2600" b="1">
                 <a:solidFill>
                   <a:srgbClr val="5234B7"/>
                 </a:solidFill>
-                <a:latin typeface="DIN Next LT W23"/>
-                <a:ea typeface="DIN Next LT W23"/>
-                <a:cs typeface="DIN Next LT W23"/>
+                <a:latin typeface="Helvetica Neue"/>
+                <a:ea typeface="Helvetica Neue"/>
+                <a:cs typeface="Helvetica Neue"/>
               </a:rPr>
               <a:t>Study Hours</a:t>
             </a:r>
             <a:r>
-              <a:rPr sz="1600" b="1">
+              <a:rPr sz="2200" b="1" baseline="-25000">
                 <a:solidFill>
                   <a:srgbClr val="5234B7"/>
                 </a:solidFill>
-                <a:latin typeface="DIN Next LT W23"/>
-                <a:ea typeface="DIN Next LT W23"/>
-                <a:cs typeface="DIN Next LT W23"/>
-                <a:baseline val="-25000"/>
+                <a:latin typeface="Helvetica Neue"/>
+                <a:ea typeface="Helvetica Neue"/>
+                <a:cs typeface="Helvetica Neue"/>
               </a:rPr>
               <a:t>C</a:t>
             </a:r>
             <a:r>
-              <a:rPr sz="2200" b="1">
+              <a:rPr sz="2600" b="1">
                 <a:solidFill>
                   <a:srgbClr val="5234B7"/>
                 </a:solidFill>
-                <a:latin typeface="DIN Next LT W23"/>
-                <a:ea typeface="DIN Next LT W23"/>
-                <a:cs typeface="DIN Next LT W23"/>
+                <a:latin typeface="Helvetica Neue"/>
+                <a:ea typeface="Helvetica Neue"/>
+                <a:cs typeface="Helvetica Neue"/>
               </a:rPr>
               <a:t> = (8 + 7) / 2 = 7.5</a:t>
             </a:r>
@@ -45152,52 +45777,51 @@
         </p:nvSpPr>
         <p:spPr>
           <a:xfrm>
-            <a:off x="868680" y="2377440"/>
-            <a:ext cx="10332720" cy="457200"/>
-          </a:xfrm>
-          <a:prstGeom prst="rect">
-            <a:avLst/>
-          </a:prstGeom>
-          <a:noFill/>
-        </p:spPr>
-        <p:txBody>
-          <a:bodyPr wrap="square" anchor="t">
-            <a:spAutoFit/>
-          </a:bodyPr>
-          <a:lstStyle/>
-          <a:p>
-            <a:pPr algn="l"/>
-            <a:r>
-              <a:rPr sz="2200" b="1">
+            <a:off x="868680" y="2331720"/>
+            <a:ext cx="10332720" cy="640080"/>
+          </a:xfrm>
+          <a:prstGeom prst="rect">
+            <a:avLst/>
+          </a:prstGeom>
+          <a:noFill/>
+        </p:spPr>
+        <p:txBody>
+          <a:bodyPr wrap="square" anchor="t">
+            <a:spAutoFit/>
+          </a:bodyPr>
+          <a:lstStyle/>
+          <a:p>
+            <a:pPr algn="ctr"/>
+            <a:r>
+              <a:rPr sz="2600" b="1">
                 <a:solidFill>
                   <a:srgbClr val="5234B7"/>
                 </a:solidFill>
-                <a:latin typeface="DIN Next LT W23"/>
-                <a:ea typeface="DIN Next LT W23"/>
-                <a:cs typeface="DIN Next LT W23"/>
+                <a:latin typeface="Helvetica Neue"/>
+                <a:ea typeface="Helvetica Neue"/>
+                <a:cs typeface="Helvetica Neue"/>
               </a:rPr>
               <a:t>Study Hours</a:t>
             </a:r>
             <a:r>
-              <a:rPr sz="1600" b="1">
+              <a:rPr sz="2200" b="1" baseline="-25000">
                 <a:solidFill>
                   <a:srgbClr val="5234B7"/>
                 </a:solidFill>
-                <a:latin typeface="DIN Next LT W23"/>
-                <a:ea typeface="DIN Next LT W23"/>
-                <a:cs typeface="DIN Next LT W23"/>
-                <a:baseline val="-25000"/>
+                <a:latin typeface="Helvetica Neue"/>
+                <a:ea typeface="Helvetica Neue"/>
+                <a:cs typeface="Helvetica Neue"/>
               </a:rPr>
               <a:t>C</a:t>
             </a:r>
             <a:r>
-              <a:rPr sz="2200" b="1">
+              <a:rPr sz="2600" b="1">
                 <a:solidFill>
                   <a:srgbClr val="5234B7"/>
                 </a:solidFill>
-                <a:latin typeface="DIN Next LT W23"/>
-                <a:ea typeface="DIN Next LT W23"/>
-                <a:cs typeface="DIN Next LT W23"/>
+                <a:latin typeface="Helvetica Neue"/>
+                <a:ea typeface="Helvetica Neue"/>
+                <a:cs typeface="Helvetica Neue"/>
               </a:rPr>
               <a:t> ≈ 7.6</a:t>
             </a:r>

--- a/web-presentation/pdf-exports/Week1-Session1-Foundations.pptx
+++ b/web-presentation/pdf-exports/Week1-Session1-Foundations.pptx
@@ -3720,8 +3720,8 @@
         </p:nvSpPr>
         <p:spPr>
           <a:xfrm>
-            <a:off x="548640" y="2011680"/>
-            <a:ext cx="10972800" cy="320040"/>
+            <a:off x="548640" y="1965960"/>
+            <a:ext cx="10972800" cy="274320"/>
           </a:xfrm>
           <a:prstGeom prst="rect">
             <a:avLst/>
@@ -3749,16 +3749,40 @@
           </a:p>
         </p:txBody>
       </p:sp>
-      <p:sp>
-        <p:nvSpPr>
-          <p:cNvPr id="9" name="Rounded Rectangle 8"/>
+      <p:pic>
+        <p:nvPicPr>
+          <p:cNvPr id="9" name="Picture 8" descr="preprocess-pipeline.png"/>
+          <p:cNvPicPr>
+            <a:picLocks noChangeAspect="1"/>
+          </p:cNvPicPr>
+          <p:nvPr/>
+        </p:nvPicPr>
+        <p:blipFill>
+          <a:blip r:embed="rId3"/>
+          <a:stretch>
+            <a:fillRect/>
+          </a:stretch>
+        </p:blipFill>
+        <p:spPr>
+          <a:xfrm>
+            <a:off x="548640" y="2331720"/>
+            <a:ext cx="10972800" cy="3552529"/>
+          </a:xfrm>
+          <a:prstGeom prst="rect">
+            <a:avLst/>
+          </a:prstGeom>
+        </p:spPr>
+      </p:pic>
+      <p:sp>
+        <p:nvSpPr>
+          <p:cNvPr id="10" name="Rounded Rectangle 9"/>
           <p:cNvSpPr/>
           <p:nvPr/>
         </p:nvSpPr>
         <p:spPr>
           <a:xfrm>
-            <a:off x="548640" y="2514600"/>
-            <a:ext cx="2560320" cy="2926080"/>
+            <a:off x="548640" y="4572000"/>
+            <a:ext cx="2560320" cy="1325880"/>
           </a:xfrm>
           <a:prstGeom prst="roundRect">
             <a:avLst>
@@ -3797,14 +3821,14 @@
       </p:sp>
       <p:sp>
         <p:nvSpPr>
-          <p:cNvPr id="10" name="TextBox 9"/>
-          <p:cNvSpPr txBox="1"/>
-          <p:nvPr/>
-        </p:nvSpPr>
-        <p:spPr>
-          <a:xfrm>
-            <a:off x="777240" y="2834640"/>
-            <a:ext cx="2103120" cy="411480"/>
+          <p:cNvPr id="11" name="TextBox 10"/>
+          <p:cNvSpPr txBox="1"/>
+          <p:nvPr/>
+        </p:nvSpPr>
+        <p:spPr>
+          <a:xfrm>
+            <a:off x="685800" y="4800600"/>
+            <a:ext cx="2286000" cy="320040"/>
           </a:xfrm>
           <a:prstGeom prst="rect">
             <a:avLst/>
@@ -3819,7 +3843,7 @@
           <a:p>
             <a:pPr algn="ctr"/>
             <a:r>
-              <a:rPr sz="2800" b="1">
+              <a:rPr sz="1400" b="1">
                 <a:solidFill>
                   <a:srgbClr val="5234B7"/>
                 </a:solidFill>
@@ -3827,21 +3851,21 @@
                 <a:ea typeface="DIN Next LT W23"/>
                 <a:cs typeface="DIN Next LT W23"/>
               </a:rPr>
-              <a:t>1</a:t>
-            </a:r>
-          </a:p>
-        </p:txBody>
-      </p:sp>
-      <p:sp>
-        <p:nvSpPr>
-          <p:cNvPr id="11" name="TextBox 10"/>
-          <p:cNvSpPr txBox="1"/>
-          <p:nvPr/>
-        </p:nvSpPr>
-        <p:spPr>
-          <a:xfrm>
-            <a:off x="777240" y="3474720"/>
-            <a:ext cx="2103120" cy="365760"/>
+              <a:t>1. Clean</a:t>
+            </a:r>
+          </a:p>
+        </p:txBody>
+      </p:sp>
+      <p:sp>
+        <p:nvSpPr>
+          <p:cNvPr id="12" name="TextBox 11"/>
+          <p:cNvSpPr txBox="1"/>
+          <p:nvPr/>
+        </p:nvSpPr>
+        <p:spPr>
+          <a:xfrm>
+            <a:off x="685800" y="5212080"/>
+            <a:ext cx="2286000" cy="548640"/>
           </a:xfrm>
           <a:prstGeom prst="rect">
             <a:avLst/>
@@ -3856,44 +3880,7 @@
           <a:p>
             <a:pPr algn="ctr"/>
             <a:r>
-              <a:rPr sz="1800" b="1">
-                <a:solidFill>
-                  <a:srgbClr val="121018"/>
-                </a:solidFill>
-                <a:latin typeface="DIN Next LT W23"/>
-                <a:ea typeface="DIN Next LT W23"/>
-                <a:cs typeface="DIN Next LT W23"/>
-              </a:rPr>
-              <a:t>Clean</a:t>
-            </a:r>
-          </a:p>
-        </p:txBody>
-      </p:sp>
-      <p:sp>
-        <p:nvSpPr>
-          <p:cNvPr id="12" name="TextBox 11"/>
-          <p:cNvSpPr txBox="1"/>
-          <p:nvPr/>
-        </p:nvSpPr>
-        <p:spPr>
-          <a:xfrm>
-            <a:off x="777240" y="4023360"/>
-            <a:ext cx="2103120" cy="1097280"/>
-          </a:xfrm>
-          <a:prstGeom prst="rect">
-            <a:avLst/>
-          </a:prstGeom>
-          <a:noFill/>
-        </p:spPr>
-        <p:txBody>
-          <a:bodyPr wrap="square" anchor="t">
-            <a:spAutoFit/>
-          </a:bodyPr>
-          <a:lstStyle/>
-          <a:p>
-            <a:pPr algn="ctr"/>
-            <a:r>
-              <a:rPr sz="1300" b="0">
+              <a:rPr sz="1100" b="0">
                 <a:solidFill>
                   <a:srgbClr val="5A5470"/>
                 </a:solidFill>
@@ -3914,8 +3901,8 @@
         </p:nvSpPr>
         <p:spPr>
           <a:xfrm>
-            <a:off x="3291840" y="2514600"/>
-            <a:ext cx="2560320" cy="2926080"/>
+            <a:off x="3291840" y="4572000"/>
+            <a:ext cx="2560320" cy="1325880"/>
           </a:xfrm>
           <a:prstGeom prst="roundRect">
             <a:avLst>
@@ -3960,8 +3947,8 @@
         </p:nvSpPr>
         <p:spPr>
           <a:xfrm>
-            <a:off x="3520440" y="2834640"/>
-            <a:ext cx="2103120" cy="411480"/>
+            <a:off x="3429000" y="4800600"/>
+            <a:ext cx="2286000" cy="320040"/>
           </a:xfrm>
           <a:prstGeom prst="rect">
             <a:avLst/>
@@ -3976,7 +3963,7 @@
           <a:p>
             <a:pPr algn="ctr"/>
             <a:r>
-              <a:rPr sz="2800" b="1">
+              <a:rPr sz="1400" b="1">
                 <a:solidFill>
                   <a:srgbClr val="5234B7"/>
                 </a:solidFill>
@@ -3984,7 +3971,7 @@
                 <a:ea typeface="DIN Next LT W23"/>
                 <a:cs typeface="DIN Next LT W23"/>
               </a:rPr>
-              <a:t>2</a:t>
+              <a:t>2. Scale</a:t>
             </a:r>
           </a:p>
         </p:txBody>
@@ -3997,8 +3984,8 @@
         </p:nvSpPr>
         <p:spPr>
           <a:xfrm>
-            <a:off x="3520440" y="3474720"/>
-            <a:ext cx="2103120" cy="365760"/>
+            <a:off x="3429000" y="5212080"/>
+            <a:ext cx="2286000" cy="548640"/>
           </a:xfrm>
           <a:prstGeom prst="rect">
             <a:avLst/>
@@ -4013,44 +4000,7 @@
           <a:p>
             <a:pPr algn="ctr"/>
             <a:r>
-              <a:rPr sz="1800" b="1">
-                <a:solidFill>
-                  <a:srgbClr val="121018"/>
-                </a:solidFill>
-                <a:latin typeface="DIN Next LT W23"/>
-                <a:ea typeface="DIN Next LT W23"/>
-                <a:cs typeface="DIN Next LT W23"/>
-              </a:rPr>
-              <a:t>Scale</a:t>
-            </a:r>
-          </a:p>
-        </p:txBody>
-      </p:sp>
-      <p:sp>
-        <p:nvSpPr>
-          <p:cNvPr id="16" name="TextBox 15"/>
-          <p:cNvSpPr txBox="1"/>
-          <p:nvPr/>
-        </p:nvSpPr>
-        <p:spPr>
-          <a:xfrm>
-            <a:off x="3520440" y="4023360"/>
-            <a:ext cx="2103120" cy="1097280"/>
-          </a:xfrm>
-          <a:prstGeom prst="rect">
-            <a:avLst/>
-          </a:prstGeom>
-          <a:noFill/>
-        </p:spPr>
-        <p:txBody>
-          <a:bodyPr wrap="square" anchor="t">
-            <a:spAutoFit/>
-          </a:bodyPr>
-          <a:lstStyle/>
-          <a:p>
-            <a:pPr algn="ctr"/>
-            <a:r>
-              <a:rPr sz="1300" b="0">
+              <a:rPr sz="1100" b="0">
                 <a:solidFill>
                   <a:srgbClr val="5A5470"/>
                 </a:solidFill>
@@ -4065,14 +4015,14 @@
       </p:sp>
       <p:sp>
         <p:nvSpPr>
-          <p:cNvPr id="17" name="Rounded Rectangle 16"/>
+          <p:cNvPr id="16" name="Rounded Rectangle 15"/>
           <p:cNvSpPr/>
           <p:nvPr/>
         </p:nvSpPr>
         <p:spPr>
           <a:xfrm>
-            <a:off x="6035040" y="2514600"/>
-            <a:ext cx="2560320" cy="2926080"/>
+            <a:off x="6035040" y="4572000"/>
+            <a:ext cx="2560320" cy="1325880"/>
           </a:xfrm>
           <a:prstGeom prst="roundRect">
             <a:avLst>
@@ -4111,14 +4061,51 @@
       </p:sp>
       <p:sp>
         <p:nvSpPr>
+          <p:cNvPr id="17" name="TextBox 16"/>
+          <p:cNvSpPr txBox="1"/>
+          <p:nvPr/>
+        </p:nvSpPr>
+        <p:spPr>
+          <a:xfrm>
+            <a:off x="6172200" y="4800600"/>
+            <a:ext cx="2286000" cy="320040"/>
+          </a:xfrm>
+          <a:prstGeom prst="rect">
+            <a:avLst/>
+          </a:prstGeom>
+          <a:noFill/>
+        </p:spPr>
+        <p:txBody>
+          <a:bodyPr wrap="square" anchor="t">
+            <a:spAutoFit/>
+          </a:bodyPr>
+          <a:lstStyle/>
+          <a:p>
+            <a:pPr algn="ctr"/>
+            <a:r>
+              <a:rPr sz="1400" b="1">
+                <a:solidFill>
+                  <a:srgbClr val="5234B7"/>
+                </a:solidFill>
+                <a:latin typeface="DIN Next LT W23"/>
+                <a:ea typeface="DIN Next LT W23"/>
+                <a:cs typeface="DIN Next LT W23"/>
+              </a:rPr>
+              <a:t>3. Encode</a:t>
+            </a:r>
+          </a:p>
+        </p:txBody>
+      </p:sp>
+      <p:sp>
+        <p:nvSpPr>
           <p:cNvPr id="18" name="TextBox 17"/>
           <p:cNvSpPr txBox="1"/>
           <p:nvPr/>
         </p:nvSpPr>
         <p:spPr>
           <a:xfrm>
-            <a:off x="6263640" y="2834640"/>
-            <a:ext cx="2103120" cy="411480"/>
+            <a:off x="6172200" y="5212080"/>
+            <a:ext cx="2286000" cy="548640"/>
           </a:xfrm>
           <a:prstGeom prst="rect">
             <a:avLst/>
@@ -4133,81 +4120,7 @@
           <a:p>
             <a:pPr algn="ctr"/>
             <a:r>
-              <a:rPr sz="2800" b="1">
-                <a:solidFill>
-                  <a:srgbClr val="5234B7"/>
-                </a:solidFill>
-                <a:latin typeface="DIN Next LT W23"/>
-                <a:ea typeface="DIN Next LT W23"/>
-                <a:cs typeface="DIN Next LT W23"/>
-              </a:rPr>
-              <a:t>3</a:t>
-            </a:r>
-          </a:p>
-        </p:txBody>
-      </p:sp>
-      <p:sp>
-        <p:nvSpPr>
-          <p:cNvPr id="19" name="TextBox 18"/>
-          <p:cNvSpPr txBox="1"/>
-          <p:nvPr/>
-        </p:nvSpPr>
-        <p:spPr>
-          <a:xfrm>
-            <a:off x="6263640" y="3474720"/>
-            <a:ext cx="2103120" cy="365760"/>
-          </a:xfrm>
-          <a:prstGeom prst="rect">
-            <a:avLst/>
-          </a:prstGeom>
-          <a:noFill/>
-        </p:spPr>
-        <p:txBody>
-          <a:bodyPr wrap="square" anchor="t">
-            <a:spAutoFit/>
-          </a:bodyPr>
-          <a:lstStyle/>
-          <a:p>
-            <a:pPr algn="ctr"/>
-            <a:r>
-              <a:rPr sz="1800" b="1">
-                <a:solidFill>
-                  <a:srgbClr val="121018"/>
-                </a:solidFill>
-                <a:latin typeface="DIN Next LT W23"/>
-                <a:ea typeface="DIN Next LT W23"/>
-                <a:cs typeface="DIN Next LT W23"/>
-              </a:rPr>
-              <a:t>Encode</a:t>
-            </a:r>
-          </a:p>
-        </p:txBody>
-      </p:sp>
-      <p:sp>
-        <p:nvSpPr>
-          <p:cNvPr id="20" name="TextBox 19"/>
-          <p:cNvSpPr txBox="1"/>
-          <p:nvPr/>
-        </p:nvSpPr>
-        <p:spPr>
-          <a:xfrm>
-            <a:off x="6263640" y="4023360"/>
-            <a:ext cx="2103120" cy="1097280"/>
-          </a:xfrm>
-          <a:prstGeom prst="rect">
-            <a:avLst/>
-          </a:prstGeom>
-          <a:noFill/>
-        </p:spPr>
-        <p:txBody>
-          <a:bodyPr wrap="square" anchor="t">
-            <a:spAutoFit/>
-          </a:bodyPr>
-          <a:lstStyle/>
-          <a:p>
-            <a:pPr algn="ctr"/>
-            <a:r>
-              <a:rPr sz="1300" b="0">
+              <a:rPr sz="1100" b="0">
                 <a:solidFill>
                   <a:srgbClr val="5A5470"/>
                 </a:solidFill>
@@ -4222,14 +4135,14 @@
       </p:sp>
       <p:sp>
         <p:nvSpPr>
-          <p:cNvPr id="21" name="Rounded Rectangle 20"/>
+          <p:cNvPr id="19" name="Rounded Rectangle 18"/>
           <p:cNvSpPr/>
           <p:nvPr/>
         </p:nvSpPr>
         <p:spPr>
           <a:xfrm>
-            <a:off x="8778240" y="2514600"/>
-            <a:ext cx="2560320" cy="2926080"/>
+            <a:off x="8778240" y="4572000"/>
+            <a:ext cx="2560320" cy="1325880"/>
           </a:xfrm>
           <a:prstGeom prst="roundRect">
             <a:avLst>
@@ -4268,14 +4181,14 @@
       </p:sp>
       <p:sp>
         <p:nvSpPr>
-          <p:cNvPr id="22" name="TextBox 21"/>
-          <p:cNvSpPr txBox="1"/>
-          <p:nvPr/>
-        </p:nvSpPr>
-        <p:spPr>
-          <a:xfrm>
-            <a:off x="9006840" y="2834640"/>
-            <a:ext cx="2103120" cy="411480"/>
+          <p:cNvPr id="20" name="TextBox 19"/>
+          <p:cNvSpPr txBox="1"/>
+          <p:nvPr/>
+        </p:nvSpPr>
+        <p:spPr>
+          <a:xfrm>
+            <a:off x="8915400" y="4800600"/>
+            <a:ext cx="2286000" cy="320040"/>
           </a:xfrm>
           <a:prstGeom prst="rect">
             <a:avLst/>
@@ -4290,7 +4203,7 @@
           <a:p>
             <a:pPr algn="ctr"/>
             <a:r>
-              <a:rPr sz="2800" b="1">
+              <a:rPr sz="1400" b="1">
                 <a:solidFill>
                   <a:srgbClr val="5234B7"/>
                 </a:solidFill>
@@ -4298,21 +4211,21 @@
                 <a:ea typeface="DIN Next LT W23"/>
                 <a:cs typeface="DIN Next LT W23"/>
               </a:rPr>
-              <a:t>4</a:t>
-            </a:r>
-          </a:p>
-        </p:txBody>
-      </p:sp>
-      <p:sp>
-        <p:nvSpPr>
-          <p:cNvPr id="23" name="TextBox 22"/>
-          <p:cNvSpPr txBox="1"/>
-          <p:nvPr/>
-        </p:nvSpPr>
-        <p:spPr>
-          <a:xfrm>
-            <a:off x="9006840" y="3474720"/>
-            <a:ext cx="2103120" cy="365760"/>
+              <a:t>4. Split</a:t>
+            </a:r>
+          </a:p>
+        </p:txBody>
+      </p:sp>
+      <p:sp>
+        <p:nvSpPr>
+          <p:cNvPr id="21" name="TextBox 20"/>
+          <p:cNvSpPr txBox="1"/>
+          <p:nvPr/>
+        </p:nvSpPr>
+        <p:spPr>
+          <a:xfrm>
+            <a:off x="8915400" y="5212080"/>
+            <a:ext cx="2286000" cy="548640"/>
           </a:xfrm>
           <a:prstGeom prst="rect">
             <a:avLst/>
@@ -4327,44 +4240,7 @@
           <a:p>
             <a:pPr algn="ctr"/>
             <a:r>
-              <a:rPr sz="1800" b="1">
-                <a:solidFill>
-                  <a:srgbClr val="121018"/>
-                </a:solidFill>
-                <a:latin typeface="DIN Next LT W23"/>
-                <a:ea typeface="DIN Next LT W23"/>
-                <a:cs typeface="DIN Next LT W23"/>
-              </a:rPr>
-              <a:t>Split</a:t>
-            </a:r>
-          </a:p>
-        </p:txBody>
-      </p:sp>
-      <p:sp>
-        <p:nvSpPr>
-          <p:cNvPr id="24" name="TextBox 23"/>
-          <p:cNvSpPr txBox="1"/>
-          <p:nvPr/>
-        </p:nvSpPr>
-        <p:spPr>
-          <a:xfrm>
-            <a:off x="9006840" y="4023360"/>
-            <a:ext cx="2103120" cy="1097280"/>
-          </a:xfrm>
-          <a:prstGeom prst="rect">
-            <a:avLst/>
-          </a:prstGeom>
-          <a:noFill/>
-        </p:spPr>
-        <p:txBody>
-          <a:bodyPr wrap="square" anchor="t">
-            <a:spAutoFit/>
-          </a:bodyPr>
-          <a:lstStyle/>
-          <a:p>
-            <a:pPr algn="ctr"/>
-            <a:r>
-              <a:rPr sz="1300" b="0">
+              <a:rPr sz="1100" b="0">
                 <a:solidFill>
                   <a:srgbClr val="5A5470"/>
                 </a:solidFill>
@@ -4379,7 +4255,7 @@
       </p:sp>
       <p:sp>
         <p:nvSpPr>
-          <p:cNvPr id="25" name="Rectangle 24"/>
+          <p:cNvPr id="22" name="Rectangle 21"/>
           <p:cNvSpPr/>
           <p:nvPr/>
         </p:nvSpPr>
@@ -4423,7 +4299,7 @@
       </p:sp>
       <p:sp>
         <p:nvSpPr>
-          <p:cNvPr id="26" name="TextBox 25"/>
+          <p:cNvPr id="23" name="TextBox 22"/>
           <p:cNvSpPr txBox="1"/>
           <p:nvPr/>
         </p:nvSpPr>
@@ -4460,7 +4336,7 @@
       </p:sp>
       <p:sp>
         <p:nvSpPr>
-          <p:cNvPr id="27" name="TextBox 26"/>
+          <p:cNvPr id="24" name="TextBox 23"/>
           <p:cNvSpPr txBox="1"/>
           <p:nvPr/>
         </p:nvSpPr>
@@ -5483,51 +5359,14 @@
       </p:sp>
       <p:sp>
         <p:nvSpPr>
-          <p:cNvPr id="8" name="TextBox 7"/>
-          <p:cNvSpPr txBox="1"/>
-          <p:nvPr/>
-        </p:nvSpPr>
-        <p:spPr>
-          <a:xfrm>
-            <a:off x="548640" y="2148840"/>
-            <a:ext cx="10972800" cy="411480"/>
-          </a:xfrm>
-          <a:prstGeom prst="rect">
-            <a:avLst/>
-          </a:prstGeom>
-          <a:noFill/>
-        </p:spPr>
-        <p:txBody>
-          <a:bodyPr wrap="square" anchor="t">
-            <a:spAutoFit/>
-          </a:bodyPr>
-          <a:lstStyle/>
-          <a:p>
-            <a:pPr algn="l"/>
-            <a:r>
-              <a:rPr sz="2200" b="1">
-                <a:solidFill>
-                  <a:srgbClr val="5234B7"/>
-                </a:solidFill>
-                <a:latin typeface="DIN Next LT W23"/>
-                <a:ea typeface="DIN Next LT W23"/>
-                <a:cs typeface="DIN Next LT W23"/>
-              </a:rPr>
-              <a:t>Train / Test Split</a:t>
-            </a:r>
-          </a:p>
-        </p:txBody>
-      </p:sp>
-      <p:sp>
-        <p:nvSpPr>
-          <p:cNvPr id="9" name="Rounded Rectangle 8"/>
+          <p:cNvPr id="8" name="Rounded Rectangle 7"/>
           <p:cNvSpPr/>
           <p:nvPr/>
         </p:nvSpPr>
         <p:spPr>
           <a:xfrm>
-            <a:off x="548640" y="2697480"/>
-            <a:ext cx="10972800" cy="1463040"/>
+            <a:off x="548640" y="2011680"/>
+            <a:ext cx="10972800" cy="777240"/>
           </a:xfrm>
           <a:prstGeom prst="roundRect">
             <a:avLst>
@@ -5566,29 +5405,29 @@
       </p:sp>
       <p:sp>
         <p:nvSpPr>
-          <p:cNvPr id="10" name="TextBox 9"/>
-          <p:cNvSpPr txBox="1"/>
-          <p:nvPr/>
-        </p:nvSpPr>
-        <p:spPr>
-          <a:xfrm>
-            <a:off x="914400" y="2971800"/>
-            <a:ext cx="10241280" cy="1005840"/>
-          </a:xfrm>
-          <a:prstGeom prst="rect">
-            <a:avLst/>
-          </a:prstGeom>
-          <a:noFill/>
-        </p:spPr>
-        <p:txBody>
-          <a:bodyPr wrap="square" anchor="t">
-            <a:spAutoFit/>
-          </a:bodyPr>
-          <a:lstStyle/>
-          <a:p>
-            <a:pPr algn="l"/>
-            <a:r>
-              <a:rPr sz="1600" b="0">
+          <p:cNvPr id="9" name="TextBox 8"/>
+          <p:cNvSpPr txBox="1"/>
+          <p:nvPr/>
+        </p:nvSpPr>
+        <p:spPr>
+          <a:xfrm>
+            <a:off x="868680" y="2194560"/>
+            <a:ext cx="10332720" cy="457200"/>
+          </a:xfrm>
+          <a:prstGeom prst="rect">
+            <a:avLst/>
+          </a:prstGeom>
+          <a:noFill/>
+        </p:spPr>
+        <p:txBody>
+          <a:bodyPr wrap="square" anchor="t">
+            <a:spAutoFit/>
+          </a:bodyPr>
+          <a:lstStyle/>
+          <a:p>
+            <a:pPr algn="l"/>
+            <a:r>
+              <a:rPr sz="1500" b="0">
                 <a:solidFill>
                   <a:srgbClr val="121018"/>
                 </a:solidFill>
@@ -5601,249 +5440,33 @@
           </a:p>
         </p:txBody>
       </p:sp>
-      <p:sp>
-        <p:nvSpPr>
-          <p:cNvPr id="11" name="Rounded Rectangle 10"/>
-          <p:cNvSpPr/>
-          <p:nvPr/>
-        </p:nvSpPr>
-        <p:spPr>
-          <a:xfrm>
-            <a:off x="548640" y="4434840"/>
-            <a:ext cx="5212080" cy="1280160"/>
-          </a:xfrm>
-          <a:prstGeom prst="roundRect">
-            <a:avLst>
-              <a:gd name="adj" fmla="val 10000"/>
-            </a:avLst>
-          </a:prstGeom>
-          <a:solidFill>
-            <a:srgbClr val="F5F1FC"/>
-          </a:solidFill>
-          <a:ln>
-            <a:noFill/>
-          </a:ln>
-          <a:effectLst/>
-        </p:spPr>
-        <p:style>
-          <a:lnRef idx="1">
-            <a:schemeClr val="accent1"/>
-          </a:lnRef>
-          <a:fillRef idx="3">
-            <a:schemeClr val="accent1"/>
-          </a:fillRef>
-          <a:effectRef idx="2">
-            <a:schemeClr val="accent1"/>
-          </a:effectRef>
-          <a:fontRef idx="minor">
-            <a:schemeClr val="lt1"/>
-          </a:fontRef>
-        </p:style>
-        <p:txBody>
-          <a:bodyPr rtlCol="0" anchor="ctr"/>
-          <a:lstStyle/>
-          <a:p>
-            <a:pPr algn="ctr"/>
-          </a:p>
-        </p:txBody>
-      </p:sp>
-      <p:sp>
-        <p:nvSpPr>
-          <p:cNvPr id="12" name="TextBox 11"/>
-          <p:cNvSpPr txBox="1"/>
-          <p:nvPr/>
-        </p:nvSpPr>
-        <p:spPr>
-          <a:xfrm>
-            <a:off x="914400" y="4617720"/>
-            <a:ext cx="4480560" cy="274320"/>
-          </a:xfrm>
-          <a:prstGeom prst="rect">
-            <a:avLst/>
-          </a:prstGeom>
-          <a:noFill/>
-        </p:spPr>
-        <p:txBody>
-          <a:bodyPr wrap="square" anchor="t">
-            <a:spAutoFit/>
-          </a:bodyPr>
-          <a:lstStyle/>
-          <a:p>
-            <a:pPr algn="l"/>
-            <a:r>
-              <a:rPr sz="1300" b="0">
-                <a:solidFill>
-                  <a:srgbClr val="9E59CD"/>
-                </a:solidFill>
-                <a:latin typeface="DIN Next LT W23"/>
-                <a:ea typeface="DIN Next LT W23"/>
-                <a:cs typeface="DIN Next LT W23"/>
-              </a:rPr>
-              <a:t>Train</a:t>
-            </a:r>
-          </a:p>
-        </p:txBody>
-      </p:sp>
-      <p:sp>
-        <p:nvSpPr>
-          <p:cNvPr id="13" name="TextBox 12"/>
-          <p:cNvSpPr txBox="1"/>
-          <p:nvPr/>
-        </p:nvSpPr>
-        <p:spPr>
-          <a:xfrm>
-            <a:off x="914400" y="4937760"/>
-            <a:ext cx="4480560" cy="640080"/>
-          </a:xfrm>
-          <a:prstGeom prst="rect">
-            <a:avLst/>
-          </a:prstGeom>
-          <a:noFill/>
-        </p:spPr>
-        <p:txBody>
-          <a:bodyPr wrap="square" anchor="t">
-            <a:spAutoFit/>
-          </a:bodyPr>
-          <a:lstStyle/>
-          <a:p>
-            <a:pPr algn="l"/>
-            <a:r>
-              <a:rPr sz="2800" b="1">
-                <a:solidFill>
-                  <a:srgbClr val="5234B7"/>
-                </a:solidFill>
-                <a:latin typeface="DIN Next LT W23"/>
-                <a:ea typeface="DIN Next LT W23"/>
-                <a:cs typeface="DIN Next LT W23"/>
-              </a:rPr>
-              <a:t>80%</a:t>
-            </a:r>
-          </a:p>
-        </p:txBody>
-      </p:sp>
-      <p:sp>
-        <p:nvSpPr>
-          <p:cNvPr id="14" name="Rounded Rectangle 13"/>
-          <p:cNvSpPr/>
-          <p:nvPr/>
-        </p:nvSpPr>
-        <p:spPr>
-          <a:xfrm>
-            <a:off x="6126480" y="4434840"/>
-            <a:ext cx="5212080" cy="1280160"/>
-          </a:xfrm>
-          <a:prstGeom prst="roundRect">
-            <a:avLst>
-              <a:gd name="adj" fmla="val 10000"/>
-            </a:avLst>
-          </a:prstGeom>
-          <a:solidFill>
-            <a:srgbClr val="F5F1FC"/>
-          </a:solidFill>
-          <a:ln>
-            <a:noFill/>
-          </a:ln>
-          <a:effectLst/>
-        </p:spPr>
-        <p:style>
-          <a:lnRef idx="1">
-            <a:schemeClr val="accent1"/>
-          </a:lnRef>
-          <a:fillRef idx="3">
-            <a:schemeClr val="accent1"/>
-          </a:fillRef>
-          <a:effectRef idx="2">
-            <a:schemeClr val="accent1"/>
-          </a:effectRef>
-          <a:fontRef idx="minor">
-            <a:schemeClr val="lt1"/>
-          </a:fontRef>
-        </p:style>
-        <p:txBody>
-          <a:bodyPr rtlCol="0" anchor="ctr"/>
-          <a:lstStyle/>
-          <a:p>
-            <a:pPr algn="ctr"/>
-          </a:p>
-        </p:txBody>
-      </p:sp>
-      <p:sp>
-        <p:nvSpPr>
-          <p:cNvPr id="15" name="TextBox 14"/>
-          <p:cNvSpPr txBox="1"/>
-          <p:nvPr/>
-        </p:nvSpPr>
-        <p:spPr>
-          <a:xfrm>
-            <a:off x="6492240" y="4617720"/>
-            <a:ext cx="4480560" cy="274320"/>
-          </a:xfrm>
-          <a:prstGeom prst="rect">
-            <a:avLst/>
-          </a:prstGeom>
-          <a:noFill/>
-        </p:spPr>
-        <p:txBody>
-          <a:bodyPr wrap="square" anchor="t">
-            <a:spAutoFit/>
-          </a:bodyPr>
-          <a:lstStyle/>
-          <a:p>
-            <a:pPr algn="l"/>
-            <a:r>
-              <a:rPr sz="1300" b="0">
-                <a:solidFill>
-                  <a:srgbClr val="9E59CD"/>
-                </a:solidFill>
-                <a:latin typeface="DIN Next LT W23"/>
-                <a:ea typeface="DIN Next LT W23"/>
-                <a:cs typeface="DIN Next LT W23"/>
-              </a:rPr>
-              <a:t>Test</a:t>
-            </a:r>
-          </a:p>
-        </p:txBody>
-      </p:sp>
-      <p:sp>
-        <p:nvSpPr>
-          <p:cNvPr id="16" name="TextBox 15"/>
-          <p:cNvSpPr txBox="1"/>
-          <p:nvPr/>
-        </p:nvSpPr>
-        <p:spPr>
-          <a:xfrm>
-            <a:off x="6492240" y="4937760"/>
-            <a:ext cx="4480560" cy="640080"/>
-          </a:xfrm>
-          <a:prstGeom prst="rect">
-            <a:avLst/>
-          </a:prstGeom>
-          <a:noFill/>
-        </p:spPr>
-        <p:txBody>
-          <a:bodyPr wrap="square" anchor="t">
-            <a:spAutoFit/>
-          </a:bodyPr>
-          <a:lstStyle/>
-          <a:p>
-            <a:pPr algn="l"/>
-            <a:r>
-              <a:rPr sz="2800" b="1">
-                <a:solidFill>
-                  <a:srgbClr val="5234B7"/>
-                </a:solidFill>
-                <a:latin typeface="DIN Next LT W23"/>
-                <a:ea typeface="DIN Next LT W23"/>
-                <a:cs typeface="DIN Next LT W23"/>
-              </a:rPr>
-              <a:t>20%</a:t>
-            </a:r>
-          </a:p>
-        </p:txBody>
-      </p:sp>
-      <p:sp>
-        <p:nvSpPr>
-          <p:cNvPr id="17" name="TextBox 16"/>
+      <p:pic>
+        <p:nvPicPr>
+          <p:cNvPr id="10" name="Picture 9" descr="train-test-split.png"/>
+          <p:cNvPicPr>
+            <a:picLocks noChangeAspect="1"/>
+          </p:cNvPicPr>
+          <p:nvPr/>
+        </p:nvPicPr>
+        <p:blipFill>
+          <a:blip r:embed="rId3"/>
+          <a:stretch>
+            <a:fillRect/>
+          </a:stretch>
+        </p:blipFill>
+        <p:spPr>
+          <a:xfrm>
+            <a:off x="548640" y="2971800"/>
+            <a:ext cx="10972800" cy="3969973"/>
+          </a:xfrm>
+          <a:prstGeom prst="rect">
+            <a:avLst/>
+          </a:prstGeom>
+        </p:spPr>
+      </p:pic>
+      <p:sp>
+        <p:nvSpPr>
+          <p:cNvPr id="11" name="TextBox 10"/>
           <p:cNvSpPr txBox="1"/>
           <p:nvPr/>
         </p:nvSpPr>
@@ -5880,7 +5503,7 @@
       </p:sp>
       <p:sp>
         <p:nvSpPr>
-          <p:cNvPr id="18" name="Rectangle 17"/>
+          <p:cNvPr id="12" name="Rectangle 11"/>
           <p:cNvSpPr/>
           <p:nvPr/>
         </p:nvSpPr>
@@ -5924,7 +5547,7 @@
       </p:sp>
       <p:sp>
         <p:nvSpPr>
-          <p:cNvPr id="19" name="TextBox 18"/>
+          <p:cNvPr id="13" name="TextBox 12"/>
           <p:cNvSpPr txBox="1"/>
           <p:nvPr/>
         </p:nvSpPr>
@@ -5961,7 +5584,7 @@
       </p:sp>
       <p:sp>
         <p:nvSpPr>
-          <p:cNvPr id="20" name="TextBox 19"/>
+          <p:cNvPr id="14" name="TextBox 13"/>
           <p:cNvSpPr txBox="1"/>
           <p:nvPr/>
         </p:nvSpPr>
@@ -6245,52 +5868,30 @@
           </a:p>
         </p:txBody>
       </p:sp>
-      <p:sp>
-        <p:nvSpPr>
-          <p:cNvPr id="8" name="Rounded Rectangle 7"/>
-          <p:cNvSpPr/>
-          <p:nvPr/>
-        </p:nvSpPr>
-        <p:spPr>
-          <a:xfrm>
-            <a:off x="548640" y="2057400"/>
-            <a:ext cx="5212080" cy="1234440"/>
-          </a:xfrm>
-          <a:prstGeom prst="roundRect">
-            <a:avLst>
-              <a:gd name="adj" fmla="val 10000"/>
-            </a:avLst>
-          </a:prstGeom>
-          <a:solidFill>
-            <a:srgbClr val="EEE8FA"/>
-          </a:solidFill>
-          <a:ln>
-            <a:noFill/>
-          </a:ln>
-          <a:effectLst/>
-        </p:spPr>
-        <p:style>
-          <a:lnRef idx="1">
-            <a:schemeClr val="accent1"/>
-          </a:lnRef>
-          <a:fillRef idx="3">
-            <a:schemeClr val="accent1"/>
-          </a:fillRef>
-          <a:effectRef idx="2">
-            <a:schemeClr val="accent1"/>
-          </a:effectRef>
-          <a:fontRef idx="minor">
-            <a:schemeClr val="lt1"/>
-          </a:fontRef>
-        </p:style>
-        <p:txBody>
-          <a:bodyPr rtlCol="0" anchor="ctr"/>
-          <a:lstStyle/>
-          <a:p>
-            <a:pPr algn="ctr"/>
-          </a:p>
-        </p:txBody>
-      </p:sp>
+      <p:pic>
+        <p:nvPicPr>
+          <p:cNvPr id="8" name="Picture 7" descr="train-test-split.png"/>
+          <p:cNvPicPr>
+            <a:picLocks noChangeAspect="1"/>
+          </p:cNvPicPr>
+          <p:nvPr/>
+        </p:nvPicPr>
+        <p:blipFill>
+          <a:blip r:embed="rId3"/>
+          <a:stretch>
+            <a:fillRect/>
+          </a:stretch>
+        </p:blipFill>
+        <p:spPr>
+          <a:xfrm>
+            <a:off x="548640" y="2011680"/>
+            <a:ext cx="10972800" cy="3969973"/>
+          </a:xfrm>
+          <a:prstGeom prst="rect">
+            <a:avLst/>
+          </a:prstGeom>
+        </p:spPr>
+      </p:pic>
       <p:sp>
         <p:nvSpPr>
           <p:cNvPr id="9" name="TextBox 8"/>
@@ -6299,31 +5900,31 @@
         </p:nvSpPr>
         <p:spPr>
           <a:xfrm>
-            <a:off x="868680" y="2240280"/>
-            <a:ext cx="4572000" cy="274320"/>
-          </a:xfrm>
-          <a:prstGeom prst="rect">
-            <a:avLst/>
-          </a:prstGeom>
-          <a:noFill/>
-        </p:spPr>
-        <p:txBody>
-          <a:bodyPr wrap="square" anchor="t">
-            <a:spAutoFit/>
-          </a:bodyPr>
-          <a:lstStyle/>
-          <a:p>
-            <a:pPr algn="l"/>
-            <a:r>
-              <a:rPr sz="1400" b="1">
-                <a:solidFill>
-                  <a:srgbClr val="5234B7"/>
-                </a:solidFill>
-                <a:latin typeface="DIN Next LT W23"/>
-                <a:ea typeface="DIN Next LT W23"/>
-                <a:cs typeface="DIN Next LT W23"/>
-              </a:rPr>
-              <a:t>Training Set</a:t>
+            <a:off x="548640" y="4709160"/>
+            <a:ext cx="320040" cy="365760"/>
+          </a:xfrm>
+          <a:prstGeom prst="rect">
+            <a:avLst/>
+          </a:prstGeom>
+          <a:noFill/>
+        </p:spPr>
+        <p:txBody>
+          <a:bodyPr wrap="square" anchor="t">
+            <a:spAutoFit/>
+          </a:bodyPr>
+          <a:lstStyle/>
+          <a:p>
+            <a:pPr algn="l"/>
+            <a:r>
+              <a:rPr sz="1400" b="0">
+                <a:solidFill>
+                  <a:srgbClr val="9E59CD"/>
+                </a:solidFill>
+                <a:latin typeface="DIN Next LT W23"/>
+                <a:ea typeface="DIN Next LT W23"/>
+                <a:cs typeface="DIN Next LT W23"/>
+              </a:rPr>
+              <a:t>–</a:t>
             </a:r>
           </a:p>
         </p:txBody>
@@ -6336,78 +5937,69 @@
         </p:nvSpPr>
         <p:spPr>
           <a:xfrm>
-            <a:off x="868680" y="2560320"/>
-            <a:ext cx="4572000" cy="594360"/>
-          </a:xfrm>
-          <a:prstGeom prst="rect">
-            <a:avLst/>
-          </a:prstGeom>
-          <a:noFill/>
-        </p:spPr>
-        <p:txBody>
-          <a:bodyPr wrap="square" anchor="t">
-            <a:spAutoFit/>
-          </a:bodyPr>
-          <a:lstStyle/>
-          <a:p>
-            <a:pPr algn="l"/>
-            <a:r>
-              <a:rPr sz="1300" b="0">
-                <a:solidFill>
-                  <a:srgbClr val="5A5470"/>
-                </a:solidFill>
-                <a:latin typeface="DIN Next LT W23"/>
-                <a:ea typeface="DIN Next LT W23"/>
-                <a:cs typeface="DIN Next LT W23"/>
-              </a:rPr>
-              <a:t>Data used by the model to learn patterns.</a:t>
-            </a:r>
-          </a:p>
-        </p:txBody>
-      </p:sp>
-      <p:sp>
-        <p:nvSpPr>
-          <p:cNvPr id="11" name="Rounded Rectangle 10"/>
-          <p:cNvSpPr/>
-          <p:nvPr/>
-        </p:nvSpPr>
-        <p:spPr>
-          <a:xfrm>
-            <a:off x="6126480" y="2057400"/>
-            <a:ext cx="5212080" cy="1234440"/>
-          </a:xfrm>
-          <a:prstGeom prst="roundRect">
-            <a:avLst>
-              <a:gd name="adj" fmla="val 10000"/>
-            </a:avLst>
-          </a:prstGeom>
-          <a:solidFill>
-            <a:srgbClr val="EEE8FA"/>
-          </a:solidFill>
-          <a:ln>
-            <a:noFill/>
-          </a:ln>
-          <a:effectLst/>
-        </p:spPr>
-        <p:style>
-          <a:lnRef idx="1">
-            <a:schemeClr val="accent1"/>
-          </a:lnRef>
-          <a:fillRef idx="3">
-            <a:schemeClr val="accent1"/>
-          </a:fillRef>
-          <a:effectRef idx="2">
-            <a:schemeClr val="accent1"/>
-          </a:effectRef>
-          <a:fontRef idx="minor">
-            <a:schemeClr val="lt1"/>
-          </a:fontRef>
-        </p:style>
-        <p:txBody>
-          <a:bodyPr rtlCol="0" anchor="ctr"/>
-          <a:lstStyle/>
-          <a:p>
-            <a:pPr algn="ctr"/>
+            <a:off x="914400" y="4709160"/>
+            <a:ext cx="10241280" cy="411480"/>
+          </a:xfrm>
+          <a:prstGeom prst="rect">
+            <a:avLst/>
+          </a:prstGeom>
+          <a:noFill/>
+        </p:spPr>
+        <p:txBody>
+          <a:bodyPr wrap="square" anchor="t">
+            <a:spAutoFit/>
+          </a:bodyPr>
+          <a:lstStyle/>
+          <a:p>
+            <a:pPr algn="l"/>
+            <a:r>
+              <a:rPr sz="1400" b="0">
+                <a:solidFill>
+                  <a:srgbClr val="121018"/>
+                </a:solidFill>
+                <a:latin typeface="DIN Next LT W23"/>
+                <a:ea typeface="DIN Next LT W23"/>
+                <a:cs typeface="DIN Next LT W23"/>
+              </a:rPr>
+              <a:t>Never tune hyperparameters on the test set — it becomes part of training indirectly.</a:t>
+            </a:r>
+          </a:p>
+        </p:txBody>
+      </p:sp>
+      <p:sp>
+        <p:nvSpPr>
+          <p:cNvPr id="11" name="TextBox 10"/>
+          <p:cNvSpPr txBox="1"/>
+          <p:nvPr/>
+        </p:nvSpPr>
+        <p:spPr>
+          <a:xfrm>
+            <a:off x="548640" y="5330952"/>
+            <a:ext cx="320040" cy="365760"/>
+          </a:xfrm>
+          <a:prstGeom prst="rect">
+            <a:avLst/>
+          </a:prstGeom>
+          <a:noFill/>
+        </p:spPr>
+        <p:txBody>
+          <a:bodyPr wrap="square" anchor="t">
+            <a:spAutoFit/>
+          </a:bodyPr>
+          <a:lstStyle/>
+          <a:p>
+            <a:pPr algn="l"/>
+            <a:r>
+              <a:rPr sz="1400" b="0">
+                <a:solidFill>
+                  <a:srgbClr val="9E59CD"/>
+                </a:solidFill>
+                <a:latin typeface="DIN Next LT W23"/>
+                <a:ea typeface="DIN Next LT W23"/>
+                <a:cs typeface="DIN Next LT W23"/>
+              </a:rPr>
+              <a:t>–</a:t>
+            </a:r>
           </a:p>
         </p:txBody>
       </p:sp>
@@ -6419,31 +6011,31 @@
         </p:nvSpPr>
         <p:spPr>
           <a:xfrm>
-            <a:off x="6446520" y="2240280"/>
-            <a:ext cx="4572000" cy="274320"/>
-          </a:xfrm>
-          <a:prstGeom prst="rect">
-            <a:avLst/>
-          </a:prstGeom>
-          <a:noFill/>
-        </p:spPr>
-        <p:txBody>
-          <a:bodyPr wrap="square" anchor="t">
-            <a:spAutoFit/>
-          </a:bodyPr>
-          <a:lstStyle/>
-          <a:p>
-            <a:pPr algn="l"/>
-            <a:r>
-              <a:rPr sz="1400" b="1">
-                <a:solidFill>
-                  <a:srgbClr val="5234B7"/>
-                </a:solidFill>
-                <a:latin typeface="DIN Next LT W23"/>
-                <a:ea typeface="DIN Next LT W23"/>
-                <a:cs typeface="DIN Next LT W23"/>
-              </a:rPr>
-              <a:t>Test Set</a:t>
+            <a:off x="914400" y="5330952"/>
+            <a:ext cx="10241280" cy="411480"/>
+          </a:xfrm>
+          <a:prstGeom prst="rect">
+            <a:avLst/>
+          </a:prstGeom>
+          <a:noFill/>
+        </p:spPr>
+        <p:txBody>
+          <a:bodyPr wrap="square" anchor="t">
+            <a:spAutoFit/>
+          </a:bodyPr>
+          <a:lstStyle/>
+          <a:p>
+            <a:pPr algn="l"/>
+            <a:r>
+              <a:rPr sz="1400" b="0">
+                <a:solidFill>
+                  <a:srgbClr val="121018"/>
+                </a:solidFill>
+                <a:latin typeface="DIN Next LT W23"/>
+                <a:ea typeface="DIN Next LT W23"/>
+                <a:cs typeface="DIN Next LT W23"/>
+              </a:rPr>
+              <a:t>Stratified splits preserve class balance in classification tasks.</a:t>
             </a:r>
           </a:p>
         </p:txBody>
@@ -6456,31 +6048,31 @@
         </p:nvSpPr>
         <p:spPr>
           <a:xfrm>
-            <a:off x="6446520" y="2560320"/>
-            <a:ext cx="4572000" cy="594360"/>
-          </a:xfrm>
-          <a:prstGeom prst="rect">
-            <a:avLst/>
-          </a:prstGeom>
-          <a:noFill/>
-        </p:spPr>
-        <p:txBody>
-          <a:bodyPr wrap="square" anchor="t">
-            <a:spAutoFit/>
-          </a:bodyPr>
-          <a:lstStyle/>
-          <a:p>
-            <a:pPr algn="l"/>
-            <a:r>
-              <a:rPr sz="1300" b="0">
-                <a:solidFill>
-                  <a:srgbClr val="5A5470"/>
-                </a:solidFill>
-                <a:latin typeface="DIN Next LT W23"/>
-                <a:ea typeface="DIN Next LT W23"/>
-                <a:cs typeface="DIN Next LT W23"/>
-              </a:rPr>
-              <a:t>New, unseen data used to check model performance.</a:t>
+            <a:off x="548640" y="5952744"/>
+            <a:ext cx="320040" cy="365760"/>
+          </a:xfrm>
+          <a:prstGeom prst="rect">
+            <a:avLst/>
+          </a:prstGeom>
+          <a:noFill/>
+        </p:spPr>
+        <p:txBody>
+          <a:bodyPr wrap="square" anchor="t">
+            <a:spAutoFit/>
+          </a:bodyPr>
+          <a:lstStyle/>
+          <a:p>
+            <a:pPr algn="l"/>
+            <a:r>
+              <a:rPr sz="1400" b="0">
+                <a:solidFill>
+                  <a:srgbClr val="9E59CD"/>
+                </a:solidFill>
+                <a:latin typeface="DIN Next LT W23"/>
+                <a:ea typeface="DIN Next LT W23"/>
+                <a:cs typeface="DIN Next LT W23"/>
+              </a:rPr>
+              <a:t>–</a:t>
             </a:r>
           </a:p>
         </p:txBody>
@@ -6493,44 +6085,7 @@
         </p:nvSpPr>
         <p:spPr>
           <a:xfrm>
-            <a:off x="548640" y="3520440"/>
-            <a:ext cx="320040" cy="365760"/>
-          </a:xfrm>
-          <a:prstGeom prst="rect">
-            <a:avLst/>
-          </a:prstGeom>
-          <a:noFill/>
-        </p:spPr>
-        <p:txBody>
-          <a:bodyPr wrap="square" anchor="t">
-            <a:spAutoFit/>
-          </a:bodyPr>
-          <a:lstStyle/>
-          <a:p>
-            <a:pPr algn="l"/>
-            <a:r>
-              <a:rPr sz="1500" b="0">
-                <a:solidFill>
-                  <a:srgbClr val="9E59CD"/>
-                </a:solidFill>
-                <a:latin typeface="DIN Next LT W23"/>
-                <a:ea typeface="DIN Next LT W23"/>
-                <a:cs typeface="DIN Next LT W23"/>
-              </a:rPr>
-              <a:t>–</a:t>
-            </a:r>
-          </a:p>
-        </p:txBody>
-      </p:sp>
-      <p:sp>
-        <p:nvSpPr>
-          <p:cNvPr id="15" name="TextBox 14"/>
-          <p:cNvSpPr txBox="1"/>
-          <p:nvPr/>
-        </p:nvSpPr>
-        <p:spPr>
-          <a:xfrm>
-            <a:off x="914400" y="3520440"/>
+            <a:off x="914400" y="5952744"/>
             <a:ext cx="10241280" cy="411480"/>
           </a:xfrm>
           <a:prstGeom prst="rect">
@@ -6546,7 +6101,7 @@
           <a:p>
             <a:pPr algn="l"/>
             <a:r>
-              <a:rPr sz="1500" b="0">
+              <a:rPr sz="1400" b="0">
                 <a:solidFill>
                   <a:srgbClr val="121018"/>
                 </a:solidFill>
@@ -6554,154 +6109,6 @@
                 <a:ea typeface="DIN Next LT W23"/>
                 <a:cs typeface="DIN Next LT W23"/>
               </a:rPr>
-              <a:t>Never tune hyperparameters on the test set — it becomes part of training indirectly.</a:t>
-            </a:r>
-          </a:p>
-        </p:txBody>
-      </p:sp>
-      <p:sp>
-        <p:nvSpPr>
-          <p:cNvPr id="16" name="TextBox 15"/>
-          <p:cNvSpPr txBox="1"/>
-          <p:nvPr/>
-        </p:nvSpPr>
-        <p:spPr>
-          <a:xfrm>
-            <a:off x="548640" y="4142232"/>
-            <a:ext cx="320040" cy="365760"/>
-          </a:xfrm>
-          <a:prstGeom prst="rect">
-            <a:avLst/>
-          </a:prstGeom>
-          <a:noFill/>
-        </p:spPr>
-        <p:txBody>
-          <a:bodyPr wrap="square" anchor="t">
-            <a:spAutoFit/>
-          </a:bodyPr>
-          <a:lstStyle/>
-          <a:p>
-            <a:pPr algn="l"/>
-            <a:r>
-              <a:rPr sz="1500" b="0">
-                <a:solidFill>
-                  <a:srgbClr val="9E59CD"/>
-                </a:solidFill>
-                <a:latin typeface="DIN Next LT W23"/>
-                <a:ea typeface="DIN Next LT W23"/>
-                <a:cs typeface="DIN Next LT W23"/>
-              </a:rPr>
-              <a:t>–</a:t>
-            </a:r>
-          </a:p>
-        </p:txBody>
-      </p:sp>
-      <p:sp>
-        <p:nvSpPr>
-          <p:cNvPr id="17" name="TextBox 16"/>
-          <p:cNvSpPr txBox="1"/>
-          <p:nvPr/>
-        </p:nvSpPr>
-        <p:spPr>
-          <a:xfrm>
-            <a:off x="914400" y="4142232"/>
-            <a:ext cx="10241280" cy="411480"/>
-          </a:xfrm>
-          <a:prstGeom prst="rect">
-            <a:avLst/>
-          </a:prstGeom>
-          <a:noFill/>
-        </p:spPr>
-        <p:txBody>
-          <a:bodyPr wrap="square" anchor="t">
-            <a:spAutoFit/>
-          </a:bodyPr>
-          <a:lstStyle/>
-          <a:p>
-            <a:pPr algn="l"/>
-            <a:r>
-              <a:rPr sz="1500" b="0">
-                <a:solidFill>
-                  <a:srgbClr val="121018"/>
-                </a:solidFill>
-                <a:latin typeface="DIN Next LT W23"/>
-                <a:ea typeface="DIN Next LT W23"/>
-                <a:cs typeface="DIN Next LT W23"/>
-              </a:rPr>
-              <a:t>Stratified splits preserve class balance in classification tasks.</a:t>
-            </a:r>
-          </a:p>
-        </p:txBody>
-      </p:sp>
-      <p:sp>
-        <p:nvSpPr>
-          <p:cNvPr id="18" name="TextBox 17"/>
-          <p:cNvSpPr txBox="1"/>
-          <p:nvPr/>
-        </p:nvSpPr>
-        <p:spPr>
-          <a:xfrm>
-            <a:off x="548640" y="4764024"/>
-            <a:ext cx="320040" cy="365760"/>
-          </a:xfrm>
-          <a:prstGeom prst="rect">
-            <a:avLst/>
-          </a:prstGeom>
-          <a:noFill/>
-        </p:spPr>
-        <p:txBody>
-          <a:bodyPr wrap="square" anchor="t">
-            <a:spAutoFit/>
-          </a:bodyPr>
-          <a:lstStyle/>
-          <a:p>
-            <a:pPr algn="l"/>
-            <a:r>
-              <a:rPr sz="1500" b="0">
-                <a:solidFill>
-                  <a:srgbClr val="9E59CD"/>
-                </a:solidFill>
-                <a:latin typeface="DIN Next LT W23"/>
-                <a:ea typeface="DIN Next LT W23"/>
-                <a:cs typeface="DIN Next LT W23"/>
-              </a:rPr>
-              <a:t>–</a:t>
-            </a:r>
-          </a:p>
-        </p:txBody>
-      </p:sp>
-      <p:sp>
-        <p:nvSpPr>
-          <p:cNvPr id="19" name="TextBox 18"/>
-          <p:cNvSpPr txBox="1"/>
-          <p:nvPr/>
-        </p:nvSpPr>
-        <p:spPr>
-          <a:xfrm>
-            <a:off x="914400" y="4764024"/>
-            <a:ext cx="10241280" cy="411480"/>
-          </a:xfrm>
-          <a:prstGeom prst="rect">
-            <a:avLst/>
-          </a:prstGeom>
-          <a:noFill/>
-        </p:spPr>
-        <p:txBody>
-          <a:bodyPr wrap="square" anchor="t">
-            <a:spAutoFit/>
-          </a:bodyPr>
-          <a:lstStyle/>
-          <a:p>
-            <a:pPr algn="l"/>
-            <a:r>
-              <a:rPr sz="1500" b="0">
-                <a:solidFill>
-                  <a:srgbClr val="121018"/>
-                </a:solidFill>
-                <a:latin typeface="DIN Next LT W23"/>
-                <a:ea typeface="DIN Next LT W23"/>
-                <a:cs typeface="DIN Next LT W23"/>
-              </a:rPr>
               <a:t>We train on one part of the data, then test on another part to make sure the model generalizes well.</a:t>
             </a:r>
           </a:p>
@@ -6709,7 +6116,7 @@
       </p:sp>
       <p:sp>
         <p:nvSpPr>
-          <p:cNvPr id="20" name="Rectangle 19"/>
+          <p:cNvPr id="15" name="Rectangle 14"/>
           <p:cNvSpPr/>
           <p:nvPr/>
         </p:nvSpPr>
@@ -6753,7 +6160,7 @@
       </p:sp>
       <p:sp>
         <p:nvSpPr>
-          <p:cNvPr id="21" name="TextBox 20"/>
+          <p:cNvPr id="16" name="TextBox 15"/>
           <p:cNvSpPr txBox="1"/>
           <p:nvPr/>
         </p:nvSpPr>
@@ -6790,7 +6197,7 @@
       </p:sp>
       <p:sp>
         <p:nvSpPr>
-          <p:cNvPr id="22" name="TextBox 21"/>
+          <p:cNvPr id="17" name="TextBox 16"/>
           <p:cNvSpPr txBox="1"/>
           <p:nvPr/>
         </p:nvSpPr>
@@ -7082,8 +6489,8 @@
         </p:nvSpPr>
         <p:spPr>
           <a:xfrm>
-            <a:off x="548640" y="2697480"/>
-            <a:ext cx="10972800" cy="1463040"/>
+            <a:off x="548640" y="2011680"/>
+            <a:ext cx="10972800" cy="777240"/>
           </a:xfrm>
           <a:prstGeom prst="roundRect">
             <a:avLst>
@@ -7128,23 +6535,23 @@
         </p:nvSpPr>
         <p:spPr>
           <a:xfrm>
-            <a:off x="914400" y="2971800"/>
-            <a:ext cx="10241280" cy="1005840"/>
-          </a:xfrm>
-          <a:prstGeom prst="rect">
-            <a:avLst/>
-          </a:prstGeom>
-          <a:noFill/>
-        </p:spPr>
-        <p:txBody>
-          <a:bodyPr wrap="square" anchor="t">
-            <a:spAutoFit/>
-          </a:bodyPr>
-          <a:lstStyle/>
-          <a:p>
-            <a:pPr algn="l"/>
-            <a:r>
-              <a:rPr sz="1600" b="0">
+            <a:off x="868680" y="2194560"/>
+            <a:ext cx="10332720" cy="457200"/>
+          </a:xfrm>
+          <a:prstGeom prst="rect">
+            <a:avLst/>
+          </a:prstGeom>
+          <a:noFill/>
+        </p:spPr>
+        <p:txBody>
+          <a:bodyPr wrap="square" anchor="t">
+            <a:spAutoFit/>
+          </a:bodyPr>
+          <a:lstStyle/>
+          <a:p>
+            <a:pPr algn="l"/>
+            <a:r>
+              <a:rPr sz="1500" b="0">
                 <a:solidFill>
                   <a:srgbClr val="121018"/>
                 </a:solidFill>
@@ -7157,9 +6564,33 @@
           </a:p>
         </p:txBody>
       </p:sp>
-      <p:sp>
-        <p:nvSpPr>
-          <p:cNvPr id="10" name="Rectangle 9"/>
+      <p:pic>
+        <p:nvPicPr>
+          <p:cNvPr id="10" name="Picture 9" descr="scaling-before-after.png"/>
+          <p:cNvPicPr>
+            <a:picLocks noChangeAspect="1"/>
+          </p:cNvPicPr>
+          <p:nvPr/>
+        </p:nvPicPr>
+        <p:blipFill>
+          <a:blip r:embed="rId3"/>
+          <a:stretch>
+            <a:fillRect/>
+          </a:stretch>
+        </p:blipFill>
+        <p:spPr>
+          <a:xfrm>
+            <a:off x="548640" y="2971800"/>
+            <a:ext cx="10972800" cy="5209309"/>
+          </a:xfrm>
+          <a:prstGeom prst="rect">
+            <a:avLst/>
+          </a:prstGeom>
+        </p:spPr>
+      </p:pic>
+      <p:sp>
+        <p:nvSpPr>
+          <p:cNvPr id="11" name="Rectangle 10"/>
           <p:cNvSpPr/>
           <p:nvPr/>
         </p:nvSpPr>
@@ -7203,7 +6634,7 @@
       </p:sp>
       <p:sp>
         <p:nvSpPr>
-          <p:cNvPr id="11" name="TextBox 10"/>
+          <p:cNvPr id="12" name="TextBox 11"/>
           <p:cNvSpPr txBox="1"/>
           <p:nvPr/>
         </p:nvSpPr>
@@ -7240,7 +6671,7 @@
       </p:sp>
       <p:sp>
         <p:nvSpPr>
-          <p:cNvPr id="12" name="TextBox 11"/>
+          <p:cNvPr id="13" name="TextBox 12"/>
           <p:cNvSpPr txBox="1"/>
           <p:nvPr/>
         </p:nvSpPr>
@@ -7524,52 +6955,30 @@
           </a:p>
         </p:txBody>
       </p:sp>
-      <p:sp>
-        <p:nvSpPr>
-          <p:cNvPr id="8" name="Rounded Rectangle 7"/>
-          <p:cNvSpPr/>
-          <p:nvPr/>
-        </p:nvSpPr>
-        <p:spPr>
-          <a:xfrm>
-            <a:off x="548640" y="2057400"/>
-            <a:ext cx="5212080" cy="1234440"/>
-          </a:xfrm>
-          <a:prstGeom prst="roundRect">
-            <a:avLst>
-              <a:gd name="adj" fmla="val 10000"/>
-            </a:avLst>
-          </a:prstGeom>
-          <a:solidFill>
-            <a:srgbClr val="EEE8FA"/>
-          </a:solidFill>
-          <a:ln>
-            <a:noFill/>
-          </a:ln>
-          <a:effectLst/>
-        </p:spPr>
-        <p:style>
-          <a:lnRef idx="1">
-            <a:schemeClr val="accent1"/>
-          </a:lnRef>
-          <a:fillRef idx="3">
-            <a:schemeClr val="accent1"/>
-          </a:fillRef>
-          <a:effectRef idx="2">
-            <a:schemeClr val="accent1"/>
-          </a:effectRef>
-          <a:fontRef idx="minor">
-            <a:schemeClr val="lt1"/>
-          </a:fontRef>
-        </p:style>
-        <p:txBody>
-          <a:bodyPr rtlCol="0" anchor="ctr"/>
-          <a:lstStyle/>
-          <a:p>
-            <a:pPr algn="ctr"/>
-          </a:p>
-        </p:txBody>
-      </p:sp>
+      <p:pic>
+        <p:nvPicPr>
+          <p:cNvPr id="8" name="Picture 7" descr="scaling-before-after.png"/>
+          <p:cNvPicPr>
+            <a:picLocks noChangeAspect="1"/>
+          </p:cNvPicPr>
+          <p:nvPr/>
+        </p:nvPicPr>
+        <p:blipFill>
+          <a:blip r:embed="rId3"/>
+          <a:stretch>
+            <a:fillRect/>
+          </a:stretch>
+        </p:blipFill>
+        <p:spPr>
+          <a:xfrm>
+            <a:off x="548640" y="2011680"/>
+            <a:ext cx="10972800" cy="5209309"/>
+          </a:xfrm>
+          <a:prstGeom prst="rect">
+            <a:avLst/>
+          </a:prstGeom>
+        </p:spPr>
+      </p:pic>
       <p:sp>
         <p:nvSpPr>
           <p:cNvPr id="9" name="TextBox 8"/>
@@ -7578,31 +6987,31 @@
         </p:nvSpPr>
         <p:spPr>
           <a:xfrm>
-            <a:off x="868680" y="2240280"/>
-            <a:ext cx="4572000" cy="274320"/>
-          </a:xfrm>
-          <a:prstGeom prst="rect">
-            <a:avLst/>
-          </a:prstGeom>
-          <a:noFill/>
-        </p:spPr>
-        <p:txBody>
-          <a:bodyPr wrap="square" anchor="t">
-            <a:spAutoFit/>
-          </a:bodyPr>
-          <a:lstStyle/>
-          <a:p>
-            <a:pPr algn="l"/>
-            <a:r>
-              <a:rPr sz="1400" b="1">
-                <a:solidFill>
-                  <a:srgbClr val="5234B7"/>
-                </a:solidFill>
-                <a:latin typeface="DIN Next LT W23"/>
-                <a:ea typeface="DIN Next LT W23"/>
-                <a:cs typeface="DIN Next LT W23"/>
-              </a:rPr>
-              <a:t>Comparable range</a:t>
+            <a:off x="548640" y="4709160"/>
+            <a:ext cx="320040" cy="365760"/>
+          </a:xfrm>
+          <a:prstGeom prst="rect">
+            <a:avLst/>
+          </a:prstGeom>
+          <a:noFill/>
+        </p:spPr>
+        <p:txBody>
+          <a:bodyPr wrap="square" anchor="t">
+            <a:spAutoFit/>
+          </a:bodyPr>
+          <a:lstStyle/>
+          <a:p>
+            <a:pPr algn="l"/>
+            <a:r>
+              <a:rPr sz="1400" b="0">
+                <a:solidFill>
+                  <a:srgbClr val="9E59CD"/>
+                </a:solidFill>
+                <a:latin typeface="DIN Next LT W23"/>
+                <a:ea typeface="DIN Next LT W23"/>
+                <a:cs typeface="DIN Next LT W23"/>
+              </a:rPr>
+              <a:t>–</a:t>
             </a:r>
           </a:p>
         </p:txBody>
@@ -7615,78 +7024,69 @@
         </p:nvSpPr>
         <p:spPr>
           <a:xfrm>
-            <a:off x="868680" y="2560320"/>
-            <a:ext cx="4572000" cy="594360"/>
-          </a:xfrm>
-          <a:prstGeom prst="rect">
-            <a:avLst/>
-          </a:prstGeom>
-          <a:noFill/>
-        </p:spPr>
-        <p:txBody>
-          <a:bodyPr wrap="square" anchor="t">
-            <a:spAutoFit/>
-          </a:bodyPr>
-          <a:lstStyle/>
-          <a:p>
-            <a:pPr algn="l"/>
-            <a:r>
-              <a:rPr sz="1300" b="0">
-                <a:solidFill>
-                  <a:srgbClr val="5A5470"/>
-                </a:solidFill>
-                <a:latin typeface="DIN Next LT W23"/>
-                <a:ea typeface="DIN Next LT W23"/>
-                <a:cs typeface="DIN Next LT W23"/>
-              </a:rPr>
-              <a:t>Features brought to a comparable range.</a:t>
-            </a:r>
-          </a:p>
-        </p:txBody>
-      </p:sp>
-      <p:sp>
-        <p:nvSpPr>
-          <p:cNvPr id="11" name="Rounded Rectangle 10"/>
-          <p:cNvSpPr/>
-          <p:nvPr/>
-        </p:nvSpPr>
-        <p:spPr>
-          <a:xfrm>
-            <a:off x="6126480" y="2057400"/>
-            <a:ext cx="5212080" cy="1234440"/>
-          </a:xfrm>
-          <a:prstGeom prst="roundRect">
-            <a:avLst>
-              <a:gd name="adj" fmla="val 10000"/>
-            </a:avLst>
-          </a:prstGeom>
-          <a:solidFill>
-            <a:srgbClr val="EEE8FA"/>
-          </a:solidFill>
-          <a:ln>
-            <a:noFill/>
-          </a:ln>
-          <a:effectLst/>
-        </p:spPr>
-        <p:style>
-          <a:lnRef idx="1">
-            <a:schemeClr val="accent1"/>
-          </a:lnRef>
-          <a:fillRef idx="3">
-            <a:schemeClr val="accent1"/>
-          </a:fillRef>
-          <a:effectRef idx="2">
-            <a:schemeClr val="accent1"/>
-          </a:effectRef>
-          <a:fontRef idx="minor">
-            <a:schemeClr val="lt1"/>
-          </a:fontRef>
-        </p:style>
-        <p:txBody>
-          <a:bodyPr rtlCol="0" anchor="ctr"/>
-          <a:lstStyle/>
-          <a:p>
-            <a:pPr algn="ctr"/>
+            <a:off x="914400" y="4709160"/>
+            <a:ext cx="10241280" cy="411480"/>
+          </a:xfrm>
+          <a:prstGeom prst="rect">
+            <a:avLst/>
+          </a:prstGeom>
+          <a:noFill/>
+        </p:spPr>
+        <p:txBody>
+          <a:bodyPr wrap="square" anchor="t">
+            <a:spAutoFit/>
+          </a:bodyPr>
+          <a:lstStyle/>
+          <a:p>
+            <a:pPr algn="l"/>
+            <a:r>
+              <a:rPr sz="1400" b="0">
+                <a:solidFill>
+                  <a:srgbClr val="121018"/>
+                </a:solidFill>
+                <a:latin typeface="DIN Next LT W23"/>
+                <a:ea typeface="DIN Next LT W23"/>
+                <a:cs typeface="DIN Next LT W23"/>
+              </a:rPr>
+              <a:t>It prevents large-value features from dominating smaller-value features.</a:t>
+            </a:r>
+          </a:p>
+        </p:txBody>
+      </p:sp>
+      <p:sp>
+        <p:nvSpPr>
+          <p:cNvPr id="11" name="TextBox 10"/>
+          <p:cNvSpPr txBox="1"/>
+          <p:nvPr/>
+        </p:nvSpPr>
+        <p:spPr>
+          <a:xfrm>
+            <a:off x="548640" y="5330952"/>
+            <a:ext cx="320040" cy="365760"/>
+          </a:xfrm>
+          <a:prstGeom prst="rect">
+            <a:avLst/>
+          </a:prstGeom>
+          <a:noFill/>
+        </p:spPr>
+        <p:txBody>
+          <a:bodyPr wrap="square" anchor="t">
+            <a:spAutoFit/>
+          </a:bodyPr>
+          <a:lstStyle/>
+          <a:p>
+            <a:pPr algn="l"/>
+            <a:r>
+              <a:rPr sz="1400" b="0">
+                <a:solidFill>
+                  <a:srgbClr val="9E59CD"/>
+                </a:solidFill>
+                <a:latin typeface="DIN Next LT W23"/>
+                <a:ea typeface="DIN Next LT W23"/>
+                <a:cs typeface="DIN Next LT W23"/>
+              </a:rPr>
+              <a:t>–</a:t>
+            </a:r>
           </a:p>
         </p:txBody>
       </p:sp>
@@ -7698,31 +7098,31 @@
         </p:nvSpPr>
         <p:spPr>
           <a:xfrm>
-            <a:off x="6446520" y="2240280"/>
-            <a:ext cx="4572000" cy="274320"/>
-          </a:xfrm>
-          <a:prstGeom prst="rect">
-            <a:avLst/>
-          </a:prstGeom>
-          <a:noFill/>
-        </p:spPr>
-        <p:txBody>
-          <a:bodyPr wrap="square" anchor="t">
-            <a:spAutoFit/>
-          </a:bodyPr>
-          <a:lstStyle/>
-          <a:p>
-            <a:pPr algn="l"/>
-            <a:r>
-              <a:rPr sz="1400" b="1">
-                <a:solidFill>
-                  <a:srgbClr val="5234B7"/>
-                </a:solidFill>
-                <a:latin typeface="DIN Next LT W23"/>
-                <a:ea typeface="DIN Next LT W23"/>
-                <a:cs typeface="DIN Next LT W23"/>
-              </a:rPr>
-              <a:t>After scaling</a:t>
+            <a:off x="914400" y="5330952"/>
+            <a:ext cx="10241280" cy="411480"/>
+          </a:xfrm>
+          <a:prstGeom prst="rect">
+            <a:avLst/>
+          </a:prstGeom>
+          <a:noFill/>
+        </p:spPr>
+        <p:txBody>
+          <a:bodyPr wrap="square" anchor="t">
+            <a:spAutoFit/>
+          </a:bodyPr>
+          <a:lstStyle/>
+          <a:p>
+            <a:pPr algn="l"/>
+            <a:r>
+              <a:rPr sz="1400" b="0">
+                <a:solidFill>
+                  <a:srgbClr val="121018"/>
+                </a:solidFill>
+                <a:latin typeface="DIN Next LT W23"/>
+                <a:ea typeface="DIN Next LT W23"/>
+                <a:cs typeface="DIN Next LT W23"/>
+              </a:rPr>
+              <a:t>It improves performance for distance-based and gradient-based algorithms (e.g., KNN, SVM, Gradient Descent).</a:t>
             </a:r>
           </a:p>
         </p:txBody>
@@ -7735,31 +7135,31 @@
         </p:nvSpPr>
         <p:spPr>
           <a:xfrm>
-            <a:off x="6446520" y="2560320"/>
-            <a:ext cx="4572000" cy="594360"/>
-          </a:xfrm>
-          <a:prstGeom prst="rect">
-            <a:avLst/>
-          </a:prstGeom>
-          <a:noFill/>
-        </p:spPr>
-        <p:txBody>
-          <a:bodyPr wrap="square" anchor="t">
-            <a:spAutoFit/>
-          </a:bodyPr>
-          <a:lstStyle/>
-          <a:p>
-            <a:pPr algn="l"/>
-            <a:r>
-              <a:rPr sz="1300" b="0">
-                <a:solidFill>
-                  <a:srgbClr val="5A5470"/>
-                </a:solidFill>
-                <a:latin typeface="DIN Next LT W23"/>
-                <a:ea typeface="DIN Next LT W23"/>
-                <a:cs typeface="DIN Next LT W23"/>
-              </a:rPr>
-              <a:t>Heights are comparable.</a:t>
+            <a:off x="548640" y="5952744"/>
+            <a:ext cx="320040" cy="365760"/>
+          </a:xfrm>
+          <a:prstGeom prst="rect">
+            <a:avLst/>
+          </a:prstGeom>
+          <a:noFill/>
+        </p:spPr>
+        <p:txBody>
+          <a:bodyPr wrap="square" anchor="t">
+            <a:spAutoFit/>
+          </a:bodyPr>
+          <a:lstStyle/>
+          <a:p>
+            <a:pPr algn="l"/>
+            <a:r>
+              <a:rPr sz="1400" b="0">
+                <a:solidFill>
+                  <a:srgbClr val="9E59CD"/>
+                </a:solidFill>
+                <a:latin typeface="DIN Next LT W23"/>
+                <a:ea typeface="DIN Next LT W23"/>
+                <a:cs typeface="DIN Next LT W23"/>
+              </a:rPr>
+              <a:t>–</a:t>
             </a:r>
           </a:p>
         </p:txBody>
@@ -7772,44 +7172,7 @@
         </p:nvSpPr>
         <p:spPr>
           <a:xfrm>
-            <a:off x="548640" y="3520440"/>
-            <a:ext cx="320040" cy="365760"/>
-          </a:xfrm>
-          <a:prstGeom prst="rect">
-            <a:avLst/>
-          </a:prstGeom>
-          <a:noFill/>
-        </p:spPr>
-        <p:txBody>
-          <a:bodyPr wrap="square" anchor="t">
-            <a:spAutoFit/>
-          </a:bodyPr>
-          <a:lstStyle/>
-          <a:p>
-            <a:pPr algn="l"/>
-            <a:r>
-              <a:rPr sz="1500" b="0">
-                <a:solidFill>
-                  <a:srgbClr val="9E59CD"/>
-                </a:solidFill>
-                <a:latin typeface="DIN Next LT W23"/>
-                <a:ea typeface="DIN Next LT W23"/>
-                <a:cs typeface="DIN Next LT W23"/>
-              </a:rPr>
-              <a:t>–</a:t>
-            </a:r>
-          </a:p>
-        </p:txBody>
-      </p:sp>
-      <p:sp>
-        <p:nvSpPr>
-          <p:cNvPr id="15" name="TextBox 14"/>
-          <p:cNvSpPr txBox="1"/>
-          <p:nvPr/>
-        </p:nvSpPr>
-        <p:spPr>
-          <a:xfrm>
-            <a:off x="914400" y="3520440"/>
+            <a:off x="914400" y="5952744"/>
             <a:ext cx="10241280" cy="411480"/>
           </a:xfrm>
           <a:prstGeom prst="rect">
@@ -7825,7 +7188,7 @@
           <a:p>
             <a:pPr algn="l"/>
             <a:r>
-              <a:rPr sz="1500" b="0">
+              <a:rPr sz="1400" b="0">
                 <a:solidFill>
                   <a:srgbClr val="121018"/>
                 </a:solidFill>
@@ -7833,154 +7196,6 @@
                 <a:ea typeface="DIN Next LT W23"/>
                 <a:cs typeface="DIN Next LT W23"/>
               </a:rPr>
-              <a:t>It prevents large-value features from dominating smaller-value features.</a:t>
-            </a:r>
-          </a:p>
-        </p:txBody>
-      </p:sp>
-      <p:sp>
-        <p:nvSpPr>
-          <p:cNvPr id="16" name="TextBox 15"/>
-          <p:cNvSpPr txBox="1"/>
-          <p:nvPr/>
-        </p:nvSpPr>
-        <p:spPr>
-          <a:xfrm>
-            <a:off x="548640" y="4142232"/>
-            <a:ext cx="320040" cy="365760"/>
-          </a:xfrm>
-          <a:prstGeom prst="rect">
-            <a:avLst/>
-          </a:prstGeom>
-          <a:noFill/>
-        </p:spPr>
-        <p:txBody>
-          <a:bodyPr wrap="square" anchor="t">
-            <a:spAutoFit/>
-          </a:bodyPr>
-          <a:lstStyle/>
-          <a:p>
-            <a:pPr algn="l"/>
-            <a:r>
-              <a:rPr sz="1500" b="0">
-                <a:solidFill>
-                  <a:srgbClr val="9E59CD"/>
-                </a:solidFill>
-                <a:latin typeface="DIN Next LT W23"/>
-                <a:ea typeface="DIN Next LT W23"/>
-                <a:cs typeface="DIN Next LT W23"/>
-              </a:rPr>
-              <a:t>–</a:t>
-            </a:r>
-          </a:p>
-        </p:txBody>
-      </p:sp>
-      <p:sp>
-        <p:nvSpPr>
-          <p:cNvPr id="17" name="TextBox 16"/>
-          <p:cNvSpPr txBox="1"/>
-          <p:nvPr/>
-        </p:nvSpPr>
-        <p:spPr>
-          <a:xfrm>
-            <a:off x="914400" y="4142232"/>
-            <a:ext cx="10241280" cy="411480"/>
-          </a:xfrm>
-          <a:prstGeom prst="rect">
-            <a:avLst/>
-          </a:prstGeom>
-          <a:noFill/>
-        </p:spPr>
-        <p:txBody>
-          <a:bodyPr wrap="square" anchor="t">
-            <a:spAutoFit/>
-          </a:bodyPr>
-          <a:lstStyle/>
-          <a:p>
-            <a:pPr algn="l"/>
-            <a:r>
-              <a:rPr sz="1500" b="0">
-                <a:solidFill>
-                  <a:srgbClr val="121018"/>
-                </a:solidFill>
-                <a:latin typeface="DIN Next LT W23"/>
-                <a:ea typeface="DIN Next LT W23"/>
-                <a:cs typeface="DIN Next LT W23"/>
-              </a:rPr>
-              <a:t>It improves performance for distance-based and gradient-based algorithms (e.g., KNN, SVM, Gradient Descent).</a:t>
-            </a:r>
-          </a:p>
-        </p:txBody>
-      </p:sp>
-      <p:sp>
-        <p:nvSpPr>
-          <p:cNvPr id="18" name="TextBox 17"/>
-          <p:cNvSpPr txBox="1"/>
-          <p:nvPr/>
-        </p:nvSpPr>
-        <p:spPr>
-          <a:xfrm>
-            <a:off x="548640" y="4764024"/>
-            <a:ext cx="320040" cy="365760"/>
-          </a:xfrm>
-          <a:prstGeom prst="rect">
-            <a:avLst/>
-          </a:prstGeom>
-          <a:noFill/>
-        </p:spPr>
-        <p:txBody>
-          <a:bodyPr wrap="square" anchor="t">
-            <a:spAutoFit/>
-          </a:bodyPr>
-          <a:lstStyle/>
-          <a:p>
-            <a:pPr algn="l"/>
-            <a:r>
-              <a:rPr sz="1500" b="0">
-                <a:solidFill>
-                  <a:srgbClr val="9E59CD"/>
-                </a:solidFill>
-                <a:latin typeface="DIN Next LT W23"/>
-                <a:ea typeface="DIN Next LT W23"/>
-                <a:cs typeface="DIN Next LT W23"/>
-              </a:rPr>
-              <a:t>–</a:t>
-            </a:r>
-          </a:p>
-        </p:txBody>
-      </p:sp>
-      <p:sp>
-        <p:nvSpPr>
-          <p:cNvPr id="19" name="TextBox 18"/>
-          <p:cNvSpPr txBox="1"/>
-          <p:nvPr/>
-        </p:nvSpPr>
-        <p:spPr>
-          <a:xfrm>
-            <a:off x="914400" y="4764024"/>
-            <a:ext cx="10241280" cy="411480"/>
-          </a:xfrm>
-          <a:prstGeom prst="rect">
-            <a:avLst/>
-          </a:prstGeom>
-          <a:noFill/>
-        </p:spPr>
-        <p:txBody>
-          <a:bodyPr wrap="square" anchor="t">
-            <a:spAutoFit/>
-          </a:bodyPr>
-          <a:lstStyle/>
-          <a:p>
-            <a:pPr algn="l"/>
-            <a:r>
-              <a:rPr sz="1500" b="0">
-                <a:solidFill>
-                  <a:srgbClr val="121018"/>
-                </a:solidFill>
-                <a:latin typeface="DIN Next LT W23"/>
-                <a:ea typeface="DIN Next LT W23"/>
-                <a:cs typeface="DIN Next LT W23"/>
-              </a:rPr>
               <a:t>It helps training converge faster.</a:t>
             </a:r>
           </a:p>
@@ -7988,7 +7203,7 @@
       </p:sp>
       <p:sp>
         <p:nvSpPr>
-          <p:cNvPr id="20" name="Rectangle 19"/>
+          <p:cNvPr id="15" name="Rectangle 14"/>
           <p:cNvSpPr/>
           <p:nvPr/>
         </p:nvSpPr>
@@ -8032,7 +7247,7 @@
       </p:sp>
       <p:sp>
         <p:nvSpPr>
-          <p:cNvPr id="21" name="TextBox 20"/>
+          <p:cNvPr id="16" name="TextBox 15"/>
           <p:cNvSpPr txBox="1"/>
           <p:nvPr/>
         </p:nvSpPr>
@@ -8069,7 +7284,7 @@
       </p:sp>
       <p:sp>
         <p:nvSpPr>
-          <p:cNvPr id="22" name="TextBox 21"/>
+          <p:cNvPr id="17" name="TextBox 16"/>
           <p:cNvSpPr txBox="1"/>
           <p:nvPr/>
         </p:nvSpPr>
@@ -8363,7 +7578,7 @@
         </p:nvGraphicFramePr>
         <p:xfrm>
           <a:off x="548640" y="2103120"/>
-          <a:ext cx="10972800" cy="1965960"/>
+          <a:ext cx="10972800" cy="1920240"/>
         </p:xfrm>
         <a:graphic>
           <a:graphicData uri="http://schemas.openxmlformats.org/drawingml/2006/table">
@@ -8378,7 +7593,7 @@
                 <a:gridCol w="2194560"/>
                 <a:gridCol w="2194560"/>
               </a:tblGrid>
-              <a:tr h="491490">
+              <a:tr h="480060">
                 <a:tc>
                   <a:txBody>
                     <a:bodyPr/>
@@ -8495,7 +7710,7 @@
                   </a:tcPr>
                 </a:tc>
               </a:tr>
-              <a:tr h="491490">
+              <a:tr h="480060">
                 <a:tc>
                   <a:txBody>
                     <a:bodyPr/>
@@ -8612,7 +7827,7 @@
                   </a:tcPr>
                 </a:tc>
               </a:tr>
-              <a:tr h="491490">
+              <a:tr h="480060">
                 <a:tc>
                   <a:txBody>
                     <a:bodyPr/>
@@ -8729,7 +7944,7 @@
                   </a:tcPr>
                 </a:tc>
               </a:tr>
-              <a:tr h="491490">
+              <a:tr h="480060">
                 <a:tc>
                   <a:txBody>
                     <a:bodyPr/>
@@ -8858,7 +8073,7 @@
         </p:nvSpPr>
         <p:spPr>
           <a:xfrm>
-            <a:off x="548640" y="4434840"/>
+            <a:off x="548640" y="4160520"/>
             <a:ext cx="10972800" cy="822960"/>
           </a:xfrm>
           <a:prstGeom prst="roundRect">
@@ -8904,7 +8119,7 @@
         </p:nvSpPr>
         <p:spPr>
           <a:xfrm>
-            <a:off x="868680" y="4663440"/>
+            <a:off x="868680" y="4389120"/>
             <a:ext cx="10332720" cy="457200"/>
           </a:xfrm>
           <a:prstGeom prst="rect">
@@ -10275,23 +9490,23 @@
         </p:nvSpPr>
         <p:spPr>
           <a:xfrm>
-            <a:off x="548640" y="2103120"/>
-            <a:ext cx="10972800" cy="411480"/>
-          </a:xfrm>
-          <a:prstGeom prst="rect">
-            <a:avLst/>
-          </a:prstGeom>
-          <a:noFill/>
-        </p:spPr>
-        <p:txBody>
-          <a:bodyPr wrap="square" anchor="t">
-            <a:spAutoFit/>
-          </a:bodyPr>
-          <a:lstStyle/>
-          <a:p>
-            <a:pPr algn="l"/>
-            <a:r>
-              <a:rPr sz="1600" b="0">
+            <a:off x="548640" y="2011680"/>
+            <a:ext cx="10972800" cy="320040"/>
+          </a:xfrm>
+          <a:prstGeom prst="rect">
+            <a:avLst/>
+          </a:prstGeom>
+          <a:noFill/>
+        </p:spPr>
+        <p:txBody>
+          <a:bodyPr wrap="square" anchor="t">
+            <a:spAutoFit/>
+          </a:bodyPr>
+          <a:lstStyle/>
+          <a:p>
+            <a:pPr algn="l"/>
+            <a:r>
+              <a:rPr sz="1500" b="0">
                 <a:solidFill>
                   <a:srgbClr val="5A5470"/>
                 </a:solidFill>
@@ -10312,8 +9527,8 @@
         </p:nvSpPr>
         <p:spPr>
           <a:xfrm>
-            <a:off x="548640" y="2606040"/>
-            <a:ext cx="10972800" cy="1874519"/>
+            <a:off x="548640" y="2423160"/>
+            <a:ext cx="5029200" cy="2148840"/>
           </a:xfrm>
           <a:prstGeom prst="roundRect">
             <a:avLst>
@@ -10358,23 +9573,23 @@
         </p:nvSpPr>
         <p:spPr>
           <a:xfrm>
-            <a:off x="914400" y="2697480"/>
-            <a:ext cx="10241280" cy="256032"/>
-          </a:xfrm>
-          <a:prstGeom prst="rect">
-            <a:avLst/>
-          </a:prstGeom>
-          <a:noFill/>
-        </p:spPr>
-        <p:txBody>
-          <a:bodyPr wrap="square" anchor="t">
-            <a:spAutoFit/>
-          </a:bodyPr>
-          <a:lstStyle/>
-          <a:p>
-            <a:pPr algn="l"/>
-            <a:r>
-              <a:rPr sz="1200" b="1">
+            <a:off x="822960" y="2560320"/>
+            <a:ext cx="4572000" cy="228600"/>
+          </a:xfrm>
+          <a:prstGeom prst="rect">
+            <a:avLst/>
+          </a:prstGeom>
+          <a:noFill/>
+        </p:spPr>
+        <p:txBody>
+          <a:bodyPr wrap="square" anchor="t">
+            <a:spAutoFit/>
+          </a:bodyPr>
+          <a:lstStyle/>
+          <a:p>
+            <a:pPr algn="l"/>
+            <a:r>
+              <a:rPr sz="1100" b="1">
                 <a:solidFill>
                   <a:srgbClr val="9E59CD"/>
                 </a:solidFill>
@@ -10395,8 +9610,8 @@
         </p:nvSpPr>
         <p:spPr>
           <a:xfrm>
-            <a:off x="914400" y="2971800"/>
-            <a:ext cx="2867558" cy="1097280"/>
+            <a:off x="777240" y="2880360"/>
+            <a:ext cx="1305763" cy="1280160"/>
           </a:xfrm>
           <a:prstGeom prst="rect">
             <a:avLst/>
@@ -10411,7 +9626,7 @@
           <a:p>
             <a:pPr algn="r"/>
             <a:r>
-              <a:rPr sz="2400" b="1">
+              <a:rPr sz="1600" b="1">
                 <a:solidFill>
                   <a:srgbClr val="5234B7"/>
                 </a:solidFill>
@@ -10422,7 +9637,7 @@
               <a:t>x</a:t>
             </a:r>
             <a:r>
-              <a:rPr sz="2000" b="1" baseline="-25000">
+              <a:rPr sz="1200" b="1" baseline="-25000">
                 <a:solidFill>
                   <a:srgbClr val="5234B7"/>
                 </a:solidFill>
@@ -10433,7 +9648,7 @@
               <a:t>norm</a:t>
             </a:r>
             <a:r>
-              <a:rPr sz="2400" b="1">
+              <a:rPr sz="1600" b="1">
                 <a:solidFill>
                   <a:srgbClr val="5234B7"/>
                 </a:solidFill>
@@ -10454,8 +9669,8 @@
         </p:nvSpPr>
         <p:spPr>
           <a:xfrm>
-            <a:off x="3986784" y="2971800"/>
-            <a:ext cx="6964070" cy="416966"/>
+            <a:off x="2176272" y="2880360"/>
+            <a:ext cx="3171139" cy="486460"/>
           </a:xfrm>
           <a:prstGeom prst="rect">
             <a:avLst/>
@@ -10470,7 +9685,7 @@
           <a:p>
             <a:pPr algn="ctr"/>
             <a:r>
-              <a:rPr sz="2400" b="1">
+              <a:rPr sz="1600" b="1">
                 <a:solidFill>
                   <a:srgbClr val="5234B7"/>
                 </a:solidFill>
@@ -10481,7 +9696,7 @@
               <a:t>x − x</a:t>
             </a:r>
             <a:r>
-              <a:rPr sz="2000" b="1" baseline="-25000">
+              <a:rPr sz="1200" b="1" baseline="-25000">
                 <a:solidFill>
                   <a:srgbClr val="5234B7"/>
                 </a:solidFill>
@@ -10502,8 +9717,8 @@
         </p:nvSpPr>
         <p:spPr>
           <a:xfrm>
-            <a:off x="4334987" y="3434852"/>
-            <a:ext cx="6267663" cy="18288"/>
+            <a:off x="2334828" y="3420587"/>
+            <a:ext cx="2854025" cy="18288"/>
           </a:xfrm>
           <a:prstGeom prst="rect">
             <a:avLst/>
@@ -10546,8 +9761,8 @@
         </p:nvSpPr>
         <p:spPr>
           <a:xfrm>
-            <a:off x="3986784" y="3520440"/>
-            <a:ext cx="6964070" cy="416966"/>
+            <a:off x="2176272" y="3520440"/>
+            <a:ext cx="3171139" cy="486460"/>
           </a:xfrm>
           <a:prstGeom prst="rect">
             <a:avLst/>
@@ -10562,7 +9777,7 @@
           <a:p>
             <a:pPr algn="ctr"/>
             <a:r>
-              <a:rPr sz="2400" b="1">
+              <a:rPr sz="1600" b="1">
                 <a:solidFill>
                   <a:srgbClr val="5234B7"/>
                 </a:solidFill>
@@ -10573,7 +9788,7 @@
               <a:t>x</a:t>
             </a:r>
             <a:r>
-              <a:rPr sz="2000" b="1" baseline="-25000">
+              <a:rPr sz="1200" b="1" baseline="-25000">
                 <a:solidFill>
                   <a:srgbClr val="5234B7"/>
                 </a:solidFill>
@@ -10584,7 +9799,7 @@
               <a:t>max</a:t>
             </a:r>
             <a:r>
-              <a:rPr sz="2400" b="1">
+              <a:rPr sz="1600" b="1">
                 <a:solidFill>
                   <a:srgbClr val="5234B7"/>
                 </a:solidFill>
@@ -10595,7 +9810,7 @@
               <a:t> − x</a:t>
             </a:r>
             <a:r>
-              <a:rPr sz="2000" b="1" baseline="-25000">
+              <a:rPr sz="1200" b="1" baseline="-25000">
                 <a:solidFill>
                   <a:srgbClr val="5234B7"/>
                 </a:solidFill>
@@ -10608,15 +9823,39 @@
           </a:p>
         </p:txBody>
       </p:sp>
-      <p:sp>
-        <p:nvSpPr>
-          <p:cNvPr id="15" name="TextBox 14"/>
-          <p:cNvSpPr txBox="1"/>
-          <p:nvPr/>
-        </p:nvSpPr>
-        <p:spPr>
-          <a:xfrm>
-            <a:off x="548640" y="4709160"/>
+      <p:pic>
+        <p:nvPicPr>
+          <p:cNvPr id="15" name="Picture 14" descr="normalization-scale.png"/>
+          <p:cNvPicPr>
+            <a:picLocks noChangeAspect="1"/>
+          </p:cNvPicPr>
+          <p:nvPr/>
+        </p:nvPicPr>
+        <p:blipFill>
+          <a:blip r:embed="rId3"/>
+          <a:stretch>
+            <a:fillRect/>
+          </a:stretch>
+        </p:blipFill>
+        <p:spPr>
+          <a:xfrm>
+            <a:off x="5852160" y="2423160"/>
+            <a:ext cx="5669280" cy="1904842"/>
+          </a:xfrm>
+          <a:prstGeom prst="rect">
+            <a:avLst/>
+          </a:prstGeom>
+        </p:spPr>
+      </p:pic>
+      <p:sp>
+        <p:nvSpPr>
+          <p:cNvPr id="16" name="TextBox 15"/>
+          <p:cNvSpPr txBox="1"/>
+          <p:nvPr/>
+        </p:nvSpPr>
+        <p:spPr>
+          <a:xfrm>
+            <a:off x="548640" y="4846320"/>
             <a:ext cx="320040" cy="365760"/>
           </a:xfrm>
           <a:prstGeom prst="rect">
@@ -10632,7 +9871,7 @@
           <a:p>
             <a:pPr algn="l"/>
             <a:r>
-              <a:rPr sz="1600" b="0">
+              <a:rPr sz="1500" b="0">
                 <a:solidFill>
                   <a:srgbClr val="9E59CD"/>
                 </a:solidFill>
@@ -10647,13 +9886,13 @@
       </p:sp>
       <p:sp>
         <p:nvSpPr>
-          <p:cNvPr id="16" name="TextBox 15"/>
-          <p:cNvSpPr txBox="1"/>
-          <p:nvPr/>
-        </p:nvSpPr>
-        <p:spPr>
-          <a:xfrm>
-            <a:off x="914400" y="4709160"/>
+          <p:cNvPr id="17" name="TextBox 16"/>
+          <p:cNvSpPr txBox="1"/>
+          <p:nvPr/>
+        </p:nvSpPr>
+        <p:spPr>
+          <a:xfrm>
+            <a:off x="914400" y="4846320"/>
             <a:ext cx="10241280" cy="411480"/>
           </a:xfrm>
           <a:prstGeom prst="rect">
@@ -10669,7 +9908,7 @@
           <a:p>
             <a:pPr algn="l"/>
             <a:r>
-              <a:rPr sz="1600" b="0">
+              <a:rPr sz="1500" b="0">
                 <a:solidFill>
                   <a:srgbClr val="121018"/>
                 </a:solidFill>
@@ -10684,13 +9923,13 @@
       </p:sp>
       <p:sp>
         <p:nvSpPr>
-          <p:cNvPr id="17" name="TextBox 16"/>
-          <p:cNvSpPr txBox="1"/>
-          <p:nvPr/>
-        </p:nvSpPr>
-        <p:spPr>
-          <a:xfrm>
-            <a:off x="548640" y="5330952"/>
+          <p:cNvPr id="18" name="TextBox 17"/>
+          <p:cNvSpPr txBox="1"/>
+          <p:nvPr/>
+        </p:nvSpPr>
+        <p:spPr>
+          <a:xfrm>
+            <a:off x="548640" y="5468112"/>
             <a:ext cx="320040" cy="365760"/>
           </a:xfrm>
           <a:prstGeom prst="rect">
@@ -10706,7 +9945,7 @@
           <a:p>
             <a:pPr algn="l"/>
             <a:r>
-              <a:rPr sz="1600" b="0">
+              <a:rPr sz="1500" b="0">
                 <a:solidFill>
                   <a:srgbClr val="9E59CD"/>
                 </a:solidFill>
@@ -10721,13 +9960,13 @@
       </p:sp>
       <p:sp>
         <p:nvSpPr>
-          <p:cNvPr id="18" name="TextBox 17"/>
-          <p:cNvSpPr txBox="1"/>
-          <p:nvPr/>
-        </p:nvSpPr>
-        <p:spPr>
-          <a:xfrm>
-            <a:off x="914400" y="5330952"/>
+          <p:cNvPr id="19" name="TextBox 18"/>
+          <p:cNvSpPr txBox="1"/>
+          <p:nvPr/>
+        </p:nvSpPr>
+        <p:spPr>
+          <a:xfrm>
+            <a:off x="914400" y="5468112"/>
             <a:ext cx="10241280" cy="411480"/>
           </a:xfrm>
           <a:prstGeom prst="rect">
@@ -10743,7 +9982,7 @@
           <a:p>
             <a:pPr algn="l"/>
             <a:r>
-              <a:rPr sz="1600" b="0">
+              <a:rPr sz="1500" b="0">
                 <a:solidFill>
                   <a:srgbClr val="121018"/>
                 </a:solidFill>
@@ -10758,7 +9997,7 @@
       </p:sp>
       <p:sp>
         <p:nvSpPr>
-          <p:cNvPr id="19" name="Rectangle 18"/>
+          <p:cNvPr id="20" name="Rectangle 19"/>
           <p:cNvSpPr/>
           <p:nvPr/>
         </p:nvSpPr>
@@ -10802,7 +10041,7 @@
       </p:sp>
       <p:sp>
         <p:nvSpPr>
-          <p:cNvPr id="20" name="TextBox 19"/>
+          <p:cNvPr id="21" name="TextBox 20"/>
           <p:cNvSpPr txBox="1"/>
           <p:nvPr/>
         </p:nvSpPr>
@@ -10839,7 +10078,7 @@
       </p:sp>
       <p:sp>
         <p:nvSpPr>
-          <p:cNvPr id="21" name="TextBox 20"/>
+          <p:cNvPr id="22" name="TextBox 21"/>
           <p:cNvSpPr txBox="1"/>
           <p:nvPr/>
         </p:nvSpPr>
@@ -11131,23 +10370,23 @@
         </p:nvSpPr>
         <p:spPr>
           <a:xfrm>
-            <a:off x="548640" y="2103120"/>
-            <a:ext cx="10972800" cy="411480"/>
-          </a:xfrm>
-          <a:prstGeom prst="rect">
-            <a:avLst/>
-          </a:prstGeom>
-          <a:noFill/>
-        </p:spPr>
-        <p:txBody>
-          <a:bodyPr wrap="square" anchor="t">
-            <a:spAutoFit/>
-          </a:bodyPr>
-          <a:lstStyle/>
-          <a:p>
-            <a:pPr algn="l"/>
-            <a:r>
-              <a:rPr sz="1600" b="0">
+            <a:off x="548640" y="2011680"/>
+            <a:ext cx="10972800" cy="320040"/>
+          </a:xfrm>
+          <a:prstGeom prst="rect">
+            <a:avLst/>
+          </a:prstGeom>
+          <a:noFill/>
+        </p:spPr>
+        <p:txBody>
+          <a:bodyPr wrap="square" anchor="t">
+            <a:spAutoFit/>
+          </a:bodyPr>
+          <a:lstStyle/>
+          <a:p>
+            <a:pPr algn="l"/>
+            <a:r>
+              <a:rPr sz="1500" b="0">
                 <a:solidFill>
                   <a:srgbClr val="5A5470"/>
                 </a:solidFill>
@@ -11168,8 +10407,8 @@
         </p:nvSpPr>
         <p:spPr>
           <a:xfrm>
-            <a:off x="548640" y="2606040"/>
-            <a:ext cx="10972800" cy="1874519"/>
+            <a:off x="548640" y="2423160"/>
+            <a:ext cx="5029200" cy="2148840"/>
           </a:xfrm>
           <a:prstGeom prst="roundRect">
             <a:avLst>
@@ -11214,23 +10453,23 @@
         </p:nvSpPr>
         <p:spPr>
           <a:xfrm>
-            <a:off x="914400" y="2697480"/>
-            <a:ext cx="10241280" cy="256032"/>
-          </a:xfrm>
-          <a:prstGeom prst="rect">
-            <a:avLst/>
-          </a:prstGeom>
-          <a:noFill/>
-        </p:spPr>
-        <p:txBody>
-          <a:bodyPr wrap="square" anchor="t">
-            <a:spAutoFit/>
-          </a:bodyPr>
-          <a:lstStyle/>
-          <a:p>
-            <a:pPr algn="l"/>
-            <a:r>
-              <a:rPr sz="1200" b="1">
+            <a:off x="822960" y="2560320"/>
+            <a:ext cx="4572000" cy="228600"/>
+          </a:xfrm>
+          <a:prstGeom prst="rect">
+            <a:avLst/>
+          </a:prstGeom>
+          <a:noFill/>
+        </p:spPr>
+        <p:txBody>
+          <a:bodyPr wrap="square" anchor="t">
+            <a:spAutoFit/>
+          </a:bodyPr>
+          <a:lstStyle/>
+          <a:p>
+            <a:pPr algn="l"/>
+            <a:r>
+              <a:rPr sz="1100" b="1">
                 <a:solidFill>
                   <a:srgbClr val="9E59CD"/>
                 </a:solidFill>
@@ -11251,8 +10490,8 @@
         </p:nvSpPr>
         <p:spPr>
           <a:xfrm>
-            <a:off x="914400" y="2971800"/>
-            <a:ext cx="2867558" cy="1097280"/>
+            <a:off x="777240" y="2880360"/>
+            <a:ext cx="1305763" cy="1280160"/>
           </a:xfrm>
           <a:prstGeom prst="rect">
             <a:avLst/>
@@ -11267,7 +10506,7 @@
           <a:p>
             <a:pPr algn="r"/>
             <a:r>
-              <a:rPr sz="2400" b="1">
+              <a:rPr sz="1600" b="1">
                 <a:solidFill>
                   <a:srgbClr val="5234B7"/>
                 </a:solidFill>
@@ -11288,8 +10527,8 @@
         </p:nvSpPr>
         <p:spPr>
           <a:xfrm>
-            <a:off x="3986784" y="2971800"/>
-            <a:ext cx="6964070" cy="416966"/>
+            <a:off x="2176272" y="2880360"/>
+            <a:ext cx="3171139" cy="486460"/>
           </a:xfrm>
           <a:prstGeom prst="rect">
             <a:avLst/>
@@ -11304,7 +10543,7 @@
           <a:p>
             <a:pPr algn="ctr"/>
             <a:r>
-              <a:rPr sz="2400" b="1">
+              <a:rPr sz="1600" b="1">
                 <a:solidFill>
                   <a:srgbClr val="5234B7"/>
                 </a:solidFill>
@@ -11325,8 +10564,8 @@
         </p:nvSpPr>
         <p:spPr>
           <a:xfrm>
-            <a:off x="4334987" y="3434852"/>
-            <a:ext cx="6267663" cy="18288"/>
+            <a:off x="2334828" y="3420587"/>
+            <a:ext cx="2854025" cy="18288"/>
           </a:xfrm>
           <a:prstGeom prst="rect">
             <a:avLst/>
@@ -11369,8 +10608,8 @@
         </p:nvSpPr>
         <p:spPr>
           <a:xfrm>
-            <a:off x="3986784" y="3520440"/>
-            <a:ext cx="6964070" cy="416966"/>
+            <a:off x="2176272" y="3520440"/>
+            <a:ext cx="3171139" cy="486460"/>
           </a:xfrm>
           <a:prstGeom prst="rect">
             <a:avLst/>
@@ -11385,7 +10624,7 @@
           <a:p>
             <a:pPr algn="ctr"/>
             <a:r>
-              <a:rPr sz="2400" b="1">
+              <a:rPr sz="1600" b="1">
                 <a:solidFill>
                   <a:srgbClr val="5234B7"/>
                 </a:solidFill>
@@ -11398,43 +10637,30 @@
           </a:p>
         </p:txBody>
       </p:sp>
-      <p:sp>
-        <p:nvSpPr>
-          <p:cNvPr id="15" name="TextBox 14"/>
-          <p:cNvSpPr txBox="1"/>
-          <p:nvPr/>
-        </p:nvSpPr>
-        <p:spPr>
-          <a:xfrm>
-            <a:off x="914400" y="4114800"/>
-            <a:ext cx="10241280" cy="256032"/>
-          </a:xfrm>
-          <a:prstGeom prst="rect">
-            <a:avLst/>
-          </a:prstGeom>
-          <a:noFill/>
-        </p:spPr>
-        <p:txBody>
-          <a:bodyPr wrap="square" anchor="t">
-            <a:spAutoFit/>
-          </a:bodyPr>
-          <a:lstStyle/>
-          <a:p>
-            <a:pPr algn="l"/>
-            <a:r>
-              <a:rPr sz="1300" b="0">
-                <a:solidFill>
-                  <a:srgbClr val="5A5470"/>
-                </a:solidFill>
-                <a:latin typeface="Helvetica Neue"/>
-                <a:ea typeface="Helvetica Neue"/>
-                <a:cs typeface="Helvetica Neue"/>
-              </a:rPr>
-              <a:t>μ = mean of the feature · σ = standard deviation of the feature</a:t>
-            </a:r>
-          </a:p>
-        </p:txBody>
-      </p:sp>
+      <p:pic>
+        <p:nvPicPr>
+          <p:cNvPr id="15" name="Picture 14" descr="standardization-curve.png"/>
+          <p:cNvPicPr>
+            <a:picLocks noChangeAspect="1"/>
+          </p:cNvPicPr>
+          <p:nvPr/>
+        </p:nvPicPr>
+        <p:blipFill>
+          <a:blip r:embed="rId3"/>
+          <a:stretch>
+            <a:fillRect/>
+          </a:stretch>
+        </p:blipFill>
+        <p:spPr>
+          <a:xfrm>
+            <a:off x="5852160" y="2423160"/>
+            <a:ext cx="5669280" cy="2543315"/>
+          </a:xfrm>
+          <a:prstGeom prst="rect">
+            <a:avLst/>
+          </a:prstGeom>
+        </p:spPr>
+      </p:pic>
       <p:sp>
         <p:nvSpPr>
           <p:cNvPr id="16" name="TextBox 15"/>
@@ -11443,7 +10669,7 @@
         </p:nvSpPr>
         <p:spPr>
           <a:xfrm>
-            <a:off x="548640" y="4709160"/>
+            <a:off x="548640" y="4846320"/>
             <a:ext cx="320040" cy="365760"/>
           </a:xfrm>
           <a:prstGeom prst="rect">
@@ -11459,7 +10685,7 @@
           <a:p>
             <a:pPr algn="l"/>
             <a:r>
-              <a:rPr sz="1600" b="0">
+              <a:rPr sz="1500" b="0">
                 <a:solidFill>
                   <a:srgbClr val="9E59CD"/>
                 </a:solidFill>
@@ -11480,7 +10706,7 @@
         </p:nvSpPr>
         <p:spPr>
           <a:xfrm>
-            <a:off x="914400" y="4709160"/>
+            <a:off x="914400" y="4846320"/>
             <a:ext cx="10241280" cy="411480"/>
           </a:xfrm>
           <a:prstGeom prst="rect">
@@ -11496,7 +10722,7 @@
           <a:p>
             <a:pPr algn="l"/>
             <a:r>
-              <a:rPr sz="1600" b="0">
+              <a:rPr sz="1500" b="0">
                 <a:solidFill>
                   <a:srgbClr val="121018"/>
                 </a:solidFill>
@@ -11517,7 +10743,7 @@
         </p:nvSpPr>
         <p:spPr>
           <a:xfrm>
-            <a:off x="548640" y="5330952"/>
+            <a:off x="548640" y="5468112"/>
             <a:ext cx="320040" cy="365760"/>
           </a:xfrm>
           <a:prstGeom prst="rect">
@@ -11533,7 +10759,7 @@
           <a:p>
             <a:pPr algn="l"/>
             <a:r>
-              <a:rPr sz="1600" b="0">
+              <a:rPr sz="1500" b="0">
                 <a:solidFill>
                   <a:srgbClr val="9E59CD"/>
                 </a:solidFill>
@@ -11554,7 +10780,7 @@
         </p:nvSpPr>
         <p:spPr>
           <a:xfrm>
-            <a:off x="914400" y="5330952"/>
+            <a:off x="914400" y="5468112"/>
             <a:ext cx="10241280" cy="411480"/>
           </a:xfrm>
           <a:prstGeom prst="rect">
@@ -11570,7 +10796,7 @@
           <a:p>
             <a:pPr algn="l"/>
             <a:r>
-              <a:rPr sz="1600" b="0">
+              <a:rPr sz="1500" b="0">
                 <a:solidFill>
                   <a:srgbClr val="121018"/>
                 </a:solidFill>
@@ -20926,7 +20152,7 @@
         </p:nvGraphicFramePr>
         <p:xfrm>
           <a:off x="548640" y="2103120"/>
-          <a:ext cx="10972800" cy="2011680"/>
+          <a:ext cx="10972800" cy="1965960"/>
         </p:xfrm>
         <a:graphic>
           <a:graphicData uri="http://schemas.openxmlformats.org/drawingml/2006/table">
@@ -20939,7 +20165,7 @@
                 <a:gridCol w="3657600"/>
                 <a:gridCol w="3657600"/>
               </a:tblGrid>
-              <a:tr h="670560">
+              <a:tr h="655320">
                 <a:tc>
                   <a:txBody>
                     <a:bodyPr/>
@@ -21010,7 +20236,7 @@
                   </a:tcPr>
                 </a:tc>
               </a:tr>
-              <a:tr h="670560">
+              <a:tr h="655320">
                 <a:tc>
                   <a:txBody>
                     <a:bodyPr/>
@@ -21081,7 +20307,7 @@
                   </a:tcPr>
                 </a:tc>
               </a:tr>
-              <a:tr h="670560">
+              <a:tr h="655320">
                 <a:tc>
                   <a:txBody>
                     <a:bodyPr/>
@@ -21164,7 +20390,7 @@
         </p:nvSpPr>
         <p:spPr>
           <a:xfrm>
-            <a:off x="548640" y="4480560"/>
+            <a:off x="548640" y="4206240"/>
             <a:ext cx="10972800" cy="822960"/>
           </a:xfrm>
           <a:prstGeom prst="roundRect">
@@ -21210,7 +20436,7 @@
         </p:nvSpPr>
         <p:spPr>
           <a:xfrm>
-            <a:off x="868680" y="4709160"/>
+            <a:off x="868680" y="4434840"/>
             <a:ext cx="10332720" cy="457200"/>
           </a:xfrm>
           <a:prstGeom prst="rect">
@@ -21616,7 +20842,7 @@
         </p:nvGraphicFramePr>
         <p:xfrm>
           <a:off x="548640" y="2103120"/>
-          <a:ext cx="10972800" cy="1965960"/>
+          <a:ext cx="10972800" cy="1920240"/>
         </p:xfrm>
         <a:graphic>
           <a:graphicData uri="http://schemas.openxmlformats.org/drawingml/2006/table">
@@ -21628,7 +20854,7 @@
                 <a:gridCol w="5486400"/>
                 <a:gridCol w="5486400"/>
               </a:tblGrid>
-              <a:tr h="491490">
+              <a:tr h="480060">
                 <a:tc>
                   <a:txBody>
                     <a:bodyPr/>
@@ -21676,7 +20902,7 @@
                   </a:tcPr>
                 </a:tc>
               </a:tr>
-              <a:tr h="491490">
+              <a:tr h="480060">
                 <a:tc>
                   <a:txBody>
                     <a:bodyPr/>
@@ -21724,7 +20950,7 @@
                   </a:tcPr>
                 </a:tc>
               </a:tr>
-              <a:tr h="491490">
+              <a:tr h="480060">
                 <a:tc>
                   <a:txBody>
                     <a:bodyPr/>
@@ -21772,7 +20998,7 @@
                   </a:tcPr>
                 </a:tc>
               </a:tr>
-              <a:tr h="491490">
+              <a:tr h="480060">
                 <a:tc>
                   <a:txBody>
                     <a:bodyPr/>
@@ -21832,7 +21058,7 @@
         </p:nvSpPr>
         <p:spPr>
           <a:xfrm>
-            <a:off x="548640" y="4434840"/>
+            <a:off x="548640" y="4160520"/>
             <a:ext cx="10972800" cy="822960"/>
           </a:xfrm>
           <a:prstGeom prst="roundRect">
@@ -21878,7 +21104,7 @@
         </p:nvSpPr>
         <p:spPr>
           <a:xfrm>
-            <a:off x="868680" y="4663440"/>
+            <a:off x="868680" y="4389120"/>
             <a:ext cx="10332720" cy="457200"/>
           </a:xfrm>
           <a:prstGeom prst="rect">
@@ -22284,7 +21510,7 @@
         </p:nvGraphicFramePr>
         <p:xfrm>
           <a:off x="548640" y="2103120"/>
-          <a:ext cx="10972800" cy="1965960"/>
+          <a:ext cx="10972800" cy="1920240"/>
         </p:xfrm>
         <a:graphic>
           <a:graphicData uri="http://schemas.openxmlformats.org/drawingml/2006/table">
@@ -22298,7 +21524,7 @@
                 <a:gridCol w="2743200"/>
                 <a:gridCol w="2743200"/>
               </a:tblGrid>
-              <a:tr h="491490">
+              <a:tr h="480060">
                 <a:tc>
                   <a:txBody>
                     <a:bodyPr/>
@@ -22392,7 +21618,7 @@
                   </a:tcPr>
                 </a:tc>
               </a:tr>
-              <a:tr h="491490">
+              <a:tr h="480060">
                 <a:tc>
                   <a:txBody>
                     <a:bodyPr/>
@@ -22486,7 +21712,7 @@
                   </a:tcPr>
                 </a:tc>
               </a:tr>
-              <a:tr h="491490">
+              <a:tr h="480060">
                 <a:tc>
                   <a:txBody>
                     <a:bodyPr/>
@@ -22580,7 +21806,7 @@
                   </a:tcPr>
                 </a:tc>
               </a:tr>
-              <a:tr h="491490">
+              <a:tr h="480060">
                 <a:tc>
                   <a:txBody>
                     <a:bodyPr/>
@@ -22686,7 +21912,7 @@
         </p:nvSpPr>
         <p:spPr>
           <a:xfrm>
-            <a:off x="548640" y="4434840"/>
+            <a:off x="548640" y="4160520"/>
             <a:ext cx="10972800" cy="822960"/>
           </a:xfrm>
           <a:prstGeom prst="roundRect">
@@ -22732,7 +21958,7 @@
         </p:nvSpPr>
         <p:spPr>
           <a:xfrm>
-            <a:off x="868680" y="4663440"/>
+            <a:off x="868680" y="4389120"/>
             <a:ext cx="10332720" cy="457200"/>
           </a:xfrm>
           <a:prstGeom prst="rect">
@@ -24293,7 +23519,68 @@
         </p:nvSpPr>
         <p:spPr>
           <a:xfrm>
-            <a:off x="548640" y="2057400"/>
+            <a:off x="548640" y="1965960"/>
+            <a:ext cx="10972800" cy="274320"/>
+          </a:xfrm>
+          <a:prstGeom prst="rect">
+            <a:avLst/>
+          </a:prstGeom>
+          <a:noFill/>
+        </p:spPr>
+        <p:txBody>
+          <a:bodyPr wrap="square" anchor="t">
+            <a:spAutoFit/>
+          </a:bodyPr>
+          <a:lstStyle/>
+          <a:p>
+            <a:pPr algn="l"/>
+            <a:r>
+              <a:rPr sz="1400" b="0">
+                <a:solidFill>
+                  <a:srgbClr val="5A5470"/>
+                </a:solidFill>
+                <a:latin typeface="DIN Next LT W23"/>
+                <a:ea typeface="DIN Next LT W23"/>
+                <a:cs typeface="DIN Next LT W23"/>
+              </a:rPr>
+              <a:t>Three ways to encode categorical variables</a:t>
+            </a:r>
+          </a:p>
+        </p:txBody>
+      </p:sp>
+      <p:pic>
+        <p:nvPicPr>
+          <p:cNvPr id="9" name="Picture 8" descr="encoding-label-vs-onehot.png"/>
+          <p:cNvPicPr>
+            <a:picLocks noChangeAspect="1"/>
+          </p:cNvPicPr>
+          <p:nvPr/>
+        </p:nvPicPr>
+        <p:blipFill>
+          <a:blip r:embed="rId3"/>
+          <a:stretch>
+            <a:fillRect/>
+          </a:stretch>
+        </p:blipFill>
+        <p:spPr>
+          <a:xfrm>
+            <a:off x="548640" y="2286000"/>
+            <a:ext cx="10972800" cy="4876800"/>
+          </a:xfrm>
+          <a:prstGeom prst="rect">
+            <a:avLst/>
+          </a:prstGeom>
+        </p:spPr>
+      </p:pic>
+      <p:sp>
+        <p:nvSpPr>
+          <p:cNvPr id="10" name="TextBox 9"/>
+          <p:cNvSpPr txBox="1"/>
+          <p:nvPr/>
+        </p:nvSpPr>
+        <p:spPr>
+          <a:xfrm>
+            <a:off x="548640" y="5669280"/>
             <a:ext cx="10972800" cy="320040"/>
           </a:xfrm>
           <a:prstGeom prst="rect">
@@ -24309,7 +23596,7 @@
           <a:p>
             <a:pPr algn="l"/>
             <a:r>
-              <a:rPr sz="1600" b="0">
+              <a:rPr sz="1300" b="0">
                 <a:solidFill>
                   <a:srgbClr val="5A5470"/>
                 </a:solidFill>
@@ -24317,485 +23604,14 @@
                 <a:ea typeface="DIN Next LT W23"/>
                 <a:cs typeface="DIN Next LT W23"/>
               </a:rPr>
-              <a:t>Three ways to encode categorical variables</a:t>
-            </a:r>
-          </a:p>
-        </p:txBody>
-      </p:sp>
-      <p:sp>
-        <p:nvSpPr>
-          <p:cNvPr id="9" name="Rounded Rectangle 8"/>
-          <p:cNvSpPr/>
-          <p:nvPr/>
-        </p:nvSpPr>
-        <p:spPr>
-          <a:xfrm>
-            <a:off x="548640" y="2560320"/>
-            <a:ext cx="3429000" cy="3200400"/>
-          </a:xfrm>
-          <a:prstGeom prst="roundRect">
-            <a:avLst>
-              <a:gd name="adj" fmla="val 10000"/>
-            </a:avLst>
-          </a:prstGeom>
-          <a:solidFill>
-            <a:srgbClr val="EEE8FA"/>
-          </a:solidFill>
-          <a:ln>
-            <a:noFill/>
-          </a:ln>
-          <a:effectLst/>
-        </p:spPr>
-        <p:style>
-          <a:lnRef idx="1">
-            <a:schemeClr val="accent1"/>
-          </a:lnRef>
-          <a:fillRef idx="3">
-            <a:schemeClr val="accent1"/>
-          </a:fillRef>
-          <a:effectRef idx="2">
-            <a:schemeClr val="accent1"/>
-          </a:effectRef>
-          <a:fontRef idx="minor">
-            <a:schemeClr val="lt1"/>
-          </a:fontRef>
-        </p:style>
-        <p:txBody>
-          <a:bodyPr rtlCol="0" anchor="ctr"/>
-          <a:lstStyle/>
-          <a:p>
-            <a:pPr algn="ctr"/>
-          </a:p>
-        </p:txBody>
-      </p:sp>
-      <p:sp>
-        <p:nvSpPr>
-          <p:cNvPr id="10" name="TextBox 9"/>
-          <p:cNvSpPr txBox="1"/>
-          <p:nvPr/>
-        </p:nvSpPr>
-        <p:spPr>
-          <a:xfrm>
-            <a:off x="822960" y="2880360"/>
-            <a:ext cx="2880360" cy="274320"/>
-          </a:xfrm>
-          <a:prstGeom prst="rect">
-            <a:avLst/>
-          </a:prstGeom>
-          <a:noFill/>
-        </p:spPr>
-        <p:txBody>
-          <a:bodyPr wrap="square" anchor="t">
-            <a:spAutoFit/>
-          </a:bodyPr>
-          <a:lstStyle/>
-          <a:p>
-            <a:pPr algn="l"/>
-            <a:r>
-              <a:rPr sz="1200" b="1">
-                <a:solidFill>
-                  <a:srgbClr val="9E59CD"/>
-                </a:solidFill>
-                <a:latin typeface="DIN Next LT W23"/>
-                <a:ea typeface="DIN Next LT W23"/>
-                <a:cs typeface="DIN Next LT W23"/>
-              </a:rPr>
-              <a:t>01</a:t>
-            </a:r>
-          </a:p>
-        </p:txBody>
-      </p:sp>
-      <p:sp>
-        <p:nvSpPr>
-          <p:cNvPr id="11" name="TextBox 10"/>
-          <p:cNvSpPr txBox="1"/>
-          <p:nvPr/>
-        </p:nvSpPr>
-        <p:spPr>
-          <a:xfrm>
-            <a:off x="822960" y="3246120"/>
-            <a:ext cx="2880360" cy="502920"/>
-          </a:xfrm>
-          <a:prstGeom prst="rect">
-            <a:avLst/>
-          </a:prstGeom>
-          <a:noFill/>
-        </p:spPr>
-        <p:txBody>
-          <a:bodyPr wrap="square" anchor="t">
-            <a:spAutoFit/>
-          </a:bodyPr>
-          <a:lstStyle/>
-          <a:p>
-            <a:pPr algn="l"/>
-            <a:r>
-              <a:rPr sz="1600" b="1">
-                <a:solidFill>
-                  <a:srgbClr val="5234B7"/>
-                </a:solidFill>
-                <a:latin typeface="DIN Next LT W23"/>
-                <a:ea typeface="DIN Next LT W23"/>
-                <a:cs typeface="DIN Next LT W23"/>
-              </a:rPr>
-              <a:t>Label Encoding</a:t>
-            </a:r>
-          </a:p>
-        </p:txBody>
-      </p:sp>
-      <p:sp>
-        <p:nvSpPr>
-          <p:cNvPr id="12" name="TextBox 11"/>
-          <p:cNvSpPr txBox="1"/>
-          <p:nvPr/>
-        </p:nvSpPr>
-        <p:spPr>
-          <a:xfrm>
-            <a:off x="822960" y="3931920"/>
-            <a:ext cx="2880360" cy="1463040"/>
-          </a:xfrm>
-          <a:prstGeom prst="rect">
-            <a:avLst/>
-          </a:prstGeom>
-          <a:noFill/>
-        </p:spPr>
-        <p:txBody>
-          <a:bodyPr wrap="square" anchor="t">
-            <a:spAutoFit/>
-          </a:bodyPr>
-          <a:lstStyle/>
-          <a:p>
-            <a:pPr algn="l"/>
-            <a:r>
-              <a:rPr sz="1300" b="0">
-                <a:solidFill>
-                  <a:srgbClr val="5A5470"/>
-                </a:solidFill>
-                <a:latin typeface="DIN Next LT W23"/>
-                <a:ea typeface="DIN Next LT W23"/>
-                <a:cs typeface="DIN Next LT W23"/>
-              </a:rPr>
-              <a:t>Maps each category to a unique integer. Simple, but can invent false order for nominal data.</a:t>
-            </a:r>
-          </a:p>
-        </p:txBody>
-      </p:sp>
-      <p:sp>
-        <p:nvSpPr>
-          <p:cNvPr id="13" name="Rounded Rectangle 12"/>
-          <p:cNvSpPr/>
-          <p:nvPr/>
-        </p:nvSpPr>
-        <p:spPr>
-          <a:xfrm>
-            <a:off x="4206240" y="2560320"/>
-            <a:ext cx="3429000" cy="3200400"/>
-          </a:xfrm>
-          <a:prstGeom prst="roundRect">
-            <a:avLst>
-              <a:gd name="adj" fmla="val 10000"/>
-            </a:avLst>
-          </a:prstGeom>
-          <a:solidFill>
-            <a:srgbClr val="F5F1FC"/>
-          </a:solidFill>
-          <a:ln>
-            <a:noFill/>
-          </a:ln>
-          <a:effectLst/>
-        </p:spPr>
-        <p:style>
-          <a:lnRef idx="1">
-            <a:schemeClr val="accent1"/>
-          </a:lnRef>
-          <a:fillRef idx="3">
-            <a:schemeClr val="accent1"/>
-          </a:fillRef>
-          <a:effectRef idx="2">
-            <a:schemeClr val="accent1"/>
-          </a:effectRef>
-          <a:fontRef idx="minor">
-            <a:schemeClr val="lt1"/>
-          </a:fontRef>
-        </p:style>
-        <p:txBody>
-          <a:bodyPr rtlCol="0" anchor="ctr"/>
-          <a:lstStyle/>
-          <a:p>
-            <a:pPr algn="ctr"/>
-          </a:p>
-        </p:txBody>
-      </p:sp>
-      <p:sp>
-        <p:nvSpPr>
-          <p:cNvPr id="14" name="TextBox 13"/>
-          <p:cNvSpPr txBox="1"/>
-          <p:nvPr/>
-        </p:nvSpPr>
-        <p:spPr>
-          <a:xfrm>
-            <a:off x="4480560" y="2880360"/>
-            <a:ext cx="2880360" cy="274320"/>
-          </a:xfrm>
-          <a:prstGeom prst="rect">
-            <a:avLst/>
-          </a:prstGeom>
-          <a:noFill/>
-        </p:spPr>
-        <p:txBody>
-          <a:bodyPr wrap="square" anchor="t">
-            <a:spAutoFit/>
-          </a:bodyPr>
-          <a:lstStyle/>
-          <a:p>
-            <a:pPr algn="l"/>
-            <a:r>
-              <a:rPr sz="1200" b="1">
-                <a:solidFill>
-                  <a:srgbClr val="9E59CD"/>
-                </a:solidFill>
-                <a:latin typeface="DIN Next LT W23"/>
-                <a:ea typeface="DIN Next LT W23"/>
-                <a:cs typeface="DIN Next LT W23"/>
-              </a:rPr>
-              <a:t>02</a:t>
-            </a:r>
-          </a:p>
-        </p:txBody>
-      </p:sp>
-      <p:sp>
-        <p:nvSpPr>
-          <p:cNvPr id="15" name="TextBox 14"/>
-          <p:cNvSpPr txBox="1"/>
-          <p:nvPr/>
-        </p:nvSpPr>
-        <p:spPr>
-          <a:xfrm>
-            <a:off x="4480560" y="3246120"/>
-            <a:ext cx="2880360" cy="502920"/>
-          </a:xfrm>
-          <a:prstGeom prst="rect">
-            <a:avLst/>
-          </a:prstGeom>
-          <a:noFill/>
-        </p:spPr>
-        <p:txBody>
-          <a:bodyPr wrap="square" anchor="t">
-            <a:spAutoFit/>
-          </a:bodyPr>
-          <a:lstStyle/>
-          <a:p>
-            <a:pPr algn="l"/>
-            <a:r>
-              <a:rPr sz="1600" b="1">
-                <a:solidFill>
-                  <a:srgbClr val="5234B7"/>
-                </a:solidFill>
-                <a:latin typeface="DIN Next LT W23"/>
-                <a:ea typeface="DIN Next LT W23"/>
-                <a:cs typeface="DIN Next LT W23"/>
-              </a:rPr>
-              <a:t>One-Hot Encoding</a:t>
-            </a:r>
-          </a:p>
-        </p:txBody>
-      </p:sp>
-      <p:sp>
-        <p:nvSpPr>
-          <p:cNvPr id="16" name="TextBox 15"/>
-          <p:cNvSpPr txBox="1"/>
-          <p:nvPr/>
-        </p:nvSpPr>
-        <p:spPr>
-          <a:xfrm>
-            <a:off x="4480560" y="3931920"/>
-            <a:ext cx="2880360" cy="1463040"/>
-          </a:xfrm>
-          <a:prstGeom prst="rect">
-            <a:avLst/>
-          </a:prstGeom>
-          <a:noFill/>
-        </p:spPr>
-        <p:txBody>
-          <a:bodyPr wrap="square" anchor="t">
-            <a:spAutoFit/>
-          </a:bodyPr>
-          <a:lstStyle/>
-          <a:p>
-            <a:pPr algn="l"/>
-            <a:r>
-              <a:rPr sz="1300" b="0">
-                <a:solidFill>
-                  <a:srgbClr val="5A5470"/>
-                </a:solidFill>
-                <a:latin typeface="DIN Next LT W23"/>
-                <a:ea typeface="DIN Next LT W23"/>
-                <a:cs typeface="DIN Next LT W23"/>
-              </a:rPr>
-              <a:t>Creates a binary column per category. Safe for nominal data; increases feature count.</a:t>
-            </a:r>
-          </a:p>
-        </p:txBody>
-      </p:sp>
-      <p:sp>
-        <p:nvSpPr>
-          <p:cNvPr id="17" name="Rounded Rectangle 16"/>
-          <p:cNvSpPr/>
-          <p:nvPr/>
-        </p:nvSpPr>
-        <p:spPr>
-          <a:xfrm>
-            <a:off x="7863840" y="2560320"/>
-            <a:ext cx="3429000" cy="3200400"/>
-          </a:xfrm>
-          <a:prstGeom prst="roundRect">
-            <a:avLst>
-              <a:gd name="adj" fmla="val 10000"/>
-            </a:avLst>
-          </a:prstGeom>
-          <a:solidFill>
-            <a:srgbClr val="EEE8FA"/>
-          </a:solidFill>
-          <a:ln>
-            <a:noFill/>
-          </a:ln>
-          <a:effectLst/>
-        </p:spPr>
-        <p:style>
-          <a:lnRef idx="1">
-            <a:schemeClr val="accent1"/>
-          </a:lnRef>
-          <a:fillRef idx="3">
-            <a:schemeClr val="accent1"/>
-          </a:fillRef>
-          <a:effectRef idx="2">
-            <a:schemeClr val="accent1"/>
-          </a:effectRef>
-          <a:fontRef idx="minor">
-            <a:schemeClr val="lt1"/>
-          </a:fontRef>
-        </p:style>
-        <p:txBody>
-          <a:bodyPr rtlCol="0" anchor="ctr"/>
-          <a:lstStyle/>
-          <a:p>
-            <a:pPr algn="ctr"/>
-          </a:p>
-        </p:txBody>
-      </p:sp>
-      <p:sp>
-        <p:nvSpPr>
-          <p:cNvPr id="18" name="TextBox 17"/>
-          <p:cNvSpPr txBox="1"/>
-          <p:nvPr/>
-        </p:nvSpPr>
-        <p:spPr>
-          <a:xfrm>
-            <a:off x="8138160" y="2880360"/>
-            <a:ext cx="2880360" cy="274320"/>
-          </a:xfrm>
-          <a:prstGeom prst="rect">
-            <a:avLst/>
-          </a:prstGeom>
-          <a:noFill/>
-        </p:spPr>
-        <p:txBody>
-          <a:bodyPr wrap="square" anchor="t">
-            <a:spAutoFit/>
-          </a:bodyPr>
-          <a:lstStyle/>
-          <a:p>
-            <a:pPr algn="l"/>
-            <a:r>
-              <a:rPr sz="1200" b="1">
-                <a:solidFill>
-                  <a:srgbClr val="9E59CD"/>
-                </a:solidFill>
-                <a:latin typeface="DIN Next LT W23"/>
-                <a:ea typeface="DIN Next LT W23"/>
-                <a:cs typeface="DIN Next LT W23"/>
-              </a:rPr>
-              <a:t>03</a:t>
-            </a:r>
-          </a:p>
-        </p:txBody>
-      </p:sp>
-      <p:sp>
-        <p:nvSpPr>
-          <p:cNvPr id="19" name="TextBox 18"/>
-          <p:cNvSpPr txBox="1"/>
-          <p:nvPr/>
-        </p:nvSpPr>
-        <p:spPr>
-          <a:xfrm>
-            <a:off x="8138160" y="3246120"/>
-            <a:ext cx="2880360" cy="502920"/>
-          </a:xfrm>
-          <a:prstGeom prst="rect">
-            <a:avLst/>
-          </a:prstGeom>
-          <a:noFill/>
-        </p:spPr>
-        <p:txBody>
-          <a:bodyPr wrap="square" anchor="t">
-            <a:spAutoFit/>
-          </a:bodyPr>
-          <a:lstStyle/>
-          <a:p>
-            <a:pPr algn="l"/>
-            <a:r>
-              <a:rPr sz="1600" b="1">
-                <a:solidFill>
-                  <a:srgbClr val="5234B7"/>
-                </a:solidFill>
-                <a:latin typeface="DIN Next LT W23"/>
-                <a:ea typeface="DIN Next LT W23"/>
-                <a:cs typeface="DIN Next LT W23"/>
-              </a:rPr>
-              <a:t>Ordinal Encoding</a:t>
-            </a:r>
-          </a:p>
-        </p:txBody>
-      </p:sp>
-      <p:sp>
-        <p:nvSpPr>
-          <p:cNvPr id="20" name="TextBox 19"/>
-          <p:cNvSpPr txBox="1"/>
-          <p:nvPr/>
-        </p:nvSpPr>
-        <p:spPr>
-          <a:xfrm>
-            <a:off x="8138160" y="3931920"/>
-            <a:ext cx="2880360" cy="1463040"/>
-          </a:xfrm>
-          <a:prstGeom prst="rect">
-            <a:avLst/>
-          </a:prstGeom>
-          <a:noFill/>
-        </p:spPr>
-        <p:txBody>
-          <a:bodyPr wrap="square" anchor="t">
-            <a:spAutoFit/>
-          </a:bodyPr>
-          <a:lstStyle/>
-          <a:p>
-            <a:pPr algn="l"/>
-            <a:r>
-              <a:rPr sz="1300" b="0">
-                <a:solidFill>
-                  <a:srgbClr val="5A5470"/>
-                </a:solidFill>
-                <a:latin typeface="DIN Next LT W23"/>
-                <a:ea typeface="DIN Next LT W23"/>
-                <a:cs typeface="DIN Next LT W23"/>
-              </a:rPr>
-              <a:t>Assigns integers that preserve a meaningful ranking for ordered categories.</a:t>
-            </a:r>
-          </a:p>
-        </p:txBody>
-      </p:sp>
-      <p:sp>
-        <p:nvSpPr>
-          <p:cNvPr id="21" name="Rectangle 20"/>
+              <a:t>Label Encoding  ·  One-Hot Encoding  ·  Ordinal Encoding</a:t>
+            </a:r>
+          </a:p>
+        </p:txBody>
+      </p:sp>
+      <p:sp>
+        <p:nvSpPr>
+          <p:cNvPr id="11" name="Rectangle 10"/>
           <p:cNvSpPr/>
           <p:nvPr/>
         </p:nvSpPr>
@@ -24839,7 +23655,7 @@
       </p:sp>
       <p:sp>
         <p:nvSpPr>
-          <p:cNvPr id="22" name="TextBox 21"/>
+          <p:cNvPr id="12" name="TextBox 11"/>
           <p:cNvSpPr txBox="1"/>
           <p:nvPr/>
         </p:nvSpPr>
@@ -24876,7 +23692,7 @@
       </p:sp>
       <p:sp>
         <p:nvSpPr>
-          <p:cNvPr id="23" name="TextBox 22"/>
+          <p:cNvPr id="13" name="TextBox 12"/>
           <p:cNvSpPr txBox="1"/>
           <p:nvPr/>
         </p:nvSpPr>
@@ -25842,7 +24658,7 @@
         </p:nvGraphicFramePr>
         <p:xfrm>
           <a:off x="548640" y="2103120"/>
-          <a:ext cx="10972800" cy="1965960"/>
+          <a:ext cx="10972800" cy="1920240"/>
         </p:xfrm>
         <a:graphic>
           <a:graphicData uri="http://schemas.openxmlformats.org/drawingml/2006/table">
@@ -25854,7 +24670,7 @@
                 <a:gridCol w="5486400"/>
                 <a:gridCol w="5486400"/>
               </a:tblGrid>
-              <a:tr h="491490">
+              <a:tr h="480060">
                 <a:tc>
                   <a:txBody>
                     <a:bodyPr/>
@@ -25902,7 +24718,7 @@
                   </a:tcPr>
                 </a:tc>
               </a:tr>
-              <a:tr h="491490">
+              <a:tr h="480060">
                 <a:tc>
                   <a:txBody>
                     <a:bodyPr/>
@@ -25950,7 +24766,7 @@
                   </a:tcPr>
                 </a:tc>
               </a:tr>
-              <a:tr h="491490">
+              <a:tr h="480060">
                 <a:tc>
                   <a:txBody>
                     <a:bodyPr/>
@@ -25998,7 +24814,7 @@
                   </a:tcPr>
                 </a:tc>
               </a:tr>
-              <a:tr h="491490">
+              <a:tr h="480060">
                 <a:tc>
                   <a:txBody>
                     <a:bodyPr/>
@@ -26058,7 +24874,7 @@
         </p:nvSpPr>
         <p:spPr>
           <a:xfrm>
-            <a:off x="548640" y="4434840"/>
+            <a:off x="548640" y="4160520"/>
             <a:ext cx="10972800" cy="822960"/>
           </a:xfrm>
           <a:prstGeom prst="roundRect">
@@ -26104,7 +24920,7 @@
         </p:nvSpPr>
         <p:spPr>
           <a:xfrm>
-            <a:off x="868680" y="4663440"/>
+            <a:off x="868680" y="4389120"/>
             <a:ext cx="10332720" cy="457200"/>
           </a:xfrm>
           <a:prstGeom prst="rect">
@@ -28507,7 +27323,7 @@
         </p:nvGraphicFramePr>
         <p:xfrm>
           <a:off x="548640" y="2103120"/>
-          <a:ext cx="10972800" cy="1965960"/>
+          <a:ext cx="10972800" cy="1920240"/>
         </p:xfrm>
         <a:graphic>
           <a:graphicData uri="http://schemas.openxmlformats.org/drawingml/2006/table">
@@ -28521,7 +27337,7 @@
                 <a:gridCol w="2743200"/>
                 <a:gridCol w="2743200"/>
               </a:tblGrid>
-              <a:tr h="491490">
+              <a:tr h="480060">
                 <a:tc>
                   <a:txBody>
                     <a:bodyPr/>
@@ -28615,7 +27431,7 @@
                   </a:tcPr>
                 </a:tc>
               </a:tr>
-              <a:tr h="491490">
+              <a:tr h="480060">
                 <a:tc>
                   <a:txBody>
                     <a:bodyPr/>
@@ -28709,7 +27525,7 @@
                   </a:tcPr>
                 </a:tc>
               </a:tr>
-              <a:tr h="491490">
+              <a:tr h="480060">
                 <a:tc>
                   <a:txBody>
                     <a:bodyPr/>
@@ -28803,7 +27619,7 @@
                   </a:tcPr>
                 </a:tc>
               </a:tr>
-              <a:tr h="491490">
+              <a:tr h="480060">
                 <a:tc>
                   <a:txBody>
                     <a:bodyPr/>
@@ -28909,7 +27725,7 @@
         </p:nvSpPr>
         <p:spPr>
           <a:xfrm>
-            <a:off x="548640" y="4434840"/>
+            <a:off x="548640" y="4160520"/>
             <a:ext cx="10972800" cy="822960"/>
           </a:xfrm>
           <a:prstGeom prst="roundRect">
@@ -28955,7 +27771,7 @@
         </p:nvSpPr>
         <p:spPr>
           <a:xfrm>
-            <a:off x="868680" y="4663440"/>
+            <a:off x="868680" y="4389120"/>
             <a:ext cx="10332720" cy="457200"/>
           </a:xfrm>
           <a:prstGeom prst="rect">
@@ -30070,7 +28886,7 @@
         </p:nvGraphicFramePr>
         <p:xfrm>
           <a:off x="548640" y="2103120"/>
-          <a:ext cx="10972800" cy="1965960"/>
+          <a:ext cx="10972800" cy="1920240"/>
         </p:xfrm>
         <a:graphic>
           <a:graphicData uri="http://schemas.openxmlformats.org/drawingml/2006/table">
@@ -30083,7 +28899,7 @@
                 <a:gridCol w="3657600"/>
                 <a:gridCol w="3657600"/>
               </a:tblGrid>
-              <a:tr h="491490">
+              <a:tr h="480060">
                 <a:tc>
                   <a:txBody>
                     <a:bodyPr/>
@@ -30154,7 +28970,7 @@
                   </a:tcPr>
                 </a:tc>
               </a:tr>
-              <a:tr h="491490">
+              <a:tr h="480060">
                 <a:tc>
                   <a:txBody>
                     <a:bodyPr/>
@@ -30225,7 +29041,7 @@
                   </a:tcPr>
                 </a:tc>
               </a:tr>
-              <a:tr h="491490">
+              <a:tr h="480060">
                 <a:tc>
                   <a:txBody>
                     <a:bodyPr/>
@@ -30296,7 +29112,7 @@
                   </a:tcPr>
                 </a:tc>
               </a:tr>
-              <a:tr h="491490">
+              <a:tr h="480060">
                 <a:tc>
                   <a:txBody>
                     <a:bodyPr/>
@@ -30379,7 +29195,7 @@
         </p:nvSpPr>
         <p:spPr>
           <a:xfrm>
-            <a:off x="548640" y="4434840"/>
+            <a:off x="548640" y="4160520"/>
             <a:ext cx="10972800" cy="822960"/>
           </a:xfrm>
           <a:prstGeom prst="roundRect">
@@ -30425,7 +29241,7 @@
         </p:nvSpPr>
         <p:spPr>
           <a:xfrm>
-            <a:off x="868680" y="4663440"/>
+            <a:off x="868680" y="4389120"/>
             <a:ext cx="10332720" cy="457200"/>
           </a:xfrm>
           <a:prstGeom prst="rect">
@@ -32388,7 +31204,7 @@
         </p:nvGraphicFramePr>
         <p:xfrm>
           <a:off x="548640" y="2103120"/>
-          <a:ext cx="10972800" cy="1965960"/>
+          <a:ext cx="10972800" cy="1920240"/>
         </p:xfrm>
         <a:graphic>
           <a:graphicData uri="http://schemas.openxmlformats.org/drawingml/2006/table">
@@ -32400,7 +31216,7 @@
                 <a:gridCol w="5486400"/>
                 <a:gridCol w="5486400"/>
               </a:tblGrid>
-              <a:tr h="491490">
+              <a:tr h="480060">
                 <a:tc>
                   <a:txBody>
                     <a:bodyPr/>
@@ -32448,7 +31264,7 @@
                   </a:tcPr>
                 </a:tc>
               </a:tr>
-              <a:tr h="491490">
+              <a:tr h="480060">
                 <a:tc>
                   <a:txBody>
                     <a:bodyPr/>
@@ -32496,7 +31312,7 @@
                   </a:tcPr>
                 </a:tc>
               </a:tr>
-              <a:tr h="491490">
+              <a:tr h="480060">
                 <a:tc>
                   <a:txBody>
                     <a:bodyPr/>
@@ -32544,7 +31360,7 @@
                   </a:tcPr>
                 </a:tc>
               </a:tr>
-              <a:tr h="491490">
+              <a:tr h="480060">
                 <a:tc>
                   <a:txBody>
                     <a:bodyPr/>
@@ -32973,7 +31789,7 @@
         </p:nvGraphicFramePr>
         <p:xfrm>
           <a:off x="548640" y="2103120"/>
-          <a:ext cx="10972800" cy="1965960"/>
+          <a:ext cx="10972800" cy="1920240"/>
         </p:xfrm>
         <a:graphic>
           <a:graphicData uri="http://schemas.openxmlformats.org/drawingml/2006/table">
@@ -32985,7 +31801,7 @@
                 <a:gridCol w="5486400"/>
                 <a:gridCol w="5486400"/>
               </a:tblGrid>
-              <a:tr h="491490">
+              <a:tr h="480060">
                 <a:tc>
                   <a:txBody>
                     <a:bodyPr/>
@@ -33033,7 +31849,7 @@
                   </a:tcPr>
                 </a:tc>
               </a:tr>
-              <a:tr h="491490">
+              <a:tr h="480060">
                 <a:tc>
                   <a:txBody>
                     <a:bodyPr/>
@@ -33081,7 +31897,7 @@
                   </a:tcPr>
                 </a:tc>
               </a:tr>
-              <a:tr h="491490">
+              <a:tr h="480060">
                 <a:tc>
                   <a:txBody>
                     <a:bodyPr/>
@@ -33129,7 +31945,7 @@
                   </a:tcPr>
                 </a:tc>
               </a:tr>
-              <a:tr h="491490">
+              <a:tr h="480060">
                 <a:tc>
                   <a:txBody>
                     <a:bodyPr/>
@@ -33558,7 +32374,7 @@
         </p:nvGraphicFramePr>
         <p:xfrm>
           <a:off x="548640" y="2103120"/>
-          <a:ext cx="10972800" cy="1965960"/>
+          <a:ext cx="10972800" cy="1920240"/>
         </p:xfrm>
         <a:graphic>
           <a:graphicData uri="http://schemas.openxmlformats.org/drawingml/2006/table">
@@ -33570,7 +32386,7 @@
                 <a:gridCol w="5486400"/>
                 <a:gridCol w="5486400"/>
               </a:tblGrid>
-              <a:tr h="491490">
+              <a:tr h="480060">
                 <a:tc>
                   <a:txBody>
                     <a:bodyPr/>
@@ -33618,7 +32434,7 @@
                   </a:tcPr>
                 </a:tc>
               </a:tr>
-              <a:tr h="491490">
+              <a:tr h="480060">
                 <a:tc>
                   <a:txBody>
                     <a:bodyPr/>
@@ -33666,7 +32482,7 @@
                   </a:tcPr>
                 </a:tc>
               </a:tr>
-              <a:tr h="491490">
+              <a:tr h="480060">
                 <a:tc>
                   <a:txBody>
                     <a:bodyPr/>
@@ -33714,7 +32530,7 @@
                   </a:tcPr>
                 </a:tc>
               </a:tr>
-              <a:tr h="491490">
+              <a:tr h="480060">
                 <a:tc>
                   <a:txBody>
                     <a:bodyPr/>
@@ -34143,7 +32959,7 @@
         </p:nvGraphicFramePr>
         <p:xfrm>
           <a:off x="548640" y="2103120"/>
-          <a:ext cx="10972800" cy="1965960"/>
+          <a:ext cx="10972800" cy="1920240"/>
         </p:xfrm>
         <a:graphic>
           <a:graphicData uri="http://schemas.openxmlformats.org/drawingml/2006/table">
@@ -34156,7 +32972,7 @@
                 <a:gridCol w="3657600"/>
                 <a:gridCol w="3657600"/>
               </a:tblGrid>
-              <a:tr h="491490">
+              <a:tr h="480060">
                 <a:tc>
                   <a:txBody>
                     <a:bodyPr/>
@@ -34227,7 +33043,7 @@
                   </a:tcPr>
                 </a:tc>
               </a:tr>
-              <a:tr h="491490">
+              <a:tr h="480060">
                 <a:tc>
                   <a:txBody>
                     <a:bodyPr/>
@@ -34298,7 +33114,7 @@
                   </a:tcPr>
                 </a:tc>
               </a:tr>
-              <a:tr h="491490">
+              <a:tr h="480060">
                 <a:tc>
                   <a:txBody>
                     <a:bodyPr/>
@@ -34369,7 +33185,7 @@
                   </a:tcPr>
                 </a:tc>
               </a:tr>
-              <a:tr h="491490">
+              <a:tr h="480060">
                 <a:tc>
                   <a:txBody>
                     <a:bodyPr/>
@@ -34821,7 +33637,7 @@
         </p:nvGraphicFramePr>
         <p:xfrm>
           <a:off x="548640" y="2103120"/>
-          <a:ext cx="10972800" cy="1965960"/>
+          <a:ext cx="10972800" cy="1920240"/>
         </p:xfrm>
         <a:graphic>
           <a:graphicData uri="http://schemas.openxmlformats.org/drawingml/2006/table">
@@ -34833,7 +33649,7 @@
                 <a:gridCol w="5486400"/>
                 <a:gridCol w="5486400"/>
               </a:tblGrid>
-              <a:tr h="491490">
+              <a:tr h="480060">
                 <a:tc>
                   <a:txBody>
                     <a:bodyPr/>
@@ -34881,7 +33697,7 @@
                   </a:tcPr>
                 </a:tc>
               </a:tr>
-              <a:tr h="491490">
+              <a:tr h="480060">
                 <a:tc>
                   <a:txBody>
                     <a:bodyPr/>
@@ -34929,7 +33745,7 @@
                   </a:tcPr>
                 </a:tc>
               </a:tr>
-              <a:tr h="491490">
+              <a:tr h="480060">
                 <a:tc>
                   <a:txBody>
                     <a:bodyPr/>
@@ -34977,7 +33793,7 @@
                   </a:tcPr>
                 </a:tc>
               </a:tr>
-              <a:tr h="491490">
+              <a:tr h="480060">
                 <a:tc>
                   <a:txBody>
                     <a:bodyPr/>
@@ -36068,227 +34884,116 @@
           </a:p>
         </p:txBody>
       </p:sp>
-      <p:graphicFrame>
-        <p:nvGraphicFramePr>
-          <p:cNvPr id="8" name="Table 7"/>
-          <p:cNvGraphicFramePr>
-            <a:graphicFrameLocks noGrp="1"/>
-          </p:cNvGraphicFramePr>
-          <p:nvPr/>
-        </p:nvGraphicFramePr>
-        <p:xfrm>
-          <a:off x="548640" y="2103120"/>
-          <a:ext cx="10972800" cy="2788920"/>
-        </p:xfrm>
-        <a:graphic>
-          <a:graphicData uri="http://schemas.openxmlformats.org/drawingml/2006/table">
-            <a:tbl>
-              <a:tblPr firstRow="1" bandRow="1">
-                <a:tableStyleId>{5C22544A-7EE6-4342-B048-85BDC9FD1C3A}</a:tableStyleId>
-              </a:tblPr>
-              <a:tblGrid>
-                <a:gridCol w="5486400"/>
-                <a:gridCol w="5486400"/>
-              </a:tblGrid>
-              <a:tr h="697230">
-                <a:tc>
-                  <a:txBody>
-                    <a:bodyPr/>
-                    <a:lstStyle/>
-                    <a:p>
-                      <a:pPr algn="ctr"/>
-                      <a:r>
-                        <a:rPr sz="1100" b="1">
-                          <a:solidFill>
-                            <a:srgbClr val="FFFFFF"/>
-                          </a:solidFill>
-                          <a:latin typeface="Helvetica"/>
-                        </a:rPr>
-                        <a:t>Type</a:t>
-                      </a:r>
-                    </a:p>
-                  </a:txBody>
-                  <a:tcPr>
-                    <a:solidFill>
-                      <a:srgbClr val="5234B7"/>
-                    </a:solidFill>
-                  </a:tcPr>
-                </a:tc>
-                <a:tc>
-                  <a:txBody>
-                    <a:bodyPr/>
-                    <a:lstStyle/>
-                    <a:p>
-                      <a:pPr algn="ctr"/>
-                      <a:r>
-                        <a:rPr sz="1100" b="1">
-                          <a:solidFill>
-                            <a:srgbClr val="FFFFFF"/>
-                          </a:solidFill>
-                          <a:latin typeface="Helvetica"/>
-                        </a:rPr>
-                        <a:t>Meaning</a:t>
-                      </a:r>
-                    </a:p>
-                  </a:txBody>
-                  <a:tcPr>
-                    <a:solidFill>
-                      <a:srgbClr val="5234B7"/>
-                    </a:solidFill>
-                  </a:tcPr>
-                </a:tc>
-              </a:tr>
-              <a:tr h="697230">
-                <a:tc>
-                  <a:txBody>
-                    <a:bodyPr/>
-                    <a:lstStyle/>
-                    <a:p>
-                      <a:pPr algn="l"/>
-                      <a:r>
-                        <a:rPr sz="1200" b="1">
-                          <a:solidFill>
-                            <a:srgbClr val="5234B7"/>
-                          </a:solidFill>
-                          <a:latin typeface="Helvetica"/>
-                        </a:rPr>
-                        <a:t>MCAR (Missing Completely at Random)</a:t>
-                      </a:r>
-                    </a:p>
-                  </a:txBody>
-                  <a:tcPr>
-                    <a:solidFill>
-                      <a:srgbClr val="EEE8FA"/>
-                    </a:solidFill>
-                  </a:tcPr>
-                </a:tc>
-                <a:tc>
-                  <a:txBody>
-                    <a:bodyPr/>
-                    <a:lstStyle/>
-                    <a:p>
-                      <a:pPr algn="l"/>
-                      <a:r>
-                        <a:rPr sz="1200" b="0">
-                          <a:solidFill>
-                            <a:srgbClr val="121018"/>
-                          </a:solidFill>
-                          <a:latin typeface="Helvetica"/>
-                        </a:rPr>
-                        <a:t>Missingness happens randomly and is unrelated to any variable in the dataset.</a:t>
-                      </a:r>
-                    </a:p>
-                  </a:txBody>
-                  <a:tcPr>
-                    <a:solidFill>
-                      <a:srgbClr val="EEE8FA"/>
-                    </a:solidFill>
-                  </a:tcPr>
-                </a:tc>
-              </a:tr>
-              <a:tr h="697230">
-                <a:tc>
-                  <a:txBody>
-                    <a:bodyPr/>
-                    <a:lstStyle/>
-                    <a:p>
-                      <a:pPr algn="l"/>
-                      <a:r>
-                        <a:rPr sz="1200" b="1">
-                          <a:solidFill>
-                            <a:srgbClr val="5234B7"/>
-                          </a:solidFill>
-                          <a:latin typeface="Helvetica"/>
-                        </a:rPr>
-                        <a:t>MAR (Missing at Random)</a:t>
-                      </a:r>
-                    </a:p>
-                  </a:txBody>
-                  <a:tcPr>
-                    <a:solidFill>
-                      <a:srgbClr val="F5F1FC"/>
-                    </a:solidFill>
-                  </a:tcPr>
-                </a:tc>
-                <a:tc>
-                  <a:txBody>
-                    <a:bodyPr/>
-                    <a:lstStyle/>
-                    <a:p>
-                      <a:pPr algn="l"/>
-                      <a:r>
-                        <a:rPr sz="1200" b="0">
-                          <a:solidFill>
-                            <a:srgbClr val="121018"/>
-                          </a:solidFill>
-                          <a:latin typeface="Helvetica"/>
-                        </a:rPr>
-                        <a:t>Missingness depends on other observed variables, but not on the missing value itself.</a:t>
-                      </a:r>
-                    </a:p>
-                  </a:txBody>
-                  <a:tcPr>
-                    <a:solidFill>
-                      <a:srgbClr val="F5F1FC"/>
-                    </a:solidFill>
-                  </a:tcPr>
-                </a:tc>
-              </a:tr>
-              <a:tr h="697230">
-                <a:tc>
-                  <a:txBody>
-                    <a:bodyPr/>
-                    <a:lstStyle/>
-                    <a:p>
-                      <a:pPr algn="l"/>
-                      <a:r>
-                        <a:rPr sz="1200" b="1">
-                          <a:solidFill>
-                            <a:srgbClr val="5234B7"/>
-                          </a:solidFill>
-                          <a:latin typeface="Helvetica"/>
-                        </a:rPr>
-                        <a:t>NMAR (Not Missing at Random)</a:t>
-                      </a:r>
-                    </a:p>
-                  </a:txBody>
-                  <a:tcPr>
-                    <a:solidFill>
-                      <a:srgbClr val="EEE8FA"/>
-                    </a:solidFill>
-                  </a:tcPr>
-                </a:tc>
-                <a:tc>
-                  <a:txBody>
-                    <a:bodyPr/>
-                    <a:lstStyle/>
-                    <a:p>
-                      <a:pPr algn="l"/>
-                      <a:r>
-                        <a:rPr sz="1200" b="0">
-                          <a:solidFill>
-                            <a:srgbClr val="121018"/>
-                          </a:solidFill>
-                          <a:latin typeface="Helvetica"/>
-                        </a:rPr>
-                        <a:t>Missingness depends on the missing value itself or unobserved factors.</a:t>
-                      </a:r>
-                    </a:p>
-                  </a:txBody>
-                  <a:tcPr>
-                    <a:solidFill>
-                      <a:srgbClr val="EEE8FA"/>
-                    </a:solidFill>
-                  </a:tcPr>
-                </a:tc>
-              </a:tr>
-            </a:tbl>
-          </a:graphicData>
-        </a:graphic>
-      </p:graphicFrame>
-      <p:sp>
-        <p:nvSpPr>
-          <p:cNvPr id="9" name="Rectangle 8"/>
+      <p:pic>
+        <p:nvPicPr>
+          <p:cNvPr id="8" name="Picture 7" descr="missing-mcar-mar-mnar.png"/>
+          <p:cNvPicPr>
+            <a:picLocks noChangeAspect="1"/>
+          </p:cNvPicPr>
+          <p:nvPr/>
+        </p:nvPicPr>
+        <p:blipFill>
+          <a:blip r:embed="rId3"/>
+          <a:stretch>
+            <a:fillRect/>
+          </a:stretch>
+        </p:blipFill>
+        <p:spPr>
+          <a:xfrm>
+            <a:off x="548640" y="2011680"/>
+            <a:ext cx="10972800" cy="4673600"/>
+          </a:xfrm>
+          <a:prstGeom prst="rect">
+            <a:avLst/>
+          </a:prstGeom>
+        </p:spPr>
+      </p:pic>
+      <p:sp>
+        <p:nvSpPr>
+          <p:cNvPr id="9" name="Rounded Rectangle 8"/>
+          <p:cNvSpPr/>
+          <p:nvPr/>
+        </p:nvSpPr>
+        <p:spPr>
+          <a:xfrm>
+            <a:off x="548640" y="5074920"/>
+            <a:ext cx="10972800" cy="868680"/>
+          </a:xfrm>
+          <a:prstGeom prst="roundRect">
+            <a:avLst>
+              <a:gd name="adj" fmla="val 10000"/>
+            </a:avLst>
+          </a:prstGeom>
+          <a:solidFill>
+            <a:srgbClr val="EEE8FA"/>
+          </a:solidFill>
+          <a:ln>
+            <a:noFill/>
+          </a:ln>
+          <a:effectLst/>
+        </p:spPr>
+        <p:style>
+          <a:lnRef idx="1">
+            <a:schemeClr val="accent1"/>
+          </a:lnRef>
+          <a:fillRef idx="3">
+            <a:schemeClr val="accent1"/>
+          </a:fillRef>
+          <a:effectRef idx="2">
+            <a:schemeClr val="accent1"/>
+          </a:effectRef>
+          <a:fontRef idx="minor">
+            <a:schemeClr val="lt1"/>
+          </a:fontRef>
+        </p:style>
+        <p:txBody>
+          <a:bodyPr rtlCol="0" anchor="ctr"/>
+          <a:lstStyle/>
+          <a:p>
+            <a:pPr algn="ctr"/>
+          </a:p>
+        </p:txBody>
+      </p:sp>
+      <p:sp>
+        <p:nvSpPr>
+          <p:cNvPr id="10" name="TextBox 9"/>
+          <p:cNvSpPr txBox="1"/>
+          <p:nvPr/>
+        </p:nvSpPr>
+        <p:spPr>
+          <a:xfrm>
+            <a:off x="868680" y="5257800"/>
+            <a:ext cx="10332720" cy="502920"/>
+          </a:xfrm>
+          <a:prstGeom prst="rect">
+            <a:avLst/>
+          </a:prstGeom>
+          <a:noFill/>
+        </p:spPr>
+        <p:txBody>
+          <a:bodyPr wrap="square" anchor="t">
+            <a:spAutoFit/>
+          </a:bodyPr>
+          <a:lstStyle/>
+          <a:p>
+            <a:pPr algn="l"/>
+            <a:r>
+              <a:rPr sz="1400" b="0">
+                <a:solidFill>
+                  <a:srgbClr val="5A5470"/>
+                </a:solidFill>
+                <a:latin typeface="DIN Next LT W23"/>
+                <a:ea typeface="DIN Next LT W23"/>
+                <a:cs typeface="DIN Next LT W23"/>
+              </a:rPr>
+              <a:t>MCAR = random · MAR = explained by observed features · MNAR = tied to the missing value itself.</a:t>
+            </a:r>
+          </a:p>
+        </p:txBody>
+      </p:sp>
+      <p:sp>
+        <p:nvSpPr>
+          <p:cNvPr id="11" name="Rectangle 10"/>
           <p:cNvSpPr/>
           <p:nvPr/>
         </p:nvSpPr>
@@ -36332,7 +35037,7 @@
       </p:sp>
       <p:sp>
         <p:nvSpPr>
-          <p:cNvPr id="10" name="TextBox 9"/>
+          <p:cNvPr id="12" name="TextBox 11"/>
           <p:cNvSpPr txBox="1"/>
           <p:nvPr/>
         </p:nvSpPr>
@@ -36369,7 +35074,7 @@
       </p:sp>
       <p:sp>
         <p:nvSpPr>
-          <p:cNvPr id="11" name="TextBox 10"/>
+          <p:cNvPr id="13" name="TextBox 12"/>
           <p:cNvSpPr txBox="1"/>
           <p:nvPr/>
         </p:nvSpPr>
@@ -37635,7 +36340,7 @@
         </p:nvSpPr>
         <p:spPr>
           <a:xfrm>
-            <a:off x="548640" y="5760720"/>
+            <a:off x="548640" y="5532120"/>
             <a:ext cx="10972800" cy="822960"/>
           </a:xfrm>
           <a:prstGeom prst="roundRect">
@@ -37681,7 +36386,7 @@
         </p:nvSpPr>
         <p:spPr>
           <a:xfrm>
-            <a:off x="868680" y="5989320"/>
+            <a:off x="868680" y="5760720"/>
             <a:ext cx="10332720" cy="457200"/>
           </a:xfrm>
           <a:prstGeom prst="rect">
@@ -38077,16 +36782,40 @@
           </a:p>
         </p:txBody>
       </p:sp>
-      <p:sp>
-        <p:nvSpPr>
-          <p:cNvPr id="8" name="Rounded Rectangle 7"/>
+      <p:pic>
+        <p:nvPicPr>
+          <p:cNvPr id="8" name="Picture 7" descr="ml-process.png"/>
+          <p:cNvPicPr>
+            <a:picLocks noChangeAspect="1"/>
+          </p:cNvPicPr>
+          <p:nvPr/>
+        </p:nvPicPr>
+        <p:blipFill>
+          <a:blip r:embed="rId3"/>
+          <a:stretch>
+            <a:fillRect/>
+          </a:stretch>
+        </p:blipFill>
+        <p:spPr>
+          <a:xfrm>
+            <a:off x="548640" y="2011680"/>
+            <a:ext cx="10972800" cy="3765511"/>
+          </a:xfrm>
+          <a:prstGeom prst="rect">
+            <a:avLst/>
+          </a:prstGeom>
+        </p:spPr>
+      </p:pic>
+      <p:sp>
+        <p:nvSpPr>
+          <p:cNvPr id="9" name="Rounded Rectangle 8"/>
           <p:cNvSpPr/>
           <p:nvPr/>
         </p:nvSpPr>
         <p:spPr>
           <a:xfrm>
-            <a:off x="548640" y="2148840"/>
-            <a:ext cx="3429000" cy="3794760"/>
+            <a:off x="548640" y="4160520"/>
+            <a:ext cx="3429000" cy="1691640"/>
           </a:xfrm>
           <a:prstGeom prst="roundRect">
             <a:avLst>
@@ -38125,14 +36854,51 @@
       </p:sp>
       <p:sp>
         <p:nvSpPr>
-          <p:cNvPr id="9" name="TextBox 8"/>
-          <p:cNvSpPr txBox="1"/>
-          <p:nvPr/>
-        </p:nvSpPr>
-        <p:spPr>
-          <a:xfrm>
-            <a:off x="868680" y="2468880"/>
-            <a:ext cx="2743200" cy="274320"/>
+          <p:cNvPr id="10" name="TextBox 9"/>
+          <p:cNvSpPr txBox="1"/>
+          <p:nvPr/>
+        </p:nvSpPr>
+        <p:spPr>
+          <a:xfrm>
+            <a:off x="777240" y="4389120"/>
+            <a:ext cx="2926080" cy="320040"/>
+          </a:xfrm>
+          <a:prstGeom prst="rect">
+            <a:avLst/>
+          </a:prstGeom>
+          <a:noFill/>
+        </p:spPr>
+        <p:txBody>
+          <a:bodyPr wrap="square" anchor="t">
+            <a:spAutoFit/>
+          </a:bodyPr>
+          <a:lstStyle/>
+          <a:p>
+            <a:pPr algn="l"/>
+            <a:r>
+              <a:rPr sz="1300" b="1">
+                <a:solidFill>
+                  <a:srgbClr val="5234B7"/>
+                </a:solidFill>
+                <a:latin typeface="DIN Next LT W23"/>
+                <a:ea typeface="DIN Next LT W23"/>
+                <a:cs typeface="DIN Next LT W23"/>
+              </a:rPr>
+              <a:t>Step 1  ·  Data Pre-Processing</a:t>
+            </a:r>
+          </a:p>
+        </p:txBody>
+      </p:sp>
+      <p:sp>
+        <p:nvSpPr>
+          <p:cNvPr id="11" name="TextBox 10"/>
+          <p:cNvSpPr txBox="1"/>
+          <p:nvPr/>
+        </p:nvSpPr>
+        <p:spPr>
+          <a:xfrm>
+            <a:off x="777240" y="4846320"/>
+            <a:ext cx="2926080" cy="822960"/>
           </a:xfrm>
           <a:prstGeom prst="rect">
             <a:avLst/>
@@ -38149,360 +36915,27 @@
             <a:r>
               <a:rPr sz="1200" b="0">
                 <a:solidFill>
-                  <a:srgbClr val="9E59CD"/>
-                </a:solidFill>
-                <a:latin typeface="DIN Next LT W23"/>
-                <a:ea typeface="DIN Next LT W23"/>
-                <a:cs typeface="DIN Next LT W23"/>
-              </a:rPr>
-              <a:t>Step 1</a:t>
-            </a:r>
-          </a:p>
-        </p:txBody>
-      </p:sp>
-      <p:sp>
-        <p:nvSpPr>
-          <p:cNvPr id="10" name="TextBox 9"/>
-          <p:cNvSpPr txBox="1"/>
-          <p:nvPr/>
-        </p:nvSpPr>
-        <p:spPr>
-          <a:xfrm>
-            <a:off x="868680" y="2834640"/>
-            <a:ext cx="2834640" cy="502920"/>
-          </a:xfrm>
-          <a:prstGeom prst="rect">
-            <a:avLst/>
-          </a:prstGeom>
-          <a:noFill/>
-        </p:spPr>
-        <p:txBody>
-          <a:bodyPr wrap="square" anchor="t">
-            <a:spAutoFit/>
-          </a:bodyPr>
-          <a:lstStyle/>
-          <a:p>
-            <a:pPr algn="l"/>
-            <a:r>
-              <a:rPr sz="1700" b="1">
-                <a:solidFill>
-                  <a:srgbClr val="5234B7"/>
-                </a:solidFill>
-                <a:latin typeface="DIN Next LT W23"/>
-                <a:ea typeface="DIN Next LT W23"/>
-                <a:cs typeface="DIN Next LT W23"/>
-              </a:rPr>
-              <a:t>Data Pre-Processing</a:t>
-            </a:r>
-          </a:p>
-        </p:txBody>
-      </p:sp>
-      <p:sp>
-        <p:nvSpPr>
-          <p:cNvPr id="11" name="TextBox 10"/>
-          <p:cNvSpPr txBox="1"/>
-          <p:nvPr/>
-        </p:nvSpPr>
-        <p:spPr>
-          <a:xfrm>
-            <a:off x="868680" y="3566160"/>
-            <a:ext cx="228600" cy="320040"/>
-          </a:xfrm>
-          <a:prstGeom prst="rect">
-            <a:avLst/>
-          </a:prstGeom>
-          <a:noFill/>
-        </p:spPr>
-        <p:txBody>
-          <a:bodyPr wrap="square" anchor="t">
-            <a:spAutoFit/>
-          </a:bodyPr>
-          <a:lstStyle/>
-          <a:p>
-            <a:pPr algn="l"/>
-            <a:r>
-              <a:rPr sz="1400" b="0">
-                <a:solidFill>
-                  <a:srgbClr val="9E59CD"/>
-                </a:solidFill>
-                <a:latin typeface="DIN Next LT W23"/>
-                <a:ea typeface="DIN Next LT W23"/>
-                <a:cs typeface="DIN Next LT W23"/>
-              </a:rPr>
-              <a:t>–</a:t>
-            </a:r>
-          </a:p>
-        </p:txBody>
-      </p:sp>
-      <p:sp>
-        <p:nvSpPr>
-          <p:cNvPr id="12" name="TextBox 11"/>
-          <p:cNvSpPr txBox="1"/>
-          <p:nvPr/>
-        </p:nvSpPr>
-        <p:spPr>
-          <a:xfrm>
-            <a:off x="1097280" y="3566160"/>
-            <a:ext cx="2651760" cy="365760"/>
-          </a:xfrm>
-          <a:prstGeom prst="rect">
-            <a:avLst/>
-          </a:prstGeom>
-          <a:noFill/>
-        </p:spPr>
-        <p:txBody>
-          <a:bodyPr wrap="square" anchor="t">
-            <a:spAutoFit/>
-          </a:bodyPr>
-          <a:lstStyle/>
-          <a:p>
-            <a:pPr algn="l"/>
-            <a:r>
-              <a:rPr sz="1300" b="0">
-                <a:solidFill>
                   <a:srgbClr val="5A5470"/>
                 </a:solidFill>
                 <a:latin typeface="DIN Next LT W23"/>
                 <a:ea typeface="DIN Next LT W23"/>
                 <a:cs typeface="DIN Next LT W23"/>
               </a:rPr>
-              <a:t>Import the data</a:t>
-            </a:r>
-          </a:p>
-        </p:txBody>
-      </p:sp>
-      <p:sp>
-        <p:nvSpPr>
-          <p:cNvPr id="13" name="TextBox 12"/>
-          <p:cNvSpPr txBox="1"/>
-          <p:nvPr/>
-        </p:nvSpPr>
-        <p:spPr>
-          <a:xfrm>
-            <a:off x="868680" y="4023360"/>
-            <a:ext cx="228600" cy="320040"/>
-          </a:xfrm>
-          <a:prstGeom prst="rect">
-            <a:avLst/>
-          </a:prstGeom>
-          <a:noFill/>
-        </p:spPr>
-        <p:txBody>
-          <a:bodyPr wrap="square" anchor="t">
-            <a:spAutoFit/>
-          </a:bodyPr>
-          <a:lstStyle/>
-          <a:p>
-            <a:pPr algn="l"/>
-            <a:r>
-              <a:rPr sz="1400" b="0">
-                <a:solidFill>
-                  <a:srgbClr val="9E59CD"/>
-                </a:solidFill>
-                <a:latin typeface="DIN Next LT W23"/>
-                <a:ea typeface="DIN Next LT W23"/>
-                <a:cs typeface="DIN Next LT W23"/>
-              </a:rPr>
-              <a:t>–</a:t>
-            </a:r>
-          </a:p>
-        </p:txBody>
-      </p:sp>
-      <p:sp>
-        <p:nvSpPr>
-          <p:cNvPr id="14" name="TextBox 13"/>
-          <p:cNvSpPr txBox="1"/>
-          <p:nvPr/>
-        </p:nvSpPr>
-        <p:spPr>
-          <a:xfrm>
-            <a:off x="1097280" y="4023360"/>
-            <a:ext cx="2651760" cy="365760"/>
-          </a:xfrm>
-          <a:prstGeom prst="rect">
-            <a:avLst/>
-          </a:prstGeom>
-          <a:noFill/>
-        </p:spPr>
-        <p:txBody>
-          <a:bodyPr wrap="square" anchor="t">
-            <a:spAutoFit/>
-          </a:bodyPr>
-          <a:lstStyle/>
-          <a:p>
-            <a:pPr algn="l"/>
-            <a:r>
-              <a:rPr sz="1300" b="0">
-                <a:solidFill>
-                  <a:srgbClr val="5A5470"/>
-                </a:solidFill>
-                <a:latin typeface="DIN Next LT W23"/>
-                <a:ea typeface="DIN Next LT W23"/>
-                <a:cs typeface="DIN Next LT W23"/>
-              </a:rPr>
-              <a:t>Clean the data</a:t>
-            </a:r>
-          </a:p>
-        </p:txBody>
-      </p:sp>
-      <p:sp>
-        <p:nvSpPr>
-          <p:cNvPr id="15" name="TextBox 14"/>
-          <p:cNvSpPr txBox="1"/>
-          <p:nvPr/>
-        </p:nvSpPr>
-        <p:spPr>
-          <a:xfrm>
-            <a:off x="868680" y="4480560"/>
-            <a:ext cx="228600" cy="320040"/>
-          </a:xfrm>
-          <a:prstGeom prst="rect">
-            <a:avLst/>
-          </a:prstGeom>
-          <a:noFill/>
-        </p:spPr>
-        <p:txBody>
-          <a:bodyPr wrap="square" anchor="t">
-            <a:spAutoFit/>
-          </a:bodyPr>
-          <a:lstStyle/>
-          <a:p>
-            <a:pPr algn="l"/>
-            <a:r>
-              <a:rPr sz="1400" b="0">
-                <a:solidFill>
-                  <a:srgbClr val="9E59CD"/>
-                </a:solidFill>
-                <a:latin typeface="DIN Next LT W23"/>
-                <a:ea typeface="DIN Next LT W23"/>
-                <a:cs typeface="DIN Next LT W23"/>
-              </a:rPr>
-              <a:t>–</a:t>
-            </a:r>
-          </a:p>
-        </p:txBody>
-      </p:sp>
-      <p:sp>
-        <p:nvSpPr>
-          <p:cNvPr id="16" name="TextBox 15"/>
-          <p:cNvSpPr txBox="1"/>
-          <p:nvPr/>
-        </p:nvSpPr>
-        <p:spPr>
-          <a:xfrm>
-            <a:off x="1097280" y="4480560"/>
-            <a:ext cx="2651760" cy="365760"/>
-          </a:xfrm>
-          <a:prstGeom prst="rect">
-            <a:avLst/>
-          </a:prstGeom>
-          <a:noFill/>
-        </p:spPr>
-        <p:txBody>
-          <a:bodyPr wrap="square" anchor="t">
-            <a:spAutoFit/>
-          </a:bodyPr>
-          <a:lstStyle/>
-          <a:p>
-            <a:pPr algn="l"/>
-            <a:r>
-              <a:rPr sz="1300" b="0">
-                <a:solidFill>
-                  <a:srgbClr val="5A5470"/>
-                </a:solidFill>
-                <a:latin typeface="DIN Next LT W23"/>
-                <a:ea typeface="DIN Next LT W23"/>
-                <a:cs typeface="DIN Next LT W23"/>
-              </a:rPr>
-              <a:t>Split into training and test sets</a:t>
-            </a:r>
-          </a:p>
-        </p:txBody>
-      </p:sp>
-      <p:sp>
-        <p:nvSpPr>
-          <p:cNvPr id="17" name="TextBox 16"/>
-          <p:cNvSpPr txBox="1"/>
-          <p:nvPr/>
-        </p:nvSpPr>
-        <p:spPr>
-          <a:xfrm>
-            <a:off x="868680" y="4937760"/>
-            <a:ext cx="228600" cy="320040"/>
-          </a:xfrm>
-          <a:prstGeom prst="rect">
-            <a:avLst/>
-          </a:prstGeom>
-          <a:noFill/>
-        </p:spPr>
-        <p:txBody>
-          <a:bodyPr wrap="square" anchor="t">
-            <a:spAutoFit/>
-          </a:bodyPr>
-          <a:lstStyle/>
-          <a:p>
-            <a:pPr algn="l"/>
-            <a:r>
-              <a:rPr sz="1400" b="0">
-                <a:solidFill>
-                  <a:srgbClr val="9E59CD"/>
-                </a:solidFill>
-                <a:latin typeface="DIN Next LT W23"/>
-                <a:ea typeface="DIN Next LT W23"/>
-                <a:cs typeface="DIN Next LT W23"/>
-              </a:rPr>
-              <a:t>–</a:t>
-            </a:r>
-          </a:p>
-        </p:txBody>
-      </p:sp>
-      <p:sp>
-        <p:nvSpPr>
-          <p:cNvPr id="18" name="TextBox 17"/>
-          <p:cNvSpPr txBox="1"/>
-          <p:nvPr/>
-        </p:nvSpPr>
-        <p:spPr>
-          <a:xfrm>
-            <a:off x="1097280" y="4937760"/>
-            <a:ext cx="2651760" cy="365760"/>
-          </a:xfrm>
-          <a:prstGeom prst="rect">
-            <a:avLst/>
-          </a:prstGeom>
-          <a:noFill/>
-        </p:spPr>
-        <p:txBody>
-          <a:bodyPr wrap="square" anchor="t">
-            <a:spAutoFit/>
-          </a:bodyPr>
-          <a:lstStyle/>
-          <a:p>
-            <a:pPr algn="l"/>
-            <a:r>
-              <a:rPr sz="1300" b="0">
-                <a:solidFill>
-                  <a:srgbClr val="5A5470"/>
-                </a:solidFill>
-                <a:latin typeface="DIN Next LT W23"/>
-                <a:ea typeface="DIN Next LT W23"/>
-                <a:cs typeface="DIN Next LT W23"/>
-              </a:rPr>
-              <a:t>Feature scaling</a:t>
-            </a:r>
-          </a:p>
-        </p:txBody>
-      </p:sp>
-      <p:sp>
-        <p:nvSpPr>
-          <p:cNvPr id="19" name="Rounded Rectangle 18"/>
+              <a:t>Import the data · Clean the data</a:t>
+            </a:r>
+          </a:p>
+        </p:txBody>
+      </p:sp>
+      <p:sp>
+        <p:nvSpPr>
+          <p:cNvPr id="12" name="Rounded Rectangle 11"/>
           <p:cNvSpPr/>
           <p:nvPr/>
         </p:nvSpPr>
         <p:spPr>
           <a:xfrm>
-            <a:off x="4178808" y="2148840"/>
-            <a:ext cx="3429000" cy="3794760"/>
+            <a:off x="4178808" y="4160520"/>
+            <a:ext cx="3429000" cy="1691640"/>
           </a:xfrm>
           <a:prstGeom prst="roundRect">
             <a:avLst>
@@ -38541,14 +36974,51 @@
       </p:sp>
       <p:sp>
         <p:nvSpPr>
-          <p:cNvPr id="20" name="TextBox 19"/>
-          <p:cNvSpPr txBox="1"/>
-          <p:nvPr/>
-        </p:nvSpPr>
-        <p:spPr>
-          <a:xfrm>
-            <a:off x="4498848" y="2468880"/>
-            <a:ext cx="2743200" cy="274320"/>
+          <p:cNvPr id="13" name="TextBox 12"/>
+          <p:cNvSpPr txBox="1"/>
+          <p:nvPr/>
+        </p:nvSpPr>
+        <p:spPr>
+          <a:xfrm>
+            <a:off x="4407408" y="4389120"/>
+            <a:ext cx="2926080" cy="320040"/>
+          </a:xfrm>
+          <a:prstGeom prst="rect">
+            <a:avLst/>
+          </a:prstGeom>
+          <a:noFill/>
+        </p:spPr>
+        <p:txBody>
+          <a:bodyPr wrap="square" anchor="t">
+            <a:spAutoFit/>
+          </a:bodyPr>
+          <a:lstStyle/>
+          <a:p>
+            <a:pPr algn="l"/>
+            <a:r>
+              <a:rPr sz="1300" b="1">
+                <a:solidFill>
+                  <a:srgbClr val="5234B7"/>
+                </a:solidFill>
+                <a:latin typeface="DIN Next LT W23"/>
+                <a:ea typeface="DIN Next LT W23"/>
+                <a:cs typeface="DIN Next LT W23"/>
+              </a:rPr>
+              <a:t>Step 2  ·  Modelling</a:t>
+            </a:r>
+          </a:p>
+        </p:txBody>
+      </p:sp>
+      <p:sp>
+        <p:nvSpPr>
+          <p:cNvPr id="14" name="TextBox 13"/>
+          <p:cNvSpPr txBox="1"/>
+          <p:nvPr/>
+        </p:nvSpPr>
+        <p:spPr>
+          <a:xfrm>
+            <a:off x="4407408" y="4846320"/>
+            <a:ext cx="2926080" cy="822960"/>
           </a:xfrm>
           <a:prstGeom prst="rect">
             <a:avLst/>
@@ -38565,286 +37035,27 @@
             <a:r>
               <a:rPr sz="1200" b="0">
                 <a:solidFill>
-                  <a:srgbClr val="9E59CD"/>
-                </a:solidFill>
-                <a:latin typeface="DIN Next LT W23"/>
-                <a:ea typeface="DIN Next LT W23"/>
-                <a:cs typeface="DIN Next LT W23"/>
-              </a:rPr>
-              <a:t>Step 2</a:t>
-            </a:r>
-          </a:p>
-        </p:txBody>
-      </p:sp>
-      <p:sp>
-        <p:nvSpPr>
-          <p:cNvPr id="21" name="TextBox 20"/>
-          <p:cNvSpPr txBox="1"/>
-          <p:nvPr/>
-        </p:nvSpPr>
-        <p:spPr>
-          <a:xfrm>
-            <a:off x="4498848" y="2834640"/>
-            <a:ext cx="2834640" cy="502920"/>
-          </a:xfrm>
-          <a:prstGeom prst="rect">
-            <a:avLst/>
-          </a:prstGeom>
-          <a:noFill/>
-        </p:spPr>
-        <p:txBody>
-          <a:bodyPr wrap="square" anchor="t">
-            <a:spAutoFit/>
-          </a:bodyPr>
-          <a:lstStyle/>
-          <a:p>
-            <a:pPr algn="l"/>
-            <a:r>
-              <a:rPr sz="1700" b="1">
-                <a:solidFill>
-                  <a:srgbClr val="5234B7"/>
-                </a:solidFill>
-                <a:latin typeface="DIN Next LT W23"/>
-                <a:ea typeface="DIN Next LT W23"/>
-                <a:cs typeface="DIN Next LT W23"/>
-              </a:rPr>
-              <a:t>Modelling</a:t>
-            </a:r>
-          </a:p>
-        </p:txBody>
-      </p:sp>
-      <p:sp>
-        <p:nvSpPr>
-          <p:cNvPr id="22" name="TextBox 21"/>
-          <p:cNvSpPr txBox="1"/>
-          <p:nvPr/>
-        </p:nvSpPr>
-        <p:spPr>
-          <a:xfrm>
-            <a:off x="4498848" y="3566160"/>
-            <a:ext cx="228600" cy="320040"/>
-          </a:xfrm>
-          <a:prstGeom prst="rect">
-            <a:avLst/>
-          </a:prstGeom>
-          <a:noFill/>
-        </p:spPr>
-        <p:txBody>
-          <a:bodyPr wrap="square" anchor="t">
-            <a:spAutoFit/>
-          </a:bodyPr>
-          <a:lstStyle/>
-          <a:p>
-            <a:pPr algn="l"/>
-            <a:r>
-              <a:rPr sz="1400" b="0">
-                <a:solidFill>
-                  <a:srgbClr val="9E59CD"/>
-                </a:solidFill>
-                <a:latin typeface="DIN Next LT W23"/>
-                <a:ea typeface="DIN Next LT W23"/>
-                <a:cs typeface="DIN Next LT W23"/>
-              </a:rPr>
-              <a:t>–</a:t>
-            </a:r>
-          </a:p>
-        </p:txBody>
-      </p:sp>
-      <p:sp>
-        <p:nvSpPr>
-          <p:cNvPr id="23" name="TextBox 22"/>
-          <p:cNvSpPr txBox="1"/>
-          <p:nvPr/>
-        </p:nvSpPr>
-        <p:spPr>
-          <a:xfrm>
-            <a:off x="4727448" y="3566160"/>
-            <a:ext cx="2651760" cy="365760"/>
-          </a:xfrm>
-          <a:prstGeom prst="rect">
-            <a:avLst/>
-          </a:prstGeom>
-          <a:noFill/>
-        </p:spPr>
-        <p:txBody>
-          <a:bodyPr wrap="square" anchor="t">
-            <a:spAutoFit/>
-          </a:bodyPr>
-          <a:lstStyle/>
-          <a:p>
-            <a:pPr algn="l"/>
-            <a:r>
-              <a:rPr sz="1300" b="0">
-                <a:solidFill>
                   <a:srgbClr val="5A5470"/>
                 </a:solidFill>
                 <a:latin typeface="DIN Next LT W23"/>
                 <a:ea typeface="DIN Next LT W23"/>
                 <a:cs typeface="DIN Next LT W23"/>
               </a:rPr>
-              <a:t>Build the model</a:t>
-            </a:r>
-          </a:p>
-        </p:txBody>
-      </p:sp>
-      <p:sp>
-        <p:nvSpPr>
-          <p:cNvPr id="24" name="TextBox 23"/>
-          <p:cNvSpPr txBox="1"/>
-          <p:nvPr/>
-        </p:nvSpPr>
-        <p:spPr>
-          <a:xfrm>
-            <a:off x="4498848" y="4023360"/>
-            <a:ext cx="228600" cy="320040"/>
-          </a:xfrm>
-          <a:prstGeom prst="rect">
-            <a:avLst/>
-          </a:prstGeom>
-          <a:noFill/>
-        </p:spPr>
-        <p:txBody>
-          <a:bodyPr wrap="square" anchor="t">
-            <a:spAutoFit/>
-          </a:bodyPr>
-          <a:lstStyle/>
-          <a:p>
-            <a:pPr algn="l"/>
-            <a:r>
-              <a:rPr sz="1400" b="0">
-                <a:solidFill>
-                  <a:srgbClr val="9E59CD"/>
-                </a:solidFill>
-                <a:latin typeface="DIN Next LT W23"/>
-                <a:ea typeface="DIN Next LT W23"/>
-                <a:cs typeface="DIN Next LT W23"/>
-              </a:rPr>
-              <a:t>–</a:t>
-            </a:r>
-          </a:p>
-        </p:txBody>
-      </p:sp>
-      <p:sp>
-        <p:nvSpPr>
-          <p:cNvPr id="25" name="TextBox 24"/>
-          <p:cNvSpPr txBox="1"/>
-          <p:nvPr/>
-        </p:nvSpPr>
-        <p:spPr>
-          <a:xfrm>
-            <a:off x="4727448" y="4023360"/>
-            <a:ext cx="2651760" cy="365760"/>
-          </a:xfrm>
-          <a:prstGeom prst="rect">
-            <a:avLst/>
-          </a:prstGeom>
-          <a:noFill/>
-        </p:spPr>
-        <p:txBody>
-          <a:bodyPr wrap="square" anchor="t">
-            <a:spAutoFit/>
-          </a:bodyPr>
-          <a:lstStyle/>
-          <a:p>
-            <a:pPr algn="l"/>
-            <a:r>
-              <a:rPr sz="1300" b="0">
-                <a:solidFill>
-                  <a:srgbClr val="5A5470"/>
-                </a:solidFill>
-                <a:latin typeface="DIN Next LT W23"/>
-                <a:ea typeface="DIN Next LT W23"/>
-                <a:cs typeface="DIN Next LT W23"/>
-              </a:rPr>
-              <a:t>Train the model</a:t>
-            </a:r>
-          </a:p>
-        </p:txBody>
-      </p:sp>
-      <p:sp>
-        <p:nvSpPr>
-          <p:cNvPr id="26" name="TextBox 25"/>
-          <p:cNvSpPr txBox="1"/>
-          <p:nvPr/>
-        </p:nvSpPr>
-        <p:spPr>
-          <a:xfrm>
-            <a:off x="4498848" y="4480560"/>
-            <a:ext cx="228600" cy="320040"/>
-          </a:xfrm>
-          <a:prstGeom prst="rect">
-            <a:avLst/>
-          </a:prstGeom>
-          <a:noFill/>
-        </p:spPr>
-        <p:txBody>
-          <a:bodyPr wrap="square" anchor="t">
-            <a:spAutoFit/>
-          </a:bodyPr>
-          <a:lstStyle/>
-          <a:p>
-            <a:pPr algn="l"/>
-            <a:r>
-              <a:rPr sz="1400" b="0">
-                <a:solidFill>
-                  <a:srgbClr val="9E59CD"/>
-                </a:solidFill>
-                <a:latin typeface="DIN Next LT W23"/>
-                <a:ea typeface="DIN Next LT W23"/>
-                <a:cs typeface="DIN Next LT W23"/>
-              </a:rPr>
-              <a:t>–</a:t>
-            </a:r>
-          </a:p>
-        </p:txBody>
-      </p:sp>
-      <p:sp>
-        <p:nvSpPr>
-          <p:cNvPr id="27" name="TextBox 26"/>
-          <p:cNvSpPr txBox="1"/>
-          <p:nvPr/>
-        </p:nvSpPr>
-        <p:spPr>
-          <a:xfrm>
-            <a:off x="4727448" y="4480560"/>
-            <a:ext cx="2651760" cy="365760"/>
-          </a:xfrm>
-          <a:prstGeom prst="rect">
-            <a:avLst/>
-          </a:prstGeom>
-          <a:noFill/>
-        </p:spPr>
-        <p:txBody>
-          <a:bodyPr wrap="square" anchor="t">
-            <a:spAutoFit/>
-          </a:bodyPr>
-          <a:lstStyle/>
-          <a:p>
-            <a:pPr algn="l"/>
-            <a:r>
-              <a:rPr sz="1300" b="0">
-                <a:solidFill>
-                  <a:srgbClr val="5A5470"/>
-                </a:solidFill>
-                <a:latin typeface="DIN Next LT W23"/>
-                <a:ea typeface="DIN Next LT W23"/>
-                <a:cs typeface="DIN Next LT W23"/>
-              </a:rPr>
-              <a:t>Make predictions</a:t>
-            </a:r>
-          </a:p>
-        </p:txBody>
-      </p:sp>
-      <p:sp>
-        <p:nvSpPr>
-          <p:cNvPr id="28" name="Rounded Rectangle 27"/>
+              <a:t>Build the model · Train the model</a:t>
+            </a:r>
+          </a:p>
+        </p:txBody>
+      </p:sp>
+      <p:sp>
+        <p:nvSpPr>
+          <p:cNvPr id="15" name="Rounded Rectangle 14"/>
           <p:cNvSpPr/>
           <p:nvPr/>
         </p:nvSpPr>
         <p:spPr>
           <a:xfrm>
-            <a:off x="7808976" y="2148840"/>
-            <a:ext cx="3429000" cy="3794760"/>
+            <a:off x="7808976" y="4160520"/>
+            <a:ext cx="3429000" cy="1691640"/>
           </a:xfrm>
           <a:prstGeom prst="roundRect">
             <a:avLst>
@@ -38883,14 +37094,51 @@
       </p:sp>
       <p:sp>
         <p:nvSpPr>
-          <p:cNvPr id="29" name="TextBox 28"/>
-          <p:cNvSpPr txBox="1"/>
-          <p:nvPr/>
-        </p:nvSpPr>
-        <p:spPr>
-          <a:xfrm>
-            <a:off x="8129016" y="2468880"/>
-            <a:ext cx="2743200" cy="274320"/>
+          <p:cNvPr id="16" name="TextBox 15"/>
+          <p:cNvSpPr txBox="1"/>
+          <p:nvPr/>
+        </p:nvSpPr>
+        <p:spPr>
+          <a:xfrm>
+            <a:off x="8037576" y="4389120"/>
+            <a:ext cx="2926080" cy="320040"/>
+          </a:xfrm>
+          <a:prstGeom prst="rect">
+            <a:avLst/>
+          </a:prstGeom>
+          <a:noFill/>
+        </p:spPr>
+        <p:txBody>
+          <a:bodyPr wrap="square" anchor="t">
+            <a:spAutoFit/>
+          </a:bodyPr>
+          <a:lstStyle/>
+          <a:p>
+            <a:pPr algn="l"/>
+            <a:r>
+              <a:rPr sz="1300" b="1">
+                <a:solidFill>
+                  <a:srgbClr val="5234B7"/>
+                </a:solidFill>
+                <a:latin typeface="DIN Next LT W23"/>
+                <a:ea typeface="DIN Next LT W23"/>
+                <a:cs typeface="DIN Next LT W23"/>
+              </a:rPr>
+              <a:t>Step 3  ·  Evaluation</a:t>
+            </a:r>
+          </a:p>
+        </p:txBody>
+      </p:sp>
+      <p:sp>
+        <p:nvSpPr>
+          <p:cNvPr id="17" name="TextBox 16"/>
+          <p:cNvSpPr txBox="1"/>
+          <p:nvPr/>
+        </p:nvSpPr>
+        <p:spPr>
+          <a:xfrm>
+            <a:off x="8037576" y="4846320"/>
+            <a:ext cx="2926080" cy="822960"/>
           </a:xfrm>
           <a:prstGeom prst="rect">
             <a:avLst/>
@@ -38907,205 +37155,20 @@
             <a:r>
               <a:rPr sz="1200" b="0">
                 <a:solidFill>
-                  <a:srgbClr val="9E59CD"/>
-                </a:solidFill>
-                <a:latin typeface="DIN Next LT W23"/>
-                <a:ea typeface="DIN Next LT W23"/>
-                <a:cs typeface="DIN Next LT W23"/>
-              </a:rPr>
-              <a:t>Step 3</a:t>
-            </a:r>
-          </a:p>
-        </p:txBody>
-      </p:sp>
-      <p:sp>
-        <p:nvSpPr>
-          <p:cNvPr id="30" name="TextBox 29"/>
-          <p:cNvSpPr txBox="1"/>
-          <p:nvPr/>
-        </p:nvSpPr>
-        <p:spPr>
-          <a:xfrm>
-            <a:off x="8129016" y="2834640"/>
-            <a:ext cx="2834640" cy="502920"/>
-          </a:xfrm>
-          <a:prstGeom prst="rect">
-            <a:avLst/>
-          </a:prstGeom>
-          <a:noFill/>
-        </p:spPr>
-        <p:txBody>
-          <a:bodyPr wrap="square" anchor="t">
-            <a:spAutoFit/>
-          </a:bodyPr>
-          <a:lstStyle/>
-          <a:p>
-            <a:pPr algn="l"/>
-            <a:r>
-              <a:rPr sz="1700" b="1">
-                <a:solidFill>
-                  <a:srgbClr val="5234B7"/>
-                </a:solidFill>
-                <a:latin typeface="DIN Next LT W23"/>
-                <a:ea typeface="DIN Next LT W23"/>
-                <a:cs typeface="DIN Next LT W23"/>
-              </a:rPr>
-              <a:t>Evaluation</a:t>
-            </a:r>
-          </a:p>
-        </p:txBody>
-      </p:sp>
-      <p:sp>
-        <p:nvSpPr>
-          <p:cNvPr id="31" name="TextBox 30"/>
-          <p:cNvSpPr txBox="1"/>
-          <p:nvPr/>
-        </p:nvSpPr>
-        <p:spPr>
-          <a:xfrm>
-            <a:off x="8129016" y="3566160"/>
-            <a:ext cx="228600" cy="320040"/>
-          </a:xfrm>
-          <a:prstGeom prst="rect">
-            <a:avLst/>
-          </a:prstGeom>
-          <a:noFill/>
-        </p:spPr>
-        <p:txBody>
-          <a:bodyPr wrap="square" anchor="t">
-            <a:spAutoFit/>
-          </a:bodyPr>
-          <a:lstStyle/>
-          <a:p>
-            <a:pPr algn="l"/>
-            <a:r>
-              <a:rPr sz="1400" b="0">
-                <a:solidFill>
-                  <a:srgbClr val="9E59CD"/>
-                </a:solidFill>
-                <a:latin typeface="DIN Next LT W23"/>
-                <a:ea typeface="DIN Next LT W23"/>
-                <a:cs typeface="DIN Next LT W23"/>
-              </a:rPr>
-              <a:t>–</a:t>
-            </a:r>
-          </a:p>
-        </p:txBody>
-      </p:sp>
-      <p:sp>
-        <p:nvSpPr>
-          <p:cNvPr id="32" name="TextBox 31"/>
-          <p:cNvSpPr txBox="1"/>
-          <p:nvPr/>
-        </p:nvSpPr>
-        <p:spPr>
-          <a:xfrm>
-            <a:off x="8357616" y="3566160"/>
-            <a:ext cx="2651760" cy="365760"/>
-          </a:xfrm>
-          <a:prstGeom prst="rect">
-            <a:avLst/>
-          </a:prstGeom>
-          <a:noFill/>
-        </p:spPr>
-        <p:txBody>
-          <a:bodyPr wrap="square" anchor="t">
-            <a:spAutoFit/>
-          </a:bodyPr>
-          <a:lstStyle/>
-          <a:p>
-            <a:pPr algn="l"/>
-            <a:r>
-              <a:rPr sz="1300" b="0">
-                <a:solidFill>
                   <a:srgbClr val="5A5470"/>
                 </a:solidFill>
                 <a:latin typeface="DIN Next LT W23"/>
                 <a:ea typeface="DIN Next LT W23"/>
                 <a:cs typeface="DIN Next LT W23"/>
               </a:rPr>
-              <a:t>Calculate performance metrics</a:t>
-            </a:r>
-          </a:p>
-        </p:txBody>
-      </p:sp>
-      <p:sp>
-        <p:nvSpPr>
-          <p:cNvPr id="33" name="TextBox 32"/>
-          <p:cNvSpPr txBox="1"/>
-          <p:nvPr/>
-        </p:nvSpPr>
-        <p:spPr>
-          <a:xfrm>
-            <a:off x="8129016" y="4023360"/>
-            <a:ext cx="228600" cy="320040"/>
-          </a:xfrm>
-          <a:prstGeom prst="rect">
-            <a:avLst/>
-          </a:prstGeom>
-          <a:noFill/>
-        </p:spPr>
-        <p:txBody>
-          <a:bodyPr wrap="square" anchor="t">
-            <a:spAutoFit/>
-          </a:bodyPr>
-          <a:lstStyle/>
-          <a:p>
-            <a:pPr algn="l"/>
-            <a:r>
-              <a:rPr sz="1400" b="0">
-                <a:solidFill>
-                  <a:srgbClr val="9E59CD"/>
-                </a:solidFill>
-                <a:latin typeface="DIN Next LT W23"/>
-                <a:ea typeface="DIN Next LT W23"/>
-                <a:cs typeface="DIN Next LT W23"/>
-              </a:rPr>
-              <a:t>–</a:t>
-            </a:r>
-          </a:p>
-        </p:txBody>
-      </p:sp>
-      <p:sp>
-        <p:nvSpPr>
-          <p:cNvPr id="34" name="TextBox 33"/>
-          <p:cNvSpPr txBox="1"/>
-          <p:nvPr/>
-        </p:nvSpPr>
-        <p:spPr>
-          <a:xfrm>
-            <a:off x="8357616" y="4023360"/>
-            <a:ext cx="2651760" cy="365760"/>
-          </a:xfrm>
-          <a:prstGeom prst="rect">
-            <a:avLst/>
-          </a:prstGeom>
-          <a:noFill/>
-        </p:spPr>
-        <p:txBody>
-          <a:bodyPr wrap="square" anchor="t">
-            <a:spAutoFit/>
-          </a:bodyPr>
-          <a:lstStyle/>
-          <a:p>
-            <a:pPr algn="l"/>
-            <a:r>
-              <a:rPr sz="1300" b="0">
-                <a:solidFill>
-                  <a:srgbClr val="5A5470"/>
-                </a:solidFill>
-                <a:latin typeface="DIN Next LT W23"/>
-                <a:ea typeface="DIN Next LT W23"/>
-                <a:cs typeface="DIN Next LT W23"/>
-              </a:rPr>
-              <a:t>Make a final prediction</a:t>
-            </a:r>
-          </a:p>
-        </p:txBody>
-      </p:sp>
-      <p:sp>
-        <p:nvSpPr>
-          <p:cNvPr id="35" name="Rectangle 34"/>
+              <a:t>Calculate performance metrics · Make a final prediction</a:t>
+            </a:r>
+          </a:p>
+        </p:txBody>
+      </p:sp>
+      <p:sp>
+        <p:nvSpPr>
+          <p:cNvPr id="18" name="Rectangle 17"/>
           <p:cNvSpPr/>
           <p:nvPr/>
         </p:nvSpPr>
@@ -39149,7 +37212,7 @@
       </p:sp>
       <p:sp>
         <p:nvSpPr>
-          <p:cNvPr id="36" name="TextBox 35"/>
+          <p:cNvPr id="19" name="TextBox 18"/>
           <p:cNvSpPr txBox="1"/>
           <p:nvPr/>
         </p:nvSpPr>
@@ -39186,7 +37249,7 @@
       </p:sp>
       <p:sp>
         <p:nvSpPr>
-          <p:cNvPr id="37" name="TextBox 36"/>
+          <p:cNvPr id="20" name="TextBox 19"/>
           <p:cNvSpPr txBox="1"/>
           <p:nvPr/>
         </p:nvSpPr>
@@ -40748,7 +38811,7 @@
         </p:nvSpPr>
         <p:spPr>
           <a:xfrm>
-            <a:off x="548640" y="5760720"/>
+            <a:off x="548640" y="5532120"/>
             <a:ext cx="10972800" cy="822960"/>
           </a:xfrm>
           <a:prstGeom prst="roundRect">
@@ -40794,7 +38857,7 @@
         </p:nvSpPr>
         <p:spPr>
           <a:xfrm>
-            <a:off x="868680" y="5989320"/>
+            <a:off x="868680" y="5760720"/>
             <a:ext cx="10332720" cy="457200"/>
           </a:xfrm>
           <a:prstGeom prst="rect">
@@ -41946,7 +40009,7 @@
         </p:nvGraphicFramePr>
         <p:xfrm>
           <a:off x="548640" y="2103120"/>
-          <a:ext cx="10972800" cy="2011680"/>
+          <a:ext cx="10972800" cy="1965960"/>
         </p:xfrm>
         <a:graphic>
           <a:graphicData uri="http://schemas.openxmlformats.org/drawingml/2006/table">
@@ -41959,7 +40022,7 @@
                 <a:gridCol w="3657600"/>
                 <a:gridCol w="3657600"/>
               </a:tblGrid>
-              <a:tr h="670560">
+              <a:tr h="655320">
                 <a:tc>
                   <a:txBody>
                     <a:bodyPr/>
@@ -42030,7 +40093,7 @@
                   </a:tcPr>
                 </a:tc>
               </a:tr>
-              <a:tr h="670560">
+              <a:tr h="655320">
                 <a:tc>
                   <a:txBody>
                     <a:bodyPr/>
@@ -42101,7 +40164,7 @@
                   </a:tcPr>
                 </a:tc>
               </a:tr>
-              <a:tr h="670560">
+              <a:tr h="655320">
                 <a:tc>
                   <a:txBody>
                     <a:bodyPr/>
@@ -42184,7 +40247,7 @@
         </p:nvSpPr>
         <p:spPr>
           <a:xfrm>
-            <a:off x="548640" y="4480560"/>
+            <a:off x="548640" y="4206240"/>
             <a:ext cx="10972800" cy="822960"/>
           </a:xfrm>
           <a:prstGeom prst="roundRect">
@@ -42230,7 +40293,7 @@
         </p:nvSpPr>
         <p:spPr>
           <a:xfrm>
-            <a:off x="868680" y="4709160"/>
+            <a:off x="868680" y="4434840"/>
             <a:ext cx="10332720" cy="457200"/>
           </a:xfrm>
           <a:prstGeom prst="rect">
@@ -42634,8 +40697,8 @@
         </p:nvSpPr>
         <p:spPr>
           <a:xfrm>
-            <a:off x="548640" y="2057400"/>
-            <a:ext cx="10972800" cy="1234440"/>
+            <a:off x="548640" y="1965960"/>
+            <a:ext cx="10972800" cy="685800"/>
           </a:xfrm>
           <a:prstGeom prst="roundRect">
             <a:avLst>
@@ -42680,23 +40743,23 @@
         </p:nvSpPr>
         <p:spPr>
           <a:xfrm>
-            <a:off x="868680" y="2286000"/>
-            <a:ext cx="10332720" cy="868680"/>
-          </a:xfrm>
-          <a:prstGeom prst="rect">
-            <a:avLst/>
-          </a:prstGeom>
-          <a:noFill/>
-        </p:spPr>
-        <p:txBody>
-          <a:bodyPr wrap="square" anchor="t">
-            <a:spAutoFit/>
-          </a:bodyPr>
-          <a:lstStyle/>
-          <a:p>
-            <a:pPr algn="l"/>
-            <a:r>
-              <a:rPr sz="1500" b="0">
+            <a:off x="868680" y="2103120"/>
+            <a:ext cx="10332720" cy="457200"/>
+          </a:xfrm>
+          <a:prstGeom prst="rect">
+            <a:avLst/>
+          </a:prstGeom>
+          <a:noFill/>
+        </p:spPr>
+        <p:txBody>
+          <a:bodyPr wrap="square" anchor="t">
+            <a:spAutoFit/>
+          </a:bodyPr>
+          <a:lstStyle/>
+          <a:p>
+            <a:pPr algn="l"/>
+            <a:r>
+              <a:rPr sz="1400" b="0">
                 <a:solidFill>
                   <a:srgbClr val="121018"/>
                 </a:solidFill>
@@ -42709,15 +40772,39 @@
           </a:p>
         </p:txBody>
       </p:sp>
-      <p:sp>
-        <p:nvSpPr>
-          <p:cNvPr id="10" name="TextBox 9"/>
-          <p:cNvSpPr txBox="1"/>
-          <p:nvPr/>
-        </p:nvSpPr>
-        <p:spPr>
-          <a:xfrm>
-            <a:off x="548640" y="3566160"/>
+      <p:pic>
+        <p:nvPicPr>
+          <p:cNvPr id="10" name="Picture 9" descr="knn-neighbors.png"/>
+          <p:cNvPicPr>
+            <a:picLocks noChangeAspect="1"/>
+          </p:cNvPicPr>
+          <p:nvPr/>
+        </p:nvPicPr>
+        <p:blipFill>
+          <a:blip r:embed="rId3"/>
+          <a:stretch>
+            <a:fillRect/>
+          </a:stretch>
+        </p:blipFill>
+        <p:spPr>
+          <a:xfrm>
+            <a:off x="548640" y="2788920"/>
+            <a:ext cx="10972800" cy="5059953"/>
+          </a:xfrm>
+          <a:prstGeom prst="rect">
+            <a:avLst/>
+          </a:prstGeom>
+        </p:spPr>
+      </p:pic>
+      <p:sp>
+        <p:nvSpPr>
+          <p:cNvPr id="11" name="TextBox 10"/>
+          <p:cNvSpPr txBox="1"/>
+          <p:nvPr/>
+        </p:nvSpPr>
+        <p:spPr>
+          <a:xfrm>
+            <a:off x="548640" y="5349240"/>
             <a:ext cx="320040" cy="365760"/>
           </a:xfrm>
           <a:prstGeom prst="rect">
@@ -42733,7 +40820,7 @@
           <a:p>
             <a:pPr algn="l"/>
             <a:r>
-              <a:rPr sz="1600" b="0">
+              <a:rPr sz="1400" b="0">
                 <a:solidFill>
                   <a:srgbClr val="9E59CD"/>
                 </a:solidFill>
@@ -42748,13 +40835,13 @@
       </p:sp>
       <p:sp>
         <p:nvSpPr>
-          <p:cNvPr id="11" name="TextBox 10"/>
-          <p:cNvSpPr txBox="1"/>
-          <p:nvPr/>
-        </p:nvSpPr>
-        <p:spPr>
-          <a:xfrm>
-            <a:off x="914400" y="3566160"/>
+          <p:cNvPr id="12" name="TextBox 11"/>
+          <p:cNvSpPr txBox="1"/>
+          <p:nvPr/>
+        </p:nvSpPr>
+        <p:spPr>
+          <a:xfrm>
+            <a:off x="914400" y="5349240"/>
             <a:ext cx="10241280" cy="411480"/>
           </a:xfrm>
           <a:prstGeom prst="rect">
@@ -42770,7 +40857,7 @@
           <a:p>
             <a:pPr algn="l"/>
             <a:r>
-              <a:rPr sz="1600" b="0">
+              <a:rPr sz="1400" b="0">
                 <a:solidFill>
                   <a:srgbClr val="121018"/>
                 </a:solidFill>
@@ -42785,13 +40872,13 @@
       </p:sp>
       <p:sp>
         <p:nvSpPr>
-          <p:cNvPr id="12" name="TextBox 11"/>
-          <p:cNvSpPr txBox="1"/>
-          <p:nvPr/>
-        </p:nvSpPr>
-        <p:spPr>
-          <a:xfrm>
-            <a:off x="548640" y="4187952"/>
+          <p:cNvPr id="13" name="TextBox 12"/>
+          <p:cNvSpPr txBox="1"/>
+          <p:nvPr/>
+        </p:nvSpPr>
+        <p:spPr>
+          <a:xfrm>
+            <a:off x="548640" y="5971032"/>
             <a:ext cx="320040" cy="365760"/>
           </a:xfrm>
           <a:prstGeom prst="rect">
@@ -42807,7 +40894,7 @@
           <a:p>
             <a:pPr algn="l"/>
             <a:r>
-              <a:rPr sz="1600" b="0">
+              <a:rPr sz="1400" b="0">
                 <a:solidFill>
                   <a:srgbClr val="9E59CD"/>
                 </a:solidFill>
@@ -42822,13 +40909,13 @@
       </p:sp>
       <p:sp>
         <p:nvSpPr>
-          <p:cNvPr id="13" name="TextBox 12"/>
-          <p:cNvSpPr txBox="1"/>
-          <p:nvPr/>
-        </p:nvSpPr>
-        <p:spPr>
-          <a:xfrm>
-            <a:off x="914400" y="4187952"/>
+          <p:cNvPr id="14" name="TextBox 13"/>
+          <p:cNvSpPr txBox="1"/>
+          <p:nvPr/>
+        </p:nvSpPr>
+        <p:spPr>
+          <a:xfrm>
+            <a:off x="914400" y="5971032"/>
             <a:ext cx="10241280" cy="411480"/>
           </a:xfrm>
           <a:prstGeom prst="rect">
@@ -42844,7 +40931,7 @@
           <a:p>
             <a:pPr algn="l"/>
             <a:r>
-              <a:rPr sz="1600" b="0">
+              <a:rPr sz="1400" b="0">
                 <a:solidFill>
                   <a:srgbClr val="121018"/>
                 </a:solidFill>
@@ -42859,81 +40946,7 @@
       </p:sp>
       <p:sp>
         <p:nvSpPr>
-          <p:cNvPr id="14" name="TextBox 13"/>
-          <p:cNvSpPr txBox="1"/>
-          <p:nvPr/>
-        </p:nvSpPr>
-        <p:spPr>
-          <a:xfrm>
-            <a:off x="548640" y="4809744"/>
-            <a:ext cx="320040" cy="365760"/>
-          </a:xfrm>
-          <a:prstGeom prst="rect">
-            <a:avLst/>
-          </a:prstGeom>
-          <a:noFill/>
-        </p:spPr>
-        <p:txBody>
-          <a:bodyPr wrap="square" anchor="t">
-            <a:spAutoFit/>
-          </a:bodyPr>
-          <a:lstStyle/>
-          <a:p>
-            <a:pPr algn="l"/>
-            <a:r>
-              <a:rPr sz="1600" b="0">
-                <a:solidFill>
-                  <a:srgbClr val="9E59CD"/>
-                </a:solidFill>
-                <a:latin typeface="DIN Next LT W23"/>
-                <a:ea typeface="DIN Next LT W23"/>
-                <a:cs typeface="DIN Next LT W23"/>
-              </a:rPr>
-              <a:t>–</a:t>
-            </a:r>
-          </a:p>
-        </p:txBody>
-      </p:sp>
-      <p:sp>
-        <p:nvSpPr>
-          <p:cNvPr id="15" name="TextBox 14"/>
-          <p:cNvSpPr txBox="1"/>
-          <p:nvPr/>
-        </p:nvSpPr>
-        <p:spPr>
-          <a:xfrm>
-            <a:off x="914400" y="4809744"/>
-            <a:ext cx="10241280" cy="411480"/>
-          </a:xfrm>
-          <a:prstGeom prst="rect">
-            <a:avLst/>
-          </a:prstGeom>
-          <a:noFill/>
-        </p:spPr>
-        <p:txBody>
-          <a:bodyPr wrap="square" anchor="t">
-            <a:spAutoFit/>
-          </a:bodyPr>
-          <a:lstStyle/>
-          <a:p>
-            <a:pPr algn="l"/>
-            <a:r>
-              <a:rPr sz="1600" b="0">
-                <a:solidFill>
-                  <a:srgbClr val="121018"/>
-                </a:solidFill>
-                <a:latin typeface="DIN Next LT W23"/>
-                <a:ea typeface="DIN Next LT W23"/>
-                <a:cs typeface="DIN Next LT W23"/>
-              </a:rPr>
-              <a:t>This works under MAR because missingness is explained by observed patterns, not by the missing value alone.</a:t>
-            </a:r>
-          </a:p>
-        </p:txBody>
-      </p:sp>
-      <p:sp>
-        <p:nvSpPr>
-          <p:cNvPr id="16" name="Rectangle 15"/>
+          <p:cNvPr id="15" name="Rectangle 14"/>
           <p:cNvSpPr/>
           <p:nvPr/>
         </p:nvSpPr>
@@ -42977,7 +40990,7 @@
       </p:sp>
       <p:sp>
         <p:nvSpPr>
-          <p:cNvPr id="17" name="TextBox 16"/>
+          <p:cNvPr id="16" name="TextBox 15"/>
           <p:cNvSpPr txBox="1"/>
           <p:nvPr/>
         </p:nvSpPr>
@@ -43014,7 +41027,7 @@
       </p:sp>
       <p:sp>
         <p:nvSpPr>
-          <p:cNvPr id="18" name="TextBox 17"/>
+          <p:cNvPr id="17" name="TextBox 16"/>
           <p:cNvSpPr txBox="1"/>
           <p:nvPr/>
         </p:nvSpPr>
@@ -43308,7 +41321,7 @@
         </p:nvGraphicFramePr>
         <p:xfrm>
           <a:off x="548640" y="2103120"/>
-          <a:ext cx="10972800" cy="2468880"/>
+          <a:ext cx="10972800" cy="2423160"/>
         </p:xfrm>
         <a:graphic>
           <a:graphicData uri="http://schemas.openxmlformats.org/drawingml/2006/table">
@@ -43322,7 +41335,7 @@
                 <a:gridCol w="2743200"/>
                 <a:gridCol w="2743200"/>
               </a:tblGrid>
-              <a:tr h="493776">
+              <a:tr h="484632">
                 <a:tc>
                   <a:txBody>
                     <a:bodyPr/>
@@ -43416,7 +41429,7 @@
                   </a:tcPr>
                 </a:tc>
               </a:tr>
-              <a:tr h="493776">
+              <a:tr h="484632">
                 <a:tc>
                   <a:txBody>
                     <a:bodyPr/>
@@ -43510,7 +41523,7 @@
                   </a:tcPr>
                 </a:tc>
               </a:tr>
-              <a:tr h="493776">
+              <a:tr h="484632">
                 <a:tc>
                   <a:txBody>
                     <a:bodyPr/>
@@ -43604,7 +41617,7 @@
                   </a:tcPr>
                 </a:tc>
               </a:tr>
-              <a:tr h="493776">
+              <a:tr h="484632">
                 <a:tc>
                   <a:txBody>
                     <a:bodyPr/>
@@ -43698,7 +41711,7 @@
                   </a:tcPr>
                 </a:tc>
               </a:tr>
-              <a:tr h="493776">
+              <a:tr h="484632">
                 <a:tc>
                   <a:txBody>
                     <a:bodyPr/>
@@ -43804,7 +41817,7 @@
         </p:nvSpPr>
         <p:spPr>
           <a:xfrm>
-            <a:off x="548640" y="4937760"/>
+            <a:off x="548640" y="4663440"/>
             <a:ext cx="10972800" cy="822960"/>
           </a:xfrm>
           <a:prstGeom prst="roundRect">
@@ -43850,7 +41863,7 @@
         </p:nvSpPr>
         <p:spPr>
           <a:xfrm>
-            <a:off x="868680" y="5166360"/>
+            <a:off x="868680" y="4892040"/>
             <a:ext cx="10332720" cy="457200"/>
           </a:xfrm>
           <a:prstGeom prst="rect">
@@ -46390,7 +44403,7 @@
         </p:nvGraphicFramePr>
         <p:xfrm>
           <a:off x="548640" y="2103120"/>
-          <a:ext cx="10972800" cy="2971800"/>
+          <a:ext cx="10972800" cy="2926080"/>
         </p:xfrm>
         <a:graphic>
           <a:graphicData uri="http://schemas.openxmlformats.org/drawingml/2006/table">
@@ -46403,7 +44416,7 @@
                 <a:gridCol w="3657600"/>
                 <a:gridCol w="3657600"/>
               </a:tblGrid>
-              <a:tr h="495300">
+              <a:tr h="487680">
                 <a:tc>
                   <a:txBody>
                     <a:bodyPr/>
@@ -46474,7 +44487,7 @@
                   </a:tcPr>
                 </a:tc>
               </a:tr>
-              <a:tr h="495300">
+              <a:tr h="487680">
                 <a:tc>
                   <a:txBody>
                     <a:bodyPr/>
@@ -46545,7 +44558,7 @@
                   </a:tcPr>
                 </a:tc>
               </a:tr>
-              <a:tr h="495300">
+              <a:tr h="487680">
                 <a:tc>
                   <a:txBody>
                     <a:bodyPr/>
@@ -46616,7 +44629,7 @@
                   </a:tcPr>
                 </a:tc>
               </a:tr>
-              <a:tr h="495300">
+              <a:tr h="487680">
                 <a:tc>
                   <a:txBody>
                     <a:bodyPr/>
@@ -46687,7 +44700,7 @@
                   </a:tcPr>
                 </a:tc>
               </a:tr>
-              <a:tr h="495300">
+              <a:tr h="487680">
                 <a:tc>
                   <a:txBody>
                     <a:bodyPr/>
@@ -46758,7 +44771,7 @@
                   </a:tcPr>
                 </a:tc>
               </a:tr>
-              <a:tr h="495300">
+              <a:tr h="487680">
                 <a:tc>
                   <a:txBody>
                     <a:bodyPr/>
@@ -46841,7 +44854,7 @@
         </p:nvSpPr>
         <p:spPr>
           <a:xfrm>
-            <a:off x="548640" y="5440680"/>
+            <a:off x="548640" y="5166360"/>
             <a:ext cx="10972800" cy="822960"/>
           </a:xfrm>
           <a:prstGeom prst="roundRect">
@@ -46887,7 +44900,7 @@
         </p:nvSpPr>
         <p:spPr>
           <a:xfrm>
-            <a:off x="868680" y="5669280"/>
+            <a:off x="868680" y="5394960"/>
             <a:ext cx="10332720" cy="457200"/>
           </a:xfrm>
           <a:prstGeom prst="rect">
@@ -47291,7 +45304,7 @@
         </p:nvSpPr>
         <p:spPr>
           <a:xfrm>
-            <a:off x="548640" y="2194560"/>
+            <a:off x="548640" y="2148840"/>
             <a:ext cx="320040" cy="365760"/>
           </a:xfrm>
           <a:prstGeom prst="rect">
@@ -47307,7 +45320,7 @@
           <a:p>
             <a:pPr algn="l"/>
             <a:r>
-              <a:rPr sz="2000" b="0">
+              <a:rPr sz="1800" b="0">
                 <a:solidFill>
                   <a:srgbClr val="9E59CD"/>
                 </a:solidFill>
@@ -47328,7 +45341,7 @@
         </p:nvSpPr>
         <p:spPr>
           <a:xfrm>
-            <a:off x="914400" y="2194560"/>
+            <a:off x="914400" y="2148840"/>
             <a:ext cx="10241280" cy="411480"/>
           </a:xfrm>
           <a:prstGeom prst="rect">
@@ -47344,7 +45357,7 @@
           <a:p>
             <a:pPr algn="l"/>
             <a:r>
-              <a:rPr sz="2000" b="0">
+              <a:rPr sz="1800" b="0">
                 <a:solidFill>
                   <a:srgbClr val="121018"/>
                 </a:solidFill>
@@ -47365,7 +45378,7 @@
         </p:nvSpPr>
         <p:spPr>
           <a:xfrm>
-            <a:off x="548640" y="2816352"/>
+            <a:off x="548640" y="2770632"/>
             <a:ext cx="320040" cy="365760"/>
           </a:xfrm>
           <a:prstGeom prst="rect">
@@ -47381,7 +45394,7 @@
           <a:p>
             <a:pPr algn="l"/>
             <a:r>
-              <a:rPr sz="2000" b="0">
+              <a:rPr sz="1800" b="0">
                 <a:solidFill>
                   <a:srgbClr val="9E59CD"/>
                 </a:solidFill>
@@ -47402,7 +45415,7 @@
         </p:nvSpPr>
         <p:spPr>
           <a:xfrm>
-            <a:off x="914400" y="2816352"/>
+            <a:off x="914400" y="2770632"/>
             <a:ext cx="10241280" cy="411480"/>
           </a:xfrm>
           <a:prstGeom prst="rect">
@@ -47418,7 +45431,7 @@
           <a:p>
             <a:pPr algn="l"/>
             <a:r>
-              <a:rPr sz="2000" b="0">
+              <a:rPr sz="1800" b="0">
                 <a:solidFill>
                   <a:srgbClr val="121018"/>
                 </a:solidFill>
@@ -47439,7 +45452,7 @@
         </p:nvSpPr>
         <p:spPr>
           <a:xfrm>
-            <a:off x="548640" y="3438144"/>
+            <a:off x="548640" y="3392424"/>
             <a:ext cx="320040" cy="365760"/>
           </a:xfrm>
           <a:prstGeom prst="rect">
@@ -47455,7 +45468,7 @@
           <a:p>
             <a:pPr algn="l"/>
             <a:r>
-              <a:rPr sz="2000" b="0">
+              <a:rPr sz="1800" b="0">
                 <a:solidFill>
                   <a:srgbClr val="9E59CD"/>
                 </a:solidFill>
@@ -47476,7 +45489,7 @@
         </p:nvSpPr>
         <p:spPr>
           <a:xfrm>
-            <a:off x="914400" y="3438144"/>
+            <a:off x="914400" y="3392424"/>
             <a:ext cx="10241280" cy="411480"/>
           </a:xfrm>
           <a:prstGeom prst="rect">
@@ -47492,7 +45505,7 @@
           <a:p>
             <a:pPr algn="l"/>
             <a:r>
-              <a:rPr sz="2000" b="0">
+              <a:rPr sz="1800" b="0">
                 <a:solidFill>
                   <a:srgbClr val="121018"/>
                 </a:solidFill>
@@ -47513,7 +45526,7 @@
         </p:nvSpPr>
         <p:spPr>
           <a:xfrm>
-            <a:off x="548640" y="4059936"/>
+            <a:off x="548640" y="4014216"/>
             <a:ext cx="320040" cy="365760"/>
           </a:xfrm>
           <a:prstGeom prst="rect">
@@ -47529,7 +45542,7 @@
           <a:p>
             <a:pPr algn="l"/>
             <a:r>
-              <a:rPr sz="2000" b="0">
+              <a:rPr sz="1800" b="0">
                 <a:solidFill>
                   <a:srgbClr val="9E59CD"/>
                 </a:solidFill>
@@ -47550,7 +45563,7 @@
         </p:nvSpPr>
         <p:spPr>
           <a:xfrm>
-            <a:off x="914400" y="4059936"/>
+            <a:off x="914400" y="4014216"/>
             <a:ext cx="10241280" cy="411480"/>
           </a:xfrm>
           <a:prstGeom prst="rect">
@@ -47566,7 +45579,7 @@
           <a:p>
             <a:pPr algn="l"/>
             <a:r>
-              <a:rPr sz="2000" b="0">
+              <a:rPr sz="1800" b="0">
                 <a:solidFill>
                   <a:srgbClr val="121018"/>
                 </a:solidFill>
@@ -47579,9 +45592,33 @@
           </a:p>
         </p:txBody>
       </p:sp>
-      <p:sp>
-        <p:nvSpPr>
-          <p:cNvPr id="16" name="Rectangle 15"/>
+      <p:pic>
+        <p:nvPicPr>
+          <p:cNvPr id="16" name="Picture 15" descr="preprocess-pipeline.png"/>
+          <p:cNvPicPr>
+            <a:picLocks noChangeAspect="1"/>
+          </p:cNvPicPr>
+          <p:nvPr/>
+        </p:nvPicPr>
+        <p:blipFill>
+          <a:blip r:embed="rId3"/>
+          <a:stretch>
+            <a:fillRect/>
+          </a:stretch>
+        </p:blipFill>
+        <p:spPr>
+          <a:xfrm>
+            <a:off x="548640" y="4297680"/>
+            <a:ext cx="10972800" cy="3552529"/>
+          </a:xfrm>
+          <a:prstGeom prst="rect">
+            <a:avLst/>
+          </a:prstGeom>
+        </p:spPr>
+      </p:pic>
+      <p:sp>
+        <p:nvSpPr>
+          <p:cNvPr id="17" name="Rectangle 16"/>
           <p:cNvSpPr/>
           <p:nvPr/>
         </p:nvSpPr>
@@ -47625,7 +45662,7 @@
       </p:sp>
       <p:sp>
         <p:nvSpPr>
-          <p:cNvPr id="17" name="TextBox 16"/>
+          <p:cNvPr id="18" name="TextBox 17"/>
           <p:cNvSpPr txBox="1"/>
           <p:nvPr/>
         </p:nvSpPr>
@@ -47662,7 +45699,7 @@
       </p:sp>
       <p:sp>
         <p:nvSpPr>
-          <p:cNvPr id="18" name="TextBox 17"/>
+          <p:cNvPr id="19" name="TextBox 18"/>
           <p:cNvSpPr txBox="1"/>
           <p:nvPr/>
         </p:nvSpPr>
@@ -48702,7 +46739,7 @@
         </p:nvGraphicFramePr>
         <p:xfrm>
           <a:off x="548640" y="2103120"/>
-          <a:ext cx="10972800" cy="2971800"/>
+          <a:ext cx="10972800" cy="2926080"/>
         </p:xfrm>
         <a:graphic>
           <a:graphicData uri="http://schemas.openxmlformats.org/drawingml/2006/table">
@@ -48714,7 +46751,7 @@
                 <a:gridCol w="5486400"/>
                 <a:gridCol w="5486400"/>
               </a:tblGrid>
-              <a:tr h="495300">
+              <a:tr h="487680">
                 <a:tc>
                   <a:txBody>
                     <a:bodyPr/>
@@ -48762,7 +46799,7 @@
                   </a:tcPr>
                 </a:tc>
               </a:tr>
-              <a:tr h="495300">
+              <a:tr h="487680">
                 <a:tc>
                   <a:txBody>
                     <a:bodyPr/>
@@ -48810,7 +46847,7 @@
                   </a:tcPr>
                 </a:tc>
               </a:tr>
-              <a:tr h="495300">
+              <a:tr h="487680">
                 <a:tc>
                   <a:txBody>
                     <a:bodyPr/>
@@ -48858,7 +46895,7 @@
                   </a:tcPr>
                 </a:tc>
               </a:tr>
-              <a:tr h="495300">
+              <a:tr h="487680">
                 <a:tc>
                   <a:txBody>
                     <a:bodyPr/>
@@ -48906,7 +46943,7 @@
                   </a:tcPr>
                 </a:tc>
               </a:tr>
-              <a:tr h="495300">
+              <a:tr h="487680">
                 <a:tc>
                   <a:txBody>
                     <a:bodyPr/>
@@ -48954,7 +46991,7 @@
                   </a:tcPr>
                 </a:tc>
               </a:tr>
-              <a:tr h="495300">
+              <a:tr h="487680">
                 <a:tc>
                   <a:txBody>
                     <a:bodyPr/>
@@ -49014,7 +47051,7 @@
         </p:nvSpPr>
         <p:spPr>
           <a:xfrm>
-            <a:off x="548640" y="5440680"/>
+            <a:off x="548640" y="5166360"/>
             <a:ext cx="10972800" cy="822960"/>
           </a:xfrm>
           <a:prstGeom prst="roundRect">
@@ -49060,7 +47097,7 @@
         </p:nvSpPr>
         <p:spPr>
           <a:xfrm>
-            <a:off x="868680" y="5669280"/>
+            <a:off x="868680" y="5394960"/>
             <a:ext cx="10332720" cy="457200"/>
           </a:xfrm>
           <a:prstGeom prst="rect">
@@ -49456,459 +47493,30 @@
           </a:p>
         </p:txBody>
       </p:sp>
-      <p:graphicFrame>
-        <p:nvGraphicFramePr>
-          <p:cNvPr id="8" name="Table 7"/>
-          <p:cNvGraphicFramePr>
-            <a:graphicFrameLocks noGrp="1"/>
-          </p:cNvGraphicFramePr>
-          <p:nvPr/>
-        </p:nvGraphicFramePr>
-        <p:xfrm>
-          <a:off x="548640" y="2103120"/>
-          <a:ext cx="10972800" cy="2971800"/>
-        </p:xfrm>
-        <a:graphic>
-          <a:graphicData uri="http://schemas.openxmlformats.org/drawingml/2006/table">
-            <a:tbl>
-              <a:tblPr firstRow="1" bandRow="1">
-                <a:tableStyleId>{5C22544A-7EE6-4342-B048-85BDC9FD1C3A}</a:tableStyleId>
-              </a:tblPr>
-              <a:tblGrid>
-                <a:gridCol w="3657600"/>
-                <a:gridCol w="3657600"/>
-                <a:gridCol w="3657600"/>
-              </a:tblGrid>
-              <a:tr h="495300">
-                <a:tc>
-                  <a:txBody>
-                    <a:bodyPr/>
-                    <a:lstStyle/>
-                    <a:p>
-                      <a:pPr algn="ctr"/>
-                      <a:r>
-                        <a:rPr sz="1100" b="1">
-                          <a:solidFill>
-                            <a:srgbClr val="FFFFFF"/>
-                          </a:solidFill>
-                          <a:latin typeface="Helvetica"/>
-                        </a:rPr>
-                        <a:t>Participant</a:t>
-                      </a:r>
-                    </a:p>
-                  </a:txBody>
-                  <a:tcPr>
-                    <a:solidFill>
-                      <a:srgbClr val="5234B7"/>
-                    </a:solidFill>
-                  </a:tcPr>
-                </a:tc>
-                <a:tc>
-                  <a:txBody>
-                    <a:bodyPr/>
-                    <a:lstStyle/>
-                    <a:p>
-                      <a:pPr algn="ctr"/>
-                      <a:r>
-                        <a:rPr sz="1100" b="1">
-                          <a:solidFill>
-                            <a:srgbClr val="FFFFFF"/>
-                          </a:solidFill>
-                          <a:latin typeface="Helvetica"/>
-                        </a:rPr>
-                        <a:t>Stress (Imputed)</a:t>
-                      </a:r>
-                    </a:p>
-                  </a:txBody>
-                  <a:tcPr>
-                    <a:solidFill>
-                      <a:srgbClr val="5234B7"/>
-                    </a:solidFill>
-                  </a:tcPr>
-                </a:tc>
-                <a:tc>
-                  <a:txBody>
-                    <a:bodyPr/>
-                    <a:lstStyle/>
-                    <a:p>
-                      <a:pPr algn="ctr"/>
-                      <a:r>
-                        <a:rPr sz="1100" b="1">
-                          <a:solidFill>
-                            <a:srgbClr val="FFFFFF"/>
-                          </a:solidFill>
-                          <a:latin typeface="Helvetica"/>
-                        </a:rPr>
-                        <a:t>Stress_Was_Missing</a:t>
-                      </a:r>
-                    </a:p>
-                  </a:txBody>
-                  <a:tcPr>
-                    <a:solidFill>
-                      <a:srgbClr val="5234B7"/>
-                    </a:solidFill>
-                  </a:tcPr>
-                </a:tc>
-              </a:tr>
-              <a:tr h="495300">
-                <a:tc>
-                  <a:txBody>
-                    <a:bodyPr/>
-                    <a:lstStyle/>
-                    <a:p>
-                      <a:pPr algn="ctr"/>
-                      <a:r>
-                        <a:rPr sz="1300" b="1">
-                          <a:solidFill>
-                            <a:srgbClr val="5234B7"/>
-                          </a:solidFill>
-                          <a:latin typeface="Helvetica"/>
-                        </a:rPr>
-                        <a:t>1</a:t>
-                      </a:r>
-                    </a:p>
-                  </a:txBody>
-                  <a:tcPr>
-                    <a:solidFill>
-                      <a:srgbClr val="EEE8FA"/>
-                    </a:solidFill>
-                  </a:tcPr>
-                </a:tc>
-                <a:tc>
-                  <a:txBody>
-                    <a:bodyPr/>
-                    <a:lstStyle/>
-                    <a:p>
-                      <a:pPr algn="ctr"/>
-                      <a:r>
-                        <a:rPr sz="1300" b="0">
-                          <a:solidFill>
-                            <a:srgbClr val="121018"/>
-                          </a:solidFill>
-                          <a:latin typeface="Helvetica"/>
-                        </a:rPr>
-                        <a:t>2.0</a:t>
-                      </a:r>
-                    </a:p>
-                  </a:txBody>
-                  <a:tcPr>
-                    <a:solidFill>
-                      <a:srgbClr val="EEE8FA"/>
-                    </a:solidFill>
-                  </a:tcPr>
-                </a:tc>
-                <a:tc>
-                  <a:txBody>
-                    <a:bodyPr/>
-                    <a:lstStyle/>
-                    <a:p>
-                      <a:pPr algn="ctr"/>
-                      <a:r>
-                        <a:rPr sz="1300" b="0">
-                          <a:solidFill>
-                            <a:srgbClr val="121018"/>
-                          </a:solidFill>
-                          <a:latin typeface="Helvetica"/>
-                        </a:rPr>
-                        <a:t>0</a:t>
-                      </a:r>
-                    </a:p>
-                  </a:txBody>
-                  <a:tcPr>
-                    <a:solidFill>
-                      <a:srgbClr val="EEE8FA"/>
-                    </a:solidFill>
-                  </a:tcPr>
-                </a:tc>
-              </a:tr>
-              <a:tr h="495300">
-                <a:tc>
-                  <a:txBody>
-                    <a:bodyPr/>
-                    <a:lstStyle/>
-                    <a:p>
-                      <a:pPr algn="ctr"/>
-                      <a:r>
-                        <a:rPr sz="1300" b="1">
-                          <a:solidFill>
-                            <a:srgbClr val="5234B7"/>
-                          </a:solidFill>
-                          <a:latin typeface="Helvetica"/>
-                        </a:rPr>
-                        <a:t>2</a:t>
-                      </a:r>
-                    </a:p>
-                  </a:txBody>
-                  <a:tcPr>
-                    <a:solidFill>
-                      <a:srgbClr val="F5F1FC"/>
-                    </a:solidFill>
-                  </a:tcPr>
-                </a:tc>
-                <a:tc>
-                  <a:txBody>
-                    <a:bodyPr/>
-                    <a:lstStyle/>
-                    <a:p>
-                      <a:pPr algn="ctr"/>
-                      <a:r>
-                        <a:rPr sz="1300" b="0">
-                          <a:solidFill>
-                            <a:srgbClr val="121018"/>
-                          </a:solidFill>
-                          <a:latin typeface="Helvetica"/>
-                        </a:rPr>
-                        <a:t>4.1</a:t>
-                      </a:r>
-                    </a:p>
-                  </a:txBody>
-                  <a:tcPr>
-                    <a:solidFill>
-                      <a:srgbClr val="F5F1FC"/>
-                    </a:solidFill>
-                  </a:tcPr>
-                </a:tc>
-                <a:tc>
-                  <a:txBody>
-                    <a:bodyPr/>
-                    <a:lstStyle/>
-                    <a:p>
-                      <a:pPr algn="ctr"/>
-                      <a:r>
-                        <a:rPr sz="1300" b="0">
-                          <a:solidFill>
-                            <a:srgbClr val="121018"/>
-                          </a:solidFill>
-                          <a:latin typeface="Helvetica"/>
-                        </a:rPr>
-                        <a:t>1</a:t>
-                      </a:r>
-                    </a:p>
-                  </a:txBody>
-                  <a:tcPr>
-                    <a:solidFill>
-                      <a:srgbClr val="F5F1FC"/>
-                    </a:solidFill>
-                  </a:tcPr>
-                </a:tc>
-              </a:tr>
-              <a:tr h="495300">
-                <a:tc>
-                  <a:txBody>
-                    <a:bodyPr/>
-                    <a:lstStyle/>
-                    <a:p>
-                      <a:pPr algn="ctr"/>
-                      <a:r>
-                        <a:rPr sz="1300" b="1">
-                          <a:solidFill>
-                            <a:srgbClr val="5234B7"/>
-                          </a:solidFill>
-                          <a:latin typeface="Helvetica"/>
-                        </a:rPr>
-                        <a:t>3</a:t>
-                      </a:r>
-                    </a:p>
-                  </a:txBody>
-                  <a:tcPr>
-                    <a:solidFill>
-                      <a:srgbClr val="EEE8FA"/>
-                    </a:solidFill>
-                  </a:tcPr>
-                </a:tc>
-                <a:tc>
-                  <a:txBody>
-                    <a:bodyPr/>
-                    <a:lstStyle/>
-                    <a:p>
-                      <a:pPr algn="ctr"/>
-                      <a:r>
-                        <a:rPr sz="1300" b="0">
-                          <a:solidFill>
-                            <a:srgbClr val="121018"/>
-                          </a:solidFill>
-                          <a:latin typeface="Helvetica"/>
-                        </a:rPr>
-                        <a:t>3.0</a:t>
-                      </a:r>
-                    </a:p>
-                  </a:txBody>
-                  <a:tcPr>
-                    <a:solidFill>
-                      <a:srgbClr val="EEE8FA"/>
-                    </a:solidFill>
-                  </a:tcPr>
-                </a:tc>
-                <a:tc>
-                  <a:txBody>
-                    <a:bodyPr/>
-                    <a:lstStyle/>
-                    <a:p>
-                      <a:pPr algn="ctr"/>
-                      <a:r>
-                        <a:rPr sz="1300" b="0">
-                          <a:solidFill>
-                            <a:srgbClr val="121018"/>
-                          </a:solidFill>
-                          <a:latin typeface="Helvetica"/>
-                        </a:rPr>
-                        <a:t>0</a:t>
-                      </a:r>
-                    </a:p>
-                  </a:txBody>
-                  <a:tcPr>
-                    <a:solidFill>
-                      <a:srgbClr val="EEE8FA"/>
-                    </a:solidFill>
-                  </a:tcPr>
-                </a:tc>
-              </a:tr>
-              <a:tr h="495300">
-                <a:tc>
-                  <a:txBody>
-                    <a:bodyPr/>
-                    <a:lstStyle/>
-                    <a:p>
-                      <a:pPr algn="ctr"/>
-                      <a:r>
-                        <a:rPr sz="1300" b="1">
-                          <a:solidFill>
-                            <a:srgbClr val="5234B7"/>
-                          </a:solidFill>
-                          <a:latin typeface="Helvetica"/>
-                        </a:rPr>
-                        <a:t>4</a:t>
-                      </a:r>
-                    </a:p>
-                  </a:txBody>
-                  <a:tcPr>
-                    <a:solidFill>
-                      <a:srgbClr val="F5F1FC"/>
-                    </a:solidFill>
-                  </a:tcPr>
-                </a:tc>
-                <a:tc>
-                  <a:txBody>
-                    <a:bodyPr/>
-                    <a:lstStyle/>
-                    <a:p>
-                      <a:pPr algn="ctr"/>
-                      <a:r>
-                        <a:rPr sz="1300" b="0">
-                          <a:solidFill>
-                            <a:srgbClr val="121018"/>
-                          </a:solidFill>
-                          <a:latin typeface="Helvetica"/>
-                        </a:rPr>
-                        <a:t>4.3</a:t>
-                      </a:r>
-                    </a:p>
-                  </a:txBody>
-                  <a:tcPr>
-                    <a:solidFill>
-                      <a:srgbClr val="F5F1FC"/>
-                    </a:solidFill>
-                  </a:tcPr>
-                </a:tc>
-                <a:tc>
-                  <a:txBody>
-                    <a:bodyPr/>
-                    <a:lstStyle/>
-                    <a:p>
-                      <a:pPr algn="ctr"/>
-                      <a:r>
-                        <a:rPr sz="1300" b="0">
-                          <a:solidFill>
-                            <a:srgbClr val="121018"/>
-                          </a:solidFill>
-                          <a:latin typeface="Helvetica"/>
-                        </a:rPr>
-                        <a:t>1</a:t>
-                      </a:r>
-                    </a:p>
-                  </a:txBody>
-                  <a:tcPr>
-                    <a:solidFill>
-                      <a:srgbClr val="F5F1FC"/>
-                    </a:solidFill>
-                  </a:tcPr>
-                </a:tc>
-              </a:tr>
-              <a:tr h="495300">
-                <a:tc>
-                  <a:txBody>
-                    <a:bodyPr/>
-                    <a:lstStyle/>
-                    <a:p>
-                      <a:pPr algn="ctr"/>
-                      <a:r>
-                        <a:rPr sz="1300" b="1">
-                          <a:solidFill>
-                            <a:srgbClr val="5234B7"/>
-                          </a:solidFill>
-                          <a:latin typeface="Helvetica"/>
-                        </a:rPr>
-                        <a:t>5</a:t>
-                      </a:r>
-                    </a:p>
-                  </a:txBody>
-                  <a:tcPr>
-                    <a:solidFill>
-                      <a:srgbClr val="EEE8FA"/>
-                    </a:solidFill>
-                  </a:tcPr>
-                </a:tc>
-                <a:tc>
-                  <a:txBody>
-                    <a:bodyPr/>
-                    <a:lstStyle/>
-                    <a:p>
-                      <a:pPr algn="ctr"/>
-                      <a:r>
-                        <a:rPr sz="1300" b="0">
-                          <a:solidFill>
-                            <a:srgbClr val="121018"/>
-                          </a:solidFill>
-                          <a:latin typeface="Helvetica"/>
-                        </a:rPr>
-                        <a:t>1.0</a:t>
-                      </a:r>
-                    </a:p>
-                  </a:txBody>
-                  <a:tcPr>
-                    <a:solidFill>
-                      <a:srgbClr val="EEE8FA"/>
-                    </a:solidFill>
-                  </a:tcPr>
-                </a:tc>
-                <a:tc>
-                  <a:txBody>
-                    <a:bodyPr/>
-                    <a:lstStyle/>
-                    <a:p>
-                      <a:pPr algn="ctr"/>
-                      <a:r>
-                        <a:rPr sz="1300" b="0">
-                          <a:solidFill>
-                            <a:srgbClr val="121018"/>
-                          </a:solidFill>
-                          <a:latin typeface="Helvetica"/>
-                        </a:rPr>
-                        <a:t>0</a:t>
-                      </a:r>
-                    </a:p>
-                  </a:txBody>
-                  <a:tcPr>
-                    <a:solidFill>
-                      <a:srgbClr val="EEE8FA"/>
-                    </a:solidFill>
-                  </a:tcPr>
-                </a:tc>
-              </a:tr>
-            </a:tbl>
-          </a:graphicData>
-        </a:graphic>
-      </p:graphicFrame>
+      <p:pic>
+        <p:nvPicPr>
+          <p:cNvPr id="8" name="Picture 7" descr="missingness-indicator.png"/>
+          <p:cNvPicPr>
+            <a:picLocks noChangeAspect="1"/>
+          </p:cNvPicPr>
+          <p:nvPr/>
+        </p:nvPicPr>
+        <p:blipFill>
+          <a:blip r:embed="rId3"/>
+          <a:stretch>
+            <a:fillRect/>
+          </a:stretch>
+        </p:blipFill>
+        <p:spPr>
+          <a:xfrm>
+            <a:off x="548640" y="2011680"/>
+            <a:ext cx="10972800" cy="3964886"/>
+          </a:xfrm>
+          <a:prstGeom prst="rect">
+            <a:avLst/>
+          </a:prstGeom>
+        </p:spPr>
+      </p:pic>
       <p:sp>
         <p:nvSpPr>
           <p:cNvPr id="9" name="Rounded Rectangle 8"/>
@@ -49917,8 +47525,8 @@
         </p:nvSpPr>
         <p:spPr>
           <a:xfrm>
-            <a:off x="548640" y="5440680"/>
-            <a:ext cx="10972800" cy="822960"/>
+            <a:off x="548640" y="5074920"/>
+            <a:ext cx="10972800" cy="868680"/>
           </a:xfrm>
           <a:prstGeom prst="roundRect">
             <a:avLst>
@@ -49963,23 +47571,23 @@
         </p:nvSpPr>
         <p:spPr>
           <a:xfrm>
-            <a:off x="868680" y="5669280"/>
-            <a:ext cx="10332720" cy="457200"/>
-          </a:xfrm>
-          <a:prstGeom prst="rect">
-            <a:avLst/>
-          </a:prstGeom>
-          <a:noFill/>
-        </p:spPr>
-        <p:txBody>
-          <a:bodyPr wrap="square" anchor="t">
-            <a:spAutoFit/>
-          </a:bodyPr>
-          <a:lstStyle/>
-          <a:p>
-            <a:pPr algn="l"/>
-            <a:r>
-              <a:rPr sz="1300" b="0">
+            <a:off x="868680" y="5257800"/>
+            <a:ext cx="10332720" cy="502920"/>
+          </a:xfrm>
+          <a:prstGeom prst="rect">
+            <a:avLst/>
+          </a:prstGeom>
+          <a:noFill/>
+        </p:spPr>
+        <p:txBody>
+          <a:bodyPr wrap="square" anchor="t">
+            <a:spAutoFit/>
+          </a:bodyPr>
+          <a:lstStyle/>
+          <a:p>
+            <a:pPr algn="l"/>
+            <a:r>
+              <a:rPr sz="1400" b="0">
                 <a:solidFill>
                   <a:srgbClr val="5A5470"/>
                 </a:solidFill>
@@ -50359,16 +47967,40 @@
           </a:p>
         </p:txBody>
       </p:sp>
-      <p:sp>
-        <p:nvSpPr>
-          <p:cNvPr id="8" name="Rounded Rectangle 7"/>
+      <p:pic>
+        <p:nvPicPr>
+          <p:cNvPr id="8" name="Picture 7" descr="data-leakage.png"/>
+          <p:cNvPicPr>
+            <a:picLocks noChangeAspect="1"/>
+          </p:cNvPicPr>
+          <p:nvPr/>
+        </p:nvPicPr>
+        <p:blipFill>
+          <a:blip r:embed="rId3"/>
+          <a:stretch>
+            <a:fillRect/>
+          </a:stretch>
+        </p:blipFill>
+        <p:spPr>
+          <a:xfrm>
+            <a:off x="548640" y="2103120"/>
+            <a:ext cx="10972800" cy="3969973"/>
+          </a:xfrm>
+          <a:prstGeom prst="rect">
+            <a:avLst/>
+          </a:prstGeom>
+        </p:spPr>
+      </p:pic>
+      <p:sp>
+        <p:nvSpPr>
+          <p:cNvPr id="9" name="Rounded Rectangle 8"/>
           <p:cNvSpPr/>
           <p:nvPr/>
         </p:nvSpPr>
         <p:spPr>
           <a:xfrm>
-            <a:off x="548640" y="2240280"/>
-            <a:ext cx="10972800" cy="3383280"/>
+            <a:off x="548640" y="4892040"/>
+            <a:ext cx="10972800" cy="1051560"/>
           </a:xfrm>
           <a:prstGeom prst="roundRect">
             <a:avLst>
@@ -50407,74 +48039,37 @@
       </p:sp>
       <p:sp>
         <p:nvSpPr>
-          <p:cNvPr id="9" name="TextBox 8"/>
-          <p:cNvSpPr txBox="1"/>
-          <p:nvPr/>
-        </p:nvSpPr>
-        <p:spPr>
-          <a:xfrm>
-            <a:off x="914400" y="3383280"/>
-            <a:ext cx="10241280" cy="502920"/>
-          </a:xfrm>
-          <a:prstGeom prst="rect">
-            <a:avLst/>
-          </a:prstGeom>
-          <a:noFill/>
-        </p:spPr>
-        <p:txBody>
-          <a:bodyPr wrap="square" anchor="t">
-            <a:spAutoFit/>
-          </a:bodyPr>
-          <a:lstStyle/>
-          <a:p>
-            <a:pPr algn="ctr"/>
-            <a:r>
-              <a:rPr sz="2600" b="1">
-                <a:solidFill>
-                  <a:srgbClr val="5234B7"/>
-                </a:solidFill>
-                <a:latin typeface="DIN Next LT W23"/>
-                <a:ea typeface="DIN Next LT W23"/>
-                <a:cs typeface="DIN Next LT W23"/>
-              </a:rPr>
-              <a:t>Data leakage</a:t>
-            </a:r>
-          </a:p>
-        </p:txBody>
-      </p:sp>
-      <p:sp>
-        <p:nvSpPr>
           <p:cNvPr id="10" name="TextBox 9"/>
           <p:cNvSpPr txBox="1"/>
           <p:nvPr/>
         </p:nvSpPr>
         <p:spPr>
           <a:xfrm>
-            <a:off x="914400" y="3977639"/>
-            <a:ext cx="10241280" cy="365760"/>
-          </a:xfrm>
-          <a:prstGeom prst="rect">
-            <a:avLst/>
-          </a:prstGeom>
-          <a:noFill/>
-        </p:spPr>
-        <p:txBody>
-          <a:bodyPr wrap="square" anchor="t">
-            <a:spAutoFit/>
-          </a:bodyPr>
-          <a:lstStyle/>
-          <a:p>
-            <a:pPr algn="l"/>
-            <a:r>
-              <a:rPr sz="1400" b="0">
-                <a:solidFill>
-                  <a:srgbClr val="5A5470"/>
-                </a:solidFill>
-                <a:latin typeface="DIN Next LT W23"/>
-                <a:ea typeface="DIN Next LT W23"/>
-                <a:cs typeface="DIN Next LT W23"/>
-              </a:rPr>
-              <a:t>Data Pre-Processing</a:t>
+            <a:off x="914400" y="5120640"/>
+            <a:ext cx="10241280" cy="640080"/>
+          </a:xfrm>
+          <a:prstGeom prst="rect">
+            <a:avLst/>
+          </a:prstGeom>
+          <a:noFill/>
+        </p:spPr>
+        <p:txBody>
+          <a:bodyPr wrap="square" anchor="t">
+            <a:spAutoFit/>
+          </a:bodyPr>
+          <a:lstStyle/>
+          <a:p>
+            <a:pPr algn="l"/>
+            <a:r>
+              <a:rPr sz="1500" b="0">
+                <a:solidFill>
+                  <a:srgbClr val="121018"/>
+                </a:solidFill>
+                <a:latin typeface="DIN Next LT W23"/>
+                <a:ea typeface="DIN Next LT W23"/>
+                <a:cs typeface="DIN Next LT W23"/>
+              </a:rPr>
+              <a:t>Never let test-set information influence training, scaling, or feature choices.</a:t>
             </a:r>
           </a:p>
         </p:txBody>
@@ -50854,7 +48449,7 @@
         </p:nvSpPr>
         <p:spPr>
           <a:xfrm>
-            <a:off x="548640" y="2194560"/>
+            <a:off x="548640" y="2148840"/>
             <a:ext cx="320040" cy="365760"/>
           </a:xfrm>
           <a:prstGeom prst="rect">
@@ -50870,7 +48465,7 @@
           <a:p>
             <a:pPr algn="l"/>
             <a:r>
-              <a:rPr sz="2000" b="0">
+              <a:rPr sz="1800" b="0">
                 <a:solidFill>
                   <a:srgbClr val="9E59CD"/>
                 </a:solidFill>
@@ -50891,7 +48486,7 @@
         </p:nvSpPr>
         <p:spPr>
           <a:xfrm>
-            <a:off x="914400" y="2194560"/>
+            <a:off x="914400" y="2148840"/>
             <a:ext cx="10241280" cy="411480"/>
           </a:xfrm>
           <a:prstGeom prst="rect">
@@ -50907,7 +48502,7 @@
           <a:p>
             <a:pPr algn="l"/>
             <a:r>
-              <a:rPr sz="2000" b="0">
+              <a:rPr sz="1800" b="0">
                 <a:solidFill>
                   <a:srgbClr val="121018"/>
                 </a:solidFill>
@@ -50928,7 +48523,7 @@
         </p:nvSpPr>
         <p:spPr>
           <a:xfrm>
-            <a:off x="548640" y="2816352"/>
+            <a:off x="548640" y="2770632"/>
             <a:ext cx="320040" cy="365760"/>
           </a:xfrm>
           <a:prstGeom prst="rect">
@@ -50944,7 +48539,7 @@
           <a:p>
             <a:pPr algn="l"/>
             <a:r>
-              <a:rPr sz="2000" b="0">
+              <a:rPr sz="1800" b="0">
                 <a:solidFill>
                   <a:srgbClr val="9E59CD"/>
                 </a:solidFill>
@@ -50965,7 +48560,7 @@
         </p:nvSpPr>
         <p:spPr>
           <a:xfrm>
-            <a:off x="914400" y="2816352"/>
+            <a:off x="914400" y="2770632"/>
             <a:ext cx="10241280" cy="411480"/>
           </a:xfrm>
           <a:prstGeom prst="rect">
@@ -50981,7 +48576,7 @@
           <a:p>
             <a:pPr algn="l"/>
             <a:r>
-              <a:rPr sz="2000" b="0">
+              <a:rPr sz="1800" b="0">
                 <a:solidFill>
                   <a:srgbClr val="121018"/>
                 </a:solidFill>
@@ -51002,7 +48597,7 @@
         </p:nvSpPr>
         <p:spPr>
           <a:xfrm>
-            <a:off x="548640" y="3438144"/>
+            <a:off x="548640" y="3392424"/>
             <a:ext cx="320040" cy="365760"/>
           </a:xfrm>
           <a:prstGeom prst="rect">
@@ -51018,7 +48613,7 @@
           <a:p>
             <a:pPr algn="l"/>
             <a:r>
-              <a:rPr sz="2000" b="0">
+              <a:rPr sz="1800" b="0">
                 <a:solidFill>
                   <a:srgbClr val="9E59CD"/>
                 </a:solidFill>
@@ -51039,7 +48634,7 @@
         </p:nvSpPr>
         <p:spPr>
           <a:xfrm>
-            <a:off x="914400" y="3438144"/>
+            <a:off x="914400" y="3392424"/>
             <a:ext cx="10241280" cy="411480"/>
           </a:xfrm>
           <a:prstGeom prst="rect">
@@ -51055,7 +48650,7 @@
           <a:p>
             <a:pPr algn="l"/>
             <a:r>
-              <a:rPr sz="2000" b="0">
+              <a:rPr sz="1800" b="0">
                 <a:solidFill>
                   <a:srgbClr val="121018"/>
                 </a:solidFill>
@@ -51443,7 +49038,7 @@
         </p:nvSpPr>
         <p:spPr>
           <a:xfrm>
-            <a:off x="548640" y="2194560"/>
+            <a:off x="548640" y="2148840"/>
             <a:ext cx="320040" cy="365760"/>
           </a:xfrm>
           <a:prstGeom prst="rect">
@@ -51459,7 +49054,7 @@
           <a:p>
             <a:pPr algn="l"/>
             <a:r>
-              <a:rPr sz="2000" b="0">
+              <a:rPr sz="1800" b="0">
                 <a:solidFill>
                   <a:srgbClr val="9E59CD"/>
                 </a:solidFill>
@@ -51480,7 +49075,7 @@
         </p:nvSpPr>
         <p:spPr>
           <a:xfrm>
-            <a:off x="914400" y="2194560"/>
+            <a:off x="914400" y="2148840"/>
             <a:ext cx="10241280" cy="411480"/>
           </a:xfrm>
           <a:prstGeom prst="rect">
@@ -51496,7 +49091,7 @@
           <a:p>
             <a:pPr algn="l"/>
             <a:r>
-              <a:rPr sz="2000" b="0">
+              <a:rPr sz="1800" b="0">
                 <a:solidFill>
                   <a:srgbClr val="121018"/>
                 </a:solidFill>
@@ -51517,7 +49112,7 @@
         </p:nvSpPr>
         <p:spPr>
           <a:xfrm>
-            <a:off x="548640" y="2816352"/>
+            <a:off x="548640" y="2770632"/>
             <a:ext cx="320040" cy="365760"/>
           </a:xfrm>
           <a:prstGeom prst="rect">
@@ -51533,7 +49128,7 @@
           <a:p>
             <a:pPr algn="l"/>
             <a:r>
-              <a:rPr sz="2000" b="0">
+              <a:rPr sz="1800" b="0">
                 <a:solidFill>
                   <a:srgbClr val="9E59CD"/>
                 </a:solidFill>
@@ -51554,7 +49149,7 @@
         </p:nvSpPr>
         <p:spPr>
           <a:xfrm>
-            <a:off x="914400" y="2816352"/>
+            <a:off x="914400" y="2770632"/>
             <a:ext cx="10241280" cy="411480"/>
           </a:xfrm>
           <a:prstGeom prst="rect">
@@ -51570,7 +49165,7 @@
           <a:p>
             <a:pPr algn="l"/>
             <a:r>
-              <a:rPr sz="2000" b="0">
+              <a:rPr sz="1800" b="0">
                 <a:solidFill>
                   <a:srgbClr val="121018"/>
                 </a:solidFill>

--- a/web-presentation/pdf-exports/Week1-Session1-Foundations.pptx
+++ b/web-presentation/pdf-exports/Week1-Session1-Foundations.pptx
@@ -3765,8 +3765,8 @@
         </p:blipFill>
         <p:spPr>
           <a:xfrm>
-            <a:off x="548640" y="2331720"/>
-            <a:ext cx="10972800" cy="3552529"/>
+            <a:off x="2928272" y="2331720"/>
+            <a:ext cx="6213534" cy="2011680"/>
           </a:xfrm>
           <a:prstGeom prst="rect">
             <a:avLst/>
@@ -5456,8 +5456,8 @@
         </p:blipFill>
         <p:spPr>
           <a:xfrm>
-            <a:off x="548640" y="2971800"/>
-            <a:ext cx="10972800" cy="3969973"/>
+            <a:off x="2244008" y="2926080"/>
+            <a:ext cx="7582063" cy="2743200"/>
           </a:xfrm>
           <a:prstGeom prst="rect">
             <a:avLst/>
@@ -5472,7 +5472,7 @@
         </p:nvSpPr>
         <p:spPr>
           <a:xfrm>
-            <a:off x="548640" y="5806440"/>
+            <a:off x="548640" y="5852160"/>
             <a:ext cx="10972800" cy="274320"/>
           </a:xfrm>
           <a:prstGeom prst="rect">
@@ -5884,8 +5884,8 @@
         </p:blipFill>
         <p:spPr>
           <a:xfrm>
-            <a:off x="548640" y="2011680"/>
-            <a:ext cx="10972800" cy="3969973"/>
+            <a:off x="2244008" y="2011680"/>
+            <a:ext cx="7582063" cy="2743200"/>
           </a:xfrm>
           <a:prstGeom prst="rect">
             <a:avLst/>
@@ -5900,7 +5900,7 @@
         </p:nvSpPr>
         <p:spPr>
           <a:xfrm>
-            <a:off x="548640" y="4709160"/>
+            <a:off x="548640" y="4937760"/>
             <a:ext cx="320040" cy="365760"/>
           </a:xfrm>
           <a:prstGeom prst="rect">
@@ -5937,7 +5937,7 @@
         </p:nvSpPr>
         <p:spPr>
           <a:xfrm>
-            <a:off x="914400" y="4709160"/>
+            <a:off x="914400" y="4937760"/>
             <a:ext cx="10241280" cy="411480"/>
           </a:xfrm>
           <a:prstGeom prst="rect">
@@ -5974,7 +5974,7 @@
         </p:nvSpPr>
         <p:spPr>
           <a:xfrm>
-            <a:off x="548640" y="5330952"/>
+            <a:off x="548640" y="5559552"/>
             <a:ext cx="320040" cy="365760"/>
           </a:xfrm>
           <a:prstGeom prst="rect">
@@ -6011,7 +6011,7 @@
         </p:nvSpPr>
         <p:spPr>
           <a:xfrm>
-            <a:off x="914400" y="5330952"/>
+            <a:off x="914400" y="5559552"/>
             <a:ext cx="10241280" cy="411480"/>
           </a:xfrm>
           <a:prstGeom prst="rect">
@@ -6048,7 +6048,7 @@
         </p:nvSpPr>
         <p:spPr>
           <a:xfrm>
-            <a:off x="548640" y="5952744"/>
+            <a:off x="548640" y="6181344"/>
             <a:ext cx="320040" cy="365760"/>
           </a:xfrm>
           <a:prstGeom prst="rect">
@@ -6085,7 +6085,7 @@
         </p:nvSpPr>
         <p:spPr>
           <a:xfrm>
-            <a:off x="914400" y="5952744"/>
+            <a:off x="914400" y="6181344"/>
             <a:ext cx="10241280" cy="411480"/>
           </a:xfrm>
           <a:prstGeom prst="rect">
@@ -6580,8 +6580,8 @@
         </p:blipFill>
         <p:spPr>
           <a:xfrm>
-            <a:off x="548640" y="2971800"/>
-            <a:ext cx="10972800" cy="5209309"/>
+            <a:off x="3145925" y="2926080"/>
+            <a:ext cx="5778229" cy="2743200"/>
           </a:xfrm>
           <a:prstGeom prst="rect">
             <a:avLst/>
@@ -6971,8 +6971,8 @@
         </p:blipFill>
         <p:spPr>
           <a:xfrm>
-            <a:off x="548640" y="2011680"/>
-            <a:ext cx="10972800" cy="5209309"/>
+            <a:off x="3145925" y="2011680"/>
+            <a:ext cx="5778229" cy="2743200"/>
           </a:xfrm>
           <a:prstGeom prst="rect">
             <a:avLst/>
@@ -6987,7 +6987,7 @@
         </p:nvSpPr>
         <p:spPr>
           <a:xfrm>
-            <a:off x="548640" y="4709160"/>
+            <a:off x="548640" y="4937760"/>
             <a:ext cx="320040" cy="365760"/>
           </a:xfrm>
           <a:prstGeom prst="rect">
@@ -7024,7 +7024,7 @@
         </p:nvSpPr>
         <p:spPr>
           <a:xfrm>
-            <a:off x="914400" y="4709160"/>
+            <a:off x="914400" y="4937760"/>
             <a:ext cx="10241280" cy="411480"/>
           </a:xfrm>
           <a:prstGeom prst="rect">
@@ -7061,7 +7061,7 @@
         </p:nvSpPr>
         <p:spPr>
           <a:xfrm>
-            <a:off x="548640" y="5330952"/>
+            <a:off x="548640" y="5559552"/>
             <a:ext cx="320040" cy="365760"/>
           </a:xfrm>
           <a:prstGeom prst="rect">
@@ -7098,7 +7098,7 @@
         </p:nvSpPr>
         <p:spPr>
           <a:xfrm>
-            <a:off x="914400" y="5330952"/>
+            <a:off x="914400" y="5559552"/>
             <a:ext cx="10241280" cy="411480"/>
           </a:xfrm>
           <a:prstGeom prst="rect">
@@ -7135,7 +7135,7 @@
         </p:nvSpPr>
         <p:spPr>
           <a:xfrm>
-            <a:off x="548640" y="5952744"/>
+            <a:off x="548640" y="6181344"/>
             <a:ext cx="320040" cy="365760"/>
           </a:xfrm>
           <a:prstGeom prst="rect">
@@ -7172,7 +7172,7 @@
         </p:nvSpPr>
         <p:spPr>
           <a:xfrm>
-            <a:off x="914400" y="5952744"/>
+            <a:off x="914400" y="6181344"/>
             <a:ext cx="10241280" cy="411480"/>
           </a:xfrm>
           <a:prstGeom prst="rect">
@@ -9840,7 +9840,7 @@
         <p:spPr>
           <a:xfrm>
             <a:off x="5852160" y="2423160"/>
-            <a:ext cx="5669280" cy="1904842"/>
+            <a:ext cx="5669280" cy="1904841"/>
           </a:xfrm>
           <a:prstGeom prst="rect">
             <a:avLst/>
@@ -10653,8 +10653,8 @@
         </p:blipFill>
         <p:spPr>
           <a:xfrm>
-            <a:off x="5852160" y="2423160"/>
-            <a:ext cx="5669280" cy="2543315"/>
+            <a:off x="6444691" y="2423160"/>
+            <a:ext cx="4484217" cy="2011680"/>
           </a:xfrm>
           <a:prstGeom prst="rect">
             <a:avLst/>
@@ -23564,8 +23564,8 @@
         </p:blipFill>
         <p:spPr>
           <a:xfrm>
-            <a:off x="548640" y="2286000"/>
-            <a:ext cx="10972800" cy="4876800"/>
+            <a:off x="2948940" y="2286000"/>
+            <a:ext cx="6172200" cy="2743200"/>
           </a:xfrm>
           <a:prstGeom prst="rect">
             <a:avLst/>
@@ -23580,7 +23580,7 @@
         </p:nvSpPr>
         <p:spPr>
           <a:xfrm>
-            <a:off x="548640" y="5669280"/>
+            <a:off x="548640" y="5257800"/>
             <a:ext cx="10972800" cy="320040"/>
           </a:xfrm>
           <a:prstGeom prst="rect">
@@ -34900,8 +34900,8 @@
         </p:blipFill>
         <p:spPr>
           <a:xfrm>
-            <a:off x="548640" y="2011680"/>
-            <a:ext cx="10972800" cy="4673600"/>
+            <a:off x="2814761" y="2011680"/>
+            <a:ext cx="6440556" cy="2743200"/>
           </a:xfrm>
           <a:prstGeom prst="rect">
             <a:avLst/>
@@ -34916,7 +34916,7 @@
         </p:nvSpPr>
         <p:spPr>
           <a:xfrm>
-            <a:off x="548640" y="5074920"/>
+            <a:off x="548640" y="4983480"/>
             <a:ext cx="10972800" cy="868680"/>
           </a:xfrm>
           <a:prstGeom prst="roundRect">
@@ -34962,7 +34962,7 @@
         </p:nvSpPr>
         <p:spPr>
           <a:xfrm>
-            <a:off x="868680" y="5257800"/>
+            <a:off x="868680" y="5166360"/>
             <a:ext cx="10332720" cy="502920"/>
           </a:xfrm>
           <a:prstGeom prst="rect">
@@ -36798,8 +36798,8 @@
         </p:blipFill>
         <p:spPr>
           <a:xfrm>
-            <a:off x="548640" y="2011680"/>
-            <a:ext cx="10972800" cy="3765511"/>
+            <a:off x="3103994" y="2011680"/>
+            <a:ext cx="5862090" cy="2011680"/>
           </a:xfrm>
           <a:prstGeom prst="rect">
             <a:avLst/>
@@ -36814,7 +36814,7 @@
         </p:nvSpPr>
         <p:spPr>
           <a:xfrm>
-            <a:off x="548640" y="4160520"/>
+            <a:off x="548640" y="4206240"/>
             <a:ext cx="3429000" cy="1691640"/>
           </a:xfrm>
           <a:prstGeom prst="roundRect">
@@ -36860,7 +36860,7 @@
         </p:nvSpPr>
         <p:spPr>
           <a:xfrm>
-            <a:off x="777240" y="4389120"/>
+            <a:off x="777240" y="4434840"/>
             <a:ext cx="2926080" cy="320040"/>
           </a:xfrm>
           <a:prstGeom prst="rect">
@@ -36897,7 +36897,7 @@
         </p:nvSpPr>
         <p:spPr>
           <a:xfrm>
-            <a:off x="777240" y="4846320"/>
+            <a:off x="777240" y="4892040"/>
             <a:ext cx="2926080" cy="822960"/>
           </a:xfrm>
           <a:prstGeom prst="rect">
@@ -36934,7 +36934,7 @@
         </p:nvSpPr>
         <p:spPr>
           <a:xfrm>
-            <a:off x="4178808" y="4160520"/>
+            <a:off x="4178808" y="4206240"/>
             <a:ext cx="3429000" cy="1691640"/>
           </a:xfrm>
           <a:prstGeom prst="roundRect">
@@ -36980,7 +36980,7 @@
         </p:nvSpPr>
         <p:spPr>
           <a:xfrm>
-            <a:off x="4407408" y="4389120"/>
+            <a:off x="4407408" y="4434840"/>
             <a:ext cx="2926080" cy="320040"/>
           </a:xfrm>
           <a:prstGeom prst="rect">
@@ -37017,7 +37017,7 @@
         </p:nvSpPr>
         <p:spPr>
           <a:xfrm>
-            <a:off x="4407408" y="4846320"/>
+            <a:off x="4407408" y="4892040"/>
             <a:ext cx="2926080" cy="822960"/>
           </a:xfrm>
           <a:prstGeom prst="rect">
@@ -37054,7 +37054,7 @@
         </p:nvSpPr>
         <p:spPr>
           <a:xfrm>
-            <a:off x="7808976" y="4160520"/>
+            <a:off x="7808976" y="4206240"/>
             <a:ext cx="3429000" cy="1691640"/>
           </a:xfrm>
           <a:prstGeom prst="roundRect">
@@ -37100,7 +37100,7 @@
         </p:nvSpPr>
         <p:spPr>
           <a:xfrm>
-            <a:off x="8037576" y="4389120"/>
+            <a:off x="8037576" y="4434840"/>
             <a:ext cx="2926080" cy="320040"/>
           </a:xfrm>
           <a:prstGeom prst="rect">
@@ -37137,7 +37137,7 @@
         </p:nvSpPr>
         <p:spPr>
           <a:xfrm>
-            <a:off x="8037576" y="4846320"/>
+            <a:off x="8037576" y="4892040"/>
             <a:ext cx="2926080" cy="822960"/>
           </a:xfrm>
           <a:prstGeom prst="rect">
@@ -40788,8 +40788,8 @@
         </p:blipFill>
         <p:spPr>
           <a:xfrm>
-            <a:off x="548640" y="2788920"/>
-            <a:ext cx="10972800" cy="5059953"/>
+            <a:off x="3457232" y="2788920"/>
+            <a:ext cx="5155615" cy="2377440"/>
           </a:xfrm>
           <a:prstGeom prst="rect">
             <a:avLst/>
@@ -40804,7 +40804,7 @@
         </p:nvSpPr>
         <p:spPr>
           <a:xfrm>
-            <a:off x="548640" y="5349240"/>
+            <a:off x="548640" y="5394960"/>
             <a:ext cx="320040" cy="365760"/>
           </a:xfrm>
           <a:prstGeom prst="rect">
@@ -40841,7 +40841,7 @@
         </p:nvSpPr>
         <p:spPr>
           <a:xfrm>
-            <a:off x="914400" y="5349240"/>
+            <a:off x="914400" y="5394960"/>
             <a:ext cx="10241280" cy="411480"/>
           </a:xfrm>
           <a:prstGeom prst="rect">
@@ -40878,7 +40878,7 @@
         </p:nvSpPr>
         <p:spPr>
           <a:xfrm>
-            <a:off x="548640" y="5971032"/>
+            <a:off x="548640" y="6016752"/>
             <a:ext cx="320040" cy="365760"/>
           </a:xfrm>
           <a:prstGeom prst="rect">
@@ -40915,7 +40915,7 @@
         </p:nvSpPr>
         <p:spPr>
           <a:xfrm>
-            <a:off x="914400" y="5971032"/>
+            <a:off x="914400" y="6016752"/>
             <a:ext cx="10241280" cy="411480"/>
           </a:xfrm>
           <a:prstGeom prst="rect">
@@ -45608,8 +45608,8 @@
         </p:blipFill>
         <p:spPr>
           <a:xfrm>
-            <a:off x="548640" y="4297680"/>
-            <a:ext cx="10972800" cy="3552529"/>
+            <a:off x="3493139" y="4572000"/>
+            <a:ext cx="5083800" cy="1645920"/>
           </a:xfrm>
           <a:prstGeom prst="rect">
             <a:avLst/>
@@ -47509,8 +47509,8 @@
         </p:blipFill>
         <p:spPr>
           <a:xfrm>
-            <a:off x="548640" y="2011680"/>
-            <a:ext cx="10972800" cy="3964886"/>
+            <a:off x="2239144" y="2011680"/>
+            <a:ext cx="7591790" cy="2743200"/>
           </a:xfrm>
           <a:prstGeom prst="rect">
             <a:avLst/>
@@ -47525,7 +47525,7 @@
         </p:nvSpPr>
         <p:spPr>
           <a:xfrm>
-            <a:off x="548640" y="5074920"/>
+            <a:off x="548640" y="4983480"/>
             <a:ext cx="10972800" cy="868680"/>
           </a:xfrm>
           <a:prstGeom prst="roundRect">
@@ -47571,7 +47571,7 @@
         </p:nvSpPr>
         <p:spPr>
           <a:xfrm>
-            <a:off x="868680" y="5257800"/>
+            <a:off x="868680" y="5166360"/>
             <a:ext cx="10332720" cy="502920"/>
           </a:xfrm>
           <a:prstGeom prst="rect">
@@ -47983,8 +47983,8 @@
         </p:blipFill>
         <p:spPr>
           <a:xfrm>
-            <a:off x="548640" y="2103120"/>
-            <a:ext cx="10972800" cy="3969973"/>
+            <a:off x="2244008" y="2103120"/>
+            <a:ext cx="7582063" cy="2743200"/>
           </a:xfrm>
           <a:prstGeom prst="rect">
             <a:avLst/>
@@ -47999,8 +47999,8 @@
         </p:nvSpPr>
         <p:spPr>
           <a:xfrm>
-            <a:off x="548640" y="4892040"/>
-            <a:ext cx="10972800" cy="1051560"/>
+            <a:off x="548640" y="5029200"/>
+            <a:ext cx="10972800" cy="914400"/>
           </a:xfrm>
           <a:prstGeom prst="roundRect">
             <a:avLst>
@@ -48045,8 +48045,8 @@
         </p:nvSpPr>
         <p:spPr>
           <a:xfrm>
-            <a:off x="914400" y="5120640"/>
-            <a:ext cx="10241280" cy="640080"/>
+            <a:off x="914400" y="5212080"/>
+            <a:ext cx="10241280" cy="594360"/>
           </a:xfrm>
           <a:prstGeom prst="rect">
             <a:avLst/>
